--- a/notebooks/demo.pptx
+++ b/notebooks/demo.pptx
@@ -3307,7 +3307,11 @@
         <p:txBody>
           <a:bodyPr/>
           <a:lstStyle/>
-          <a:p/>
+          <a:p>
+            <a:r>
+              <a:t>Revenue Trend</a:t>
+            </a:r>
+          </a:p>
         </p:txBody>
       </p:sp>
       <p:graphicFrame>

--- a/notebooks/demo.pptx
+++ b/notebooks/demo.pptx
@@ -10,6 +10,7 @@
   <p:sldIdLst>
     <p:sldId id="256" r:id="rId18"/>
     <p:sldId id="257" r:id="rId19"/>
+    <p:sldId id="258" r:id="rId20"/>
   </p:sldIdLst>
   <p:sldSz cx="12188825" cy="6858000"/>
   <p:notesSz cx="6858000" cy="9144000"/>
@@ -294,7 +295,295 @@
           <a:lstStyle/>
           <a:p>
             <a:r>
-              <a:t>Revenue Trend</a:t>
+              <a:t>Revenue Trend - Chart Title</a:t>
+            </a:r>
+          </a:p>
+        </c:rich>
+      </c:tx>
+      <c:layout/>
+      <c:overlay val="0"/>
+    </c:title>
+    <c:autoTitleDeleted val="0"/>
+    <c:plotArea>
+      <c:lineChart>
+        <c:grouping val="standard"/>
+        <c:varyColors val="0"/>
+        <c:ser>
+          <c:idx val="0"/>
+          <c:order val="0"/>
+          <c:tx>
+            <c:strRef>
+              <c:f>Sheet1!$B$1</c:f>
+              <c:strCache>
+                <c:ptCount val="1"/>
+                <c:pt idx="0">
+                  <c:v>revenue</c:v>
+                </c:pt>
+              </c:strCache>
+            </c:strRef>
+          </c:tx>
+          <c:marker>
+            <c:symbol val="none"/>
+          </c:marker>
+          <c:cat>
+            <c:strRef>
+              <c:f>Sheet1!$A$2:$A$5</c:f>
+              <c:strCache>
+                <c:ptCount val="4"/>
+                <c:pt idx="0">
+                  <c:v>Jan</c:v>
+                </c:pt>
+                <c:pt idx="1">
+                  <c:v>Feb</c:v>
+                </c:pt>
+                <c:pt idx="2">
+                  <c:v>Mar</c:v>
+                </c:pt>
+                <c:pt idx="3">
+                  <c:v>Apr</c:v>
+                </c:pt>
+              </c:strCache>
+            </c:strRef>
+          </c:cat>
+          <c:val>
+            <c:numRef>
+              <c:f>Sheet1!$B$2:$B$5</c:f>
+              <c:numCache>
+                <c:formatCode>General</c:formatCode>
+                <c:ptCount val="4"/>
+                <c:pt idx="0">
+                  <c:v>10</c:v>
+                </c:pt>
+                <c:pt idx="1">
+                  <c:v>14</c:v>
+                </c:pt>
+                <c:pt idx="2">
+                  <c:v>9</c:v>
+                </c:pt>
+                <c:pt idx="3">
+                  <c:v>18</c:v>
+                </c:pt>
+              </c:numCache>
+            </c:numRef>
+          </c:val>
+          <c:smooth val="0"/>
+        </c:ser>
+        <c:marker val="1"/>
+        <c:smooth val="0"/>
+        <c:axId val="2118791784"/>
+        <c:axId val="2140495176"/>
+      </c:lineChart>
+      <c:catAx>
+        <c:axId val="2118791784"/>
+        <c:scaling>
+          <c:orientation val="minMax"/>
+        </c:scaling>
+        <c:delete val="0"/>
+        <c:axPos val="b"/>
+        <c:majorTickMark val="out"/>
+        <c:minorTickMark val="none"/>
+        <c:tickLblPos val="nextTo"/>
+        <c:crossAx val="2140495176"/>
+        <c:crosses val="autoZero"/>
+        <c:auto val="1"/>
+        <c:lblAlgn val="ctr"/>
+        <c:lblOffset val="100"/>
+        <c:noMultiLvlLbl val="0"/>
+      </c:catAx>
+      <c:valAx>
+        <c:axId val="2140495176"/>
+        <c:scaling/>
+        <c:delete val="0"/>
+        <c:axPos val="l"/>
+        <c:majorGridlines/>
+        <c:majorTickMark val="out"/>
+        <c:minorTickMark val="none"/>
+        <c:tickLblPos val="nextTo"/>
+        <c:crossAx val="2118791784"/>
+        <c:crosses val="autoZero"/>
+      </c:valAx>
+    </c:plotArea>
+    <c:legend>
+      <c:legendPos val="r"/>
+      <c:layout/>
+      <c:overlay val="0"/>
+    </c:legend>
+    <c:plotVisOnly val="1"/>
+    <c:dispBlanksAs val="gap"/>
+    <c:showDLblsOverMax val="0"/>
+  </c:chart>
+  <c:txPr>
+    <a:bodyPr/>
+    <a:lstStyle/>
+    <a:p>
+      <a:pPr>
+        <a:defRPr sz="1800"/>
+      </a:pPr>
+      <a:endParaRPr lang="en-US"/>
+    </a:p>
+  </c:txPr>
+  <c:externalData r:id="rId1">
+    <c:autoUpdate val="0"/>
+  </c:externalData>
+</c:chartSpace>
+</file>
+
+<file path=ppt/charts/chart2.xml><?xml version="1.0" encoding="utf-8"?>
+<c:chartSpace xmlns:c="http://schemas.openxmlformats.org/drawingml/2006/chart" xmlns:a="http://schemas.openxmlformats.org/drawingml/2006/main" xmlns:r="http://schemas.openxmlformats.org/officeDocument/2006/relationships">
+  <c:date1904 val="0"/>
+  <c:chart>
+    <c:title>
+      <c:tx>
+        <c:rich>
+          <a:bodyPr/>
+          <a:lstStyle/>
+          <a:p>
+            <a:r>
+              <a:t>Revenue Trend - Chart Title</a:t>
+            </a:r>
+          </a:p>
+        </c:rich>
+      </c:tx>
+      <c:layout/>
+      <c:overlay val="0"/>
+    </c:title>
+    <c:autoTitleDeleted val="0"/>
+    <c:plotArea>
+      <c:lineChart>
+        <c:grouping val="standard"/>
+        <c:varyColors val="0"/>
+        <c:ser>
+          <c:idx val="0"/>
+          <c:order val="0"/>
+          <c:tx>
+            <c:strRef>
+              <c:f>Sheet1!$B$1</c:f>
+              <c:strCache>
+                <c:ptCount val="1"/>
+                <c:pt idx="0">
+                  <c:v>revenue</c:v>
+                </c:pt>
+              </c:strCache>
+            </c:strRef>
+          </c:tx>
+          <c:marker>
+            <c:symbol val="none"/>
+          </c:marker>
+          <c:cat>
+            <c:strRef>
+              <c:f>Sheet1!$A$2:$A$5</c:f>
+              <c:strCache>
+                <c:ptCount val="4"/>
+                <c:pt idx="0">
+                  <c:v>Jan</c:v>
+                </c:pt>
+                <c:pt idx="1">
+                  <c:v>Feb</c:v>
+                </c:pt>
+                <c:pt idx="2">
+                  <c:v>Mar</c:v>
+                </c:pt>
+                <c:pt idx="3">
+                  <c:v>Apr</c:v>
+                </c:pt>
+              </c:strCache>
+            </c:strRef>
+          </c:cat>
+          <c:val>
+            <c:numRef>
+              <c:f>Sheet1!$B$2:$B$5</c:f>
+              <c:numCache>
+                <c:formatCode>General</c:formatCode>
+                <c:ptCount val="4"/>
+                <c:pt idx="0">
+                  <c:v>10</c:v>
+                </c:pt>
+                <c:pt idx="1">
+                  <c:v>14</c:v>
+                </c:pt>
+                <c:pt idx="2">
+                  <c:v>9</c:v>
+                </c:pt>
+                <c:pt idx="3">
+                  <c:v>18</c:v>
+                </c:pt>
+              </c:numCache>
+            </c:numRef>
+          </c:val>
+          <c:smooth val="0"/>
+        </c:ser>
+        <c:marker val="1"/>
+        <c:smooth val="0"/>
+        <c:axId val="2118791784"/>
+        <c:axId val="2140495176"/>
+      </c:lineChart>
+      <c:catAx>
+        <c:axId val="2118791784"/>
+        <c:scaling>
+          <c:orientation val="minMax"/>
+        </c:scaling>
+        <c:delete val="0"/>
+        <c:axPos val="b"/>
+        <c:majorTickMark val="out"/>
+        <c:minorTickMark val="none"/>
+        <c:tickLblPos val="nextTo"/>
+        <c:crossAx val="2140495176"/>
+        <c:crosses val="autoZero"/>
+        <c:auto val="1"/>
+        <c:lblAlgn val="ctr"/>
+        <c:lblOffset val="100"/>
+        <c:noMultiLvlLbl val="0"/>
+      </c:catAx>
+      <c:valAx>
+        <c:axId val="2140495176"/>
+        <c:scaling/>
+        <c:delete val="0"/>
+        <c:axPos val="l"/>
+        <c:majorGridlines/>
+        <c:majorTickMark val="out"/>
+        <c:minorTickMark val="none"/>
+        <c:tickLblPos val="nextTo"/>
+        <c:crossAx val="2118791784"/>
+        <c:crosses val="autoZero"/>
+      </c:valAx>
+    </c:plotArea>
+    <c:legend>
+      <c:legendPos val="r"/>
+      <c:layout/>
+      <c:overlay val="0"/>
+    </c:legend>
+    <c:plotVisOnly val="1"/>
+    <c:dispBlanksAs val="gap"/>
+    <c:showDLblsOverMax val="0"/>
+  </c:chart>
+  <c:txPr>
+    <a:bodyPr/>
+    <a:lstStyle/>
+    <a:p>
+      <a:pPr>
+        <a:defRPr sz="1800"/>
+      </a:pPr>
+      <a:endParaRPr lang="en-US"/>
+    </a:p>
+  </c:txPr>
+  <c:externalData r:id="rId1">
+    <c:autoUpdate val="0"/>
+  </c:externalData>
+</c:chartSpace>
+</file>
+
+<file path=ppt/charts/chart3.xml><?xml version="1.0" encoding="utf-8"?>
+<c:chartSpace xmlns:c="http://schemas.openxmlformats.org/drawingml/2006/chart" xmlns:a="http://schemas.openxmlformats.org/drawingml/2006/main" xmlns:r="http://schemas.openxmlformats.org/officeDocument/2006/relationships">
+  <c:date1904 val="0"/>
+  <c:chart>
+    <c:title>
+      <c:tx>
+        <c:rich>
+          <a:bodyPr/>
+          <a:lstStyle/>
+          <a:p>
+            <a:r>
+              <a:t>Revenue Trend - Chart Title</a:t>
             </a:r>
           </a:p>
         </c:rich>
@@ -3538,7 +3827,7 @@
           <a:lstStyle/>
           <a:p>
             <a:r>
-              <a:t>Demo</a:t>
+              <a:t>Demo - Title Slide</a:t>
             </a:r>
           </a:p>
         </p:txBody>
@@ -3559,7 +3848,7 @@
           <a:lstStyle/>
           <a:p>
             <a:r>
-              <a:t>Refactored Package</a:t>
+              <a:t>Refactored Package - Author</a:t>
             </a:r>
           </a:p>
         </p:txBody>
@@ -3598,7 +3887,7 @@
           <a:lstStyle/>
           <a:p>
             <a:r>
-              <a:t>Revenue Trend</a:t>
+              <a:t>Revenue Trend - Slide Title</a:t>
             </a:r>
           </a:p>
         </p:txBody>
@@ -3618,6 +3907,81 @@
         <a:graphic>
           <a:graphicData uri="http://schemas.openxmlformats.org/drawingml/2006/chart">
             <c:chart xmlns:c="http://schemas.openxmlformats.org/drawingml/2006/chart" r:id="rId2"/>
+          </a:graphicData>
+        </a:graphic>
+      </p:graphicFrame>
+    </p:spTree>
+  </p:cSld>
+  <p:clrMapOvr>
+    <a:masterClrMapping/>
+  </p:clrMapOvr>
+</p:sld>
+</file>
+
+<file path=ppt/slides/slide3.xml><?xml version="1.0" encoding="utf-8"?>
+<p:sld xmlns:a="http://schemas.openxmlformats.org/drawingml/2006/main" xmlns:p="http://schemas.openxmlformats.org/presentationml/2006/main" xmlns:r="http://schemas.openxmlformats.org/officeDocument/2006/relationships">
+  <p:cSld>
+    <p:spTree>
+      <p:nvGrpSpPr>
+        <p:cNvPr id="1" name=""/>
+        <p:cNvGrpSpPr/>
+        <p:nvPr/>
+      </p:nvGrpSpPr>
+      <p:grpSpPr/>
+      <p:sp>
+        <p:nvSpPr>
+          <p:cNvPr id="2" name="Title 1"/>
+          <p:cNvSpPr>
+            <a:spLocks noGrp="1"/>
+          </p:cNvSpPr>
+          <p:nvPr>
+            <p:ph type="title"/>
+          </p:nvPr>
+        </p:nvSpPr>
+        <p:spPr/>
+        <p:txBody>
+          <a:bodyPr/>
+          <a:lstStyle/>
+          <a:p>
+            <a:r>
+              <a:t>Revenue Trend - Slide Title</a:t>
+            </a:r>
+          </a:p>
+        </p:txBody>
+      </p:sp>
+      <p:graphicFrame>
+        <p:nvGraphicFramePr>
+          <p:cNvPr id="3" name="Chart 2"/>
+          <p:cNvGraphicFramePr>
+            <a:graphicFrameLocks noGrp="1"/>
+          </p:cNvGraphicFramePr>
+          <p:nvPr/>
+        </p:nvGraphicFramePr>
+        <p:xfrm>
+          <a:off x="457200" y="1371600"/>
+          <a:ext cx="4114800" cy="3657600"/>
+        </p:xfrm>
+        <a:graphic>
+          <a:graphicData uri="http://schemas.openxmlformats.org/drawingml/2006/chart">
+            <c:chart xmlns:c="http://schemas.openxmlformats.org/drawingml/2006/chart" r:id="rId2"/>
+          </a:graphicData>
+        </a:graphic>
+      </p:graphicFrame>
+      <p:graphicFrame>
+        <p:nvGraphicFramePr>
+          <p:cNvPr id="4" name="Chart 3"/>
+          <p:cNvGraphicFramePr>
+            <a:graphicFrameLocks noGrp="1"/>
+          </p:cNvGraphicFramePr>
+          <p:nvPr/>
+        </p:nvGraphicFramePr>
+        <p:xfrm>
+          <a:off x="4572000" y="1371600"/>
+          <a:ext cx="4114800" cy="3657600"/>
+        </p:xfrm>
+        <a:graphic>
+          <a:graphicData uri="http://schemas.openxmlformats.org/drawingml/2006/chart">
+            <c:chart xmlns:c="http://schemas.openxmlformats.org/drawingml/2006/chart" r:id="rId3"/>
           </a:graphicData>
         </a:graphic>
       </p:graphicFrame>

--- a/notebooks/demo.pptx
+++ b/notebooks/demo.pptx
@@ -11,6 +11,7 @@
     <p:sldId id="256" r:id="rId18"/>
     <p:sldId id="257" r:id="rId19"/>
     <p:sldId id="258" r:id="rId20"/>
+    <p:sldId id="259" r:id="rId21"/>
   </p:sldIdLst>
   <p:sldSz cx="12188825" cy="6858000"/>
   <p:notesSz cx="6858000" cy="9144000"/>
@@ -288,21 +289,6 @@
 <c:chartSpace xmlns:c="http://schemas.openxmlformats.org/drawingml/2006/chart" xmlns:a="http://schemas.openxmlformats.org/drawingml/2006/main" xmlns:r="http://schemas.openxmlformats.org/officeDocument/2006/relationships">
   <c:date1904 val="0"/>
   <c:chart>
-    <c:title>
-      <c:tx>
-        <c:rich>
-          <a:bodyPr/>
-          <a:lstStyle/>
-          <a:p>
-            <a:r>
-              <a:t>Revenue Trend - Chart Title</a:t>
-            </a:r>
-          </a:p>
-        </c:rich>
-      </c:tx>
-      <c:layout/>
-      <c:overlay val="0"/>
-    </c:title>
     <c:autoTitleDeleted val="0"/>
     <c:plotArea>
       <c:lineChart>
@@ -432,21 +418,6 @@
 <c:chartSpace xmlns:c="http://schemas.openxmlformats.org/drawingml/2006/chart" xmlns:a="http://schemas.openxmlformats.org/drawingml/2006/main" xmlns:r="http://schemas.openxmlformats.org/officeDocument/2006/relationships">
   <c:date1904 val="0"/>
   <c:chart>
-    <c:title>
-      <c:tx>
-        <c:rich>
-          <a:bodyPr/>
-          <a:lstStyle/>
-          <a:p>
-            <a:r>
-              <a:t>Revenue Trend - Chart Title</a:t>
-            </a:r>
-          </a:p>
-        </c:rich>
-      </c:tx>
-      <c:layout/>
-      <c:overlay val="0"/>
-    </c:title>
     <c:autoTitleDeleted val="0"/>
     <c:plotArea>
       <c:lineChart>
@@ -576,21 +547,122 @@
 <c:chartSpace xmlns:c="http://schemas.openxmlformats.org/drawingml/2006/chart" xmlns:a="http://schemas.openxmlformats.org/drawingml/2006/main" xmlns:r="http://schemas.openxmlformats.org/officeDocument/2006/relationships">
   <c:date1904 val="0"/>
   <c:chart>
-    <c:title>
-      <c:tx>
-        <c:rich>
-          <a:bodyPr/>
-          <a:lstStyle/>
-          <a:p>
-            <a:r>
-              <a:t>Revenue Trend - Chart Title</a:t>
-            </a:r>
-          </a:p>
-        </c:rich>
-      </c:tx>
-      <c:layout/>
-      <c:overlay val="0"/>
-    </c:title>
+    <c:autoTitleDeleted val="0"/>
+    <c:plotArea>
+      <c:barChart>
+        <c:barDir val="col"/>
+        <c:grouping val="clustered"/>
+        <c:ser>
+          <c:idx val="0"/>
+          <c:order val="0"/>
+          <c:tx>
+            <c:strRef>
+              <c:f>Sheet1!$B$1</c:f>
+              <c:strCache>
+                <c:ptCount val="1"/>
+                <c:pt idx="0">
+                  <c:v>revenue</c:v>
+                </c:pt>
+              </c:strCache>
+            </c:strRef>
+          </c:tx>
+          <c:cat>
+            <c:strRef>
+              <c:f>Sheet1!$A$2:$A$5</c:f>
+              <c:strCache>
+                <c:ptCount val="4"/>
+                <c:pt idx="0">
+                  <c:v>Jan</c:v>
+                </c:pt>
+                <c:pt idx="1">
+                  <c:v>Feb</c:v>
+                </c:pt>
+                <c:pt idx="2">
+                  <c:v>Mar</c:v>
+                </c:pt>
+                <c:pt idx="3">
+                  <c:v>Apr</c:v>
+                </c:pt>
+              </c:strCache>
+            </c:strRef>
+          </c:cat>
+          <c:val>
+            <c:numRef>
+              <c:f>Sheet1!$B$2:$B$5</c:f>
+              <c:numCache>
+                <c:formatCode>General</c:formatCode>
+                <c:ptCount val="4"/>
+                <c:pt idx="0">
+                  <c:v>10</c:v>
+                </c:pt>
+                <c:pt idx="1">
+                  <c:v>14</c:v>
+                </c:pt>
+                <c:pt idx="2">
+                  <c:v>9</c:v>
+                </c:pt>
+                <c:pt idx="3">
+                  <c:v>18</c:v>
+                </c:pt>
+              </c:numCache>
+            </c:numRef>
+          </c:val>
+        </c:ser>
+        <c:axId val="-2068027336"/>
+        <c:axId val="-2113994440"/>
+      </c:barChart>
+      <c:catAx>
+        <c:axId val="-2068027336"/>
+        <c:scaling>
+          <c:orientation val="minMax"/>
+        </c:scaling>
+        <c:delete val="0"/>
+        <c:axPos val="b"/>
+        <c:majorTickMark val="out"/>
+        <c:minorTickMark val="none"/>
+        <c:tickLblPos val="nextTo"/>
+        <c:crossAx val="-2113994440"/>
+        <c:crosses val="autoZero"/>
+        <c:auto val="1"/>
+        <c:lblAlgn val="ctr"/>
+        <c:lblOffset val="100"/>
+        <c:noMultiLvlLbl val="0"/>
+      </c:catAx>
+      <c:valAx>
+        <c:axId val="-2113994440"/>
+        <c:scaling/>
+        <c:delete val="0"/>
+        <c:axPos val="l"/>
+        <c:majorGridlines/>
+        <c:majorTickMark val="out"/>
+        <c:minorTickMark val="none"/>
+        <c:tickLblPos val="nextTo"/>
+        <c:crossAx val="-2068027336"/>
+        <c:crosses val="autoZero"/>
+      </c:valAx>
+    </c:plotArea>
+    <c:dispBlanksAs val="gap"/>
+  </c:chart>
+  <c:txPr>
+    <a:bodyPr/>
+    <a:lstStyle/>
+    <a:p>
+      <a:pPr>
+        <a:defRPr sz="1800"/>
+      </a:pPr>
+      <a:endParaRPr lang="en-US"/>
+    </a:p>
+  </c:txPr>
+  <c:externalData r:id="rId1">
+    <c:autoUpdate val="0"/>
+  </c:externalData>
+</c:chartSpace>
+</file>
+
+<file path=ppt/charts/chart4.xml><?xml version="1.0" encoding="utf-8"?>
+<c:chartSpace xmlns:c="http://schemas.openxmlformats.org/drawingml/2006/chart" xmlns:a="http://schemas.openxmlformats.org/drawingml/2006/main" xmlns:r="http://schemas.openxmlformats.org/officeDocument/2006/relationships">
+  <c:date1904 val="0"/>
+  <c:chart>
     <c:autoTitleDeleted val="0"/>
     <c:plotArea>
       <c:lineChart>
@@ -650,6 +722,251 @@
                 </c:pt>
                 <c:pt idx="3">
                   <c:v>18</c:v>
+                </c:pt>
+              </c:numCache>
+            </c:numRef>
+          </c:val>
+          <c:smooth val="0"/>
+        </c:ser>
+        <c:marker val="1"/>
+        <c:smooth val="0"/>
+        <c:axId val="2118791784"/>
+        <c:axId val="2140495176"/>
+      </c:lineChart>
+      <c:catAx>
+        <c:axId val="2118791784"/>
+        <c:scaling>
+          <c:orientation val="minMax"/>
+        </c:scaling>
+        <c:delete val="0"/>
+        <c:axPos val="b"/>
+        <c:majorTickMark val="out"/>
+        <c:minorTickMark val="none"/>
+        <c:tickLblPos val="nextTo"/>
+        <c:crossAx val="2140495176"/>
+        <c:crosses val="autoZero"/>
+        <c:auto val="1"/>
+        <c:lblAlgn val="ctr"/>
+        <c:lblOffset val="100"/>
+        <c:noMultiLvlLbl val="0"/>
+      </c:catAx>
+      <c:valAx>
+        <c:axId val="2140495176"/>
+        <c:scaling/>
+        <c:delete val="0"/>
+        <c:axPos val="l"/>
+        <c:majorGridlines/>
+        <c:majorTickMark val="out"/>
+        <c:minorTickMark val="none"/>
+        <c:tickLblPos val="nextTo"/>
+        <c:crossAx val="2118791784"/>
+        <c:crosses val="autoZero"/>
+      </c:valAx>
+    </c:plotArea>
+    <c:legend>
+      <c:legendPos val="r"/>
+      <c:layout/>
+      <c:overlay val="0"/>
+    </c:legend>
+    <c:plotVisOnly val="1"/>
+    <c:dispBlanksAs val="gap"/>
+    <c:showDLblsOverMax val="0"/>
+  </c:chart>
+  <c:txPr>
+    <a:bodyPr/>
+    <a:lstStyle/>
+    <a:p>
+      <a:pPr>
+        <a:defRPr sz="1800"/>
+      </a:pPr>
+      <a:endParaRPr lang="en-US"/>
+    </a:p>
+  </c:txPr>
+  <c:externalData r:id="rId1">
+    <c:autoUpdate val="0"/>
+  </c:externalData>
+</c:chartSpace>
+</file>
+
+<file path=ppt/charts/chart5.xml><?xml version="1.0" encoding="utf-8"?>
+<c:chartSpace xmlns:c="http://schemas.openxmlformats.org/drawingml/2006/chart" xmlns:a="http://schemas.openxmlformats.org/drawingml/2006/main" xmlns:r="http://schemas.openxmlformats.org/officeDocument/2006/relationships">
+  <c:date1904 val="0"/>
+  <c:chart>
+    <c:autoTitleDeleted val="0"/>
+    <c:plotArea>
+      <c:barChart>
+        <c:barDir val="col"/>
+        <c:grouping val="clustered"/>
+        <c:ser>
+          <c:idx val="0"/>
+          <c:order val="0"/>
+          <c:tx>
+            <c:strRef>
+              <c:f>Sheet1!$B$1</c:f>
+              <c:strCache>
+                <c:ptCount val="1"/>
+                <c:pt idx="0">
+                  <c:v>revenue</c:v>
+                </c:pt>
+              </c:strCache>
+            </c:strRef>
+          </c:tx>
+          <c:cat>
+            <c:strRef>
+              <c:f>Sheet1!$A$2:$A$5</c:f>
+              <c:strCache>
+                <c:ptCount val="4"/>
+                <c:pt idx="0">
+                  <c:v>Jan</c:v>
+                </c:pt>
+                <c:pt idx="1">
+                  <c:v>Feb</c:v>
+                </c:pt>
+                <c:pt idx="2">
+                  <c:v>Mar</c:v>
+                </c:pt>
+                <c:pt idx="3">
+                  <c:v>Apr</c:v>
+                </c:pt>
+              </c:strCache>
+            </c:strRef>
+          </c:cat>
+          <c:val>
+            <c:numRef>
+              <c:f>Sheet1!$B$2:$B$5</c:f>
+              <c:numCache>
+                <c:formatCode>General</c:formatCode>
+                <c:ptCount val="4"/>
+                <c:pt idx="0">
+                  <c:v>10</c:v>
+                </c:pt>
+                <c:pt idx="1">
+                  <c:v>14</c:v>
+                </c:pt>
+                <c:pt idx="2">
+                  <c:v>9</c:v>
+                </c:pt>
+                <c:pt idx="3">
+                  <c:v>18</c:v>
+                </c:pt>
+              </c:numCache>
+            </c:numRef>
+          </c:val>
+        </c:ser>
+        <c:axId val="-2068027336"/>
+        <c:axId val="-2113994440"/>
+      </c:barChart>
+      <c:catAx>
+        <c:axId val="-2068027336"/>
+        <c:scaling>
+          <c:orientation val="minMax"/>
+        </c:scaling>
+        <c:delete val="0"/>
+        <c:axPos val="b"/>
+        <c:majorTickMark val="out"/>
+        <c:minorTickMark val="none"/>
+        <c:tickLblPos val="nextTo"/>
+        <c:crossAx val="-2113994440"/>
+        <c:crosses val="autoZero"/>
+        <c:auto val="1"/>
+        <c:lblAlgn val="ctr"/>
+        <c:lblOffset val="100"/>
+        <c:noMultiLvlLbl val="0"/>
+      </c:catAx>
+      <c:valAx>
+        <c:axId val="-2113994440"/>
+        <c:scaling/>
+        <c:delete val="0"/>
+        <c:axPos val="l"/>
+        <c:majorGridlines/>
+        <c:majorTickMark val="out"/>
+        <c:minorTickMark val="none"/>
+        <c:tickLblPos val="nextTo"/>
+        <c:crossAx val="-2068027336"/>
+        <c:crosses val="autoZero"/>
+      </c:valAx>
+    </c:plotArea>
+    <c:dispBlanksAs val="gap"/>
+  </c:chart>
+  <c:txPr>
+    <a:bodyPr/>
+    <a:lstStyle/>
+    <a:p>
+      <a:pPr>
+        <a:defRPr sz="1800"/>
+      </a:pPr>
+      <a:endParaRPr lang="en-US"/>
+    </a:p>
+  </c:txPr>
+  <c:externalData r:id="rId1">
+    <c:autoUpdate val="0"/>
+  </c:externalData>
+</c:chartSpace>
+</file>
+
+<file path=ppt/charts/chart6.xml><?xml version="1.0" encoding="utf-8"?>
+<c:chartSpace xmlns:c="http://schemas.openxmlformats.org/drawingml/2006/chart" xmlns:a="http://schemas.openxmlformats.org/drawingml/2006/main" xmlns:r="http://schemas.openxmlformats.org/officeDocument/2006/relationships">
+  <c:date1904 val="0"/>
+  <c:chart>
+    <c:autoTitleDeleted val="0"/>
+    <c:plotArea>
+      <c:lineChart>
+        <c:grouping val="standard"/>
+        <c:varyColors val="0"/>
+        <c:ser>
+          <c:idx val="0"/>
+          <c:order val="0"/>
+          <c:tx>
+            <c:strRef>
+              <c:f>Sheet1!$B$1</c:f>
+              <c:strCache>
+                <c:ptCount val="1"/>
+                <c:pt idx="0">
+                  <c:v>revenue</c:v>
+                </c:pt>
+              </c:strCache>
+            </c:strRef>
+          </c:tx>
+          <c:marker>
+            <c:symbol val="none"/>
+          </c:marker>
+          <c:cat>
+            <c:strRef>
+              <c:f>Sheet1!$A$2:$A$5</c:f>
+              <c:strCache>
+                <c:ptCount val="4"/>
+                <c:pt idx="0">
+                  <c:v>JanJan</c:v>
+                </c:pt>
+                <c:pt idx="1">
+                  <c:v>FebFeb</c:v>
+                </c:pt>
+                <c:pt idx="2">
+                  <c:v>MarMar</c:v>
+                </c:pt>
+                <c:pt idx="3">
+                  <c:v>AprApr</c:v>
+                </c:pt>
+              </c:strCache>
+            </c:strRef>
+          </c:cat>
+          <c:val>
+            <c:numRef>
+              <c:f>Sheet1!$B$2:$B$5</c:f>
+              <c:numCache>
+                <c:formatCode>General</c:formatCode>
+                <c:ptCount val="4"/>
+                <c:pt idx="0">
+                  <c:v>20</c:v>
+                </c:pt>
+                <c:pt idx="1">
+                  <c:v>28</c:v>
+                </c:pt>
+                <c:pt idx="2">
+                  <c:v>18</c:v>
+                </c:pt>
+                <c:pt idx="3">
+                  <c:v>36</c:v>
                 </c:pt>
               </c:numCache>
             </c:numRef>
@@ -3873,17 +4190,24 @@
       <p:grpSpPr/>
       <p:sp>
         <p:nvSpPr>
-          <p:cNvPr id="2" name="Title 1"/>
-          <p:cNvSpPr>
-            <a:spLocks noGrp="1"/>
-          </p:cNvSpPr>
-          <p:nvPr>
-            <p:ph type="title"/>
-          </p:nvPr>
+          <p:cNvPr id="2" name="TextBox 1"/>
+          <p:cNvSpPr txBox="1"/>
+          <p:nvPr/>
         </p:nvSpPr>
-        <p:spPr/>
+        <p:spPr>
+          <a:xfrm>
+            <a:off x="914400" y="274320"/>
+            <a:ext cx="7315200" cy="731520"/>
+          </a:xfrm>
+          <a:prstGeom prst="rect">
+            <a:avLst/>
+          </a:prstGeom>
+          <a:noFill/>
+        </p:spPr>
         <p:txBody>
-          <a:bodyPr/>
+          <a:bodyPr wrap="none">
+            <a:spAutoFit/>
+          </a:bodyPr>
           <a:lstStyle/>
           <a:p>
             <a:r>
@@ -3901,7 +4225,7 @@
           <p:nvPr/>
         </p:nvGraphicFramePr>
         <p:xfrm>
-          <a:off x="914400" y="1371600"/>
+          <a:off x="914400" y="1554480"/>
           <a:ext cx="7315200" cy="4114800"/>
         </p:xfrm>
         <a:graphic>
@@ -3910,6 +4234,34 @@
           </a:graphicData>
         </a:graphic>
       </p:graphicFrame>
+      <p:sp>
+        <p:nvSpPr>
+          <p:cNvPr id="4" name="TextBox 3"/>
+          <p:cNvSpPr txBox="1"/>
+          <p:nvPr/>
+        </p:nvSpPr>
+        <p:spPr>
+          <a:xfrm>
+            <a:off x="914400" y="1097280"/>
+            <a:ext cx="7315200" cy="365760"/>
+          </a:xfrm>
+          <a:prstGeom prst="rect">
+            <a:avLst/>
+          </a:prstGeom>
+          <a:noFill/>
+        </p:spPr>
+        <p:txBody>
+          <a:bodyPr wrap="none">
+            <a:spAutoFit/>
+          </a:bodyPr>
+          <a:lstStyle/>
+          <a:p>
+            <a:r>
+              <a:t>Revenue Trend (Line) - Chart Title</a:t>
+            </a:r>
+          </a:p>
+        </p:txBody>
+      </p:sp>
     </p:spTree>
   </p:cSld>
   <p:clrMapOvr>
@@ -3930,17 +4282,24 @@
       <p:grpSpPr/>
       <p:sp>
         <p:nvSpPr>
-          <p:cNvPr id="2" name="Title 1"/>
-          <p:cNvSpPr>
-            <a:spLocks noGrp="1"/>
-          </p:cNvSpPr>
-          <p:nvPr>
-            <p:ph type="title"/>
-          </p:nvPr>
+          <p:cNvPr id="2" name="TextBox 1"/>
+          <p:cNvSpPr txBox="1"/>
+          <p:nvPr/>
         </p:nvSpPr>
-        <p:spPr/>
+        <p:spPr>
+          <a:xfrm>
+            <a:off x="914400" y="274320"/>
+            <a:ext cx="7315200" cy="731520"/>
+          </a:xfrm>
+          <a:prstGeom prst="rect">
+            <a:avLst/>
+          </a:prstGeom>
+          <a:noFill/>
+        </p:spPr>
         <p:txBody>
-          <a:bodyPr/>
+          <a:bodyPr wrap="none">
+            <a:spAutoFit/>
+          </a:bodyPr>
           <a:lstStyle/>
           <a:p>
             <a:r>
@@ -3958,7 +4317,7 @@
           <p:nvPr/>
         </p:nvGraphicFramePr>
         <p:xfrm>
-          <a:off x="457200" y="1371600"/>
+          <a:off x="457200" y="1554480"/>
           <a:ext cx="4114800" cy="3657600"/>
         </p:xfrm>
         <a:graphic>
@@ -3967,16 +4326,44 @@
           </a:graphicData>
         </a:graphic>
       </p:graphicFrame>
+      <p:sp>
+        <p:nvSpPr>
+          <p:cNvPr id="4" name="TextBox 3"/>
+          <p:cNvSpPr txBox="1"/>
+          <p:nvPr/>
+        </p:nvSpPr>
+        <p:spPr>
+          <a:xfrm>
+            <a:off x="457200" y="1097280"/>
+            <a:ext cx="4114800" cy="365760"/>
+          </a:xfrm>
+          <a:prstGeom prst="rect">
+            <a:avLst/>
+          </a:prstGeom>
+          <a:noFill/>
+        </p:spPr>
+        <p:txBody>
+          <a:bodyPr wrap="none">
+            <a:spAutoFit/>
+          </a:bodyPr>
+          <a:lstStyle/>
+          <a:p>
+            <a:r>
+              <a:t>Revenue Trend (Line) - Chart Title</a:t>
+            </a:r>
+          </a:p>
+        </p:txBody>
+      </p:sp>
       <p:graphicFrame>
         <p:nvGraphicFramePr>
-          <p:cNvPr id="4" name="Chart 3"/>
+          <p:cNvPr id="5" name="Chart 4"/>
           <p:cNvGraphicFramePr>
             <a:graphicFrameLocks noGrp="1"/>
           </p:cNvGraphicFramePr>
           <p:nvPr/>
         </p:nvGraphicFramePr>
         <p:xfrm>
-          <a:off x="4572000" y="1371600"/>
+          <a:off x="4572000" y="1554480"/>
           <a:ext cx="4114800" cy="3657600"/>
         </p:xfrm>
         <a:graphic>
@@ -3985,6 +4372,218 @@
           </a:graphicData>
         </a:graphic>
       </p:graphicFrame>
+      <p:sp>
+        <p:nvSpPr>
+          <p:cNvPr id="6" name="TextBox 5"/>
+          <p:cNvSpPr txBox="1"/>
+          <p:nvPr/>
+        </p:nvSpPr>
+        <p:spPr>
+          <a:xfrm>
+            <a:off x="4572000" y="1097280"/>
+            <a:ext cx="4114800" cy="365760"/>
+          </a:xfrm>
+          <a:prstGeom prst="rect">
+            <a:avLst/>
+          </a:prstGeom>
+          <a:noFill/>
+        </p:spPr>
+        <p:txBody>
+          <a:bodyPr wrap="none">
+            <a:spAutoFit/>
+          </a:bodyPr>
+          <a:lstStyle/>
+          <a:p>
+            <a:r>
+              <a:t>Revenue (Bar) - Chart Title</a:t>
+            </a:r>
+          </a:p>
+        </p:txBody>
+      </p:sp>
+    </p:spTree>
+  </p:cSld>
+  <p:clrMapOvr>
+    <a:masterClrMapping/>
+  </p:clrMapOvr>
+</p:sld>
+</file>
+
+<file path=ppt/slides/slide4.xml><?xml version="1.0" encoding="utf-8"?>
+<p:sld xmlns:a="http://schemas.openxmlformats.org/drawingml/2006/main" xmlns:p="http://schemas.openxmlformats.org/presentationml/2006/main" xmlns:r="http://schemas.openxmlformats.org/officeDocument/2006/relationships">
+  <p:cSld>
+    <p:spTree>
+      <p:nvGrpSpPr>
+        <p:cNvPr id="1" name=""/>
+        <p:cNvGrpSpPr/>
+        <p:nvPr/>
+      </p:nvGrpSpPr>
+      <p:grpSpPr/>
+      <p:sp>
+        <p:nvSpPr>
+          <p:cNvPr id="2" name="TextBox 1"/>
+          <p:cNvSpPr txBox="1"/>
+          <p:nvPr/>
+        </p:nvSpPr>
+        <p:spPr>
+          <a:xfrm>
+            <a:off x="914400" y="274320"/>
+            <a:ext cx="7315200" cy="731520"/>
+          </a:xfrm>
+          <a:prstGeom prst="rect">
+            <a:avLst/>
+          </a:prstGeom>
+          <a:noFill/>
+        </p:spPr>
+        <p:txBody>
+          <a:bodyPr wrap="none">
+            <a:spAutoFit/>
+          </a:bodyPr>
+          <a:lstStyle/>
+          <a:p>
+            <a:r>
+              <a:t>Revenue Trend - Slide Title</a:t>
+            </a:r>
+          </a:p>
+        </p:txBody>
+      </p:sp>
+      <p:graphicFrame>
+        <p:nvGraphicFramePr>
+          <p:cNvPr id="3" name="Chart 2"/>
+          <p:cNvGraphicFramePr>
+            <a:graphicFrameLocks noGrp="1"/>
+          </p:cNvGraphicFramePr>
+          <p:nvPr/>
+        </p:nvGraphicFramePr>
+        <p:xfrm>
+          <a:off x="457200" y="1554480"/>
+          <a:ext cx="2743200" cy="3657600"/>
+        </p:xfrm>
+        <a:graphic>
+          <a:graphicData uri="http://schemas.openxmlformats.org/drawingml/2006/chart">
+            <c:chart xmlns:c="http://schemas.openxmlformats.org/drawingml/2006/chart" r:id="rId2"/>
+          </a:graphicData>
+        </a:graphic>
+      </p:graphicFrame>
+      <p:sp>
+        <p:nvSpPr>
+          <p:cNvPr id="4" name="TextBox 3"/>
+          <p:cNvSpPr txBox="1"/>
+          <p:nvPr/>
+        </p:nvSpPr>
+        <p:spPr>
+          <a:xfrm>
+            <a:off x="457200" y="1097280"/>
+            <a:ext cx="2743200" cy="365760"/>
+          </a:xfrm>
+          <a:prstGeom prst="rect">
+            <a:avLst/>
+          </a:prstGeom>
+          <a:noFill/>
+        </p:spPr>
+        <p:txBody>
+          <a:bodyPr wrap="none">
+            <a:spAutoFit/>
+          </a:bodyPr>
+          <a:lstStyle/>
+          <a:p>
+            <a:r>
+              <a:t>Revenue Trend (Line) - Chart Title</a:t>
+            </a:r>
+          </a:p>
+        </p:txBody>
+      </p:sp>
+      <p:graphicFrame>
+        <p:nvGraphicFramePr>
+          <p:cNvPr id="5" name="Chart 4"/>
+          <p:cNvGraphicFramePr>
+            <a:graphicFrameLocks noGrp="1"/>
+          </p:cNvGraphicFramePr>
+          <p:nvPr/>
+        </p:nvGraphicFramePr>
+        <p:xfrm>
+          <a:off x="3200400" y="1554480"/>
+          <a:ext cx="2743200" cy="3657600"/>
+        </p:xfrm>
+        <a:graphic>
+          <a:graphicData uri="http://schemas.openxmlformats.org/drawingml/2006/chart">
+            <c:chart xmlns:c="http://schemas.openxmlformats.org/drawingml/2006/chart" r:id="rId3"/>
+          </a:graphicData>
+        </a:graphic>
+      </p:graphicFrame>
+      <p:sp>
+        <p:nvSpPr>
+          <p:cNvPr id="6" name="TextBox 5"/>
+          <p:cNvSpPr txBox="1"/>
+          <p:nvPr/>
+        </p:nvSpPr>
+        <p:spPr>
+          <a:xfrm>
+            <a:off x="3200400" y="1097280"/>
+            <a:ext cx="2743200" cy="365760"/>
+          </a:xfrm>
+          <a:prstGeom prst="rect">
+            <a:avLst/>
+          </a:prstGeom>
+          <a:noFill/>
+        </p:spPr>
+        <p:txBody>
+          <a:bodyPr wrap="none">
+            <a:spAutoFit/>
+          </a:bodyPr>
+          <a:lstStyle/>
+          <a:p>
+            <a:r>
+              <a:t>Revenue (Bar) - Chart Title</a:t>
+            </a:r>
+          </a:p>
+        </p:txBody>
+      </p:sp>
+      <p:graphicFrame>
+        <p:nvGraphicFramePr>
+          <p:cNvPr id="7" name="Chart 6"/>
+          <p:cNvGraphicFramePr>
+            <a:graphicFrameLocks noGrp="1"/>
+          </p:cNvGraphicFramePr>
+          <p:nvPr/>
+        </p:nvGraphicFramePr>
+        <p:xfrm>
+          <a:off x="5943600" y="1554480"/>
+          <a:ext cx="2743200" cy="3657600"/>
+        </p:xfrm>
+        <a:graphic>
+          <a:graphicData uri="http://schemas.openxmlformats.org/drawingml/2006/chart">
+            <c:chart xmlns:c="http://schemas.openxmlformats.org/drawingml/2006/chart" r:id="rId4"/>
+          </a:graphicData>
+        </a:graphic>
+      </p:graphicFrame>
+      <p:sp>
+        <p:nvSpPr>
+          <p:cNvPr id="8" name="TextBox 7"/>
+          <p:cNvSpPr txBox="1"/>
+          <p:nvPr/>
+        </p:nvSpPr>
+        <p:spPr>
+          <a:xfrm>
+            <a:off x="5943600" y="1097280"/>
+            <a:ext cx="2743200" cy="365760"/>
+          </a:xfrm>
+          <a:prstGeom prst="rect">
+            <a:avLst/>
+          </a:prstGeom>
+          <a:noFill/>
+        </p:spPr>
+        <p:txBody>
+          <a:bodyPr wrap="none">
+            <a:spAutoFit/>
+          </a:bodyPr>
+          <a:lstStyle/>
+          <a:p>
+            <a:r>
+              <a:t>Revenue Trend (Line) - Chart Title</a:t>
+            </a:r>
+          </a:p>
+        </p:txBody>
+      </p:sp>
     </p:spTree>
   </p:cSld>
   <p:clrMapOvr>

--- a/notebooks/demo.pptx
+++ b/notebooks/demo.pptx
@@ -4196,8 +4196,8 @@
         </p:nvSpPr>
         <p:spPr>
           <a:xfrm>
-            <a:off x="914400" y="274320"/>
-            <a:ext cx="7315200" cy="731520"/>
+            <a:off x="457200" y="91440"/>
+            <a:ext cx="11430000" cy="731520"/>
           </a:xfrm>
           <a:prstGeom prst="rect">
             <a:avLst/>
@@ -4225,8 +4225,8 @@
           <p:nvPr/>
         </p:nvGraphicFramePr>
         <p:xfrm>
-          <a:off x="914400" y="1554480"/>
-          <a:ext cx="7315200" cy="4114800"/>
+          <a:off x="457200" y="1463040"/>
+          <a:ext cx="11430000" cy="4800600"/>
         </p:xfrm>
         <a:graphic>
           <a:graphicData uri="http://schemas.openxmlformats.org/drawingml/2006/chart">
@@ -4242,8 +4242,8 @@
         </p:nvSpPr>
         <p:spPr>
           <a:xfrm>
-            <a:off x="914400" y="1097280"/>
-            <a:ext cx="7315200" cy="365760"/>
+            <a:off x="457200" y="1005840"/>
+            <a:ext cx="11430000" cy="457200"/>
           </a:xfrm>
           <a:prstGeom prst="rect">
             <a:avLst/>
@@ -4288,8 +4288,8 @@
         </p:nvSpPr>
         <p:spPr>
           <a:xfrm>
-            <a:off x="914400" y="274320"/>
-            <a:ext cx="7315200" cy="731520"/>
+            <a:off x="457200" y="91440"/>
+            <a:ext cx="11430000" cy="731520"/>
           </a:xfrm>
           <a:prstGeom prst="rect">
             <a:avLst/>
@@ -4426,8 +4426,8 @@
         </p:nvSpPr>
         <p:spPr>
           <a:xfrm>
-            <a:off x="914400" y="274320"/>
-            <a:ext cx="7315200" cy="731520"/>
+            <a:off x="457200" y="91440"/>
+            <a:ext cx="11430000" cy="731520"/>
           </a:xfrm>
           <a:prstGeom prst="rect">
             <a:avLst/>

--- a/notebooks/demo.pptx
+++ b/notebooks/demo.pptx
@@ -4317,8 +4317,8 @@
           <p:nvPr/>
         </p:nvGraphicFramePr>
         <p:xfrm>
-          <a:off x="457200" y="1554480"/>
-          <a:ext cx="4114800" cy="3657600"/>
+          <a:off x="457200" y="1463040"/>
+          <a:ext cx="5715000" cy="4800600"/>
         </p:xfrm>
         <a:graphic>
           <a:graphicData uri="http://schemas.openxmlformats.org/drawingml/2006/chart">
@@ -4334,8 +4334,8 @@
         </p:nvSpPr>
         <p:spPr>
           <a:xfrm>
-            <a:off x="457200" y="1097280"/>
-            <a:ext cx="4114800" cy="365760"/>
+            <a:off x="457200" y="1005840"/>
+            <a:ext cx="5715000" cy="457200"/>
           </a:xfrm>
           <a:prstGeom prst="rect">
             <a:avLst/>
@@ -4363,8 +4363,8 @@
           <p:nvPr/>
         </p:nvGraphicFramePr>
         <p:xfrm>
-          <a:off x="4572000" y="1554480"/>
-          <a:ext cx="4114800" cy="3657600"/>
+          <a:off x="6172200" y="1463040"/>
+          <a:ext cx="5715000" cy="4800600"/>
         </p:xfrm>
         <a:graphic>
           <a:graphicData uri="http://schemas.openxmlformats.org/drawingml/2006/chart">
@@ -4380,8 +4380,8 @@
         </p:nvSpPr>
         <p:spPr>
           <a:xfrm>
-            <a:off x="4572000" y="1097280"/>
-            <a:ext cx="4114800" cy="365760"/>
+            <a:off x="6172200" y="1005840"/>
+            <a:ext cx="5715000" cy="457200"/>
           </a:xfrm>
           <a:prstGeom prst="rect">
             <a:avLst/>
@@ -4455,8 +4455,8 @@
           <p:nvPr/>
         </p:nvGraphicFramePr>
         <p:xfrm>
-          <a:off x="457200" y="1554480"/>
-          <a:ext cx="2743200" cy="3657600"/>
+          <a:off x="457200" y="1463040"/>
+          <a:ext cx="3813048" cy="4800600"/>
         </p:xfrm>
         <a:graphic>
           <a:graphicData uri="http://schemas.openxmlformats.org/drawingml/2006/chart">
@@ -4472,8 +4472,8 @@
         </p:nvSpPr>
         <p:spPr>
           <a:xfrm>
-            <a:off x="457200" y="1097280"/>
-            <a:ext cx="2743200" cy="365760"/>
+            <a:off x="457200" y="1005840"/>
+            <a:ext cx="3813048" cy="457200"/>
           </a:xfrm>
           <a:prstGeom prst="rect">
             <a:avLst/>
@@ -4501,8 +4501,8 @@
           <p:nvPr/>
         </p:nvGraphicFramePr>
         <p:xfrm>
-          <a:off x="3200400" y="1554480"/>
-          <a:ext cx="2743200" cy="3657600"/>
+          <a:off x="4270248" y="1463040"/>
+          <a:ext cx="3813048" cy="4800600"/>
         </p:xfrm>
         <a:graphic>
           <a:graphicData uri="http://schemas.openxmlformats.org/drawingml/2006/chart">
@@ -4518,8 +4518,8 @@
         </p:nvSpPr>
         <p:spPr>
           <a:xfrm>
-            <a:off x="3200400" y="1097280"/>
-            <a:ext cx="2743200" cy="365760"/>
+            <a:off x="4270248" y="1005840"/>
+            <a:ext cx="3813048" cy="457200"/>
           </a:xfrm>
           <a:prstGeom prst="rect">
             <a:avLst/>
@@ -4547,8 +4547,8 @@
           <p:nvPr/>
         </p:nvGraphicFramePr>
         <p:xfrm>
-          <a:off x="5943600" y="1554480"/>
-          <a:ext cx="2743200" cy="3657600"/>
+          <a:off x="8083296" y="1463040"/>
+          <a:ext cx="3813048" cy="4800600"/>
         </p:xfrm>
         <a:graphic>
           <a:graphicData uri="http://schemas.openxmlformats.org/drawingml/2006/chart">
@@ -4564,8 +4564,8 @@
         </p:nvSpPr>
         <p:spPr>
           <a:xfrm>
-            <a:off x="5943600" y="1097280"/>
-            <a:ext cx="2743200" cy="365760"/>
+            <a:off x="8083296" y="1005840"/>
+            <a:ext cx="3813048" cy="457200"/>
           </a:xfrm>
           <a:prstGeom prst="rect">
             <a:avLst/>

--- a/notebooks/demo.pptx
+++ b/notebooks/demo.pptx
@@ -4130,42 +4130,56 @@
       <p:grpSpPr/>
       <p:sp>
         <p:nvSpPr>
-          <p:cNvPr id="2" name="Title 1"/>
-          <p:cNvSpPr>
-            <a:spLocks noGrp="1"/>
-          </p:cNvSpPr>
-          <p:nvPr>
-            <p:ph type="title"/>
-          </p:nvPr>
+          <p:cNvPr id="2" name="TextBox 1"/>
+          <p:cNvSpPr txBox="1"/>
+          <p:nvPr/>
         </p:nvSpPr>
-        <p:spPr/>
+        <p:spPr>
+          <a:xfrm>
+            <a:off x="914400" y="1828800"/>
+            <a:ext cx="7315200" cy="914400"/>
+          </a:xfrm>
+          <a:prstGeom prst="rect">
+            <a:avLst/>
+          </a:prstGeom>
+          <a:noFill/>
+        </p:spPr>
         <p:txBody>
-          <a:bodyPr/>
+          <a:bodyPr wrap="none">
+            <a:spAutoFit/>
+          </a:bodyPr>
           <a:lstStyle/>
           <a:p>
             <a:r>
-              <a:t>Demo - Title Slide</a:t>
+              <a:t>Demo - deck_title</a:t>
             </a:r>
           </a:p>
         </p:txBody>
       </p:sp>
       <p:sp>
         <p:nvSpPr>
-          <p:cNvPr id="3" name="Text Placeholder 2"/>
-          <p:cNvSpPr>
-            <a:spLocks noGrp="1"/>
-          </p:cNvSpPr>
-          <p:nvPr>
-            <p:ph type="body" idx="13" sz="quarter"/>
-          </p:nvPr>
+          <p:cNvPr id="3" name="TextBox 2"/>
+          <p:cNvSpPr txBox="1"/>
+          <p:nvPr/>
         </p:nvSpPr>
-        <p:spPr/>
+        <p:spPr>
+          <a:xfrm>
+            <a:off x="914400" y="2926080"/>
+            <a:ext cx="7315200" cy="731520"/>
+          </a:xfrm>
+          <a:prstGeom prst="rect">
+            <a:avLst/>
+          </a:prstGeom>
+          <a:noFill/>
+        </p:spPr>
         <p:txBody>
-          <a:bodyPr/>
+          <a:bodyPr wrap="none">
+            <a:spAutoFit/>
+          </a:bodyPr>
           <a:lstStyle/>
           <a:p>
             <a:r>
-              <a:t>Refactored Package - Author</a:t>
+              <a:t>deckbridge - deck_author</a:t>
             </a:r>
           </a:p>
         </p:txBody>
@@ -4188,9 +4202,27 @@
         <p:nvPr/>
       </p:nvGrpSpPr>
       <p:grpSpPr/>
+      <p:graphicFrame>
+        <p:nvGraphicFramePr>
+          <p:cNvPr id="2" name="Chart 1"/>
+          <p:cNvGraphicFramePr>
+            <a:graphicFrameLocks noGrp="1"/>
+          </p:cNvGraphicFramePr>
+          <p:nvPr/>
+        </p:nvGraphicFramePr>
+        <p:xfrm>
+          <a:off x="457200" y="1463040"/>
+          <a:ext cx="11430000" cy="4800600"/>
+        </p:xfrm>
+        <a:graphic>
+          <a:graphicData uri="http://schemas.openxmlformats.org/drawingml/2006/chart">
+            <c:chart xmlns:c="http://schemas.openxmlformats.org/drawingml/2006/chart" r:id="rId2"/>
+          </a:graphicData>
+        </a:graphic>
+      </p:graphicFrame>
       <p:sp>
         <p:nvSpPr>
-          <p:cNvPr id="2" name="TextBox 1"/>
+          <p:cNvPr id="3" name="TextBox 2"/>
           <p:cNvSpPr txBox="1"/>
           <p:nvPr/>
         </p:nvSpPr>
@@ -4216,24 +4248,6 @@
           </a:p>
         </p:txBody>
       </p:sp>
-      <p:graphicFrame>
-        <p:nvGraphicFramePr>
-          <p:cNvPr id="3" name="Chart 2"/>
-          <p:cNvGraphicFramePr>
-            <a:graphicFrameLocks noGrp="1"/>
-          </p:cNvGraphicFramePr>
-          <p:nvPr/>
-        </p:nvGraphicFramePr>
-        <p:xfrm>
-          <a:off x="457200" y="1463040"/>
-          <a:ext cx="11430000" cy="4800600"/>
-        </p:xfrm>
-        <a:graphic>
-          <a:graphicData uri="http://schemas.openxmlformats.org/drawingml/2006/chart">
-            <c:chart xmlns:c="http://schemas.openxmlformats.org/drawingml/2006/chart" r:id="rId2"/>
-          </a:graphicData>
-        </a:graphic>
-      </p:graphicFrame>
       <p:sp>
         <p:nvSpPr>
           <p:cNvPr id="4" name="TextBox 3"/>
@@ -4280,9 +4294,45 @@
         <p:nvPr/>
       </p:nvGrpSpPr>
       <p:grpSpPr/>
+      <p:graphicFrame>
+        <p:nvGraphicFramePr>
+          <p:cNvPr id="2" name="Chart 1"/>
+          <p:cNvGraphicFramePr>
+            <a:graphicFrameLocks noGrp="1"/>
+          </p:cNvGraphicFramePr>
+          <p:nvPr/>
+        </p:nvGraphicFramePr>
+        <p:xfrm>
+          <a:off x="457200" y="1463040"/>
+          <a:ext cx="5715000" cy="4800600"/>
+        </p:xfrm>
+        <a:graphic>
+          <a:graphicData uri="http://schemas.openxmlformats.org/drawingml/2006/chart">
+            <c:chart xmlns:c="http://schemas.openxmlformats.org/drawingml/2006/chart" r:id="rId2"/>
+          </a:graphicData>
+        </a:graphic>
+      </p:graphicFrame>
+      <p:graphicFrame>
+        <p:nvGraphicFramePr>
+          <p:cNvPr id="3" name="Chart 2"/>
+          <p:cNvGraphicFramePr>
+            <a:graphicFrameLocks noGrp="1"/>
+          </p:cNvGraphicFramePr>
+          <p:nvPr/>
+        </p:nvGraphicFramePr>
+        <p:xfrm>
+          <a:off x="6172200" y="1463040"/>
+          <a:ext cx="5715000" cy="4800600"/>
+        </p:xfrm>
+        <a:graphic>
+          <a:graphicData uri="http://schemas.openxmlformats.org/drawingml/2006/chart">
+            <c:chart xmlns:c="http://schemas.openxmlformats.org/drawingml/2006/chart" r:id="rId3"/>
+          </a:graphicData>
+        </a:graphic>
+      </p:graphicFrame>
       <p:sp>
         <p:nvSpPr>
-          <p:cNvPr id="2" name="TextBox 1"/>
+          <p:cNvPr id="4" name="TextBox 3"/>
           <p:cNvSpPr txBox="1"/>
           <p:nvPr/>
         </p:nvSpPr>
@@ -4308,27 +4358,9 @@
           </a:p>
         </p:txBody>
       </p:sp>
-      <p:graphicFrame>
-        <p:nvGraphicFramePr>
-          <p:cNvPr id="3" name="Chart 2"/>
-          <p:cNvGraphicFramePr>
-            <a:graphicFrameLocks noGrp="1"/>
-          </p:cNvGraphicFramePr>
-          <p:nvPr/>
-        </p:nvGraphicFramePr>
-        <p:xfrm>
-          <a:off x="457200" y="1463040"/>
-          <a:ext cx="5715000" cy="4800600"/>
-        </p:xfrm>
-        <a:graphic>
-          <a:graphicData uri="http://schemas.openxmlformats.org/drawingml/2006/chart">
-            <c:chart xmlns:c="http://schemas.openxmlformats.org/drawingml/2006/chart" r:id="rId2"/>
-          </a:graphicData>
-        </a:graphic>
-      </p:graphicFrame>
       <p:sp>
         <p:nvSpPr>
-          <p:cNvPr id="4" name="TextBox 3"/>
+          <p:cNvPr id="5" name="TextBox 4"/>
           <p:cNvSpPr txBox="1"/>
           <p:nvPr/>
         </p:nvSpPr>
@@ -4354,24 +4386,6 @@
           </a:p>
         </p:txBody>
       </p:sp>
-      <p:graphicFrame>
-        <p:nvGraphicFramePr>
-          <p:cNvPr id="5" name="Chart 4"/>
-          <p:cNvGraphicFramePr>
-            <a:graphicFrameLocks noGrp="1"/>
-          </p:cNvGraphicFramePr>
-          <p:nvPr/>
-        </p:nvGraphicFramePr>
-        <p:xfrm>
-          <a:off x="6172200" y="1463040"/>
-          <a:ext cx="5715000" cy="4800600"/>
-        </p:xfrm>
-        <a:graphic>
-          <a:graphicData uri="http://schemas.openxmlformats.org/drawingml/2006/chart">
-            <c:chart xmlns:c="http://schemas.openxmlformats.org/drawingml/2006/chart" r:id="rId3"/>
-          </a:graphicData>
-        </a:graphic>
-      </p:graphicFrame>
       <p:sp>
         <p:nvSpPr>
           <p:cNvPr id="6" name="TextBox 5"/>
@@ -4418,9 +4432,63 @@
         <p:nvPr/>
       </p:nvGrpSpPr>
       <p:grpSpPr/>
+      <p:graphicFrame>
+        <p:nvGraphicFramePr>
+          <p:cNvPr id="2" name="Chart 1"/>
+          <p:cNvGraphicFramePr>
+            <a:graphicFrameLocks noGrp="1"/>
+          </p:cNvGraphicFramePr>
+          <p:nvPr/>
+        </p:nvGraphicFramePr>
+        <p:xfrm>
+          <a:off x="457200" y="1463040"/>
+          <a:ext cx="3813048" cy="4800600"/>
+        </p:xfrm>
+        <a:graphic>
+          <a:graphicData uri="http://schemas.openxmlformats.org/drawingml/2006/chart">
+            <c:chart xmlns:c="http://schemas.openxmlformats.org/drawingml/2006/chart" r:id="rId2"/>
+          </a:graphicData>
+        </a:graphic>
+      </p:graphicFrame>
+      <p:graphicFrame>
+        <p:nvGraphicFramePr>
+          <p:cNvPr id="3" name="Chart 2"/>
+          <p:cNvGraphicFramePr>
+            <a:graphicFrameLocks noGrp="1"/>
+          </p:cNvGraphicFramePr>
+          <p:nvPr/>
+        </p:nvGraphicFramePr>
+        <p:xfrm>
+          <a:off x="4270248" y="1463040"/>
+          <a:ext cx="3813048" cy="4800600"/>
+        </p:xfrm>
+        <a:graphic>
+          <a:graphicData uri="http://schemas.openxmlformats.org/drawingml/2006/chart">
+            <c:chart xmlns:c="http://schemas.openxmlformats.org/drawingml/2006/chart" r:id="rId3"/>
+          </a:graphicData>
+        </a:graphic>
+      </p:graphicFrame>
+      <p:graphicFrame>
+        <p:nvGraphicFramePr>
+          <p:cNvPr id="4" name="Chart 3"/>
+          <p:cNvGraphicFramePr>
+            <a:graphicFrameLocks noGrp="1"/>
+          </p:cNvGraphicFramePr>
+          <p:nvPr/>
+        </p:nvGraphicFramePr>
+        <p:xfrm>
+          <a:off x="8083296" y="1463040"/>
+          <a:ext cx="3813048" cy="4800600"/>
+        </p:xfrm>
+        <a:graphic>
+          <a:graphicData uri="http://schemas.openxmlformats.org/drawingml/2006/chart">
+            <c:chart xmlns:c="http://schemas.openxmlformats.org/drawingml/2006/chart" r:id="rId4"/>
+          </a:graphicData>
+        </a:graphic>
+      </p:graphicFrame>
       <p:sp>
         <p:nvSpPr>
-          <p:cNvPr id="2" name="TextBox 1"/>
+          <p:cNvPr id="5" name="TextBox 4"/>
           <p:cNvSpPr txBox="1"/>
           <p:nvPr/>
         </p:nvSpPr>
@@ -4446,27 +4514,9 @@
           </a:p>
         </p:txBody>
       </p:sp>
-      <p:graphicFrame>
-        <p:nvGraphicFramePr>
-          <p:cNvPr id="3" name="Chart 2"/>
-          <p:cNvGraphicFramePr>
-            <a:graphicFrameLocks noGrp="1"/>
-          </p:cNvGraphicFramePr>
-          <p:nvPr/>
-        </p:nvGraphicFramePr>
-        <p:xfrm>
-          <a:off x="457200" y="1463040"/>
-          <a:ext cx="3813048" cy="4800600"/>
-        </p:xfrm>
-        <a:graphic>
-          <a:graphicData uri="http://schemas.openxmlformats.org/drawingml/2006/chart">
-            <c:chart xmlns:c="http://schemas.openxmlformats.org/drawingml/2006/chart" r:id="rId2"/>
-          </a:graphicData>
-        </a:graphic>
-      </p:graphicFrame>
       <p:sp>
         <p:nvSpPr>
-          <p:cNvPr id="4" name="TextBox 3"/>
+          <p:cNvPr id="6" name="TextBox 5"/>
           <p:cNvSpPr txBox="1"/>
           <p:nvPr/>
         </p:nvSpPr>
@@ -4492,27 +4542,9 @@
           </a:p>
         </p:txBody>
       </p:sp>
-      <p:graphicFrame>
-        <p:nvGraphicFramePr>
-          <p:cNvPr id="5" name="Chart 4"/>
-          <p:cNvGraphicFramePr>
-            <a:graphicFrameLocks noGrp="1"/>
-          </p:cNvGraphicFramePr>
-          <p:nvPr/>
-        </p:nvGraphicFramePr>
-        <p:xfrm>
-          <a:off x="4270248" y="1463040"/>
-          <a:ext cx="3813048" cy="4800600"/>
-        </p:xfrm>
-        <a:graphic>
-          <a:graphicData uri="http://schemas.openxmlformats.org/drawingml/2006/chart">
-            <c:chart xmlns:c="http://schemas.openxmlformats.org/drawingml/2006/chart" r:id="rId3"/>
-          </a:graphicData>
-        </a:graphic>
-      </p:graphicFrame>
       <p:sp>
         <p:nvSpPr>
-          <p:cNvPr id="6" name="TextBox 5"/>
+          <p:cNvPr id="7" name="TextBox 6"/>
           <p:cNvSpPr txBox="1"/>
           <p:nvPr/>
         </p:nvSpPr>
@@ -4538,24 +4570,6 @@
           </a:p>
         </p:txBody>
       </p:sp>
-      <p:graphicFrame>
-        <p:nvGraphicFramePr>
-          <p:cNvPr id="7" name="Chart 6"/>
-          <p:cNvGraphicFramePr>
-            <a:graphicFrameLocks noGrp="1"/>
-          </p:cNvGraphicFramePr>
-          <p:nvPr/>
-        </p:nvGraphicFramePr>
-        <p:xfrm>
-          <a:off x="8083296" y="1463040"/>
-          <a:ext cx="3813048" cy="4800600"/>
-        </p:xfrm>
-        <a:graphic>
-          <a:graphicData uri="http://schemas.openxmlformats.org/drawingml/2006/chart">
-            <c:chart xmlns:c="http://schemas.openxmlformats.org/drawingml/2006/chart" r:id="rId4"/>
-          </a:graphicData>
-        </a:graphic>
-      </p:graphicFrame>
       <p:sp>
         <p:nvSpPr>
           <p:cNvPr id="8" name="TextBox 7"/>

--- a/notebooks/demo.pptx
+++ b/notebooks/demo.pptx
@@ -4150,6 +4150,9 @@
           </a:bodyPr>
           <a:lstStyle/>
           <a:p>
+            <a:pPr algn="ctr">
+              <a:defRPr sz="3200" b="1" u="none"/>
+            </a:pPr>
             <a:r>
               <a:t>Demo - deck_title</a:t>
             </a:r>
@@ -4178,6 +4181,9 @@
           </a:bodyPr>
           <a:lstStyle/>
           <a:p>
+            <a:pPr>
+              <a:defRPr b="0" u="none"/>
+            </a:pPr>
             <a:r>
               <a:t>deckbridge - deck_author</a:t>
             </a:r>
@@ -4242,6 +4248,9 @@
           </a:bodyPr>
           <a:lstStyle/>
           <a:p>
+            <a:pPr>
+              <a:defRPr b="0" u="none"/>
+            </a:pPr>
             <a:r>
               <a:t>Revenue Trend - Slide Title</a:t>
             </a:r>
@@ -4270,6 +4279,9 @@
           </a:bodyPr>
           <a:lstStyle/>
           <a:p>
+            <a:pPr>
+              <a:defRPr b="0" u="none"/>
+            </a:pPr>
             <a:r>
               <a:t>Revenue Trend (Line) - Chart Title</a:t>
             </a:r>
@@ -4352,6 +4364,9 @@
           </a:bodyPr>
           <a:lstStyle/>
           <a:p>
+            <a:pPr>
+              <a:defRPr b="0" u="none"/>
+            </a:pPr>
             <a:r>
               <a:t>Revenue Trend - Slide Title</a:t>
             </a:r>
@@ -4380,6 +4395,9 @@
           </a:bodyPr>
           <a:lstStyle/>
           <a:p>
+            <a:pPr>
+              <a:defRPr b="0" u="none"/>
+            </a:pPr>
             <a:r>
               <a:t>Revenue Trend (Line) - Chart Title</a:t>
             </a:r>
@@ -4408,6 +4426,9 @@
           </a:bodyPr>
           <a:lstStyle/>
           <a:p>
+            <a:pPr>
+              <a:defRPr b="0" u="none"/>
+            </a:pPr>
             <a:r>
               <a:t>Revenue (Bar) - Chart Title</a:t>
             </a:r>
@@ -4508,6 +4529,9 @@
           </a:bodyPr>
           <a:lstStyle/>
           <a:p>
+            <a:pPr>
+              <a:defRPr b="0" u="none"/>
+            </a:pPr>
             <a:r>
               <a:t>Revenue Trend - Slide Title</a:t>
             </a:r>
@@ -4536,6 +4560,9 @@
           </a:bodyPr>
           <a:lstStyle/>
           <a:p>
+            <a:pPr>
+              <a:defRPr b="0" u="none"/>
+            </a:pPr>
             <a:r>
               <a:t>Revenue Trend (Line) - Chart Title</a:t>
             </a:r>
@@ -4564,6 +4591,9 @@
           </a:bodyPr>
           <a:lstStyle/>
           <a:p>
+            <a:pPr>
+              <a:defRPr b="0" u="none"/>
+            </a:pPr>
             <a:r>
               <a:t>Revenue (Bar) - Chart Title</a:t>
             </a:r>
@@ -4592,6 +4622,9 @@
           </a:bodyPr>
           <a:lstStyle/>
           <a:p>
+            <a:pPr>
+              <a:defRPr b="0" u="none"/>
+            </a:pPr>
             <a:r>
               <a:t>Revenue Trend (Line) - Chart Title</a:t>
             </a:r>

--- a/notebooks/demo.pptx
+++ b/notebooks/demo.pptx
@@ -4150,8 +4150,12 @@
           </a:bodyPr>
           <a:lstStyle/>
           <a:p>
-            <a:pPr algn="ctr">
-              <a:defRPr sz="3200" b="1" u="none"/>
+            <a:pPr algn="l">
+              <a:defRPr sz="3200" b="1" u="none">
+                <a:solidFill>
+                  <a:srgbClr val="7F7F7F"/>
+                </a:solidFill>
+              </a:defRPr>
             </a:pPr>
             <a:r>
               <a:t>Demo - deck_title</a:t>

--- a/notebooks/demo.pptx
+++ b/notebooks/demo.pptx
@@ -4151,7 +4151,7 @@
           <a:lstStyle/>
           <a:p>
             <a:pPr algn="l">
-              <a:defRPr sz="3200" b="1" u="none">
+              <a:defRPr sz="3200" b="1" i="1" u="none">
                 <a:solidFill>
                   <a:srgbClr val="7F7F7F"/>
                 </a:solidFill>
@@ -4186,7 +4186,7 @@
           <a:lstStyle/>
           <a:p>
             <a:pPr>
-              <a:defRPr b="0" u="none"/>
+              <a:defRPr b="0" i="0" u="none"/>
             </a:pPr>
             <a:r>
               <a:t>deckbridge - deck_author</a:t>
@@ -4253,7 +4253,7 @@
           <a:lstStyle/>
           <a:p>
             <a:pPr>
-              <a:defRPr b="0" u="none"/>
+              <a:defRPr b="0" i="0" u="none"/>
             </a:pPr>
             <a:r>
               <a:t>Revenue Trend - Slide Title</a:t>
@@ -4284,7 +4284,7 @@
           <a:lstStyle/>
           <a:p>
             <a:pPr>
-              <a:defRPr b="0" u="none"/>
+              <a:defRPr b="0" i="0" u="none"/>
             </a:pPr>
             <a:r>
               <a:t>Revenue Trend (Line) - Chart Title</a:t>
@@ -4369,7 +4369,7 @@
           <a:lstStyle/>
           <a:p>
             <a:pPr>
-              <a:defRPr b="0" u="none"/>
+              <a:defRPr b="0" i="0" u="none"/>
             </a:pPr>
             <a:r>
               <a:t>Revenue Trend - Slide Title</a:t>
@@ -4400,7 +4400,7 @@
           <a:lstStyle/>
           <a:p>
             <a:pPr>
-              <a:defRPr b="0" u="none"/>
+              <a:defRPr b="0" i="0" u="none"/>
             </a:pPr>
             <a:r>
               <a:t>Revenue Trend (Line) - Chart Title</a:t>
@@ -4431,7 +4431,7 @@
           <a:lstStyle/>
           <a:p>
             <a:pPr>
-              <a:defRPr b="0" u="none"/>
+              <a:defRPr b="0" i="0" u="none"/>
             </a:pPr>
             <a:r>
               <a:t>Revenue (Bar) - Chart Title</a:t>
@@ -4534,7 +4534,7 @@
           <a:lstStyle/>
           <a:p>
             <a:pPr>
-              <a:defRPr b="0" u="none"/>
+              <a:defRPr b="0" i="0" u="none"/>
             </a:pPr>
             <a:r>
               <a:t>Revenue Trend - Slide Title</a:t>
@@ -4565,7 +4565,7 @@
           <a:lstStyle/>
           <a:p>
             <a:pPr>
-              <a:defRPr b="0" u="none"/>
+              <a:defRPr b="0" i="0" u="none"/>
             </a:pPr>
             <a:r>
               <a:t>Revenue Trend (Line) - Chart Title</a:t>
@@ -4596,7 +4596,7 @@
           <a:lstStyle/>
           <a:p>
             <a:pPr>
-              <a:defRPr b="0" u="none"/>
+              <a:defRPr b="0" i="0" u="none"/>
             </a:pPr>
             <a:r>
               <a:t>Revenue (Bar) - Chart Title</a:t>
@@ -4627,7 +4627,7 @@
           <a:lstStyle/>
           <a:p>
             <a:pPr>
-              <a:defRPr b="0" u="none"/>
+              <a:defRPr b="0" i="0" u="none"/>
             </a:pPr>
             <a:r>
               <a:t>Revenue Trend (Line) - Chart Title</a:t>

--- a/notebooks/demo.pptx
+++ b/notebooks/demo.pptx
@@ -4151,7 +4151,7 @@
           <a:lstStyle/>
           <a:p>
             <a:pPr algn="l">
-              <a:defRPr sz="3200" b="1" i="1" u="none">
+              <a:defRPr sz="3200" b="1" i="0" u="none">
                 <a:solidFill>
                   <a:srgbClr val="7F7F7F"/>
                 </a:solidFill>

--- a/notebooks/demo.pptx
+++ b/notebooks/demo.pptx
@@ -4212,27 +4212,9 @@
         <p:nvPr/>
       </p:nvGrpSpPr>
       <p:grpSpPr/>
-      <p:graphicFrame>
-        <p:nvGraphicFramePr>
-          <p:cNvPr id="2" name="Chart 1"/>
-          <p:cNvGraphicFramePr>
-            <a:graphicFrameLocks noGrp="1"/>
-          </p:cNvGraphicFramePr>
-          <p:nvPr/>
-        </p:nvGraphicFramePr>
-        <p:xfrm>
-          <a:off x="457200" y="1463040"/>
-          <a:ext cx="11430000" cy="4800600"/>
-        </p:xfrm>
-        <a:graphic>
-          <a:graphicData uri="http://schemas.openxmlformats.org/drawingml/2006/chart">
-            <c:chart xmlns:c="http://schemas.openxmlformats.org/drawingml/2006/chart" r:id="rId2"/>
-          </a:graphicData>
-        </a:graphic>
-      </p:graphicFrame>
       <p:sp>
         <p:nvSpPr>
-          <p:cNvPr id="3" name="TextBox 2"/>
+          <p:cNvPr id="2" name="TextBox 1"/>
           <p:cNvSpPr txBox="1"/>
           <p:nvPr/>
         </p:nvSpPr>
@@ -4263,7 +4245,7 @@
       </p:sp>
       <p:sp>
         <p:nvSpPr>
-          <p:cNvPr id="4" name="TextBox 3"/>
+          <p:cNvPr id="3" name="TextBox 2"/>
           <p:cNvSpPr txBox="1"/>
           <p:nvPr/>
         </p:nvSpPr>
@@ -4292,6 +4274,24 @@
           </a:p>
         </p:txBody>
       </p:sp>
+      <p:graphicFrame>
+        <p:nvGraphicFramePr>
+          <p:cNvPr id="4" name="Chart 3"/>
+          <p:cNvGraphicFramePr>
+            <a:graphicFrameLocks noGrp="1"/>
+          </p:cNvGraphicFramePr>
+          <p:nvPr/>
+        </p:nvGraphicFramePr>
+        <p:xfrm>
+          <a:off x="457200" y="1463040"/>
+          <a:ext cx="11430000" cy="4800600"/>
+        </p:xfrm>
+        <a:graphic>
+          <a:graphicData uri="http://schemas.openxmlformats.org/drawingml/2006/chart">
+            <c:chart xmlns:c="http://schemas.openxmlformats.org/drawingml/2006/chart" r:id="rId2"/>
+          </a:graphicData>
+        </a:graphic>
+      </p:graphicFrame>
     </p:spTree>
   </p:cSld>
   <p:clrMapOvr>
@@ -4310,45 +4310,9 @@
         <p:nvPr/>
       </p:nvGrpSpPr>
       <p:grpSpPr/>
-      <p:graphicFrame>
-        <p:nvGraphicFramePr>
-          <p:cNvPr id="2" name="Chart 1"/>
-          <p:cNvGraphicFramePr>
-            <a:graphicFrameLocks noGrp="1"/>
-          </p:cNvGraphicFramePr>
-          <p:nvPr/>
-        </p:nvGraphicFramePr>
-        <p:xfrm>
-          <a:off x="457200" y="1463040"/>
-          <a:ext cx="5715000" cy="4800600"/>
-        </p:xfrm>
-        <a:graphic>
-          <a:graphicData uri="http://schemas.openxmlformats.org/drawingml/2006/chart">
-            <c:chart xmlns:c="http://schemas.openxmlformats.org/drawingml/2006/chart" r:id="rId2"/>
-          </a:graphicData>
-        </a:graphic>
-      </p:graphicFrame>
-      <p:graphicFrame>
-        <p:nvGraphicFramePr>
-          <p:cNvPr id="3" name="Chart 2"/>
-          <p:cNvGraphicFramePr>
-            <a:graphicFrameLocks noGrp="1"/>
-          </p:cNvGraphicFramePr>
-          <p:nvPr/>
-        </p:nvGraphicFramePr>
-        <p:xfrm>
-          <a:off x="6172200" y="1463040"/>
-          <a:ext cx="5715000" cy="4800600"/>
-        </p:xfrm>
-        <a:graphic>
-          <a:graphicData uri="http://schemas.openxmlformats.org/drawingml/2006/chart">
-            <c:chart xmlns:c="http://schemas.openxmlformats.org/drawingml/2006/chart" r:id="rId3"/>
-          </a:graphicData>
-        </a:graphic>
-      </p:graphicFrame>
       <p:sp>
         <p:nvSpPr>
-          <p:cNvPr id="4" name="TextBox 3"/>
+          <p:cNvPr id="2" name="TextBox 1"/>
           <p:cNvSpPr txBox="1"/>
           <p:nvPr/>
         </p:nvSpPr>
@@ -4379,7 +4343,7 @@
       </p:sp>
       <p:sp>
         <p:nvSpPr>
-          <p:cNvPr id="5" name="TextBox 4"/>
+          <p:cNvPr id="3" name="TextBox 2"/>
           <p:cNvSpPr txBox="1"/>
           <p:nvPr/>
         </p:nvSpPr>
@@ -4408,9 +4372,27 @@
           </a:p>
         </p:txBody>
       </p:sp>
+      <p:graphicFrame>
+        <p:nvGraphicFramePr>
+          <p:cNvPr id="4" name="Chart 3"/>
+          <p:cNvGraphicFramePr>
+            <a:graphicFrameLocks noGrp="1"/>
+          </p:cNvGraphicFramePr>
+          <p:nvPr/>
+        </p:nvGraphicFramePr>
+        <p:xfrm>
+          <a:off x="457200" y="1463040"/>
+          <a:ext cx="5715000" cy="4800600"/>
+        </p:xfrm>
+        <a:graphic>
+          <a:graphicData uri="http://schemas.openxmlformats.org/drawingml/2006/chart">
+            <c:chart xmlns:c="http://schemas.openxmlformats.org/drawingml/2006/chart" r:id="rId2"/>
+          </a:graphicData>
+        </a:graphic>
+      </p:graphicFrame>
       <p:sp>
         <p:nvSpPr>
-          <p:cNvPr id="6" name="TextBox 5"/>
+          <p:cNvPr id="5" name="TextBox 4"/>
           <p:cNvSpPr txBox="1"/>
           <p:nvPr/>
         </p:nvSpPr>
@@ -4439,6 +4421,24 @@
           </a:p>
         </p:txBody>
       </p:sp>
+      <p:graphicFrame>
+        <p:nvGraphicFramePr>
+          <p:cNvPr id="6" name="Chart 5"/>
+          <p:cNvGraphicFramePr>
+            <a:graphicFrameLocks noGrp="1"/>
+          </p:cNvGraphicFramePr>
+          <p:nvPr/>
+        </p:nvGraphicFramePr>
+        <p:xfrm>
+          <a:off x="6172200" y="1463040"/>
+          <a:ext cx="5715000" cy="4800600"/>
+        </p:xfrm>
+        <a:graphic>
+          <a:graphicData uri="http://schemas.openxmlformats.org/drawingml/2006/chart">
+            <c:chart xmlns:c="http://schemas.openxmlformats.org/drawingml/2006/chart" r:id="rId3"/>
+          </a:graphicData>
+        </a:graphic>
+      </p:graphicFrame>
     </p:spTree>
   </p:cSld>
   <p:clrMapOvr>
@@ -4457,63 +4457,9 @@
         <p:nvPr/>
       </p:nvGrpSpPr>
       <p:grpSpPr/>
-      <p:graphicFrame>
-        <p:nvGraphicFramePr>
-          <p:cNvPr id="2" name="Chart 1"/>
-          <p:cNvGraphicFramePr>
-            <a:graphicFrameLocks noGrp="1"/>
-          </p:cNvGraphicFramePr>
-          <p:nvPr/>
-        </p:nvGraphicFramePr>
-        <p:xfrm>
-          <a:off x="457200" y="1463040"/>
-          <a:ext cx="3813048" cy="4800600"/>
-        </p:xfrm>
-        <a:graphic>
-          <a:graphicData uri="http://schemas.openxmlformats.org/drawingml/2006/chart">
-            <c:chart xmlns:c="http://schemas.openxmlformats.org/drawingml/2006/chart" r:id="rId2"/>
-          </a:graphicData>
-        </a:graphic>
-      </p:graphicFrame>
-      <p:graphicFrame>
-        <p:nvGraphicFramePr>
-          <p:cNvPr id="3" name="Chart 2"/>
-          <p:cNvGraphicFramePr>
-            <a:graphicFrameLocks noGrp="1"/>
-          </p:cNvGraphicFramePr>
-          <p:nvPr/>
-        </p:nvGraphicFramePr>
-        <p:xfrm>
-          <a:off x="4270248" y="1463040"/>
-          <a:ext cx="3813048" cy="4800600"/>
-        </p:xfrm>
-        <a:graphic>
-          <a:graphicData uri="http://schemas.openxmlformats.org/drawingml/2006/chart">
-            <c:chart xmlns:c="http://schemas.openxmlformats.org/drawingml/2006/chart" r:id="rId3"/>
-          </a:graphicData>
-        </a:graphic>
-      </p:graphicFrame>
-      <p:graphicFrame>
-        <p:nvGraphicFramePr>
-          <p:cNvPr id="4" name="Chart 3"/>
-          <p:cNvGraphicFramePr>
-            <a:graphicFrameLocks noGrp="1"/>
-          </p:cNvGraphicFramePr>
-          <p:nvPr/>
-        </p:nvGraphicFramePr>
-        <p:xfrm>
-          <a:off x="8083296" y="1463040"/>
-          <a:ext cx="3813048" cy="4800600"/>
-        </p:xfrm>
-        <a:graphic>
-          <a:graphicData uri="http://schemas.openxmlformats.org/drawingml/2006/chart">
-            <c:chart xmlns:c="http://schemas.openxmlformats.org/drawingml/2006/chart" r:id="rId4"/>
-          </a:graphicData>
-        </a:graphic>
-      </p:graphicFrame>
       <p:sp>
         <p:nvSpPr>
-          <p:cNvPr id="5" name="TextBox 4"/>
+          <p:cNvPr id="2" name="TextBox 1"/>
           <p:cNvSpPr txBox="1"/>
           <p:nvPr/>
         </p:nvSpPr>
@@ -4544,7 +4490,7 @@
       </p:sp>
       <p:sp>
         <p:nvSpPr>
-          <p:cNvPr id="6" name="TextBox 5"/>
+          <p:cNvPr id="3" name="TextBox 2"/>
           <p:cNvSpPr txBox="1"/>
           <p:nvPr/>
         </p:nvSpPr>
@@ -4573,9 +4519,27 @@
           </a:p>
         </p:txBody>
       </p:sp>
+      <p:graphicFrame>
+        <p:nvGraphicFramePr>
+          <p:cNvPr id="4" name="Chart 3"/>
+          <p:cNvGraphicFramePr>
+            <a:graphicFrameLocks noGrp="1"/>
+          </p:cNvGraphicFramePr>
+          <p:nvPr/>
+        </p:nvGraphicFramePr>
+        <p:xfrm>
+          <a:off x="457200" y="1463040"/>
+          <a:ext cx="3813048" cy="4800600"/>
+        </p:xfrm>
+        <a:graphic>
+          <a:graphicData uri="http://schemas.openxmlformats.org/drawingml/2006/chart">
+            <c:chart xmlns:c="http://schemas.openxmlformats.org/drawingml/2006/chart" r:id="rId2"/>
+          </a:graphicData>
+        </a:graphic>
+      </p:graphicFrame>
       <p:sp>
         <p:nvSpPr>
-          <p:cNvPr id="7" name="TextBox 6"/>
+          <p:cNvPr id="5" name="TextBox 4"/>
           <p:cNvSpPr txBox="1"/>
           <p:nvPr/>
         </p:nvSpPr>
@@ -4604,9 +4568,27 @@
           </a:p>
         </p:txBody>
       </p:sp>
+      <p:graphicFrame>
+        <p:nvGraphicFramePr>
+          <p:cNvPr id="6" name="Chart 5"/>
+          <p:cNvGraphicFramePr>
+            <a:graphicFrameLocks noGrp="1"/>
+          </p:cNvGraphicFramePr>
+          <p:nvPr/>
+        </p:nvGraphicFramePr>
+        <p:xfrm>
+          <a:off x="4270248" y="1463040"/>
+          <a:ext cx="3813048" cy="4800600"/>
+        </p:xfrm>
+        <a:graphic>
+          <a:graphicData uri="http://schemas.openxmlformats.org/drawingml/2006/chart">
+            <c:chart xmlns:c="http://schemas.openxmlformats.org/drawingml/2006/chart" r:id="rId3"/>
+          </a:graphicData>
+        </a:graphic>
+      </p:graphicFrame>
       <p:sp>
         <p:nvSpPr>
-          <p:cNvPr id="8" name="TextBox 7"/>
+          <p:cNvPr id="7" name="TextBox 6"/>
           <p:cNvSpPr txBox="1"/>
           <p:nvPr/>
         </p:nvSpPr>
@@ -4635,6 +4617,24 @@
           </a:p>
         </p:txBody>
       </p:sp>
+      <p:graphicFrame>
+        <p:nvGraphicFramePr>
+          <p:cNvPr id="8" name="Chart 7"/>
+          <p:cNvGraphicFramePr>
+            <a:graphicFrameLocks noGrp="1"/>
+          </p:cNvGraphicFramePr>
+          <p:nvPr/>
+        </p:nvGraphicFramePr>
+        <p:xfrm>
+          <a:off x="8083296" y="1463040"/>
+          <a:ext cx="3813048" cy="4800600"/>
+        </p:xfrm>
+        <a:graphic>
+          <a:graphicData uri="http://schemas.openxmlformats.org/drawingml/2006/chart">
+            <c:chart xmlns:c="http://schemas.openxmlformats.org/drawingml/2006/chart" r:id="rId4"/>
+          </a:graphicData>
+        </a:graphic>
+      </p:graphicFrame>
     </p:spTree>
   </p:cSld>
   <p:clrMapOvr>

--- a/notebooks/demo.pptx
+++ b/notebooks/demo.pptx
@@ -4185,8 +4185,12 @@
           </a:bodyPr>
           <a:lstStyle/>
           <a:p>
-            <a:pPr>
-              <a:defRPr b="0" i="0" u="none"/>
+            <a:pPr algn="ctr">
+              <a:defRPr sz="1800" b="0" i="0" u="none">
+                <a:solidFill>
+                  <a:srgbClr val="000000"/>
+                </a:solidFill>
+              </a:defRPr>
             </a:pPr>
             <a:r>
               <a:t>deckbridge - deck_author</a:t>
@@ -4234,8 +4238,12 @@
           </a:bodyPr>
           <a:lstStyle/>
           <a:p>
-            <a:pPr>
-              <a:defRPr b="0" i="0" u="none"/>
+            <a:pPr algn="l">
+              <a:defRPr sz="2000" b="1" i="0" u="none">
+                <a:solidFill>
+                  <a:srgbClr val="7F7F7F"/>
+                </a:solidFill>
+              </a:defRPr>
             </a:pPr>
             <a:r>
               <a:t>Revenue Trend - Slide Title</a:t>
@@ -4243,9 +4251,27 @@
           </a:p>
         </p:txBody>
       </p:sp>
+      <p:graphicFrame>
+        <p:nvGraphicFramePr>
+          <p:cNvPr id="3" name="chart_1"/>
+          <p:cNvGraphicFramePr>
+            <a:graphicFrameLocks noGrp="1"/>
+          </p:cNvGraphicFramePr>
+          <p:nvPr/>
+        </p:nvGraphicFramePr>
+        <p:xfrm>
+          <a:off x="457200" y="1463040"/>
+          <a:ext cx="11430000" cy="4800600"/>
+        </p:xfrm>
+        <a:graphic>
+          <a:graphicData uri="http://schemas.openxmlformats.org/drawingml/2006/chart">
+            <c:chart xmlns:c="http://schemas.openxmlformats.org/drawingml/2006/chart" r:id="rId2"/>
+          </a:graphicData>
+        </a:graphic>
+      </p:graphicFrame>
       <p:sp>
         <p:nvSpPr>
-          <p:cNvPr id="3" name="TextBox 2"/>
+          <p:cNvPr id="4" name="TextBox 3"/>
           <p:cNvSpPr txBox="1"/>
           <p:nvPr/>
         </p:nvSpPr>
@@ -4265,8 +4291,12 @@
           </a:bodyPr>
           <a:lstStyle/>
           <a:p>
-            <a:pPr>
-              <a:defRPr b="0" i="0" u="none"/>
+            <a:pPr algn="ctr">
+              <a:defRPr sz="1600" b="1" i="0" u="sng">
+                <a:solidFill>
+                  <a:srgbClr val="000000"/>
+                </a:solidFill>
+              </a:defRPr>
             </a:pPr>
             <a:r>
               <a:t>Revenue Trend (Line) - Chart Title</a:t>
@@ -4274,24 +4304,6 @@
           </a:p>
         </p:txBody>
       </p:sp>
-      <p:graphicFrame>
-        <p:nvGraphicFramePr>
-          <p:cNvPr id="4" name="Chart 3"/>
-          <p:cNvGraphicFramePr>
-            <a:graphicFrameLocks noGrp="1"/>
-          </p:cNvGraphicFramePr>
-          <p:nvPr/>
-        </p:nvGraphicFramePr>
-        <p:xfrm>
-          <a:off x="457200" y="1463040"/>
-          <a:ext cx="11430000" cy="4800600"/>
-        </p:xfrm>
-        <a:graphic>
-          <a:graphicData uri="http://schemas.openxmlformats.org/drawingml/2006/chart">
-            <c:chart xmlns:c="http://schemas.openxmlformats.org/drawingml/2006/chart" r:id="rId2"/>
-          </a:graphicData>
-        </a:graphic>
-      </p:graphicFrame>
     </p:spTree>
   </p:cSld>
   <p:clrMapOvr>
@@ -4332,8 +4344,12 @@
           </a:bodyPr>
           <a:lstStyle/>
           <a:p>
-            <a:pPr>
-              <a:defRPr b="0" i="0" u="none"/>
+            <a:pPr algn="l">
+              <a:defRPr sz="2000" b="1" i="0" u="none">
+                <a:solidFill>
+                  <a:srgbClr val="7F7F7F"/>
+                </a:solidFill>
+              </a:defRPr>
             </a:pPr>
             <a:r>
               <a:t>Revenue Trend - Slide Title</a:t>
@@ -4341,9 +4357,27 @@
           </a:p>
         </p:txBody>
       </p:sp>
+      <p:graphicFrame>
+        <p:nvGraphicFramePr>
+          <p:cNvPr id="3" name="chart_1"/>
+          <p:cNvGraphicFramePr>
+            <a:graphicFrameLocks noGrp="1"/>
+          </p:cNvGraphicFramePr>
+          <p:nvPr/>
+        </p:nvGraphicFramePr>
+        <p:xfrm>
+          <a:off x="457200" y="1463040"/>
+          <a:ext cx="5715000" cy="4800600"/>
+        </p:xfrm>
+        <a:graphic>
+          <a:graphicData uri="http://schemas.openxmlformats.org/drawingml/2006/chart">
+            <c:chart xmlns:c="http://schemas.openxmlformats.org/drawingml/2006/chart" r:id="rId2"/>
+          </a:graphicData>
+        </a:graphic>
+      </p:graphicFrame>
       <p:sp>
         <p:nvSpPr>
-          <p:cNvPr id="3" name="TextBox 2"/>
+          <p:cNvPr id="4" name="TextBox 3"/>
           <p:cNvSpPr txBox="1"/>
           <p:nvPr/>
         </p:nvSpPr>
@@ -4363,8 +4397,12 @@
           </a:bodyPr>
           <a:lstStyle/>
           <a:p>
-            <a:pPr>
-              <a:defRPr b="0" i="0" u="none"/>
+            <a:pPr algn="ctr">
+              <a:defRPr sz="1600" b="1" i="0" u="sng">
+                <a:solidFill>
+                  <a:srgbClr val="000000"/>
+                </a:solidFill>
+              </a:defRPr>
             </a:pPr>
             <a:r>
               <a:t>Revenue Trend (Line) - Chart Title</a:t>
@@ -4374,25 +4412,25 @@
       </p:sp>
       <p:graphicFrame>
         <p:nvGraphicFramePr>
-          <p:cNvPr id="4" name="Chart 3"/>
+          <p:cNvPr id="5" name="chart_2"/>
           <p:cNvGraphicFramePr>
             <a:graphicFrameLocks noGrp="1"/>
           </p:cNvGraphicFramePr>
           <p:nvPr/>
         </p:nvGraphicFramePr>
         <p:xfrm>
-          <a:off x="457200" y="1463040"/>
+          <a:off x="6172200" y="1463040"/>
           <a:ext cx="5715000" cy="4800600"/>
         </p:xfrm>
         <a:graphic>
           <a:graphicData uri="http://schemas.openxmlformats.org/drawingml/2006/chart">
-            <c:chart xmlns:c="http://schemas.openxmlformats.org/drawingml/2006/chart" r:id="rId2"/>
+            <c:chart xmlns:c="http://schemas.openxmlformats.org/drawingml/2006/chart" r:id="rId3"/>
           </a:graphicData>
         </a:graphic>
       </p:graphicFrame>
       <p:sp>
         <p:nvSpPr>
-          <p:cNvPr id="5" name="TextBox 4"/>
+          <p:cNvPr id="6" name="TextBox 5"/>
           <p:cNvSpPr txBox="1"/>
           <p:nvPr/>
         </p:nvSpPr>
@@ -4412,8 +4450,12 @@
           </a:bodyPr>
           <a:lstStyle/>
           <a:p>
-            <a:pPr>
-              <a:defRPr b="0" i="0" u="none"/>
+            <a:pPr algn="ctr">
+              <a:defRPr sz="1600" b="1" i="0" u="sng">
+                <a:solidFill>
+                  <a:srgbClr val="000000"/>
+                </a:solidFill>
+              </a:defRPr>
             </a:pPr>
             <a:r>
               <a:t>Revenue (Bar) - Chart Title</a:t>
@@ -4421,24 +4463,6 @@
           </a:p>
         </p:txBody>
       </p:sp>
-      <p:graphicFrame>
-        <p:nvGraphicFramePr>
-          <p:cNvPr id="6" name="Chart 5"/>
-          <p:cNvGraphicFramePr>
-            <a:graphicFrameLocks noGrp="1"/>
-          </p:cNvGraphicFramePr>
-          <p:nvPr/>
-        </p:nvGraphicFramePr>
-        <p:xfrm>
-          <a:off x="6172200" y="1463040"/>
-          <a:ext cx="5715000" cy="4800600"/>
-        </p:xfrm>
-        <a:graphic>
-          <a:graphicData uri="http://schemas.openxmlformats.org/drawingml/2006/chart">
-            <c:chart xmlns:c="http://schemas.openxmlformats.org/drawingml/2006/chart" r:id="rId3"/>
-          </a:graphicData>
-        </a:graphic>
-      </p:graphicFrame>
     </p:spTree>
   </p:cSld>
   <p:clrMapOvr>
@@ -4479,8 +4503,12 @@
           </a:bodyPr>
           <a:lstStyle/>
           <a:p>
-            <a:pPr>
-              <a:defRPr b="0" i="0" u="none"/>
+            <a:pPr algn="l">
+              <a:defRPr sz="2000" b="1" i="0" u="none">
+                <a:solidFill>
+                  <a:srgbClr val="7F7F7F"/>
+                </a:solidFill>
+              </a:defRPr>
             </a:pPr>
             <a:r>
               <a:t>Revenue Trend - Slide Title</a:t>
@@ -4488,9 +4516,27 @@
           </a:p>
         </p:txBody>
       </p:sp>
+      <p:graphicFrame>
+        <p:nvGraphicFramePr>
+          <p:cNvPr id="3" name="chart_1"/>
+          <p:cNvGraphicFramePr>
+            <a:graphicFrameLocks noGrp="1"/>
+          </p:cNvGraphicFramePr>
+          <p:nvPr/>
+        </p:nvGraphicFramePr>
+        <p:xfrm>
+          <a:off x="457200" y="1463040"/>
+          <a:ext cx="3813048" cy="4800600"/>
+        </p:xfrm>
+        <a:graphic>
+          <a:graphicData uri="http://schemas.openxmlformats.org/drawingml/2006/chart">
+            <c:chart xmlns:c="http://schemas.openxmlformats.org/drawingml/2006/chart" r:id="rId2"/>
+          </a:graphicData>
+        </a:graphic>
+      </p:graphicFrame>
       <p:sp>
         <p:nvSpPr>
-          <p:cNvPr id="3" name="TextBox 2"/>
+          <p:cNvPr id="4" name="TextBox 3"/>
           <p:cNvSpPr txBox="1"/>
           <p:nvPr/>
         </p:nvSpPr>
@@ -4510,8 +4556,12 @@
           </a:bodyPr>
           <a:lstStyle/>
           <a:p>
-            <a:pPr>
-              <a:defRPr b="0" i="0" u="none"/>
+            <a:pPr algn="ctr">
+              <a:defRPr sz="1600" b="1" i="0" u="sng">
+                <a:solidFill>
+                  <a:srgbClr val="000000"/>
+                </a:solidFill>
+              </a:defRPr>
             </a:pPr>
             <a:r>
               <a:t>Revenue Trend (Line) - Chart Title</a:t>
@@ -4521,25 +4571,25 @@
       </p:sp>
       <p:graphicFrame>
         <p:nvGraphicFramePr>
-          <p:cNvPr id="4" name="Chart 3"/>
+          <p:cNvPr id="5" name="chart_2"/>
           <p:cNvGraphicFramePr>
             <a:graphicFrameLocks noGrp="1"/>
           </p:cNvGraphicFramePr>
           <p:nvPr/>
         </p:nvGraphicFramePr>
         <p:xfrm>
-          <a:off x="457200" y="1463040"/>
+          <a:off x="4270248" y="1463040"/>
           <a:ext cx="3813048" cy="4800600"/>
         </p:xfrm>
         <a:graphic>
           <a:graphicData uri="http://schemas.openxmlformats.org/drawingml/2006/chart">
-            <c:chart xmlns:c="http://schemas.openxmlformats.org/drawingml/2006/chart" r:id="rId2"/>
+            <c:chart xmlns:c="http://schemas.openxmlformats.org/drawingml/2006/chart" r:id="rId3"/>
           </a:graphicData>
         </a:graphic>
       </p:graphicFrame>
       <p:sp>
         <p:nvSpPr>
-          <p:cNvPr id="5" name="TextBox 4"/>
+          <p:cNvPr id="6" name="TextBox 5"/>
           <p:cNvSpPr txBox="1"/>
           <p:nvPr/>
         </p:nvSpPr>
@@ -4559,8 +4609,12 @@
           </a:bodyPr>
           <a:lstStyle/>
           <a:p>
-            <a:pPr>
-              <a:defRPr b="0" i="0" u="none"/>
+            <a:pPr algn="ctr">
+              <a:defRPr sz="1600" b="1" i="0" u="sng">
+                <a:solidFill>
+                  <a:srgbClr val="000000"/>
+                </a:solidFill>
+              </a:defRPr>
             </a:pPr>
             <a:r>
               <a:t>Revenue (Bar) - Chart Title</a:t>
@@ -4570,25 +4624,25 @@
       </p:sp>
       <p:graphicFrame>
         <p:nvGraphicFramePr>
-          <p:cNvPr id="6" name="Chart 5"/>
+          <p:cNvPr id="7" name="chart_3"/>
           <p:cNvGraphicFramePr>
             <a:graphicFrameLocks noGrp="1"/>
           </p:cNvGraphicFramePr>
           <p:nvPr/>
         </p:nvGraphicFramePr>
         <p:xfrm>
-          <a:off x="4270248" y="1463040"/>
+          <a:off x="8083296" y="1463040"/>
           <a:ext cx="3813048" cy="4800600"/>
         </p:xfrm>
         <a:graphic>
           <a:graphicData uri="http://schemas.openxmlformats.org/drawingml/2006/chart">
-            <c:chart xmlns:c="http://schemas.openxmlformats.org/drawingml/2006/chart" r:id="rId3"/>
+            <c:chart xmlns:c="http://schemas.openxmlformats.org/drawingml/2006/chart" r:id="rId4"/>
           </a:graphicData>
         </a:graphic>
       </p:graphicFrame>
       <p:sp>
         <p:nvSpPr>
-          <p:cNvPr id="7" name="TextBox 6"/>
+          <p:cNvPr id="8" name="TextBox 7"/>
           <p:cNvSpPr txBox="1"/>
           <p:nvPr/>
         </p:nvSpPr>
@@ -4608,8 +4662,12 @@
           </a:bodyPr>
           <a:lstStyle/>
           <a:p>
-            <a:pPr>
-              <a:defRPr b="0" i="0" u="none"/>
+            <a:pPr algn="ctr">
+              <a:defRPr sz="1600" b="1" i="0" u="sng">
+                <a:solidFill>
+                  <a:srgbClr val="000000"/>
+                </a:solidFill>
+              </a:defRPr>
             </a:pPr>
             <a:r>
               <a:t>Revenue Trend (Line) - Chart Title</a:t>
@@ -4617,24 +4675,6 @@
           </a:p>
         </p:txBody>
       </p:sp>
-      <p:graphicFrame>
-        <p:nvGraphicFramePr>
-          <p:cNvPr id="8" name="Chart 7"/>
-          <p:cNvGraphicFramePr>
-            <a:graphicFrameLocks noGrp="1"/>
-          </p:cNvGraphicFramePr>
-          <p:nvPr/>
-        </p:nvGraphicFramePr>
-        <p:xfrm>
-          <a:off x="8083296" y="1463040"/>
-          <a:ext cx="3813048" cy="4800600"/>
-        </p:xfrm>
-        <a:graphic>
-          <a:graphicData uri="http://schemas.openxmlformats.org/drawingml/2006/chart">
-            <c:chart xmlns:c="http://schemas.openxmlformats.org/drawingml/2006/chart" r:id="rId4"/>
-          </a:graphicData>
-        </a:graphic>
-      </p:graphicFrame>
     </p:spTree>
   </p:cSld>
   <p:clrMapOvr>

--- a/notebooks/demo.pptx
+++ b/notebooks/demo.pptx
@@ -385,14 +385,32 @@
         <c:majorTickMark val="out"/>
         <c:minorTickMark val="none"/>
         <c:tickLblPos val="nextTo"/>
+        <c:txPr>
+          <a:bodyPr/>
+          <a:lstStyle/>
+          <a:p>
+            <a:pPr>
+              <a:defRPr sz="1400"/>
+            </a:pPr>
+          </a:p>
+        </c:txPr>
         <c:crossAx val="2118791784"/>
         <c:crosses val="autoZero"/>
       </c:valAx>
     </c:plotArea>
     <c:legend>
-      <c:legendPos val="r"/>
+      <c:legendPos val="b"/>
       <c:layout/>
       <c:overlay val="0"/>
+      <c:txPr>
+        <a:bodyPr/>
+        <a:lstStyle/>
+        <a:p>
+          <a:pPr>
+            <a:defRPr sz="1200"/>
+          </a:pPr>
+        </a:p>
+      </c:txPr>
     </c:legend>
     <c:plotVisOnly val="1"/>
     <c:dispBlanksAs val="gap"/>
@@ -514,14 +532,32 @@
         <c:majorTickMark val="out"/>
         <c:minorTickMark val="none"/>
         <c:tickLblPos val="nextTo"/>
+        <c:txPr>
+          <a:bodyPr/>
+          <a:lstStyle/>
+          <a:p>
+            <a:pPr>
+              <a:defRPr sz="1200"/>
+            </a:pPr>
+          </a:p>
+        </c:txPr>
         <c:crossAx val="2118791784"/>
         <c:crosses val="autoZero"/>
       </c:valAx>
     </c:plotArea>
     <c:legend>
-      <c:legendPos val="r"/>
+      <c:legendPos val="b"/>
       <c:layout/>
       <c:overlay val="0"/>
+      <c:txPr>
+        <a:bodyPr/>
+        <a:lstStyle/>
+        <a:p>
+          <a:pPr>
+            <a:defRPr sz="1000"/>
+          </a:pPr>
+        </a:p>
+      </c:txPr>
     </c:legend>
     <c:plotVisOnly val="1"/>
     <c:dispBlanksAs val="gap"/>
@@ -637,6 +673,15 @@
         <c:majorTickMark val="out"/>
         <c:minorTickMark val="none"/>
         <c:tickLblPos val="nextTo"/>
+        <c:txPr>
+          <a:bodyPr/>
+          <a:lstStyle/>
+          <a:p>
+            <a:pPr>
+              <a:defRPr sz="1200"/>
+            </a:pPr>
+          </a:p>
+        </c:txPr>
         <c:crossAx val="-2068027336"/>
         <c:crosses val="autoZero"/>
       </c:valAx>
@@ -759,14 +804,32 @@
         <c:majorTickMark val="out"/>
         <c:minorTickMark val="none"/>
         <c:tickLblPos val="nextTo"/>
+        <c:txPr>
+          <a:bodyPr/>
+          <a:lstStyle/>
+          <a:p>
+            <a:pPr>
+              <a:defRPr sz="1200"/>
+            </a:pPr>
+          </a:p>
+        </c:txPr>
         <c:crossAx val="2118791784"/>
         <c:crosses val="autoZero"/>
       </c:valAx>
     </c:plotArea>
     <c:legend>
-      <c:legendPos val="r"/>
+      <c:legendPos val="b"/>
       <c:layout/>
       <c:overlay val="0"/>
+      <c:txPr>
+        <a:bodyPr/>
+        <a:lstStyle/>
+        <a:p>
+          <a:pPr>
+            <a:defRPr sz="1000"/>
+          </a:pPr>
+        </a:p>
+      </c:txPr>
     </c:legend>
     <c:plotVisOnly val="1"/>
     <c:dispBlanksAs val="gap"/>
@@ -882,6 +945,15 @@
         <c:majorTickMark val="out"/>
         <c:minorTickMark val="none"/>
         <c:tickLblPos val="nextTo"/>
+        <c:txPr>
+          <a:bodyPr/>
+          <a:lstStyle/>
+          <a:p>
+            <a:pPr>
+              <a:defRPr sz="1200"/>
+            </a:pPr>
+          </a:p>
+        </c:txPr>
         <c:crossAx val="-2068027336"/>
         <c:crosses val="autoZero"/>
       </c:valAx>
@@ -1004,14 +1076,32 @@
         <c:majorTickMark val="out"/>
         <c:minorTickMark val="none"/>
         <c:tickLblPos val="nextTo"/>
+        <c:txPr>
+          <a:bodyPr/>
+          <a:lstStyle/>
+          <a:p>
+            <a:pPr>
+              <a:defRPr sz="1200"/>
+            </a:pPr>
+          </a:p>
+        </c:txPr>
         <c:crossAx val="2118791784"/>
         <c:crosses val="autoZero"/>
       </c:valAx>
     </c:plotArea>
     <c:legend>
-      <c:legendPos val="r"/>
+      <c:legendPos val="b"/>
       <c:layout/>
       <c:overlay val="0"/>
+      <c:txPr>
+        <a:bodyPr/>
+        <a:lstStyle/>
+        <a:p>
+          <a:pPr>
+            <a:defRPr sz="1000"/>
+          </a:pPr>
+        </a:p>
+      </c:txPr>
     </c:legend>
     <c:plotVisOnly val="1"/>
     <c:dispBlanksAs val="gap"/>
@@ -4185,7 +4275,7 @@
           </a:bodyPr>
           <a:lstStyle/>
           <a:p>
-            <a:pPr algn="ctr">
+            <a:pPr algn="l">
               <a:defRPr sz="1800" b="0" i="0" u="none">
                 <a:solidFill>
                   <a:srgbClr val="000000"/>

--- a/notebooks/demo.pptx
+++ b/notebooks/demo.pptx
@@ -686,6 +686,19 @@
         <c:crosses val="autoZero"/>
       </c:valAx>
     </c:plotArea>
+    <c:legend>
+      <c:legendPos val="b"/>
+      <c:overlay val="0"/>
+      <c:txPr>
+        <a:bodyPr/>
+        <a:lstStyle/>
+        <a:p>
+          <a:pPr>
+            <a:defRPr sz="1000"/>
+          </a:pPr>
+        </a:p>
+      </c:txPr>
+    </c:legend>
     <c:dispBlanksAs val="gap"/>
   </c:chart>
   <c:txPr>
@@ -958,6 +971,19 @@
         <c:crosses val="autoZero"/>
       </c:valAx>
     </c:plotArea>
+    <c:legend>
+      <c:legendPos val="b"/>
+      <c:overlay val="0"/>
+      <c:txPr>
+        <a:bodyPr/>
+        <a:lstStyle/>
+        <a:p>
+          <a:pPr>
+            <a:defRPr sz="1000"/>
+          </a:pPr>
+        </a:p>
+      </c:txPr>
+    </c:legend>
     <c:dispBlanksAs val="gap"/>
   </c:chart>
   <c:txPr>

--- a/notebooks/demo.pptx
+++ b/notebooks/demo.pptx
@@ -588,6 +588,7 @@
       <c:barChart>
         <c:barDir val="col"/>
         <c:grouping val="clustered"/>
+        <c:varyColors val="0"/>
         <c:ser>
           <c:idx val="0"/>
           <c:order val="0"/>
@@ -873,6 +874,7 @@
       <c:barChart>
         <c:barDir val="col"/>
         <c:grouping val="clustered"/>
+        <c:varyColors val="0"/>
         <c:ser>
           <c:idx val="0"/>
           <c:order val="0"/>

--- a/notebooks/demo.pptx
+++ b/notebooks/demo.pptx
@@ -369,6 +369,15 @@
         <c:majorTickMark val="out"/>
         <c:minorTickMark val="none"/>
         <c:tickLblPos val="nextTo"/>
+        <c:txPr>
+          <a:bodyPr/>
+          <a:lstStyle/>
+          <a:p>
+            <a:pPr>
+              <a:defRPr sz="1400"/>
+            </a:pPr>
+          </a:p>
+        </c:txPr>
         <c:crossAx val="2140495176"/>
         <c:crosses val="autoZero"/>
         <c:auto val="1"/>
@@ -516,6 +525,15 @@
         <c:majorTickMark val="out"/>
         <c:minorTickMark val="none"/>
         <c:tickLblPos val="nextTo"/>
+        <c:txPr>
+          <a:bodyPr/>
+          <a:lstStyle/>
+          <a:p>
+            <a:pPr>
+              <a:defRPr sz="1200"/>
+            </a:pPr>
+          </a:p>
+        </c:txPr>
         <c:crossAx val="2140495176"/>
         <c:crosses val="autoZero"/>
         <c:auto val="1"/>
@@ -658,6 +676,15 @@
         <c:majorTickMark val="out"/>
         <c:minorTickMark val="none"/>
         <c:tickLblPos val="nextTo"/>
+        <c:txPr>
+          <a:bodyPr/>
+          <a:lstStyle/>
+          <a:p>
+            <a:pPr>
+              <a:defRPr sz="1200"/>
+            </a:pPr>
+          </a:p>
+        </c:txPr>
         <c:crossAx val="-2113994440"/>
         <c:crosses val="autoZero"/>
         <c:auto val="1"/>
@@ -802,6 +829,15 @@
         <c:majorTickMark val="out"/>
         <c:minorTickMark val="none"/>
         <c:tickLblPos val="nextTo"/>
+        <c:txPr>
+          <a:bodyPr/>
+          <a:lstStyle/>
+          <a:p>
+            <a:pPr>
+              <a:defRPr sz="1200"/>
+            </a:pPr>
+          </a:p>
+        </c:txPr>
         <c:crossAx val="2140495176"/>
         <c:crosses val="autoZero"/>
         <c:auto val="1"/>
@@ -944,6 +980,15 @@
         <c:majorTickMark val="out"/>
         <c:minorTickMark val="none"/>
         <c:tickLblPos val="nextTo"/>
+        <c:txPr>
+          <a:bodyPr/>
+          <a:lstStyle/>
+          <a:p>
+            <a:pPr>
+              <a:defRPr sz="1200"/>
+            </a:pPr>
+          </a:p>
+        </c:txPr>
         <c:crossAx val="-2113994440"/>
         <c:crosses val="autoZero"/>
         <c:auto val="1"/>
@@ -1088,6 +1133,15 @@
         <c:majorTickMark val="out"/>
         <c:minorTickMark val="none"/>
         <c:tickLblPos val="nextTo"/>
+        <c:txPr>
+          <a:bodyPr/>
+          <a:lstStyle/>
+          <a:p>
+            <a:pPr>
+              <a:defRPr sz="1200"/>
+            </a:pPr>
+          </a:p>
+        </c:txPr>
         <c:crossAx val="2140495176"/>
         <c:crosses val="autoZero"/>
         <c:auto val="1"/>

--- a/notebooks/demo.pptx
+++ b/notebooks/demo.pptx
@@ -289,7 +289,7 @@
 <c:chartSpace xmlns:c="http://schemas.openxmlformats.org/drawingml/2006/chart" xmlns:a="http://schemas.openxmlformats.org/drawingml/2006/main" xmlns:r="http://schemas.openxmlformats.org/officeDocument/2006/relationships">
   <c:date1904 val="0"/>
   <c:chart>
-    <c:autoTitleDeleted val="0"/>
+    <c:autoTitleDeleted val="1"/>
     <c:plotArea>
       <c:lineChart>
         <c:grouping val="standard"/>
@@ -445,7 +445,7 @@
 <c:chartSpace xmlns:c="http://schemas.openxmlformats.org/drawingml/2006/chart" xmlns:a="http://schemas.openxmlformats.org/drawingml/2006/main" xmlns:r="http://schemas.openxmlformats.org/officeDocument/2006/relationships">
   <c:date1904 val="0"/>
   <c:chart>
-    <c:autoTitleDeleted val="0"/>
+    <c:autoTitleDeleted val="1"/>
     <c:plotArea>
       <c:lineChart>
         <c:grouping val="standard"/>
@@ -601,7 +601,7 @@
 <c:chartSpace xmlns:c="http://schemas.openxmlformats.org/drawingml/2006/chart" xmlns:a="http://schemas.openxmlformats.org/drawingml/2006/main" xmlns:r="http://schemas.openxmlformats.org/officeDocument/2006/relationships">
   <c:date1904 val="0"/>
   <c:chart>
-    <c:autoTitleDeleted val="0"/>
+    <c:autoTitleDeleted val="1"/>
     <c:plotArea>
       <c:barChart>
         <c:barDir val="col"/>
@@ -749,7 +749,7 @@
 <c:chartSpace xmlns:c="http://schemas.openxmlformats.org/drawingml/2006/chart" xmlns:a="http://schemas.openxmlformats.org/drawingml/2006/main" xmlns:r="http://schemas.openxmlformats.org/officeDocument/2006/relationships">
   <c:date1904 val="0"/>
   <c:chart>
-    <c:autoTitleDeleted val="0"/>
+    <c:autoTitleDeleted val="1"/>
     <c:plotArea>
       <c:lineChart>
         <c:grouping val="standard"/>
@@ -905,7 +905,7 @@
 <c:chartSpace xmlns:c="http://schemas.openxmlformats.org/drawingml/2006/chart" xmlns:a="http://schemas.openxmlformats.org/drawingml/2006/main" xmlns:r="http://schemas.openxmlformats.org/officeDocument/2006/relationships">
   <c:date1904 val="0"/>
   <c:chart>
-    <c:autoTitleDeleted val="0"/>
+    <c:autoTitleDeleted val="1"/>
     <c:plotArea>
       <c:barChart>
         <c:barDir val="col"/>
@@ -1053,7 +1053,7 @@
 <c:chartSpace xmlns:c="http://schemas.openxmlformats.org/drawingml/2006/chart" xmlns:a="http://schemas.openxmlformats.org/drawingml/2006/main" xmlns:r="http://schemas.openxmlformats.org/officeDocument/2006/relationships">
   <c:date1904 val="0"/>
   <c:chart>
-    <c:autoTitleDeleted val="0"/>
+    <c:autoTitleDeleted val="1"/>
     <c:plotArea>
       <c:lineChart>
         <c:grouping val="standard"/>

--- a/notebooks/demo.pptx
+++ b/notebooks/demo.pptx
@@ -408,7 +408,7 @@
       </c:valAx>
     </c:plotArea>
     <c:legend>
-      <c:legendPos val="b"/>
+      <c:legendPos val="t"/>
       <c:layout/>
       <c:overlay val="0"/>
       <c:txPr>
@@ -416,7 +416,7 @@
         <a:lstStyle/>
         <a:p>
           <a:pPr>
-            <a:defRPr sz="1200"/>
+            <a:defRPr sz="1200" i="0"/>
           </a:pPr>
         </a:p>
       </c:txPr>
@@ -564,7 +564,7 @@
       </c:valAx>
     </c:plotArea>
     <c:legend>
-      <c:legendPos val="b"/>
+      <c:legendPos val="t"/>
       <c:layout/>
       <c:overlay val="0"/>
       <c:txPr>
@@ -572,7 +572,7 @@
         <a:lstStyle/>
         <a:p>
           <a:pPr>
-            <a:defRPr sz="1000"/>
+            <a:defRPr sz="1000" i="0"/>
           </a:pPr>
         </a:p>
       </c:txPr>
@@ -715,14 +715,14 @@
       </c:valAx>
     </c:plotArea>
     <c:legend>
-      <c:legendPos val="b"/>
+      <c:legendPos val="t"/>
       <c:overlay val="0"/>
       <c:txPr>
         <a:bodyPr/>
         <a:lstStyle/>
         <a:p>
           <a:pPr>
-            <a:defRPr sz="1000"/>
+            <a:defRPr sz="1000" i="0"/>
           </a:pPr>
         </a:p>
       </c:txPr>
@@ -868,7 +868,7 @@
       </c:valAx>
     </c:plotArea>
     <c:legend>
-      <c:legendPos val="b"/>
+      <c:legendPos val="t"/>
       <c:layout/>
       <c:overlay val="0"/>
       <c:txPr>
@@ -876,7 +876,7 @@
         <a:lstStyle/>
         <a:p>
           <a:pPr>
-            <a:defRPr sz="1000"/>
+            <a:defRPr sz="1000" i="0"/>
           </a:pPr>
         </a:p>
       </c:txPr>
@@ -1019,14 +1019,14 @@
       </c:valAx>
     </c:plotArea>
     <c:legend>
-      <c:legendPos val="b"/>
+      <c:legendPos val="t"/>
       <c:overlay val="0"/>
       <c:txPr>
         <a:bodyPr/>
         <a:lstStyle/>
         <a:p>
           <a:pPr>
-            <a:defRPr sz="1000"/>
+            <a:defRPr sz="1000" i="0"/>
           </a:pPr>
         </a:p>
       </c:txPr>
@@ -1172,7 +1172,7 @@
       </c:valAx>
     </c:plotArea>
     <c:legend>
-      <c:legendPos val="b"/>
+      <c:legendPos val="t"/>
       <c:layout/>
       <c:overlay val="0"/>
       <c:txPr>
@@ -1180,7 +1180,7 @@
         <a:lstStyle/>
         <a:p>
           <a:pPr>
-            <a:defRPr sz="1000"/>
+            <a:defRPr sz="1000" i="0"/>
           </a:pPr>
         </a:p>
       </c:txPr>

--- a/notebooks/demo.pptx
+++ b/notebooks/demo.pptx
@@ -366,9 +366,27 @@
         </c:scaling>
         <c:delete val="0"/>
         <c:axPos val="b"/>
+        <c:title>
+          <c:tx>
+            <c:rich>
+              <a:bodyPr/>
+              <a:lstStyle/>
+              <a:p>
+                <a:pPr>
+                  <a:defRPr sz="1400" b="1" i="0" u="none"/>
+                </a:pPr>
+                <a:r>
+                  <a:t>Revenue</a:t>
+                </a:r>
+              </a:p>
+            </c:rich>
+          </c:tx>
+          <c:layout/>
+          <c:overlay val="0"/>
+        </c:title>
         <c:majorTickMark val="out"/>
         <c:minorTickMark val="none"/>
-        <c:tickLblPos val="nextTo"/>
+        <c:tickLblPos val="low"/>
         <c:txPr>
           <a:bodyPr/>
           <a:lstStyle/>
@@ -390,7 +408,24 @@
         <c:scaling/>
         <c:delete val="0"/>
         <c:axPos val="l"/>
-        <c:majorGridlines/>
+        <c:title>
+          <c:tx>
+            <c:rich>
+              <a:bodyPr/>
+              <a:lstStyle/>
+              <a:p>
+                <a:pPr>
+                  <a:defRPr sz="1400" b="1" i="0" u="none"/>
+                </a:pPr>
+                <a:r>
+                  <a:t>Month</a:t>
+                </a:r>
+              </a:p>
+            </c:rich>
+          </c:tx>
+          <c:layout/>
+          <c:overlay val="0"/>
+        </c:title>
         <c:majorTickMark val="out"/>
         <c:minorTickMark val="none"/>
         <c:tickLblPos val="nextTo"/>
@@ -408,7 +443,7 @@
       </c:valAx>
     </c:plotArea>
     <c:legend>
-      <c:legendPos val="t"/>
+      <c:legendPos val="b"/>
       <c:layout/>
       <c:overlay val="0"/>
       <c:txPr>
@@ -416,7 +451,7 @@
         <a:lstStyle/>
         <a:p>
           <a:pPr>
-            <a:defRPr sz="1200" i="0"/>
+            <a:defRPr sz="1400"/>
           </a:pPr>
         </a:p>
       </c:txPr>
@@ -522,15 +557,33 @@
         </c:scaling>
         <c:delete val="0"/>
         <c:axPos val="b"/>
+        <c:title>
+          <c:tx>
+            <c:rich>
+              <a:bodyPr/>
+              <a:lstStyle/>
+              <a:p>
+                <a:pPr>
+                  <a:defRPr sz="1400" b="1" i="0" u="none"/>
+                </a:pPr>
+                <a:r>
+                  <a:t>Revenue</a:t>
+                </a:r>
+              </a:p>
+            </c:rich>
+          </c:tx>
+          <c:layout/>
+          <c:overlay val="0"/>
+        </c:title>
         <c:majorTickMark val="out"/>
         <c:minorTickMark val="none"/>
-        <c:tickLblPos val="nextTo"/>
+        <c:tickLblPos val="low"/>
         <c:txPr>
           <a:bodyPr/>
           <a:lstStyle/>
           <a:p>
             <a:pPr>
-              <a:defRPr sz="1200"/>
+              <a:defRPr sz="1400"/>
             </a:pPr>
           </a:p>
         </c:txPr>
@@ -546,7 +599,24 @@
         <c:scaling/>
         <c:delete val="0"/>
         <c:axPos val="l"/>
-        <c:majorGridlines/>
+        <c:title>
+          <c:tx>
+            <c:rich>
+              <a:bodyPr/>
+              <a:lstStyle/>
+              <a:p>
+                <a:pPr>
+                  <a:defRPr sz="1400" b="1" i="0" u="none"/>
+                </a:pPr>
+                <a:r>
+                  <a:t>Month</a:t>
+                </a:r>
+              </a:p>
+            </c:rich>
+          </c:tx>
+          <c:layout/>
+          <c:overlay val="0"/>
+        </c:title>
         <c:majorTickMark val="out"/>
         <c:minorTickMark val="none"/>
         <c:tickLblPos val="nextTo"/>
@@ -555,7 +625,7 @@
           <a:lstStyle/>
           <a:p>
             <a:pPr>
-              <a:defRPr sz="1200"/>
+              <a:defRPr sz="1400"/>
             </a:pPr>
           </a:p>
         </c:txPr>
@@ -564,7 +634,7 @@
       </c:valAx>
     </c:plotArea>
     <c:legend>
-      <c:legendPos val="t"/>
+      <c:legendPos val="b"/>
       <c:layout/>
       <c:overlay val="0"/>
       <c:txPr>
@@ -572,7 +642,7 @@
         <a:lstStyle/>
         <a:p>
           <a:pPr>
-            <a:defRPr sz="1000" i="0"/>
+            <a:defRPr sz="1400"/>
           </a:pPr>
         </a:p>
       </c:txPr>
@@ -673,15 +743,33 @@
         </c:scaling>
         <c:delete val="0"/>
         <c:axPos val="b"/>
+        <c:title>
+          <c:tx>
+            <c:rich>
+              <a:bodyPr/>
+              <a:lstStyle/>
+              <a:p>
+                <a:pPr>
+                  <a:defRPr sz="1400" b="1" i="0" u="none"/>
+                </a:pPr>
+                <a:r>
+                  <a:t>Revenue</a:t>
+                </a:r>
+              </a:p>
+            </c:rich>
+          </c:tx>
+          <c:layout/>
+          <c:overlay val="0"/>
+        </c:title>
         <c:majorTickMark val="out"/>
         <c:minorTickMark val="none"/>
-        <c:tickLblPos val="nextTo"/>
+        <c:tickLblPos val="low"/>
         <c:txPr>
           <a:bodyPr/>
           <a:lstStyle/>
           <a:p>
             <a:pPr>
-              <a:defRPr sz="1200"/>
+              <a:defRPr sz="1400"/>
             </a:pPr>
           </a:p>
         </c:txPr>
@@ -697,7 +785,24 @@
         <c:scaling/>
         <c:delete val="0"/>
         <c:axPos val="l"/>
-        <c:majorGridlines/>
+        <c:title>
+          <c:tx>
+            <c:rich>
+              <a:bodyPr/>
+              <a:lstStyle/>
+              <a:p>
+                <a:pPr>
+                  <a:defRPr sz="1400" b="1" i="0" u="none"/>
+                </a:pPr>
+                <a:r>
+                  <a:t>Month</a:t>
+                </a:r>
+              </a:p>
+            </c:rich>
+          </c:tx>
+          <c:layout/>
+          <c:overlay val="0"/>
+        </c:title>
         <c:majorTickMark val="out"/>
         <c:minorTickMark val="none"/>
         <c:tickLblPos val="nextTo"/>
@@ -706,7 +811,7 @@
           <a:lstStyle/>
           <a:p>
             <a:pPr>
-              <a:defRPr sz="1200"/>
+              <a:defRPr sz="1400"/>
             </a:pPr>
           </a:p>
         </c:txPr>
@@ -715,14 +820,14 @@
       </c:valAx>
     </c:plotArea>
     <c:legend>
-      <c:legendPos val="t"/>
+      <c:legendPos val="b"/>
       <c:overlay val="0"/>
       <c:txPr>
         <a:bodyPr/>
         <a:lstStyle/>
         <a:p>
           <a:pPr>
-            <a:defRPr sz="1000" i="0"/>
+            <a:defRPr sz="1400"/>
           </a:pPr>
         </a:p>
       </c:txPr>
@@ -826,15 +931,33 @@
         </c:scaling>
         <c:delete val="0"/>
         <c:axPos val="b"/>
+        <c:title>
+          <c:tx>
+            <c:rich>
+              <a:bodyPr/>
+              <a:lstStyle/>
+              <a:p>
+                <a:pPr>
+                  <a:defRPr sz="1400" b="1" i="0" u="none"/>
+                </a:pPr>
+                <a:r>
+                  <a:t>Revenue</a:t>
+                </a:r>
+              </a:p>
+            </c:rich>
+          </c:tx>
+          <c:layout/>
+          <c:overlay val="0"/>
+        </c:title>
         <c:majorTickMark val="out"/>
         <c:minorTickMark val="none"/>
-        <c:tickLblPos val="nextTo"/>
+        <c:tickLblPos val="low"/>
         <c:txPr>
           <a:bodyPr/>
           <a:lstStyle/>
           <a:p>
             <a:pPr>
-              <a:defRPr sz="1200"/>
+              <a:defRPr sz="1400"/>
             </a:pPr>
           </a:p>
         </c:txPr>
@@ -850,7 +973,24 @@
         <c:scaling/>
         <c:delete val="0"/>
         <c:axPos val="l"/>
-        <c:majorGridlines/>
+        <c:title>
+          <c:tx>
+            <c:rich>
+              <a:bodyPr/>
+              <a:lstStyle/>
+              <a:p>
+                <a:pPr>
+                  <a:defRPr sz="1400" b="1" i="0" u="none"/>
+                </a:pPr>
+                <a:r>
+                  <a:t>Month</a:t>
+                </a:r>
+              </a:p>
+            </c:rich>
+          </c:tx>
+          <c:layout/>
+          <c:overlay val="0"/>
+        </c:title>
         <c:majorTickMark val="out"/>
         <c:minorTickMark val="none"/>
         <c:tickLblPos val="nextTo"/>
@@ -859,7 +999,7 @@
           <a:lstStyle/>
           <a:p>
             <a:pPr>
-              <a:defRPr sz="1200"/>
+              <a:defRPr sz="1400"/>
             </a:pPr>
           </a:p>
         </c:txPr>
@@ -868,7 +1008,7 @@
       </c:valAx>
     </c:plotArea>
     <c:legend>
-      <c:legendPos val="t"/>
+      <c:legendPos val="b"/>
       <c:layout/>
       <c:overlay val="0"/>
       <c:txPr>
@@ -876,7 +1016,7 @@
         <a:lstStyle/>
         <a:p>
           <a:pPr>
-            <a:defRPr sz="1000" i="0"/>
+            <a:defRPr sz="1400"/>
           </a:pPr>
         </a:p>
       </c:txPr>
@@ -977,15 +1117,33 @@
         </c:scaling>
         <c:delete val="0"/>
         <c:axPos val="b"/>
+        <c:title>
+          <c:tx>
+            <c:rich>
+              <a:bodyPr/>
+              <a:lstStyle/>
+              <a:p>
+                <a:pPr>
+                  <a:defRPr sz="1400" b="1" i="0" u="none"/>
+                </a:pPr>
+                <a:r>
+                  <a:t>Revenue</a:t>
+                </a:r>
+              </a:p>
+            </c:rich>
+          </c:tx>
+          <c:layout/>
+          <c:overlay val="0"/>
+        </c:title>
         <c:majorTickMark val="out"/>
         <c:minorTickMark val="none"/>
-        <c:tickLblPos val="nextTo"/>
+        <c:tickLblPos val="low"/>
         <c:txPr>
           <a:bodyPr/>
           <a:lstStyle/>
           <a:p>
             <a:pPr>
-              <a:defRPr sz="1200"/>
+              <a:defRPr sz="1400"/>
             </a:pPr>
           </a:p>
         </c:txPr>
@@ -1001,7 +1159,24 @@
         <c:scaling/>
         <c:delete val="0"/>
         <c:axPos val="l"/>
-        <c:majorGridlines/>
+        <c:title>
+          <c:tx>
+            <c:rich>
+              <a:bodyPr/>
+              <a:lstStyle/>
+              <a:p>
+                <a:pPr>
+                  <a:defRPr sz="1400" b="1" i="0" u="none"/>
+                </a:pPr>
+                <a:r>
+                  <a:t>Month</a:t>
+                </a:r>
+              </a:p>
+            </c:rich>
+          </c:tx>
+          <c:layout/>
+          <c:overlay val="0"/>
+        </c:title>
         <c:majorTickMark val="out"/>
         <c:minorTickMark val="none"/>
         <c:tickLblPos val="nextTo"/>
@@ -1010,7 +1185,7 @@
           <a:lstStyle/>
           <a:p>
             <a:pPr>
-              <a:defRPr sz="1200"/>
+              <a:defRPr sz="1400"/>
             </a:pPr>
           </a:p>
         </c:txPr>
@@ -1019,14 +1194,14 @@
       </c:valAx>
     </c:plotArea>
     <c:legend>
-      <c:legendPos val="t"/>
+      <c:legendPos val="b"/>
       <c:overlay val="0"/>
       <c:txPr>
         <a:bodyPr/>
         <a:lstStyle/>
         <a:p>
           <a:pPr>
-            <a:defRPr sz="1000" i="0"/>
+            <a:defRPr sz="1400"/>
           </a:pPr>
         </a:p>
       </c:txPr>
@@ -1130,15 +1305,33 @@
         </c:scaling>
         <c:delete val="0"/>
         <c:axPos val="b"/>
+        <c:title>
+          <c:tx>
+            <c:rich>
+              <a:bodyPr/>
+              <a:lstStyle/>
+              <a:p>
+                <a:pPr>
+                  <a:defRPr sz="1400" b="1" i="0" u="none"/>
+                </a:pPr>
+                <a:r>
+                  <a:t>Revenue</a:t>
+                </a:r>
+              </a:p>
+            </c:rich>
+          </c:tx>
+          <c:layout/>
+          <c:overlay val="0"/>
+        </c:title>
         <c:majorTickMark val="out"/>
         <c:minorTickMark val="none"/>
-        <c:tickLblPos val="nextTo"/>
+        <c:tickLblPos val="low"/>
         <c:txPr>
           <a:bodyPr/>
           <a:lstStyle/>
           <a:p>
             <a:pPr>
-              <a:defRPr sz="1200"/>
+              <a:defRPr sz="1400"/>
             </a:pPr>
           </a:p>
         </c:txPr>
@@ -1154,7 +1347,24 @@
         <c:scaling/>
         <c:delete val="0"/>
         <c:axPos val="l"/>
-        <c:majorGridlines/>
+        <c:title>
+          <c:tx>
+            <c:rich>
+              <a:bodyPr/>
+              <a:lstStyle/>
+              <a:p>
+                <a:pPr>
+                  <a:defRPr sz="1400" b="1" i="0" u="none"/>
+                </a:pPr>
+                <a:r>
+                  <a:t>Month</a:t>
+                </a:r>
+              </a:p>
+            </c:rich>
+          </c:tx>
+          <c:layout/>
+          <c:overlay val="0"/>
+        </c:title>
         <c:majorTickMark val="out"/>
         <c:minorTickMark val="none"/>
         <c:tickLblPos val="nextTo"/>
@@ -1163,7 +1373,7 @@
           <a:lstStyle/>
           <a:p>
             <a:pPr>
-              <a:defRPr sz="1200"/>
+              <a:defRPr sz="1400"/>
             </a:pPr>
           </a:p>
         </c:txPr>
@@ -1172,7 +1382,7 @@
       </c:valAx>
     </c:plotArea>
     <c:legend>
-      <c:legendPos val="t"/>
+      <c:legendPos val="b"/>
       <c:layout/>
       <c:overlay val="0"/>
       <c:txPr>
@@ -1180,7 +1390,7 @@
         <a:lstStyle/>
         <a:p>
           <a:pPr>
-            <a:defRPr sz="1000" i="0"/>
+            <a:defRPr sz="1400"/>
           </a:pPr>
         </a:p>
       </c:txPr>

--- a/notebooks/demo.pptx
+++ b/notebooks/demo.pptx
@@ -4532,14 +4532,13 @@
           </a:bodyPr>
           <a:lstStyle/>
           <a:p>
-            <a:pPr algn="l">
-              <a:defRPr sz="3200" b="1" i="0" u="none">
+            <a:pPr algn="l"/>
+            <a:r>
+              <a:rPr sz="3200" b="1" i="0" u="none">
                 <a:solidFill>
                   <a:srgbClr val="7F7F7F"/>
                 </a:solidFill>
-              </a:defRPr>
-            </a:pPr>
-            <a:r>
+              </a:rPr>
               <a:t>Demo - deck_title</a:t>
             </a:r>
           </a:p>
@@ -4567,14 +4566,13 @@
           </a:bodyPr>
           <a:lstStyle/>
           <a:p>
-            <a:pPr algn="l">
-              <a:defRPr sz="1800" b="0" i="0" u="none">
+            <a:pPr algn="l"/>
+            <a:r>
+              <a:rPr sz="1800" b="0" i="0" u="none">
                 <a:solidFill>
                   <a:srgbClr val="000000"/>
                 </a:solidFill>
-              </a:defRPr>
-            </a:pPr>
-            <a:r>
+              </a:rPr>
               <a:t>deckbridge - deck_author</a:t>
             </a:r>
           </a:p>
@@ -4620,14 +4618,13 @@
           </a:bodyPr>
           <a:lstStyle/>
           <a:p>
-            <a:pPr algn="l">
-              <a:defRPr sz="2000" b="1" i="0" u="none">
+            <a:pPr algn="l"/>
+            <a:r>
+              <a:rPr sz="2000" b="1" i="0" u="none">
                 <a:solidFill>
                   <a:srgbClr val="7F7F7F"/>
                 </a:solidFill>
-              </a:defRPr>
-            </a:pPr>
-            <a:r>
+              </a:rPr>
               <a:t>Revenue Trend - Slide Title</a:t>
             </a:r>
           </a:p>
@@ -4673,15 +4670,23 @@
           </a:bodyPr>
           <a:lstStyle/>
           <a:p>
-            <a:pPr algn="ctr">
-              <a:defRPr sz="1600" b="1" i="0" u="sng">
+            <a:pPr algn="ctr"/>
+            <a:r>
+              <a:rPr sz="1600" b="1" i="0" u="sng">
                 <a:solidFill>
                   <a:srgbClr val="000000"/>
                 </a:solidFill>
-              </a:defRPr>
-            </a:pPr>
+              </a:rPr>
+              <a:t>Revenue Trend (Line) - Chart Title
+</a:t>
+            </a:r>
             <a:r>
-              <a:t>Revenue Trend (Line) - Chart Title</a:t>
+              <a:rPr sz="1400" b="0" i="1" u="none">
+                <a:solidFill>
+                  <a:srgbClr val="000000"/>
+                </a:solidFill>
+              </a:rPr>
+              <a:t>2024 Actuals</a:t>
             </a:r>
           </a:p>
         </p:txBody>
@@ -4726,14 +4731,13 @@
           </a:bodyPr>
           <a:lstStyle/>
           <a:p>
-            <a:pPr algn="l">
-              <a:defRPr sz="2000" b="1" i="0" u="none">
+            <a:pPr algn="l"/>
+            <a:r>
+              <a:rPr sz="2000" b="1" i="0" u="none">
                 <a:solidFill>
                   <a:srgbClr val="7F7F7F"/>
                 </a:solidFill>
-              </a:defRPr>
-            </a:pPr>
-            <a:r>
+              </a:rPr>
               <a:t>Revenue Trend - Slide Title</a:t>
             </a:r>
           </a:p>
@@ -4779,14 +4783,13 @@
           </a:bodyPr>
           <a:lstStyle/>
           <a:p>
-            <a:pPr algn="ctr">
-              <a:defRPr sz="1600" b="1" i="0" u="sng">
+            <a:pPr algn="ctr"/>
+            <a:r>
+              <a:rPr sz="1600" b="1" i="0" u="sng">
                 <a:solidFill>
                   <a:srgbClr val="000000"/>
                 </a:solidFill>
-              </a:defRPr>
-            </a:pPr>
-            <a:r>
+              </a:rPr>
               <a:t>Revenue Trend (Line) - Chart Title</a:t>
             </a:r>
           </a:p>
@@ -4832,14 +4835,13 @@
           </a:bodyPr>
           <a:lstStyle/>
           <a:p>
-            <a:pPr algn="ctr">
-              <a:defRPr sz="1600" b="1" i="0" u="sng">
+            <a:pPr algn="ctr"/>
+            <a:r>
+              <a:rPr sz="1600" b="1" i="0" u="sng">
                 <a:solidFill>
                   <a:srgbClr val="000000"/>
                 </a:solidFill>
-              </a:defRPr>
-            </a:pPr>
-            <a:r>
+              </a:rPr>
               <a:t>Revenue (Bar) - Chart Title</a:t>
             </a:r>
           </a:p>
@@ -4885,14 +4887,13 @@
           </a:bodyPr>
           <a:lstStyle/>
           <a:p>
-            <a:pPr algn="l">
-              <a:defRPr sz="2000" b="1" i="0" u="none">
+            <a:pPr algn="l"/>
+            <a:r>
+              <a:rPr sz="2000" b="1" i="0" u="none">
                 <a:solidFill>
                   <a:srgbClr val="7F7F7F"/>
                 </a:solidFill>
-              </a:defRPr>
-            </a:pPr>
-            <a:r>
+              </a:rPr>
               <a:t>Revenue Trend - Slide Title</a:t>
             </a:r>
           </a:p>
@@ -4938,14 +4939,13 @@
           </a:bodyPr>
           <a:lstStyle/>
           <a:p>
-            <a:pPr algn="ctr">
-              <a:defRPr sz="1600" b="1" i="0" u="sng">
+            <a:pPr algn="ctr"/>
+            <a:r>
+              <a:rPr sz="1600" b="1" i="0" u="sng">
                 <a:solidFill>
                   <a:srgbClr val="000000"/>
                 </a:solidFill>
-              </a:defRPr>
-            </a:pPr>
-            <a:r>
+              </a:rPr>
               <a:t>Revenue Trend (Line) - Chart Title</a:t>
             </a:r>
           </a:p>
@@ -4991,14 +4991,13 @@
           </a:bodyPr>
           <a:lstStyle/>
           <a:p>
-            <a:pPr algn="ctr">
-              <a:defRPr sz="1600" b="1" i="0" u="sng">
+            <a:pPr algn="ctr"/>
+            <a:r>
+              <a:rPr sz="1600" b="1" i="0" u="sng">
                 <a:solidFill>
                   <a:srgbClr val="000000"/>
                 </a:solidFill>
-              </a:defRPr>
-            </a:pPr>
-            <a:r>
+              </a:rPr>
               <a:t>Revenue (Bar) - Chart Title</a:t>
             </a:r>
           </a:p>
@@ -5044,14 +5043,13 @@
           </a:bodyPr>
           <a:lstStyle/>
           <a:p>
-            <a:pPr algn="ctr">
-              <a:defRPr sz="1600" b="1" i="0" u="sng">
+            <a:pPr algn="ctr"/>
+            <a:r>
+              <a:rPr sz="1600" b="1" i="0" u="sng">
                 <a:solidFill>
                   <a:srgbClr val="000000"/>
                 </a:solidFill>
-              </a:defRPr>
-            </a:pPr>
-            <a:r>
+              </a:rPr>
               <a:t>Revenue Trend (Line) - Chart Title</a:t>
             </a:r>
           </a:p>

--- a/notebooks/demo.pptx
+++ b/notebooks/demo.pptx
@@ -4691,6 +4691,40 @@
           </a:p>
         </p:txBody>
       </p:sp>
+      <p:sp>
+        <p:nvSpPr>
+          <p:cNvPr id="5" name="TextBox 4"/>
+          <p:cNvSpPr txBox="1"/>
+          <p:nvPr/>
+        </p:nvSpPr>
+        <p:spPr>
+          <a:xfrm>
+            <a:off x="457200" y="6263640"/>
+            <a:ext cx="11430000" cy="731520"/>
+          </a:xfrm>
+          <a:prstGeom prst="rect">
+            <a:avLst/>
+          </a:prstGeom>
+          <a:noFill/>
+        </p:spPr>
+        <p:txBody>
+          <a:bodyPr wrap="none">
+            <a:spAutoFit/>
+          </a:bodyPr>
+          <a:lstStyle/>
+          <a:p>
+            <a:pPr algn="l"/>
+            <a:r>
+              <a:rPr sz="1000" b="0" i="0" u="none">
+                <a:solidFill>
+                  <a:srgbClr val="000000"/>
+                </a:solidFill>
+              </a:rPr>
+              <a:t>Notes: Adjusted for recent acquisitions.</a:t>
+            </a:r>
+          </a:p>
+        </p:txBody>
+      </p:sp>
     </p:spTree>
   </p:cSld>
   <p:clrMapOvr>

--- a/notebooks/demo.pptx
+++ b/notebooks/demo.pptx
@@ -405,7 +405,10 @@
       </c:catAx>
       <c:valAx>
         <c:axId val="2140495176"/>
-        <c:scaling/>
+        <c:scaling>
+          <c:max val="100.0"/>
+          <c:min val="0.0"/>
+        </c:scaling>
         <c:delete val="0"/>
         <c:axPos val="l"/>
         <c:title>
@@ -426,6 +429,7 @@
           <c:layout/>
           <c:overlay val="0"/>
         </c:title>
+        <c:numFmt formatCode="$0.0" sourceLinked="0"/>
         <c:majorTickMark val="out"/>
         <c:minorTickMark val="none"/>
         <c:tickLblPos val="nextTo"/>
@@ -596,7 +600,10 @@
       </c:catAx>
       <c:valAx>
         <c:axId val="2140495176"/>
-        <c:scaling/>
+        <c:scaling>
+          <c:max val="100.0"/>
+          <c:min val="0.0"/>
+        </c:scaling>
         <c:delete val="0"/>
         <c:axPos val="l"/>
         <c:title>
@@ -617,6 +624,7 @@
           <c:layout/>
           <c:overlay val="0"/>
         </c:title>
+        <c:numFmt formatCode="$0.0" sourceLinked="0"/>
         <c:majorTickMark val="out"/>
         <c:minorTickMark val="none"/>
         <c:tickLblPos val="nextTo"/>
@@ -803,6 +811,7 @@
           <c:layout/>
           <c:overlay val="0"/>
         </c:title>
+        <c:numFmt formatCode="0.0%" sourceLinked="0"/>
         <c:majorTickMark val="out"/>
         <c:minorTickMark val="none"/>
         <c:tickLblPos val="nextTo"/>
@@ -970,7 +979,10 @@
       </c:catAx>
       <c:valAx>
         <c:axId val="2140495176"/>
-        <c:scaling/>
+        <c:scaling>
+          <c:max val="100.0"/>
+          <c:min val="0.0"/>
+        </c:scaling>
         <c:delete val="0"/>
         <c:axPos val="l"/>
         <c:title>
@@ -991,6 +1003,7 @@
           <c:layout/>
           <c:overlay val="0"/>
         </c:title>
+        <c:numFmt formatCode="$0.0" sourceLinked="0"/>
         <c:majorTickMark val="out"/>
         <c:minorTickMark val="none"/>
         <c:tickLblPos val="nextTo"/>
@@ -1177,6 +1190,7 @@
           <c:layout/>
           <c:overlay val="0"/>
         </c:title>
+        <c:numFmt formatCode="0.0%" sourceLinked="0"/>
         <c:majorTickMark val="out"/>
         <c:minorTickMark val="none"/>
         <c:tickLblPos val="nextTo"/>

--- a/notebooks/demo.pptx
+++ b/notebooks/demo.pptx
@@ -354,6 +354,66 @@
           </c:val>
           <c:smooth val="0"/>
         </c:ser>
+        <c:ser>
+          <c:idx val="1"/>
+          <c:order val="1"/>
+          <c:tx>
+            <c:strRef>
+              <c:f>Sheet1!$C$1</c:f>
+              <c:strCache>
+                <c:ptCount val="1"/>
+                <c:pt idx="0">
+                  <c:v>cost</c:v>
+                </c:pt>
+              </c:strCache>
+            </c:strRef>
+          </c:tx>
+          <c:marker>
+            <c:symbol val="none"/>
+          </c:marker>
+          <c:cat>
+            <c:strRef>
+              <c:f>Sheet1!$A$2:$A$5</c:f>
+              <c:strCache>
+                <c:ptCount val="4"/>
+                <c:pt idx="0">
+                  <c:v>Jan</c:v>
+                </c:pt>
+                <c:pt idx="1">
+                  <c:v>Feb</c:v>
+                </c:pt>
+                <c:pt idx="2">
+                  <c:v>Mar</c:v>
+                </c:pt>
+                <c:pt idx="3">
+                  <c:v>Apr</c:v>
+                </c:pt>
+              </c:strCache>
+            </c:strRef>
+          </c:cat>
+          <c:val>
+            <c:numRef>
+              <c:f>Sheet1!$C$2:$C$5</c:f>
+              <c:numCache>
+                <c:formatCode>General</c:formatCode>
+                <c:ptCount val="4"/>
+                <c:pt idx="0">
+                  <c:v>2</c:v>
+                </c:pt>
+                <c:pt idx="1">
+                  <c:v>4</c:v>
+                </c:pt>
+                <c:pt idx="2">
+                  <c:v>3</c:v>
+                </c:pt>
+                <c:pt idx="3">
+                  <c:v>1</c:v>
+                </c:pt>
+              </c:numCache>
+            </c:numRef>
+          </c:val>
+          <c:smooth val="0"/>
+        </c:ser>
         <c:marker val="1"/>
         <c:smooth val="0"/>
         <c:axId val="2118791784"/>
@@ -549,6 +609,66 @@
           </c:val>
           <c:smooth val="0"/>
         </c:ser>
+        <c:ser>
+          <c:idx val="1"/>
+          <c:order val="1"/>
+          <c:tx>
+            <c:strRef>
+              <c:f>Sheet1!$C$1</c:f>
+              <c:strCache>
+                <c:ptCount val="1"/>
+                <c:pt idx="0">
+                  <c:v>cost</c:v>
+                </c:pt>
+              </c:strCache>
+            </c:strRef>
+          </c:tx>
+          <c:marker>
+            <c:symbol val="none"/>
+          </c:marker>
+          <c:cat>
+            <c:strRef>
+              <c:f>Sheet1!$A$2:$A$5</c:f>
+              <c:strCache>
+                <c:ptCount val="4"/>
+                <c:pt idx="0">
+                  <c:v>Jan</c:v>
+                </c:pt>
+                <c:pt idx="1">
+                  <c:v>Feb</c:v>
+                </c:pt>
+                <c:pt idx="2">
+                  <c:v>Mar</c:v>
+                </c:pt>
+                <c:pt idx="3">
+                  <c:v>Apr</c:v>
+                </c:pt>
+              </c:strCache>
+            </c:strRef>
+          </c:cat>
+          <c:val>
+            <c:numRef>
+              <c:f>Sheet1!$C$2:$C$5</c:f>
+              <c:numCache>
+                <c:formatCode>General</c:formatCode>
+                <c:ptCount val="4"/>
+                <c:pt idx="0">
+                  <c:v>2</c:v>
+                </c:pt>
+                <c:pt idx="1">
+                  <c:v>4</c:v>
+                </c:pt>
+                <c:pt idx="2">
+                  <c:v>3</c:v>
+                </c:pt>
+                <c:pt idx="3">
+                  <c:v>1</c:v>
+                </c:pt>
+              </c:numCache>
+            </c:numRef>
+          </c:val>
+          <c:smooth val="0"/>
+        </c:ser>
         <c:marker val="1"/>
         <c:smooth val="0"/>
         <c:axId val="2118791784"/>
@@ -684,7 +804,6 @@
       <c:barChart>
         <c:barDir val="col"/>
         <c:grouping val="clustered"/>
-        <c:varyColors val="0"/>
         <c:ser>
           <c:idx val="0"/>
           <c:order val="0"/>
@@ -736,6 +855,62 @@
                 </c:pt>
                 <c:pt idx="3">
                   <c:v>18</c:v>
+                </c:pt>
+              </c:numCache>
+            </c:numRef>
+          </c:val>
+        </c:ser>
+        <c:ser>
+          <c:idx val="1"/>
+          <c:order val="1"/>
+          <c:tx>
+            <c:strRef>
+              <c:f>Sheet1!$C$1</c:f>
+              <c:strCache>
+                <c:ptCount val="1"/>
+                <c:pt idx="0">
+                  <c:v>cost</c:v>
+                </c:pt>
+              </c:strCache>
+            </c:strRef>
+          </c:tx>
+          <c:cat>
+            <c:strRef>
+              <c:f>Sheet1!$A$2:$A$5</c:f>
+              <c:strCache>
+                <c:ptCount val="4"/>
+                <c:pt idx="0">
+                  <c:v>Jan</c:v>
+                </c:pt>
+                <c:pt idx="1">
+                  <c:v>Feb</c:v>
+                </c:pt>
+                <c:pt idx="2">
+                  <c:v>Mar</c:v>
+                </c:pt>
+                <c:pt idx="3">
+                  <c:v>Apr</c:v>
+                </c:pt>
+              </c:strCache>
+            </c:strRef>
+          </c:cat>
+          <c:val>
+            <c:numRef>
+              <c:f>Sheet1!$C$2:$C$5</c:f>
+              <c:numCache>
+                <c:formatCode>General</c:formatCode>
+                <c:ptCount val="4"/>
+                <c:pt idx="0">
+                  <c:v>2</c:v>
+                </c:pt>
+                <c:pt idx="1">
+                  <c:v>4</c:v>
+                </c:pt>
+                <c:pt idx="2">
+                  <c:v>3</c:v>
+                </c:pt>
+                <c:pt idx="3">
+                  <c:v>1</c:v>
                 </c:pt>
               </c:numCache>
             </c:numRef>
@@ -928,6 +1103,66 @@
           </c:val>
           <c:smooth val="0"/>
         </c:ser>
+        <c:ser>
+          <c:idx val="1"/>
+          <c:order val="1"/>
+          <c:tx>
+            <c:strRef>
+              <c:f>Sheet1!$C$1</c:f>
+              <c:strCache>
+                <c:ptCount val="1"/>
+                <c:pt idx="0">
+                  <c:v>cost</c:v>
+                </c:pt>
+              </c:strCache>
+            </c:strRef>
+          </c:tx>
+          <c:marker>
+            <c:symbol val="none"/>
+          </c:marker>
+          <c:cat>
+            <c:strRef>
+              <c:f>Sheet1!$A$2:$A$5</c:f>
+              <c:strCache>
+                <c:ptCount val="4"/>
+                <c:pt idx="0">
+                  <c:v>Jan</c:v>
+                </c:pt>
+                <c:pt idx="1">
+                  <c:v>Feb</c:v>
+                </c:pt>
+                <c:pt idx="2">
+                  <c:v>Mar</c:v>
+                </c:pt>
+                <c:pt idx="3">
+                  <c:v>Apr</c:v>
+                </c:pt>
+              </c:strCache>
+            </c:strRef>
+          </c:cat>
+          <c:val>
+            <c:numRef>
+              <c:f>Sheet1!$C$2:$C$5</c:f>
+              <c:numCache>
+                <c:formatCode>General</c:formatCode>
+                <c:ptCount val="4"/>
+                <c:pt idx="0">
+                  <c:v>2</c:v>
+                </c:pt>
+                <c:pt idx="1">
+                  <c:v>4</c:v>
+                </c:pt>
+                <c:pt idx="2">
+                  <c:v>3</c:v>
+                </c:pt>
+                <c:pt idx="3">
+                  <c:v>1</c:v>
+                </c:pt>
+              </c:numCache>
+            </c:numRef>
+          </c:val>
+          <c:smooth val="0"/>
+        </c:ser>
         <c:marker val="1"/>
         <c:smooth val="0"/>
         <c:axId val="2118791784"/>
@@ -1063,7 +1298,6 @@
       <c:barChart>
         <c:barDir val="col"/>
         <c:grouping val="clustered"/>
-        <c:varyColors val="0"/>
         <c:ser>
           <c:idx val="0"/>
           <c:order val="0"/>
@@ -1115,6 +1349,62 @@
                 </c:pt>
                 <c:pt idx="3">
                   <c:v>18</c:v>
+                </c:pt>
+              </c:numCache>
+            </c:numRef>
+          </c:val>
+        </c:ser>
+        <c:ser>
+          <c:idx val="1"/>
+          <c:order val="1"/>
+          <c:tx>
+            <c:strRef>
+              <c:f>Sheet1!$C$1</c:f>
+              <c:strCache>
+                <c:ptCount val="1"/>
+                <c:pt idx="0">
+                  <c:v>cost</c:v>
+                </c:pt>
+              </c:strCache>
+            </c:strRef>
+          </c:tx>
+          <c:cat>
+            <c:strRef>
+              <c:f>Sheet1!$A$2:$A$5</c:f>
+              <c:strCache>
+                <c:ptCount val="4"/>
+                <c:pt idx="0">
+                  <c:v>Jan</c:v>
+                </c:pt>
+                <c:pt idx="1">
+                  <c:v>Feb</c:v>
+                </c:pt>
+                <c:pt idx="2">
+                  <c:v>Mar</c:v>
+                </c:pt>
+                <c:pt idx="3">
+                  <c:v>Apr</c:v>
+                </c:pt>
+              </c:strCache>
+            </c:strRef>
+          </c:cat>
+          <c:val>
+            <c:numRef>
+              <c:f>Sheet1!$C$2:$C$5</c:f>
+              <c:numCache>
+                <c:formatCode>General</c:formatCode>
+                <c:ptCount val="4"/>
+                <c:pt idx="0">
+                  <c:v>2</c:v>
+                </c:pt>
+                <c:pt idx="1">
+                  <c:v>4</c:v>
+                </c:pt>
+                <c:pt idx="2">
+                  <c:v>3</c:v>
+                </c:pt>
+                <c:pt idx="3">
+                  <c:v>1</c:v>
                 </c:pt>
               </c:numCache>
             </c:numRef>

--- a/notebooks/demo.pptx
+++ b/notebooks/demo.pptx
@@ -12,6 +12,7 @@
     <p:sldId id="257" r:id="rId19"/>
     <p:sldId id="258" r:id="rId20"/>
     <p:sldId id="259" r:id="rId21"/>
+    <p:sldId id="260" r:id="rId22"/>
   </p:sldIdLst>
   <p:sldSz cx="12188825" cy="6858000"/>
   <p:notesSz cx="6858000" cy="9144000"/>
@@ -1669,6 +1670,261 @@
           <c:layout/>
           <c:overlay val="0"/>
         </c:title>
+        <c:majorTickMark val="out"/>
+        <c:minorTickMark val="none"/>
+        <c:tickLblPos val="nextTo"/>
+        <c:txPr>
+          <a:bodyPr/>
+          <a:lstStyle/>
+          <a:p>
+            <a:pPr>
+              <a:defRPr sz="1400"/>
+            </a:pPr>
+          </a:p>
+        </c:txPr>
+        <c:crossAx val="2118791784"/>
+        <c:crosses val="autoZero"/>
+      </c:valAx>
+    </c:plotArea>
+    <c:legend>
+      <c:legendPos val="b"/>
+      <c:layout/>
+      <c:overlay val="0"/>
+      <c:txPr>
+        <a:bodyPr/>
+        <a:lstStyle/>
+        <a:p>
+          <a:pPr>
+            <a:defRPr sz="1400"/>
+          </a:pPr>
+        </a:p>
+      </c:txPr>
+    </c:legend>
+    <c:plotVisOnly val="1"/>
+    <c:dispBlanksAs val="gap"/>
+    <c:showDLblsOverMax val="0"/>
+  </c:chart>
+  <c:txPr>
+    <a:bodyPr/>
+    <a:lstStyle/>
+    <a:p>
+      <a:pPr>
+        <a:defRPr sz="1800"/>
+      </a:pPr>
+      <a:endParaRPr lang="en-US"/>
+    </a:p>
+  </c:txPr>
+  <c:externalData r:id="rId1">
+    <c:autoUpdate val="0"/>
+  </c:externalData>
+</c:chartSpace>
+</file>
+
+<file path=ppt/charts/chart7.xml><?xml version="1.0" encoding="utf-8"?>
+<c:chartSpace xmlns:c="http://schemas.openxmlformats.org/drawingml/2006/chart" xmlns:a="http://schemas.openxmlformats.org/drawingml/2006/main" xmlns:r="http://schemas.openxmlformats.org/officeDocument/2006/relationships">
+  <c:date1904 val="0"/>
+  <c:chart>
+    <c:autoTitleDeleted val="1"/>
+    <c:plotArea>
+      <c:lineChart>
+        <c:grouping val="standard"/>
+        <c:varyColors val="0"/>
+        <c:ser>
+          <c:idx val="0"/>
+          <c:order val="0"/>
+          <c:tx>
+            <c:strRef>
+              <c:f>Sheet1!$B$1</c:f>
+              <c:strCache>
+                <c:ptCount val="1"/>
+                <c:pt idx="0">
+                  <c:v>Revenue!</c:v>
+                </c:pt>
+              </c:strCache>
+            </c:strRef>
+          </c:tx>
+          <c:marker>
+            <c:symbol val="none"/>
+          </c:marker>
+          <c:cat>
+            <c:strRef>
+              <c:f>Sheet1!$A$2:$A$5</c:f>
+              <c:strCache>
+                <c:ptCount val="4"/>
+                <c:pt idx="0">
+                  <c:v>Jan</c:v>
+                </c:pt>
+                <c:pt idx="1">
+                  <c:v>Feb</c:v>
+                </c:pt>
+                <c:pt idx="2">
+                  <c:v>Mar</c:v>
+                </c:pt>
+                <c:pt idx="3">
+                  <c:v>Apr</c:v>
+                </c:pt>
+              </c:strCache>
+            </c:strRef>
+          </c:cat>
+          <c:val>
+            <c:numRef>
+              <c:f>Sheet1!$B$2:$B$5</c:f>
+              <c:numCache>
+                <c:formatCode>General</c:formatCode>
+                <c:ptCount val="4"/>
+                <c:pt idx="0">
+                  <c:v>10</c:v>
+                </c:pt>
+                <c:pt idx="1">
+                  <c:v>14</c:v>
+                </c:pt>
+                <c:pt idx="2">
+                  <c:v>9</c:v>
+                </c:pt>
+                <c:pt idx="3">
+                  <c:v>18</c:v>
+                </c:pt>
+              </c:numCache>
+            </c:numRef>
+          </c:val>
+          <c:smooth val="0"/>
+        </c:ser>
+        <c:ser>
+          <c:idx val="1"/>
+          <c:order val="1"/>
+          <c:tx>
+            <c:strRef>
+              <c:f>Sheet1!$C$1</c:f>
+              <c:strCache>
+                <c:ptCount val="1"/>
+                <c:pt idx="0">
+                  <c:v>Cost!</c:v>
+                </c:pt>
+              </c:strCache>
+            </c:strRef>
+          </c:tx>
+          <c:marker>
+            <c:symbol val="none"/>
+          </c:marker>
+          <c:cat>
+            <c:strRef>
+              <c:f>Sheet1!$A$2:$A$5</c:f>
+              <c:strCache>
+                <c:ptCount val="4"/>
+                <c:pt idx="0">
+                  <c:v>Jan</c:v>
+                </c:pt>
+                <c:pt idx="1">
+                  <c:v>Feb</c:v>
+                </c:pt>
+                <c:pt idx="2">
+                  <c:v>Mar</c:v>
+                </c:pt>
+                <c:pt idx="3">
+                  <c:v>Apr</c:v>
+                </c:pt>
+              </c:strCache>
+            </c:strRef>
+          </c:cat>
+          <c:val>
+            <c:numRef>
+              <c:f>Sheet1!$C$2:$C$5</c:f>
+              <c:numCache>
+                <c:formatCode>General</c:formatCode>
+                <c:ptCount val="4"/>
+                <c:pt idx="0">
+                  <c:v>2</c:v>
+                </c:pt>
+                <c:pt idx="1">
+                  <c:v>4</c:v>
+                </c:pt>
+                <c:pt idx="2">
+                  <c:v>3</c:v>
+                </c:pt>
+                <c:pt idx="3">
+                  <c:v>1</c:v>
+                </c:pt>
+              </c:numCache>
+            </c:numRef>
+          </c:val>
+          <c:smooth val="0"/>
+        </c:ser>
+        <c:marker val="1"/>
+        <c:smooth val="0"/>
+        <c:axId val="2118791784"/>
+        <c:axId val="2140495176"/>
+      </c:lineChart>
+      <c:catAx>
+        <c:axId val="2118791784"/>
+        <c:scaling>
+          <c:orientation val="minMax"/>
+        </c:scaling>
+        <c:delete val="0"/>
+        <c:axPos val="b"/>
+        <c:title>
+          <c:tx>
+            <c:rich>
+              <a:bodyPr/>
+              <a:lstStyle/>
+              <a:p>
+                <a:pPr>
+                  <a:defRPr sz="1400" b="1" i="0" u="none"/>
+                </a:pPr>
+                <a:r>
+                  <a:t>Revenue</a:t>
+                </a:r>
+              </a:p>
+            </c:rich>
+          </c:tx>
+          <c:layout/>
+          <c:overlay val="0"/>
+        </c:title>
+        <c:majorTickMark val="out"/>
+        <c:minorTickMark val="none"/>
+        <c:tickLblPos val="low"/>
+        <c:txPr>
+          <a:bodyPr/>
+          <a:lstStyle/>
+          <a:p>
+            <a:pPr>
+              <a:defRPr sz="1400"/>
+            </a:pPr>
+          </a:p>
+        </c:txPr>
+        <c:crossAx val="2140495176"/>
+        <c:crosses val="autoZero"/>
+        <c:auto val="1"/>
+        <c:lblAlgn val="ctr"/>
+        <c:lblOffset val="100"/>
+        <c:noMultiLvlLbl val="0"/>
+      </c:catAx>
+      <c:valAx>
+        <c:axId val="2140495176"/>
+        <c:scaling>
+          <c:max val="100.0"/>
+          <c:min val="0.0"/>
+        </c:scaling>
+        <c:delete val="0"/>
+        <c:axPos val="l"/>
+        <c:title>
+          <c:tx>
+            <c:rich>
+              <a:bodyPr/>
+              <a:lstStyle/>
+              <a:p>
+                <a:pPr>
+                  <a:defRPr sz="1400" b="1" i="0" u="none"/>
+                </a:pPr>
+                <a:r>
+                  <a:t>Month</a:t>
+                </a:r>
+              </a:p>
+            </c:rich>
+          </c:tx>
+          <c:layout/>
+          <c:overlay val="0"/>
+        </c:title>
+        <c:numFmt formatCode="$0.0" sourceLinked="0"/>
         <c:majorTickMark val="out"/>
         <c:minorTickMark val="none"/>
         <c:tickLblPos val="nextTo"/>
@@ -5401,6 +5657,153 @@
 </p:sld>
 </file>
 
+<file path=ppt/slides/slide5.xml><?xml version="1.0" encoding="utf-8"?>
+<p:sld xmlns:a="http://schemas.openxmlformats.org/drawingml/2006/main" xmlns:p="http://schemas.openxmlformats.org/presentationml/2006/main" xmlns:r="http://schemas.openxmlformats.org/officeDocument/2006/relationships">
+  <p:cSld>
+    <p:spTree>
+      <p:nvGrpSpPr>
+        <p:cNvPr id="1" name=""/>
+        <p:cNvGrpSpPr/>
+        <p:nvPr/>
+      </p:nvGrpSpPr>
+      <p:grpSpPr/>
+      <p:sp>
+        <p:nvSpPr>
+          <p:cNvPr id="2" name="TextBox 1"/>
+          <p:cNvSpPr txBox="1"/>
+          <p:nvPr/>
+        </p:nvSpPr>
+        <p:spPr>
+          <a:xfrm>
+            <a:off x="457200" y="91440"/>
+            <a:ext cx="11430000" cy="731520"/>
+          </a:xfrm>
+          <a:prstGeom prst="rect">
+            <a:avLst/>
+          </a:prstGeom>
+          <a:noFill/>
+        </p:spPr>
+        <p:txBody>
+          <a:bodyPr wrap="none">
+            <a:spAutoFit/>
+          </a:bodyPr>
+          <a:lstStyle/>
+          <a:p>
+            <a:pPr algn="l"/>
+            <a:r>
+              <a:rPr sz="2000" b="1" i="0" u="none">
+                <a:solidFill>
+                  <a:srgbClr val="7F7F7F"/>
+                </a:solidFill>
+              </a:rPr>
+              <a:t>Revenue Trend - Slide Title</a:t>
+            </a:r>
+          </a:p>
+        </p:txBody>
+      </p:sp>
+      <p:graphicFrame>
+        <p:nvGraphicFramePr>
+          <p:cNvPr id="3" name="chart_1"/>
+          <p:cNvGraphicFramePr>
+            <a:graphicFrameLocks noGrp="1"/>
+          </p:cNvGraphicFramePr>
+          <p:nvPr/>
+        </p:nvGraphicFramePr>
+        <p:xfrm>
+          <a:off x="457200" y="1463040"/>
+          <a:ext cx="11430000" cy="4800600"/>
+        </p:xfrm>
+        <a:graphic>
+          <a:graphicData uri="http://schemas.openxmlformats.org/drawingml/2006/chart">
+            <c:chart xmlns:c="http://schemas.openxmlformats.org/drawingml/2006/chart" r:id="rId2"/>
+          </a:graphicData>
+        </a:graphic>
+      </p:graphicFrame>
+      <p:sp>
+        <p:nvSpPr>
+          <p:cNvPr id="4" name="TextBox 3"/>
+          <p:cNvSpPr txBox="1"/>
+          <p:nvPr/>
+        </p:nvSpPr>
+        <p:spPr>
+          <a:xfrm>
+            <a:off x="457200" y="1005840"/>
+            <a:ext cx="11430000" cy="457200"/>
+          </a:xfrm>
+          <a:prstGeom prst="rect">
+            <a:avLst/>
+          </a:prstGeom>
+          <a:noFill/>
+        </p:spPr>
+        <p:txBody>
+          <a:bodyPr wrap="none">
+            <a:spAutoFit/>
+          </a:bodyPr>
+          <a:lstStyle/>
+          <a:p>
+            <a:pPr algn="ctr"/>
+            <a:r>
+              <a:rPr sz="1600" b="1" i="0" u="sng">
+                <a:solidFill>
+                  <a:srgbClr val="000000"/>
+                </a:solidFill>
+              </a:rPr>
+              <a:t>Revenue Trend (Line) - Chart Title
+</a:t>
+            </a:r>
+            <a:r>
+              <a:rPr sz="1400" b="0" i="1" u="none">
+                <a:solidFill>
+                  <a:srgbClr val="000000"/>
+                </a:solidFill>
+              </a:rPr>
+              <a:t>2024 Actuals</a:t>
+            </a:r>
+          </a:p>
+        </p:txBody>
+      </p:sp>
+      <p:sp>
+        <p:nvSpPr>
+          <p:cNvPr id="5" name="TextBox 4"/>
+          <p:cNvSpPr txBox="1"/>
+          <p:nvPr/>
+        </p:nvSpPr>
+        <p:spPr>
+          <a:xfrm>
+            <a:off x="457200" y="6263640"/>
+            <a:ext cx="11430000" cy="731520"/>
+          </a:xfrm>
+          <a:prstGeom prst="rect">
+            <a:avLst/>
+          </a:prstGeom>
+          <a:noFill/>
+        </p:spPr>
+        <p:txBody>
+          <a:bodyPr wrap="none">
+            <a:spAutoFit/>
+          </a:bodyPr>
+          <a:lstStyle/>
+          <a:p>
+            <a:pPr algn="l"/>
+            <a:r>
+              <a:rPr sz="1000" b="0" i="0" u="none">
+                <a:solidFill>
+                  <a:srgbClr val="000000"/>
+                </a:solidFill>
+              </a:rPr>
+              <a:t>Notes: Adjusted for recent acquisitions.</a:t>
+            </a:r>
+          </a:p>
+        </p:txBody>
+      </p:sp>
+    </p:spTree>
+  </p:cSld>
+  <p:clrMapOvr>
+    <a:masterClrMapping/>
+  </p:clrMapOvr>
+</p:sld>
+</file>
+
 <file path=ppt/theme/theme1.xml><?xml version="1.0" encoding="utf-8"?>
 <a:theme xmlns:a="http://schemas.openxmlformats.org/drawingml/2006/main" name="Simple Light">
   <a:themeElements>

--- a/notebooks/demo.pptx
+++ b/notebooks/demo.pptx
@@ -1721,6 +1721,516 @@
 </file>
 
 <file path=ppt/charts/chart7.xml><?xml version="1.0" encoding="utf-8"?>
+<c:chartSpace xmlns:c="http://schemas.openxmlformats.org/drawingml/2006/chart" xmlns:a="http://schemas.openxmlformats.org/drawingml/2006/main" xmlns:r="http://schemas.openxmlformats.org/officeDocument/2006/relationships">
+  <c:date1904 val="0"/>
+  <c:chart>
+    <c:autoTitleDeleted val="1"/>
+    <c:plotArea>
+      <c:lineChart>
+        <c:grouping val="standard"/>
+        <c:varyColors val="0"/>
+        <c:ser>
+          <c:idx val="0"/>
+          <c:order val="0"/>
+          <c:tx>
+            <c:strRef>
+              <c:f>Sheet1!$B$1</c:f>
+              <c:strCache>
+                <c:ptCount val="1"/>
+                <c:pt idx="0">
+                  <c:v>Revenue!</c:v>
+                </c:pt>
+              </c:strCache>
+            </c:strRef>
+          </c:tx>
+          <c:marker>
+            <c:symbol val="none"/>
+          </c:marker>
+          <c:cat>
+            <c:strRef>
+              <c:f>Sheet1!$A$2:$A$5</c:f>
+              <c:strCache>
+                <c:ptCount val="4"/>
+                <c:pt idx="0">
+                  <c:v>Jan</c:v>
+                </c:pt>
+                <c:pt idx="1">
+                  <c:v>Feb</c:v>
+                </c:pt>
+                <c:pt idx="2">
+                  <c:v>Mar</c:v>
+                </c:pt>
+                <c:pt idx="3">
+                  <c:v>Apr</c:v>
+                </c:pt>
+              </c:strCache>
+            </c:strRef>
+          </c:cat>
+          <c:val>
+            <c:numRef>
+              <c:f>Sheet1!$B$2:$B$5</c:f>
+              <c:numCache>
+                <c:formatCode>General</c:formatCode>
+                <c:ptCount val="4"/>
+                <c:pt idx="0">
+                  <c:v>10</c:v>
+                </c:pt>
+                <c:pt idx="1">
+                  <c:v>14</c:v>
+                </c:pt>
+                <c:pt idx="2">
+                  <c:v>9</c:v>
+                </c:pt>
+                <c:pt idx="3">
+                  <c:v>18</c:v>
+                </c:pt>
+              </c:numCache>
+            </c:numRef>
+          </c:val>
+          <c:smooth val="0"/>
+        </c:ser>
+        <c:ser>
+          <c:idx val="1"/>
+          <c:order val="1"/>
+          <c:tx>
+            <c:strRef>
+              <c:f>Sheet1!$C$1</c:f>
+              <c:strCache>
+                <c:ptCount val="1"/>
+                <c:pt idx="0">
+                  <c:v>Cost!</c:v>
+                </c:pt>
+              </c:strCache>
+            </c:strRef>
+          </c:tx>
+          <c:marker>
+            <c:symbol val="none"/>
+          </c:marker>
+          <c:cat>
+            <c:strRef>
+              <c:f>Sheet1!$A$2:$A$5</c:f>
+              <c:strCache>
+                <c:ptCount val="4"/>
+                <c:pt idx="0">
+                  <c:v>Jan</c:v>
+                </c:pt>
+                <c:pt idx="1">
+                  <c:v>Feb</c:v>
+                </c:pt>
+                <c:pt idx="2">
+                  <c:v>Mar</c:v>
+                </c:pt>
+                <c:pt idx="3">
+                  <c:v>Apr</c:v>
+                </c:pt>
+              </c:strCache>
+            </c:strRef>
+          </c:cat>
+          <c:val>
+            <c:numRef>
+              <c:f>Sheet1!$C$2:$C$5</c:f>
+              <c:numCache>
+                <c:formatCode>General</c:formatCode>
+                <c:ptCount val="4"/>
+                <c:pt idx="0">
+                  <c:v>2</c:v>
+                </c:pt>
+                <c:pt idx="1">
+                  <c:v>4</c:v>
+                </c:pt>
+                <c:pt idx="2">
+                  <c:v>3</c:v>
+                </c:pt>
+                <c:pt idx="3">
+                  <c:v>1</c:v>
+                </c:pt>
+              </c:numCache>
+            </c:numRef>
+          </c:val>
+          <c:smooth val="0"/>
+        </c:ser>
+        <c:marker val="1"/>
+        <c:smooth val="0"/>
+        <c:axId val="2118791784"/>
+        <c:axId val="2140495176"/>
+      </c:lineChart>
+      <c:catAx>
+        <c:axId val="2118791784"/>
+        <c:scaling>
+          <c:orientation val="minMax"/>
+        </c:scaling>
+        <c:delete val="0"/>
+        <c:axPos val="b"/>
+        <c:title>
+          <c:tx>
+            <c:rich>
+              <a:bodyPr/>
+              <a:lstStyle/>
+              <a:p>
+                <a:pPr>
+                  <a:defRPr sz="1400" b="1" i="0" u="none"/>
+                </a:pPr>
+                <a:r>
+                  <a:t>Revenue</a:t>
+                </a:r>
+              </a:p>
+            </c:rich>
+          </c:tx>
+          <c:layout/>
+          <c:overlay val="0"/>
+        </c:title>
+        <c:majorTickMark val="out"/>
+        <c:minorTickMark val="none"/>
+        <c:tickLblPos val="low"/>
+        <c:txPr>
+          <a:bodyPr/>
+          <a:lstStyle/>
+          <a:p>
+            <a:pPr>
+              <a:defRPr sz="1400"/>
+            </a:pPr>
+          </a:p>
+        </c:txPr>
+        <c:crossAx val="2140495176"/>
+        <c:crosses val="autoZero"/>
+        <c:auto val="1"/>
+        <c:lblAlgn val="ctr"/>
+        <c:lblOffset val="100"/>
+        <c:noMultiLvlLbl val="0"/>
+      </c:catAx>
+      <c:valAx>
+        <c:axId val="2140495176"/>
+        <c:scaling>
+          <c:max val="100.0"/>
+          <c:min val="0.0"/>
+        </c:scaling>
+        <c:delete val="0"/>
+        <c:axPos val="l"/>
+        <c:title>
+          <c:tx>
+            <c:rich>
+              <a:bodyPr/>
+              <a:lstStyle/>
+              <a:p>
+                <a:pPr>
+                  <a:defRPr sz="1400" b="1" i="0" u="none"/>
+                </a:pPr>
+                <a:r>
+                  <a:t>Month</a:t>
+                </a:r>
+              </a:p>
+            </c:rich>
+          </c:tx>
+          <c:layout/>
+          <c:overlay val="0"/>
+        </c:title>
+        <c:numFmt formatCode="$0.0" sourceLinked="0"/>
+        <c:majorTickMark val="out"/>
+        <c:minorTickMark val="none"/>
+        <c:tickLblPos val="nextTo"/>
+        <c:txPr>
+          <a:bodyPr/>
+          <a:lstStyle/>
+          <a:p>
+            <a:pPr>
+              <a:defRPr sz="1400"/>
+            </a:pPr>
+          </a:p>
+        </c:txPr>
+        <c:crossAx val="2118791784"/>
+        <c:crosses val="autoZero"/>
+      </c:valAx>
+    </c:plotArea>
+    <c:legend>
+      <c:legendPos val="b"/>
+      <c:layout/>
+      <c:overlay val="0"/>
+      <c:txPr>
+        <a:bodyPr/>
+        <a:lstStyle/>
+        <a:p>
+          <a:pPr>
+            <a:defRPr sz="1400"/>
+          </a:pPr>
+        </a:p>
+      </c:txPr>
+    </c:legend>
+    <c:plotVisOnly val="1"/>
+    <c:dispBlanksAs val="gap"/>
+    <c:showDLblsOverMax val="0"/>
+  </c:chart>
+  <c:txPr>
+    <a:bodyPr/>
+    <a:lstStyle/>
+    <a:p>
+      <a:pPr>
+        <a:defRPr sz="1800"/>
+      </a:pPr>
+      <a:endParaRPr lang="en-US"/>
+    </a:p>
+  </c:txPr>
+  <c:externalData r:id="rId1">
+    <c:autoUpdate val="0"/>
+  </c:externalData>
+</c:chartSpace>
+</file>
+
+<file path=ppt/charts/chart8.xml><?xml version="1.0" encoding="utf-8"?>
+<c:chartSpace xmlns:c="http://schemas.openxmlformats.org/drawingml/2006/chart" xmlns:a="http://schemas.openxmlformats.org/drawingml/2006/main" xmlns:r="http://schemas.openxmlformats.org/officeDocument/2006/relationships">
+  <c:date1904 val="0"/>
+  <c:chart>
+    <c:autoTitleDeleted val="1"/>
+    <c:plotArea>
+      <c:lineChart>
+        <c:grouping val="standard"/>
+        <c:varyColors val="0"/>
+        <c:ser>
+          <c:idx val="0"/>
+          <c:order val="0"/>
+          <c:tx>
+            <c:strRef>
+              <c:f>Sheet1!$B$1</c:f>
+              <c:strCache>
+                <c:ptCount val="1"/>
+                <c:pt idx="0">
+                  <c:v>revenue</c:v>
+                </c:pt>
+              </c:strCache>
+            </c:strRef>
+          </c:tx>
+          <c:marker>
+            <c:symbol val="none"/>
+          </c:marker>
+          <c:cat>
+            <c:strRef>
+              <c:f>Sheet1!$A$2:$A$5</c:f>
+              <c:strCache>
+                <c:ptCount val="4"/>
+                <c:pt idx="0">
+                  <c:v>Jan</c:v>
+                </c:pt>
+                <c:pt idx="1">
+                  <c:v>Feb</c:v>
+                </c:pt>
+                <c:pt idx="2">
+                  <c:v>Mar</c:v>
+                </c:pt>
+                <c:pt idx="3">
+                  <c:v>Apr</c:v>
+                </c:pt>
+              </c:strCache>
+            </c:strRef>
+          </c:cat>
+          <c:val>
+            <c:numRef>
+              <c:f>Sheet1!$B$2:$B$5</c:f>
+              <c:numCache>
+                <c:formatCode>General</c:formatCode>
+                <c:ptCount val="4"/>
+                <c:pt idx="0">
+                  <c:v>10</c:v>
+                </c:pt>
+                <c:pt idx="1">
+                  <c:v>14</c:v>
+                </c:pt>
+                <c:pt idx="2">
+                  <c:v>9</c:v>
+                </c:pt>
+                <c:pt idx="3">
+                  <c:v>18</c:v>
+                </c:pt>
+              </c:numCache>
+            </c:numRef>
+          </c:val>
+          <c:smooth val="0"/>
+        </c:ser>
+        <c:ser>
+          <c:idx val="1"/>
+          <c:order val="1"/>
+          <c:tx>
+            <c:strRef>
+              <c:f>Sheet1!$C$1</c:f>
+              <c:strCache>
+                <c:ptCount val="1"/>
+                <c:pt idx="0">
+                  <c:v>cost</c:v>
+                </c:pt>
+              </c:strCache>
+            </c:strRef>
+          </c:tx>
+          <c:marker>
+            <c:symbol val="none"/>
+          </c:marker>
+          <c:cat>
+            <c:strRef>
+              <c:f>Sheet1!$A$2:$A$5</c:f>
+              <c:strCache>
+                <c:ptCount val="4"/>
+                <c:pt idx="0">
+                  <c:v>Jan</c:v>
+                </c:pt>
+                <c:pt idx="1">
+                  <c:v>Feb</c:v>
+                </c:pt>
+                <c:pt idx="2">
+                  <c:v>Mar</c:v>
+                </c:pt>
+                <c:pt idx="3">
+                  <c:v>Apr</c:v>
+                </c:pt>
+              </c:strCache>
+            </c:strRef>
+          </c:cat>
+          <c:val>
+            <c:numRef>
+              <c:f>Sheet1!$C$2:$C$5</c:f>
+              <c:numCache>
+                <c:formatCode>General</c:formatCode>
+                <c:ptCount val="4"/>
+                <c:pt idx="0">
+                  <c:v>2</c:v>
+                </c:pt>
+                <c:pt idx="1">
+                  <c:v>4</c:v>
+                </c:pt>
+                <c:pt idx="2">
+                  <c:v>3</c:v>
+                </c:pt>
+                <c:pt idx="3">
+                  <c:v>1</c:v>
+                </c:pt>
+              </c:numCache>
+            </c:numRef>
+          </c:val>
+          <c:smooth val="0"/>
+        </c:ser>
+        <c:marker val="1"/>
+        <c:smooth val="0"/>
+        <c:axId val="2118791784"/>
+        <c:axId val="2140495176"/>
+      </c:lineChart>
+      <c:catAx>
+        <c:axId val="2118791784"/>
+        <c:scaling>
+          <c:orientation val="minMax"/>
+        </c:scaling>
+        <c:delete val="0"/>
+        <c:axPos val="b"/>
+        <c:title>
+          <c:tx>
+            <c:rich>
+              <a:bodyPr/>
+              <a:lstStyle/>
+              <a:p>
+                <a:pPr>
+                  <a:defRPr sz="1400" b="1" i="0" u="none"/>
+                </a:pPr>
+                <a:r>
+                  <a:t>Revenue</a:t>
+                </a:r>
+              </a:p>
+            </c:rich>
+          </c:tx>
+          <c:layout/>
+          <c:overlay val="0"/>
+        </c:title>
+        <c:majorTickMark val="out"/>
+        <c:minorTickMark val="none"/>
+        <c:tickLblPos val="low"/>
+        <c:txPr>
+          <a:bodyPr/>
+          <a:lstStyle/>
+          <a:p>
+            <a:pPr>
+              <a:defRPr sz="1400"/>
+            </a:pPr>
+          </a:p>
+        </c:txPr>
+        <c:crossAx val="2140495176"/>
+        <c:crosses val="autoZero"/>
+        <c:auto val="1"/>
+        <c:lblAlgn val="ctr"/>
+        <c:lblOffset val="100"/>
+        <c:noMultiLvlLbl val="0"/>
+      </c:catAx>
+      <c:valAx>
+        <c:axId val="2140495176"/>
+        <c:scaling>
+          <c:max val="100.0"/>
+          <c:min val="0.0"/>
+        </c:scaling>
+        <c:delete val="0"/>
+        <c:axPos val="l"/>
+        <c:title>
+          <c:tx>
+            <c:rich>
+              <a:bodyPr/>
+              <a:lstStyle/>
+              <a:p>
+                <a:pPr>
+                  <a:defRPr sz="1400" b="1" i="0" u="none"/>
+                </a:pPr>
+                <a:r>
+                  <a:t>Month</a:t>
+                </a:r>
+              </a:p>
+            </c:rich>
+          </c:tx>
+          <c:layout/>
+          <c:overlay val="0"/>
+        </c:title>
+        <c:numFmt formatCode="$0.0" sourceLinked="0"/>
+        <c:majorTickMark val="out"/>
+        <c:minorTickMark val="none"/>
+        <c:tickLblPos val="nextTo"/>
+        <c:txPr>
+          <a:bodyPr/>
+          <a:lstStyle/>
+          <a:p>
+            <a:pPr>
+              <a:defRPr sz="1400"/>
+            </a:pPr>
+          </a:p>
+        </c:txPr>
+        <c:crossAx val="2118791784"/>
+        <c:crosses val="autoZero"/>
+      </c:valAx>
+    </c:plotArea>
+    <c:legend>
+      <c:legendPos val="b"/>
+      <c:layout/>
+      <c:overlay val="0"/>
+      <c:txPr>
+        <a:bodyPr/>
+        <a:lstStyle/>
+        <a:p>
+          <a:pPr>
+            <a:defRPr sz="1400"/>
+          </a:pPr>
+        </a:p>
+      </c:txPr>
+    </c:legend>
+    <c:plotVisOnly val="1"/>
+    <c:dispBlanksAs val="gap"/>
+    <c:showDLblsOverMax val="0"/>
+  </c:chart>
+  <c:txPr>
+    <a:bodyPr/>
+    <a:lstStyle/>
+    <a:p>
+      <a:pPr>
+        <a:defRPr sz="1800"/>
+      </a:pPr>
+      <a:endParaRPr lang="en-US"/>
+    </a:p>
+  </c:txPr>
+  <c:externalData r:id="rId1">
+    <c:autoUpdate val="0"/>
+  </c:externalData>
+</c:chartSpace>
+</file>
+
+<file path=ppt/charts/chart9.xml><?xml version="1.0" encoding="utf-8"?>
 <c:chartSpace xmlns:c="http://schemas.openxmlformats.org/drawingml/2006/chart" xmlns:a="http://schemas.openxmlformats.org/drawingml/2006/main" xmlns:r="http://schemas.openxmlformats.org/officeDocument/2006/relationships">
   <c:date1904 val="0"/>
   <c:chart>
@@ -5696,7 +6206,7 @@
                   <a:srgbClr val="7F7F7F"/>
                 </a:solidFill>
               </a:rPr>
-              <a:t>Revenue Trend - Slide Title</a:t>
+              <a:t>These should all be the same (except for legend names)</a:t>
             </a:r>
           </a:p>
         </p:txBody>
@@ -5711,7 +6221,7 @@
         </p:nvGraphicFramePr>
         <p:xfrm>
           <a:off x="457200" y="1463040"/>
-          <a:ext cx="11430000" cy="4800600"/>
+          <a:ext cx="3813048" cy="4800600"/>
         </p:xfrm>
         <a:graphic>
           <a:graphicData uri="http://schemas.openxmlformats.org/drawingml/2006/chart">
@@ -5728,7 +6238,7 @@
         <p:spPr>
           <a:xfrm>
             <a:off x="457200" y="1005840"/>
-            <a:ext cx="11430000" cy="457200"/>
+            <a:ext cx="3813048" cy="457200"/>
           </a:xfrm>
           <a:prstGeom prst="rect">
             <a:avLst/>
@@ -5762,9 +6272,131 @@
           </a:p>
         </p:txBody>
       </p:sp>
+      <p:graphicFrame>
+        <p:nvGraphicFramePr>
+          <p:cNvPr id="5" name="chart_2"/>
+          <p:cNvGraphicFramePr>
+            <a:graphicFrameLocks noGrp="1"/>
+          </p:cNvGraphicFramePr>
+          <p:nvPr/>
+        </p:nvGraphicFramePr>
+        <p:xfrm>
+          <a:off x="4270248" y="1463040"/>
+          <a:ext cx="3813048" cy="4800600"/>
+        </p:xfrm>
+        <a:graphic>
+          <a:graphicData uri="http://schemas.openxmlformats.org/drawingml/2006/chart">
+            <c:chart xmlns:c="http://schemas.openxmlformats.org/drawingml/2006/chart" r:id="rId3"/>
+          </a:graphicData>
+        </a:graphic>
+      </p:graphicFrame>
       <p:sp>
         <p:nvSpPr>
-          <p:cNvPr id="5" name="TextBox 4"/>
+          <p:cNvPr id="6" name="TextBox 5"/>
+          <p:cNvSpPr txBox="1"/>
+          <p:nvPr/>
+        </p:nvSpPr>
+        <p:spPr>
+          <a:xfrm>
+            <a:off x="4270248" y="1005840"/>
+            <a:ext cx="3813048" cy="457200"/>
+          </a:xfrm>
+          <a:prstGeom prst="rect">
+            <a:avLst/>
+          </a:prstGeom>
+          <a:noFill/>
+        </p:spPr>
+        <p:txBody>
+          <a:bodyPr wrap="none">
+            <a:spAutoFit/>
+          </a:bodyPr>
+          <a:lstStyle/>
+          <a:p>
+            <a:pPr algn="ctr"/>
+            <a:r>
+              <a:rPr sz="1600" b="1" i="0" u="sng">
+                <a:solidFill>
+                  <a:srgbClr val="000000"/>
+                </a:solidFill>
+              </a:rPr>
+              <a:t>Revenue Trend (Line) - Chart Title
+</a:t>
+            </a:r>
+            <a:r>
+              <a:rPr sz="1400" b="0" i="1" u="none">
+                <a:solidFill>
+                  <a:srgbClr val="000000"/>
+                </a:solidFill>
+              </a:rPr>
+              <a:t>2024 Actuals</a:t>
+            </a:r>
+          </a:p>
+        </p:txBody>
+      </p:sp>
+      <p:graphicFrame>
+        <p:nvGraphicFramePr>
+          <p:cNvPr id="7" name="chart_3"/>
+          <p:cNvGraphicFramePr>
+            <a:graphicFrameLocks noGrp="1"/>
+          </p:cNvGraphicFramePr>
+          <p:nvPr/>
+        </p:nvGraphicFramePr>
+        <p:xfrm>
+          <a:off x="8083296" y="1463040"/>
+          <a:ext cx="3813048" cy="4800600"/>
+        </p:xfrm>
+        <a:graphic>
+          <a:graphicData uri="http://schemas.openxmlformats.org/drawingml/2006/chart">
+            <c:chart xmlns:c="http://schemas.openxmlformats.org/drawingml/2006/chart" r:id="rId4"/>
+          </a:graphicData>
+        </a:graphic>
+      </p:graphicFrame>
+      <p:sp>
+        <p:nvSpPr>
+          <p:cNvPr id="8" name="TextBox 7"/>
+          <p:cNvSpPr txBox="1"/>
+          <p:nvPr/>
+        </p:nvSpPr>
+        <p:spPr>
+          <a:xfrm>
+            <a:off x="8083296" y="1005840"/>
+            <a:ext cx="3813048" cy="457200"/>
+          </a:xfrm>
+          <a:prstGeom prst="rect">
+            <a:avLst/>
+          </a:prstGeom>
+          <a:noFill/>
+        </p:spPr>
+        <p:txBody>
+          <a:bodyPr wrap="none">
+            <a:spAutoFit/>
+          </a:bodyPr>
+          <a:lstStyle/>
+          <a:p>
+            <a:pPr algn="ctr"/>
+            <a:r>
+              <a:rPr sz="1600" b="1" i="0" u="sng">
+                <a:solidFill>
+                  <a:srgbClr val="000000"/>
+                </a:solidFill>
+              </a:rPr>
+              <a:t>Revenue Trend (Line) - Chart Title
+</a:t>
+            </a:r>
+            <a:r>
+              <a:rPr sz="1400" b="0" i="1" u="none">
+                <a:solidFill>
+                  <a:srgbClr val="000000"/>
+                </a:solidFill>
+              </a:rPr>
+              <a:t>2024 Actuals</a:t>
+            </a:r>
+          </a:p>
+        </p:txBody>
+      </p:sp>
+      <p:sp>
+        <p:nvSpPr>
+          <p:cNvPr id="9" name="TextBox 8"/>
           <p:cNvSpPr txBox="1"/>
           <p:nvPr/>
         </p:nvSpPr>

--- a/notebooks/demo.pptx
+++ b/notebooks/demo.pptx
@@ -819,6 +819,26 @@
               </c:strCache>
             </c:strRef>
           </c:tx>
+          <c:dLbls>
+            <c:numFmt formatCode="0.0%" sourceLinked="0"/>
+            <c:txPr>
+              <a:bodyPr/>
+              <a:lstStyle/>
+              <a:p>
+                <a:pPr>
+                  <a:defRPr sz="1000" b="1" i="1" u="sng"/>
+                </a:pPr>
+              </a:p>
+            </c:txPr>
+            <c:dLblPos val="outEnd"/>
+            <c:showLegendKey val="0"/>
+            <c:showVal val="1"/>
+            <c:showCatName val="0"/>
+            <c:showSerName val="0"/>
+            <c:showPercent val="0"/>
+            <c:showBubbleSize val="0"/>
+            <c:showLeaderLines val="1"/>
+          </c:dLbls>
           <c:cat>
             <c:strRef>
               <c:f>Sheet1!$A$2:$A$5</c:f>
@@ -875,6 +895,26 @@
               </c:strCache>
             </c:strRef>
           </c:tx>
+          <c:dLbls>
+            <c:numFmt formatCode="0.0%" sourceLinked="0"/>
+            <c:txPr>
+              <a:bodyPr/>
+              <a:lstStyle/>
+              <a:p>
+                <a:pPr>
+                  <a:defRPr sz="1000" b="1" i="1" u="sng"/>
+                </a:pPr>
+              </a:p>
+            </c:txPr>
+            <c:dLblPos val="outEnd"/>
+            <c:showLegendKey val="0"/>
+            <c:showVal val="1"/>
+            <c:showCatName val="0"/>
+            <c:showSerName val="0"/>
+            <c:showPercent val="0"/>
+            <c:showBubbleSize val="0"/>
+            <c:showLeaderLines val="1"/>
+          </c:dLbls>
           <c:cat>
             <c:strRef>
               <c:f>Sheet1!$A$2:$A$5</c:f>
@@ -1313,6 +1353,26 @@
               </c:strCache>
             </c:strRef>
           </c:tx>
+          <c:dLbls>
+            <c:numFmt formatCode="0.0%" sourceLinked="0"/>
+            <c:txPr>
+              <a:bodyPr/>
+              <a:lstStyle/>
+              <a:p>
+                <a:pPr>
+                  <a:defRPr sz="1000" b="1" i="1" u="sng"/>
+                </a:pPr>
+              </a:p>
+            </c:txPr>
+            <c:dLblPos val="outEnd"/>
+            <c:showLegendKey val="0"/>
+            <c:showVal val="1"/>
+            <c:showCatName val="0"/>
+            <c:showSerName val="0"/>
+            <c:showPercent val="0"/>
+            <c:showBubbleSize val="0"/>
+            <c:showLeaderLines val="1"/>
+          </c:dLbls>
           <c:cat>
             <c:strRef>
               <c:f>Sheet1!$A$2:$A$5</c:f>
@@ -1369,6 +1429,26 @@
               </c:strCache>
             </c:strRef>
           </c:tx>
+          <c:dLbls>
+            <c:numFmt formatCode="0.0%" sourceLinked="0"/>
+            <c:txPr>
+              <a:bodyPr/>
+              <a:lstStyle/>
+              <a:p>
+                <a:pPr>
+                  <a:defRPr sz="1000" b="1" i="1" u="sng"/>
+                </a:pPr>
+              </a:p>
+            </c:txPr>
+            <c:dLblPos val="outEnd"/>
+            <c:showLegendKey val="0"/>
+            <c:showVal val="1"/>
+            <c:showCatName val="0"/>
+            <c:showSerName val="0"/>
+            <c:showPercent val="0"/>
+            <c:showBubbleSize val="0"/>
+            <c:showLeaderLines val="1"/>
+          </c:dLbls>
           <c:cat>
             <c:strRef>
               <c:f>Sheet1!$A$2:$A$5</c:f>

--- a/notebooks/demo.pptx
+++ b/notebooks/demo.pptx
@@ -309,6 +309,16 @@
               </c:strCache>
             </c:strRef>
           </c:tx>
+          <c:spPr>
+            <a:solidFill>
+              <a:srgbClr val="4E79A7"/>
+            </a:solidFill>
+            <a:ln>
+              <a:solidFill>
+                <a:srgbClr val="4E79A7"/>
+              </a:solidFill>
+            </a:ln>
+          </c:spPr>
           <c:marker>
             <c:symbol val="none"/>
           </c:marker>
@@ -369,6 +379,16 @@
               </c:strCache>
             </c:strRef>
           </c:tx>
+          <c:spPr>
+            <a:solidFill>
+              <a:srgbClr val="F28E2B"/>
+            </a:solidFill>
+            <a:ln>
+              <a:solidFill>
+                <a:srgbClr val="F28E2B"/>
+              </a:solidFill>
+            </a:ln>
+          </c:spPr>
           <c:marker>
             <c:symbol val="none"/>
           </c:marker>
@@ -564,6 +584,16 @@
               </c:strCache>
             </c:strRef>
           </c:tx>
+          <c:spPr>
+            <a:solidFill>
+              <a:srgbClr val="4E79A7"/>
+            </a:solidFill>
+            <a:ln>
+              <a:solidFill>
+                <a:srgbClr val="4E79A7"/>
+              </a:solidFill>
+            </a:ln>
+          </c:spPr>
           <c:marker>
             <c:symbol val="none"/>
           </c:marker>
@@ -624,6 +654,16 @@
               </c:strCache>
             </c:strRef>
           </c:tx>
+          <c:spPr>
+            <a:solidFill>
+              <a:srgbClr val="F28E2B"/>
+            </a:solidFill>
+            <a:ln>
+              <a:solidFill>
+                <a:srgbClr val="F28E2B"/>
+              </a:solidFill>
+            </a:ln>
+          </c:spPr>
           <c:marker>
             <c:symbol val="none"/>
           </c:marker>
@@ -819,6 +859,17 @@
               </c:strCache>
             </c:strRef>
           </c:tx>
+          <c:spPr>
+            <a:solidFill>
+              <a:srgbClr val="4E79A7"/>
+            </a:solidFill>
+            <a:ln>
+              <a:solidFill>
+                <a:srgbClr val="4E79A7"/>
+              </a:solidFill>
+            </a:ln>
+          </c:spPr>
+          <c:invertIfNegative val="0"/>
           <c:dLbls>
             <c:numFmt formatCode="0.0%" sourceLinked="0"/>
             <c:txPr>
@@ -826,7 +877,7 @@
               <a:lstStyle/>
               <a:p>
                 <a:pPr>
-                  <a:defRPr sz="1000" b="1" i="1" u="sng"/>
+                  <a:defRPr sz="1000" b="1" i="0" u="none"/>
                 </a:pPr>
               </a:p>
             </c:txPr>
@@ -895,6 +946,17 @@
               </c:strCache>
             </c:strRef>
           </c:tx>
+          <c:spPr>
+            <a:solidFill>
+              <a:srgbClr val="F28E2B"/>
+            </a:solidFill>
+            <a:ln>
+              <a:solidFill>
+                <a:srgbClr val="F28E2B"/>
+              </a:solidFill>
+            </a:ln>
+          </c:spPr>
+          <c:invertIfNegative val="0"/>
           <c:dLbls>
             <c:numFmt formatCode="0.0%" sourceLinked="0"/>
             <c:txPr>
@@ -902,7 +964,7 @@
               <a:lstStyle/>
               <a:p>
                 <a:pPr>
-                  <a:defRPr sz="1000" b="1" i="1" u="sng"/>
+                  <a:defRPr sz="1000" b="1" i="0" u="none"/>
                 </a:pPr>
               </a:p>
             </c:txPr>
@@ -1098,6 +1160,16 @@
               </c:strCache>
             </c:strRef>
           </c:tx>
+          <c:spPr>
+            <a:solidFill>
+              <a:srgbClr val="4E79A7"/>
+            </a:solidFill>
+            <a:ln>
+              <a:solidFill>
+                <a:srgbClr val="4E79A7"/>
+              </a:solidFill>
+            </a:ln>
+          </c:spPr>
           <c:marker>
             <c:symbol val="none"/>
           </c:marker>
@@ -1158,6 +1230,16 @@
               </c:strCache>
             </c:strRef>
           </c:tx>
+          <c:spPr>
+            <a:solidFill>
+              <a:srgbClr val="F28E2B"/>
+            </a:solidFill>
+            <a:ln>
+              <a:solidFill>
+                <a:srgbClr val="F28E2B"/>
+              </a:solidFill>
+            </a:ln>
+          </c:spPr>
           <c:marker>
             <c:symbol val="none"/>
           </c:marker>
@@ -1353,6 +1435,17 @@
               </c:strCache>
             </c:strRef>
           </c:tx>
+          <c:spPr>
+            <a:solidFill>
+              <a:srgbClr val="4E79A7"/>
+            </a:solidFill>
+            <a:ln>
+              <a:solidFill>
+                <a:srgbClr val="4E79A7"/>
+              </a:solidFill>
+            </a:ln>
+          </c:spPr>
+          <c:invertIfNegative val="0"/>
           <c:dLbls>
             <c:numFmt formatCode="0.0%" sourceLinked="0"/>
             <c:txPr>
@@ -1360,7 +1453,7 @@
               <a:lstStyle/>
               <a:p>
                 <a:pPr>
-                  <a:defRPr sz="1000" b="1" i="1" u="sng"/>
+                  <a:defRPr sz="1000" b="1" i="0" u="none"/>
                 </a:pPr>
               </a:p>
             </c:txPr>
@@ -1429,6 +1522,17 @@
               </c:strCache>
             </c:strRef>
           </c:tx>
+          <c:spPr>
+            <a:solidFill>
+              <a:srgbClr val="F28E2B"/>
+            </a:solidFill>
+            <a:ln>
+              <a:solidFill>
+                <a:srgbClr val="F28E2B"/>
+              </a:solidFill>
+            </a:ln>
+          </c:spPr>
+          <c:invertIfNegative val="0"/>
           <c:dLbls>
             <c:numFmt formatCode="0.0%" sourceLinked="0"/>
             <c:txPr>
@@ -1436,7 +1540,7 @@
               <a:lstStyle/>
               <a:p>
                 <a:pPr>
-                  <a:defRPr sz="1000" b="1" i="1" u="sng"/>
+                  <a:defRPr sz="1000" b="1" i="0" u="none"/>
                 </a:pPr>
               </a:p>
             </c:txPr>
@@ -1632,6 +1736,16 @@
               </c:strCache>
             </c:strRef>
           </c:tx>
+          <c:spPr>
+            <a:solidFill>
+              <a:srgbClr val="4E79A7"/>
+            </a:solidFill>
+            <a:ln>
+              <a:solidFill>
+                <a:srgbClr val="4E79A7"/>
+              </a:solidFill>
+            </a:ln>
+          </c:spPr>
           <c:marker>
             <c:symbol val="none"/>
           </c:marker>
@@ -1823,6 +1937,16 @@
               </c:strCache>
             </c:strRef>
           </c:tx>
+          <c:spPr>
+            <a:solidFill>
+              <a:srgbClr val="4E79A7"/>
+            </a:solidFill>
+            <a:ln>
+              <a:solidFill>
+                <a:srgbClr val="4E79A7"/>
+              </a:solidFill>
+            </a:ln>
+          </c:spPr>
           <c:marker>
             <c:symbol val="none"/>
           </c:marker>
@@ -1883,6 +2007,16 @@
               </c:strCache>
             </c:strRef>
           </c:tx>
+          <c:spPr>
+            <a:solidFill>
+              <a:srgbClr val="F28E2B"/>
+            </a:solidFill>
+            <a:ln>
+              <a:solidFill>
+                <a:srgbClr val="F28E2B"/>
+              </a:solidFill>
+            </a:ln>
+          </c:spPr>
           <c:marker>
             <c:symbol val="none"/>
           </c:marker>
@@ -2078,6 +2212,16 @@
               </c:strCache>
             </c:strRef>
           </c:tx>
+          <c:spPr>
+            <a:solidFill>
+              <a:srgbClr val="4E79A7"/>
+            </a:solidFill>
+            <a:ln>
+              <a:solidFill>
+                <a:srgbClr val="4E79A7"/>
+              </a:solidFill>
+            </a:ln>
+          </c:spPr>
           <c:marker>
             <c:symbol val="none"/>
           </c:marker>
@@ -2138,6 +2282,16 @@
               </c:strCache>
             </c:strRef>
           </c:tx>
+          <c:spPr>
+            <a:solidFill>
+              <a:srgbClr val="F28E2B"/>
+            </a:solidFill>
+            <a:ln>
+              <a:solidFill>
+                <a:srgbClr val="F28E2B"/>
+              </a:solidFill>
+            </a:ln>
+          </c:spPr>
           <c:marker>
             <c:symbol val="none"/>
           </c:marker>
@@ -2333,6 +2487,16 @@
               </c:strCache>
             </c:strRef>
           </c:tx>
+          <c:spPr>
+            <a:solidFill>
+              <a:srgbClr val="4E79A7"/>
+            </a:solidFill>
+            <a:ln>
+              <a:solidFill>
+                <a:srgbClr val="4E79A7"/>
+              </a:solidFill>
+            </a:ln>
+          </c:spPr>
           <c:marker>
             <c:symbol val="none"/>
           </c:marker>
@@ -2393,6 +2557,16 @@
               </c:strCache>
             </c:strRef>
           </c:tx>
+          <c:spPr>
+            <a:solidFill>
+              <a:srgbClr val="F28E2B"/>
+            </a:solidFill>
+            <a:ln>
+              <a:solidFill>
+                <a:srgbClr val="F28E2B"/>
+              </a:solidFill>
+            </a:ln>
+          </c:spPr>
           <c:marker>
             <c:symbol val="none"/>
           </c:marker>

--- a/notebooks/demo.pptx
+++ b/notebooks/demo.pptx
@@ -304,19 +304,20 @@
               <c:strCache>
                 <c:ptCount val="1"/>
                 <c:pt idx="0">
-                  <c:v>revenue</c:v>
+                  <c:v>Revenue!</c:v>
                 </c:pt>
               </c:strCache>
             </c:strRef>
           </c:tx>
           <c:spPr>
             <a:solidFill>
-              <a:srgbClr val="4E79A7"/>
+              <a:srgbClr val="C00000"/>
             </a:solidFill>
-            <a:ln>
+            <a:ln w="25400">
               <a:solidFill>
-                <a:srgbClr val="4E79A7"/>
+                <a:srgbClr val="C00000"/>
               </a:solidFill>
+              <a:prstDash val="solid"/>
             </a:ln>
           </c:spPr>
           <c:marker>
@@ -374,19 +375,20 @@
               <c:strCache>
                 <c:ptCount val="1"/>
                 <c:pt idx="0">
-                  <c:v>cost</c:v>
+                  <c:v>Cost!</c:v>
                 </c:pt>
               </c:strCache>
             </c:strRef>
           </c:tx>
           <c:spPr>
             <a:solidFill>
-              <a:srgbClr val="F28E2B"/>
+              <a:srgbClr val="7030A0"/>
             </a:solidFill>
-            <a:ln>
+            <a:ln w="25400">
               <a:solidFill>
-                <a:srgbClr val="F28E2B"/>
+                <a:srgbClr val="7030A0"/>
               </a:solidFill>
+              <a:prstDash val="dash"/>
             </a:ln>
           </c:spPr>
           <c:marker>
@@ -579,19 +581,20 @@
               <c:strCache>
                 <c:ptCount val="1"/>
                 <c:pt idx="0">
-                  <c:v>revenue</c:v>
+                  <c:v>Revenue!</c:v>
                 </c:pt>
               </c:strCache>
             </c:strRef>
           </c:tx>
           <c:spPr>
             <a:solidFill>
-              <a:srgbClr val="4E79A7"/>
+              <a:srgbClr val="C00000"/>
             </a:solidFill>
-            <a:ln>
+            <a:ln w="25400">
               <a:solidFill>
-                <a:srgbClr val="4E79A7"/>
+                <a:srgbClr val="C00000"/>
               </a:solidFill>
+              <a:prstDash val="solid"/>
             </a:ln>
           </c:spPr>
           <c:marker>
@@ -649,19 +652,20 @@
               <c:strCache>
                 <c:ptCount val="1"/>
                 <c:pt idx="0">
-                  <c:v>cost</c:v>
+                  <c:v>Cost!</c:v>
                 </c:pt>
               </c:strCache>
             </c:strRef>
           </c:tx>
           <c:spPr>
             <a:solidFill>
-              <a:srgbClr val="F28E2B"/>
+              <a:srgbClr val="7030A0"/>
             </a:solidFill>
-            <a:ln>
+            <a:ln w="25400">
               <a:solidFill>
-                <a:srgbClr val="F28E2B"/>
+                <a:srgbClr val="7030A0"/>
               </a:solidFill>
+              <a:prstDash val="dash"/>
             </a:ln>
           </c:spPr>
           <c:marker>
@@ -1155,19 +1159,20 @@
               <c:strCache>
                 <c:ptCount val="1"/>
                 <c:pt idx="0">
-                  <c:v>revenue</c:v>
+                  <c:v>Revenue!</c:v>
                 </c:pt>
               </c:strCache>
             </c:strRef>
           </c:tx>
           <c:spPr>
             <a:solidFill>
-              <a:srgbClr val="4E79A7"/>
+              <a:srgbClr val="C00000"/>
             </a:solidFill>
-            <a:ln>
+            <a:ln w="25400">
               <a:solidFill>
-                <a:srgbClr val="4E79A7"/>
+                <a:srgbClr val="C00000"/>
               </a:solidFill>
+              <a:prstDash val="solid"/>
             </a:ln>
           </c:spPr>
           <c:marker>
@@ -1225,19 +1230,20 @@
               <c:strCache>
                 <c:ptCount val="1"/>
                 <c:pt idx="0">
-                  <c:v>cost</c:v>
+                  <c:v>Cost!</c:v>
                 </c:pt>
               </c:strCache>
             </c:strRef>
           </c:tx>
           <c:spPr>
             <a:solidFill>
-              <a:srgbClr val="F28E2B"/>
+              <a:srgbClr val="7030A0"/>
             </a:solidFill>
-            <a:ln>
+            <a:ln w="25400">
               <a:solidFill>
-                <a:srgbClr val="F28E2B"/>
+                <a:srgbClr val="7030A0"/>
               </a:solidFill>
+              <a:prstDash val="dash"/>
             </a:ln>
           </c:spPr>
           <c:marker>
@@ -1740,10 +1746,11 @@
             <a:solidFill>
               <a:srgbClr val="4E79A7"/>
             </a:solidFill>
-            <a:ln>
+            <a:ln w="25400">
               <a:solidFill>
                 <a:srgbClr val="4E79A7"/>
               </a:solidFill>
+              <a:prstDash val="dash"/>
             </a:ln>
           </c:spPr>
           <c:marker>
@@ -1941,10 +1948,11 @@
             <a:solidFill>
               <a:srgbClr val="4E79A7"/>
             </a:solidFill>
-            <a:ln>
+            <a:ln w="25400">
               <a:solidFill>
                 <a:srgbClr val="4E79A7"/>
               </a:solidFill>
+              <a:prstDash val="dash"/>
             </a:ln>
           </c:spPr>
           <c:marker>
@@ -2011,10 +2019,11 @@
             <a:solidFill>
               <a:srgbClr val="F28E2B"/>
             </a:solidFill>
-            <a:ln>
+            <a:ln w="25400">
               <a:solidFill>
                 <a:srgbClr val="F28E2B"/>
               </a:solidFill>
+              <a:prstDash val="dash"/>
             </a:ln>
           </c:spPr>
           <c:marker>
@@ -2216,10 +2225,11 @@
             <a:solidFill>
               <a:srgbClr val="4E79A7"/>
             </a:solidFill>
-            <a:ln>
+            <a:ln w="25400">
               <a:solidFill>
                 <a:srgbClr val="4E79A7"/>
               </a:solidFill>
+              <a:prstDash val="dash"/>
             </a:ln>
           </c:spPr>
           <c:marker>
@@ -2286,10 +2296,11 @@
             <a:solidFill>
               <a:srgbClr val="F28E2B"/>
             </a:solidFill>
-            <a:ln>
+            <a:ln w="25400">
               <a:solidFill>
                 <a:srgbClr val="F28E2B"/>
               </a:solidFill>
+              <a:prstDash val="dash"/>
             </a:ln>
           </c:spPr>
           <c:marker>
@@ -2491,10 +2502,11 @@
             <a:solidFill>
               <a:srgbClr val="4E79A7"/>
             </a:solidFill>
-            <a:ln>
+            <a:ln w="25400">
               <a:solidFill>
                 <a:srgbClr val="4E79A7"/>
               </a:solidFill>
+              <a:prstDash val="dash"/>
             </a:ln>
           </c:spPr>
           <c:marker>
@@ -2561,10 +2573,11 @@
             <a:solidFill>
               <a:srgbClr val="F28E2B"/>
             </a:solidFill>
-            <a:ln>
+            <a:ln w="25400">
               <a:solidFill>
                 <a:srgbClr val="F28E2B"/>
               </a:solidFill>
+              <a:prstDash val="dash"/>
             </a:ln>
           </c:spPr>
           <c:marker>
@@ -5851,7 +5864,7 @@
           <a:noFill/>
         </p:spPr>
         <p:txBody>
-          <a:bodyPr wrap="none">
+          <a:bodyPr wrap="none" anchor="t">
             <a:spAutoFit/>
           </a:bodyPr>
           <a:lstStyle/>
@@ -5885,7 +5898,7 @@
           <a:noFill/>
         </p:spPr>
         <p:txBody>
-          <a:bodyPr wrap="none">
+          <a:bodyPr wrap="none" anchor="t">
             <a:spAutoFit/>
           </a:bodyPr>
           <a:lstStyle/>
@@ -5937,7 +5950,7 @@
           <a:noFill/>
         </p:spPr>
         <p:txBody>
-          <a:bodyPr wrap="none">
+          <a:bodyPr wrap="none" anchor="t">
             <a:spAutoFit/>
           </a:bodyPr>
           <a:lstStyle/>
@@ -5989,7 +6002,7 @@
           <a:noFill/>
         </p:spPr>
         <p:txBody>
-          <a:bodyPr wrap="none">
+          <a:bodyPr wrap="none" anchor="t">
             <a:spAutoFit/>
           </a:bodyPr>
           <a:lstStyle/>
@@ -6017,14 +6030,58 @@
       </p:sp>
       <p:sp>
         <p:nvSpPr>
-          <p:cNvPr id="5" name="TextBox 4"/>
+          <p:cNvPr id="5" name="Rectangle 4"/>
+          <p:cNvSpPr/>
+          <p:nvPr/>
+        </p:nvSpPr>
+        <p:spPr>
+          <a:xfrm>
+            <a:off x="6858000" y="6263640"/>
+            <a:ext cx="164592" cy="164592"/>
+          </a:xfrm>
+          <a:prstGeom prst="rect">
+            <a:avLst/>
+          </a:prstGeom>
+          <a:solidFill>
+            <a:srgbClr val="C00000"/>
+          </a:solidFill>
+          <a:ln>
+            <a:noFill/>
+          </a:ln>
+          <a:effectLst/>
+        </p:spPr>
+        <p:style>
+          <a:lnRef idx="1">
+            <a:schemeClr val="accent1"/>
+          </a:lnRef>
+          <a:fillRef idx="3">
+            <a:schemeClr val="accent1"/>
+          </a:fillRef>
+          <a:effectRef idx="2">
+            <a:schemeClr val="accent1"/>
+          </a:effectRef>
+          <a:fontRef idx="minor">
+            <a:schemeClr val="lt1"/>
+          </a:fontRef>
+        </p:style>
+        <p:txBody>
+          <a:bodyPr rtlCol="0" anchor="ctr"/>
+          <a:lstStyle/>
+          <a:p>
+            <a:pPr algn="ctr"/>
+          </a:p>
+        </p:txBody>
+      </p:sp>
+      <p:sp>
+        <p:nvSpPr>
+          <p:cNvPr id="6" name="TextBox 5"/>
           <p:cNvSpPr txBox="1"/>
           <p:nvPr/>
         </p:nvSpPr>
         <p:spPr>
           <a:xfrm>
-            <a:off x="457200" y="6263640"/>
-            <a:ext cx="11430000" cy="731520"/>
+            <a:off x="6986016" y="6190488"/>
+            <a:ext cx="914400" cy="274320"/>
           </a:xfrm>
           <a:prstGeom prst="rect">
             <a:avLst/>
@@ -6032,7 +6089,416 @@
           <a:noFill/>
         </p:spPr>
         <p:txBody>
-          <a:bodyPr wrap="none">
+          <a:bodyPr wrap="none" anchor="ctr">
+            <a:spAutoFit/>
+          </a:bodyPr>
+          <a:lstStyle/>
+          <a:p>
+            <a:pPr algn="l"/>
+            <a:r>
+              <a:rPr sz="1200" b="0" i="0" u="none">
+                <a:solidFill>
+                  <a:srgbClr val="000000"/>
+                </a:solidFill>
+              </a:rPr>
+              <a:t>Revenue</a:t>
+            </a:r>
+          </a:p>
+        </p:txBody>
+      </p:sp>
+      <p:sp>
+        <p:nvSpPr>
+          <p:cNvPr id="7" name="Rectangle 6"/>
+          <p:cNvSpPr/>
+          <p:nvPr/>
+        </p:nvSpPr>
+        <p:spPr>
+          <a:xfrm>
+            <a:off x="6858000" y="6492240"/>
+            <a:ext cx="164592" cy="164592"/>
+          </a:xfrm>
+          <a:prstGeom prst="rect">
+            <a:avLst/>
+          </a:prstGeom>
+          <a:solidFill>
+            <a:srgbClr val="7030A0"/>
+          </a:solidFill>
+          <a:ln>
+            <a:noFill/>
+          </a:ln>
+          <a:effectLst/>
+        </p:spPr>
+        <p:style>
+          <a:lnRef idx="1">
+            <a:schemeClr val="accent1"/>
+          </a:lnRef>
+          <a:fillRef idx="3">
+            <a:schemeClr val="accent1"/>
+          </a:fillRef>
+          <a:effectRef idx="2">
+            <a:schemeClr val="accent1"/>
+          </a:effectRef>
+          <a:fontRef idx="minor">
+            <a:schemeClr val="lt1"/>
+          </a:fontRef>
+        </p:style>
+        <p:txBody>
+          <a:bodyPr rtlCol="0" anchor="ctr"/>
+          <a:lstStyle/>
+          <a:p>
+            <a:pPr algn="ctr"/>
+          </a:p>
+        </p:txBody>
+      </p:sp>
+      <p:sp>
+        <p:nvSpPr>
+          <p:cNvPr id="8" name="TextBox 7"/>
+          <p:cNvSpPr txBox="1"/>
+          <p:nvPr/>
+        </p:nvSpPr>
+        <p:spPr>
+          <a:xfrm>
+            <a:off x="6986016" y="6419088"/>
+            <a:ext cx="914400" cy="274320"/>
+          </a:xfrm>
+          <a:prstGeom prst="rect">
+            <a:avLst/>
+          </a:prstGeom>
+          <a:noFill/>
+        </p:spPr>
+        <p:txBody>
+          <a:bodyPr wrap="none" anchor="ctr">
+            <a:spAutoFit/>
+          </a:bodyPr>
+          <a:lstStyle/>
+          <a:p>
+            <a:pPr algn="l"/>
+            <a:r>
+              <a:rPr sz="1200" b="0" i="0" u="none">
+                <a:solidFill>
+                  <a:srgbClr val="000000"/>
+                </a:solidFill>
+              </a:rPr>
+              <a:t>Cost</a:t>
+            </a:r>
+          </a:p>
+        </p:txBody>
+      </p:sp>
+      <p:sp>
+        <p:nvSpPr>
+          <p:cNvPr id="9" name="Rectangle 8"/>
+          <p:cNvSpPr/>
+          <p:nvPr/>
+        </p:nvSpPr>
+        <p:spPr>
+          <a:xfrm>
+            <a:off x="7909560" y="6263640"/>
+            <a:ext cx="164592" cy="164592"/>
+          </a:xfrm>
+          <a:prstGeom prst="rect">
+            <a:avLst/>
+          </a:prstGeom>
+          <a:solidFill>
+            <a:srgbClr val="C00000"/>
+          </a:solidFill>
+          <a:ln>
+            <a:noFill/>
+          </a:ln>
+          <a:effectLst/>
+        </p:spPr>
+        <p:style>
+          <a:lnRef idx="1">
+            <a:schemeClr val="accent1"/>
+          </a:lnRef>
+          <a:fillRef idx="3">
+            <a:schemeClr val="accent1"/>
+          </a:fillRef>
+          <a:effectRef idx="2">
+            <a:schemeClr val="accent1"/>
+          </a:effectRef>
+          <a:fontRef idx="minor">
+            <a:schemeClr val="lt1"/>
+          </a:fontRef>
+        </p:style>
+        <p:txBody>
+          <a:bodyPr rtlCol="0" anchor="ctr"/>
+          <a:lstStyle/>
+          <a:p>
+            <a:pPr algn="ctr"/>
+          </a:p>
+        </p:txBody>
+      </p:sp>
+      <p:sp>
+        <p:nvSpPr>
+          <p:cNvPr id="10" name="TextBox 9"/>
+          <p:cNvSpPr txBox="1"/>
+          <p:nvPr/>
+        </p:nvSpPr>
+        <p:spPr>
+          <a:xfrm>
+            <a:off x="8037576" y="6190488"/>
+            <a:ext cx="914400" cy="274320"/>
+          </a:xfrm>
+          <a:prstGeom prst="rect">
+            <a:avLst/>
+          </a:prstGeom>
+          <a:noFill/>
+        </p:spPr>
+        <p:txBody>
+          <a:bodyPr wrap="none" anchor="ctr">
+            <a:spAutoFit/>
+          </a:bodyPr>
+          <a:lstStyle/>
+          <a:p>
+            <a:pPr algn="l"/>
+            <a:r>
+              <a:rPr sz="1200" b="0" i="0" u="none">
+                <a:solidFill>
+                  <a:srgbClr val="000000"/>
+                </a:solidFill>
+              </a:rPr>
+              <a:t>Revenue</a:t>
+            </a:r>
+          </a:p>
+        </p:txBody>
+      </p:sp>
+      <p:sp>
+        <p:nvSpPr>
+          <p:cNvPr id="11" name="Rectangle 10"/>
+          <p:cNvSpPr/>
+          <p:nvPr/>
+        </p:nvSpPr>
+        <p:spPr>
+          <a:xfrm>
+            <a:off x="7909560" y="6492240"/>
+            <a:ext cx="164592" cy="164592"/>
+          </a:xfrm>
+          <a:prstGeom prst="rect">
+            <a:avLst/>
+          </a:prstGeom>
+          <a:solidFill>
+            <a:srgbClr val="7030A0"/>
+          </a:solidFill>
+          <a:ln>
+            <a:noFill/>
+          </a:ln>
+          <a:effectLst/>
+        </p:spPr>
+        <p:style>
+          <a:lnRef idx="1">
+            <a:schemeClr val="accent1"/>
+          </a:lnRef>
+          <a:fillRef idx="3">
+            <a:schemeClr val="accent1"/>
+          </a:fillRef>
+          <a:effectRef idx="2">
+            <a:schemeClr val="accent1"/>
+          </a:effectRef>
+          <a:fontRef idx="minor">
+            <a:schemeClr val="lt1"/>
+          </a:fontRef>
+        </p:style>
+        <p:txBody>
+          <a:bodyPr rtlCol="0" anchor="ctr"/>
+          <a:lstStyle/>
+          <a:p>
+            <a:pPr algn="ctr"/>
+          </a:p>
+        </p:txBody>
+      </p:sp>
+      <p:sp>
+        <p:nvSpPr>
+          <p:cNvPr id="12" name="TextBox 11"/>
+          <p:cNvSpPr txBox="1"/>
+          <p:nvPr/>
+        </p:nvSpPr>
+        <p:spPr>
+          <a:xfrm>
+            <a:off x="8037576" y="6419088"/>
+            <a:ext cx="914400" cy="274320"/>
+          </a:xfrm>
+          <a:prstGeom prst="rect">
+            <a:avLst/>
+          </a:prstGeom>
+          <a:noFill/>
+        </p:spPr>
+        <p:txBody>
+          <a:bodyPr wrap="none" anchor="ctr">
+            <a:spAutoFit/>
+          </a:bodyPr>
+          <a:lstStyle/>
+          <a:p>
+            <a:pPr algn="l"/>
+            <a:r>
+              <a:rPr sz="1200" b="0" i="0" u="none">
+                <a:solidFill>
+                  <a:srgbClr val="000000"/>
+                </a:solidFill>
+              </a:rPr>
+              <a:t>Cost</a:t>
+            </a:r>
+          </a:p>
+        </p:txBody>
+      </p:sp>
+      <p:cxnSp>
+        <p:nvCxnSpPr>
+          <p:cNvPr id="13" name="Connector 12"/>
+          <p:cNvCxnSpPr/>
+          <p:nvPr/>
+        </p:nvCxnSpPr>
+        <p:spPr>
+          <a:xfrm>
+            <a:off x="10058400" y="914400"/>
+            <a:ext cx="320040" cy="0"/>
+          </a:xfrm>
+          <a:prstGeom prst="line">
+            <a:avLst/>
+          </a:prstGeom>
+          <a:ln w="25400">
+            <a:solidFill>
+              <a:srgbClr val="C00000"/>
+            </a:solidFill>
+          </a:ln>
+          <a:effectLst/>
+        </p:spPr>
+        <p:style>
+          <a:lnRef idx="2">
+            <a:schemeClr val="accent1"/>
+          </a:lnRef>
+          <a:fillRef idx="0">
+            <a:schemeClr val="accent1"/>
+          </a:fillRef>
+          <a:effectRef idx="1">
+            <a:schemeClr val="accent1"/>
+          </a:effectRef>
+          <a:fontRef idx="minor">
+            <a:schemeClr val="tx1"/>
+          </a:fontRef>
+        </p:style>
+      </p:cxnSp>
+      <p:sp>
+        <p:nvSpPr>
+          <p:cNvPr id="14" name="TextBox 13"/>
+          <p:cNvSpPr txBox="1"/>
+          <p:nvPr/>
+        </p:nvSpPr>
+        <p:spPr>
+          <a:xfrm>
+            <a:off x="10469880" y="777240"/>
+            <a:ext cx="1371600" cy="274320"/>
+          </a:xfrm>
+          <a:prstGeom prst="rect">
+            <a:avLst/>
+          </a:prstGeom>
+          <a:noFill/>
+        </p:spPr>
+        <p:txBody>
+          <a:bodyPr wrap="none" anchor="ctr">
+            <a:spAutoFit/>
+          </a:bodyPr>
+          <a:lstStyle/>
+          <a:p>
+            <a:pPr algn="l"/>
+            <a:r>
+              <a:rPr sz="1200" b="0" i="0" u="none">
+                <a:solidFill>
+                  <a:srgbClr val="000000"/>
+                </a:solidFill>
+              </a:rPr>
+              <a:t>Revenue</a:t>
+            </a:r>
+          </a:p>
+        </p:txBody>
+      </p:sp>
+      <p:cxnSp>
+        <p:nvCxnSpPr>
+          <p:cNvPr id="15" name="Connector 14"/>
+          <p:cNvCxnSpPr/>
+          <p:nvPr/>
+        </p:nvCxnSpPr>
+        <p:spPr>
+          <a:xfrm>
+            <a:off x="10058400" y="1143000"/>
+            <a:ext cx="320040" cy="0"/>
+          </a:xfrm>
+          <a:prstGeom prst="line">
+            <a:avLst/>
+          </a:prstGeom>
+          <a:ln w="25400">
+            <a:solidFill>
+              <a:srgbClr val="7030A0"/>
+            </a:solidFill>
+            <a:prstDash val="dash"/>
+          </a:ln>
+          <a:effectLst/>
+        </p:spPr>
+        <p:style>
+          <a:lnRef idx="2">
+            <a:schemeClr val="accent1"/>
+          </a:lnRef>
+          <a:fillRef idx="0">
+            <a:schemeClr val="accent1"/>
+          </a:fillRef>
+          <a:effectRef idx="1">
+            <a:schemeClr val="accent1"/>
+          </a:effectRef>
+          <a:fontRef idx="minor">
+            <a:schemeClr val="tx1"/>
+          </a:fontRef>
+        </p:style>
+      </p:cxnSp>
+      <p:sp>
+        <p:nvSpPr>
+          <p:cNvPr id="16" name="TextBox 15"/>
+          <p:cNvSpPr txBox="1"/>
+          <p:nvPr/>
+        </p:nvSpPr>
+        <p:spPr>
+          <a:xfrm>
+            <a:off x="10469880" y="1005840"/>
+            <a:ext cx="1371600" cy="274320"/>
+          </a:xfrm>
+          <a:prstGeom prst="rect">
+            <a:avLst/>
+          </a:prstGeom>
+          <a:noFill/>
+        </p:spPr>
+        <p:txBody>
+          <a:bodyPr wrap="none" anchor="ctr">
+            <a:spAutoFit/>
+          </a:bodyPr>
+          <a:lstStyle/>
+          <a:p>
+            <a:pPr algn="l"/>
+            <a:r>
+              <a:rPr sz="1200" b="0" i="0" u="none">
+                <a:solidFill>
+                  <a:srgbClr val="000000"/>
+                </a:solidFill>
+              </a:rPr>
+              <a:t>Cost</a:t>
+            </a:r>
+          </a:p>
+        </p:txBody>
+      </p:sp>
+      <p:sp>
+        <p:nvSpPr>
+          <p:cNvPr id="17" name="TextBox 16"/>
+          <p:cNvSpPr txBox="1"/>
+          <p:nvPr/>
+        </p:nvSpPr>
+        <p:spPr>
+          <a:xfrm>
+            <a:off x="457200" y="6263640"/>
+            <a:ext cx="11430000" cy="365760"/>
+          </a:xfrm>
+          <a:prstGeom prst="rect">
+            <a:avLst/>
+          </a:prstGeom>
+          <a:noFill/>
+        </p:spPr>
+        <p:txBody>
+          <a:bodyPr wrap="none" anchor="t">
             <a:spAutoFit/>
           </a:bodyPr>
           <a:lstStyle/>
@@ -6084,7 +6550,7 @@
           <a:noFill/>
         </p:spPr>
         <p:txBody>
-          <a:bodyPr wrap="none">
+          <a:bodyPr wrap="none" anchor="t">
             <a:spAutoFit/>
           </a:bodyPr>
           <a:lstStyle/>
@@ -6136,7 +6602,7 @@
           <a:noFill/>
         </p:spPr>
         <p:txBody>
-          <a:bodyPr wrap="none">
+          <a:bodyPr wrap="none" anchor="t">
             <a:spAutoFit/>
           </a:bodyPr>
           <a:lstStyle/>
@@ -6188,7 +6654,7 @@
           <a:noFill/>
         </p:spPr>
         <p:txBody>
-          <a:bodyPr wrap="none">
+          <a:bodyPr wrap="none" anchor="t">
             <a:spAutoFit/>
           </a:bodyPr>
           <a:lstStyle/>
@@ -6240,7 +6706,7 @@
           <a:noFill/>
         </p:spPr>
         <p:txBody>
-          <a:bodyPr wrap="none">
+          <a:bodyPr wrap="none" anchor="t">
             <a:spAutoFit/>
           </a:bodyPr>
           <a:lstStyle/>
@@ -6292,7 +6758,7 @@
           <a:noFill/>
         </p:spPr>
         <p:txBody>
-          <a:bodyPr wrap="none">
+          <a:bodyPr wrap="none" anchor="t">
             <a:spAutoFit/>
           </a:bodyPr>
           <a:lstStyle/>
@@ -6344,7 +6810,7 @@
           <a:noFill/>
         </p:spPr>
         <p:txBody>
-          <a:bodyPr wrap="none">
+          <a:bodyPr wrap="none" anchor="t">
             <a:spAutoFit/>
           </a:bodyPr>
           <a:lstStyle/>
@@ -6396,7 +6862,7 @@
           <a:noFill/>
         </p:spPr>
         <p:txBody>
-          <a:bodyPr wrap="none">
+          <a:bodyPr wrap="none" anchor="t">
             <a:spAutoFit/>
           </a:bodyPr>
           <a:lstStyle/>
@@ -6448,7 +6914,7 @@
           <a:noFill/>
         </p:spPr>
         <p:txBody>
-          <a:bodyPr wrap="none">
+          <a:bodyPr wrap="none" anchor="t">
             <a:spAutoFit/>
           </a:bodyPr>
           <a:lstStyle/>
@@ -6500,7 +6966,7 @@
           <a:noFill/>
         </p:spPr>
         <p:txBody>
-          <a:bodyPr wrap="none">
+          <a:bodyPr wrap="none" anchor="t">
             <a:spAutoFit/>
           </a:bodyPr>
           <a:lstStyle/>
@@ -6561,7 +7027,7 @@
           <a:noFill/>
         </p:spPr>
         <p:txBody>
-          <a:bodyPr wrap="none">
+          <a:bodyPr wrap="none" anchor="t">
             <a:spAutoFit/>
           </a:bodyPr>
           <a:lstStyle/>
@@ -6622,7 +7088,7 @@
           <a:noFill/>
         </p:spPr>
         <p:txBody>
-          <a:bodyPr wrap="none">
+          <a:bodyPr wrap="none" anchor="t">
             <a:spAutoFit/>
           </a:bodyPr>
           <a:lstStyle/>
@@ -6657,7 +7123,7 @@
         <p:spPr>
           <a:xfrm>
             <a:off x="457200" y="6263640"/>
-            <a:ext cx="11430000" cy="731520"/>
+            <a:ext cx="11430000" cy="365760"/>
           </a:xfrm>
           <a:prstGeom prst="rect">
             <a:avLst/>
@@ -6665,7 +7131,7 @@
           <a:noFill/>
         </p:spPr>
         <p:txBody>
-          <a:bodyPr wrap="none">
+          <a:bodyPr wrap="none" anchor="t">
             <a:spAutoFit/>
           </a:bodyPr>
           <a:lstStyle/>

--- a/notebooks/demo.pptx
+++ b/notebooks/demo.pptx
@@ -13,6 +13,7 @@
     <p:sldId id="258" r:id="rId20"/>
     <p:sldId id="259" r:id="rId21"/>
     <p:sldId id="260" r:id="rId22"/>
+    <p:sldId id="261" r:id="rId23"/>
   </p:sldIdLst>
   <p:sldSz cx="12188825" cy="6858000"/>
   <p:notesSz cx="6858000" cy="9144000"/>
@@ -490,6 +491,837 @@
         <c:axId val="2140495176"/>
         <c:scaling>
           <c:max val="100.0"/>
+          <c:min val="0.0"/>
+        </c:scaling>
+        <c:delete val="0"/>
+        <c:axPos val="l"/>
+        <c:title>
+          <c:tx>
+            <c:rich>
+              <a:bodyPr/>
+              <a:lstStyle/>
+              <a:p>
+                <a:pPr>
+                  <a:defRPr sz="1400" b="1" i="0" u="none"/>
+                </a:pPr>
+                <a:r>
+                  <a:t>Month</a:t>
+                </a:r>
+              </a:p>
+            </c:rich>
+          </c:tx>
+          <c:layout/>
+          <c:overlay val="0"/>
+        </c:title>
+        <c:numFmt formatCode="$0.0" sourceLinked="0"/>
+        <c:majorTickMark val="out"/>
+        <c:minorTickMark val="none"/>
+        <c:tickLblPos val="nextTo"/>
+        <c:txPr>
+          <a:bodyPr/>
+          <a:lstStyle/>
+          <a:p>
+            <a:pPr>
+              <a:defRPr sz="1400"/>
+            </a:pPr>
+          </a:p>
+        </c:txPr>
+        <c:crossAx val="2118791784"/>
+        <c:crosses val="autoZero"/>
+      </c:valAx>
+    </c:plotArea>
+    <c:legend>
+      <c:legendPos val="b"/>
+      <c:layout/>
+      <c:overlay val="0"/>
+      <c:txPr>
+        <a:bodyPr/>
+        <a:lstStyle/>
+        <a:p>
+          <a:pPr>
+            <a:defRPr sz="1400"/>
+          </a:pPr>
+        </a:p>
+      </c:txPr>
+    </c:legend>
+    <c:plotVisOnly val="1"/>
+    <c:dispBlanksAs val="gap"/>
+    <c:showDLblsOverMax val="0"/>
+  </c:chart>
+  <c:txPr>
+    <a:bodyPr/>
+    <a:lstStyle/>
+    <a:p>
+      <a:pPr>
+        <a:defRPr sz="1800"/>
+      </a:pPr>
+      <a:endParaRPr lang="en-US"/>
+    </a:p>
+  </c:txPr>
+  <c:externalData r:id="rId1">
+    <c:autoUpdate val="0"/>
+  </c:externalData>
+</c:chartSpace>
+</file>
+
+<file path=ppt/charts/chart10.xml><?xml version="1.0" encoding="utf-8"?>
+<c:chartSpace xmlns:c="http://schemas.openxmlformats.org/drawingml/2006/chart" xmlns:a="http://schemas.openxmlformats.org/drawingml/2006/main" xmlns:r="http://schemas.openxmlformats.org/officeDocument/2006/relationships">
+  <c:date1904 val="0"/>
+  <c:chart>
+    <c:autoTitleDeleted val="1"/>
+    <c:plotArea>
+      <c:lineChart>
+        <c:grouping val="standard"/>
+        <c:varyColors val="0"/>
+        <c:ser>
+          <c:idx val="0"/>
+          <c:order val="0"/>
+          <c:tx>
+            <c:strRef>
+              <c:f>Sheet1!$B$1</c:f>
+              <c:strCache>
+                <c:ptCount val="1"/>
+                <c:pt idx="0">
+                  <c:v>Revenue!</c:v>
+                </c:pt>
+              </c:strCache>
+            </c:strRef>
+          </c:tx>
+          <c:spPr>
+            <a:solidFill>
+              <a:srgbClr val="4E79A7"/>
+            </a:solidFill>
+            <a:ln w="25400">
+              <a:solidFill>
+                <a:srgbClr val="4E79A7"/>
+              </a:solidFill>
+              <a:prstDash val="dash"/>
+            </a:ln>
+          </c:spPr>
+          <c:marker>
+            <c:symbol val="none"/>
+          </c:marker>
+          <c:cat>
+            <c:strRef>
+              <c:f>Sheet1!$A$2:$A$5</c:f>
+              <c:strCache>
+                <c:ptCount val="4"/>
+                <c:pt idx="0">
+                  <c:v>Jan</c:v>
+                </c:pt>
+                <c:pt idx="1">
+                  <c:v>Feb</c:v>
+                </c:pt>
+                <c:pt idx="2">
+                  <c:v>Mar</c:v>
+                </c:pt>
+                <c:pt idx="3">
+                  <c:v>Apr</c:v>
+                </c:pt>
+              </c:strCache>
+            </c:strRef>
+          </c:cat>
+          <c:val>
+            <c:numRef>
+              <c:f>Sheet1!$B$2:$B$5</c:f>
+              <c:numCache>
+                <c:formatCode>General</c:formatCode>
+                <c:ptCount val="4"/>
+                <c:pt idx="0">
+                  <c:v>10</c:v>
+                </c:pt>
+                <c:pt idx="1">
+                  <c:v>14</c:v>
+                </c:pt>
+                <c:pt idx="2">
+                  <c:v>9</c:v>
+                </c:pt>
+                <c:pt idx="3">
+                  <c:v>18</c:v>
+                </c:pt>
+              </c:numCache>
+            </c:numRef>
+          </c:val>
+          <c:smooth val="0"/>
+        </c:ser>
+        <c:ser>
+          <c:idx val="1"/>
+          <c:order val="1"/>
+          <c:tx>
+            <c:strRef>
+              <c:f>Sheet1!$C$1</c:f>
+              <c:strCache>
+                <c:ptCount val="1"/>
+                <c:pt idx="0">
+                  <c:v>Cost!</c:v>
+                </c:pt>
+              </c:strCache>
+            </c:strRef>
+          </c:tx>
+          <c:spPr>
+            <a:solidFill>
+              <a:srgbClr val="F28E2B"/>
+            </a:solidFill>
+            <a:ln w="25400">
+              <a:solidFill>
+                <a:srgbClr val="F28E2B"/>
+              </a:solidFill>
+              <a:prstDash val="dash"/>
+            </a:ln>
+          </c:spPr>
+          <c:marker>
+            <c:symbol val="none"/>
+          </c:marker>
+          <c:cat>
+            <c:strRef>
+              <c:f>Sheet1!$A$2:$A$5</c:f>
+              <c:strCache>
+                <c:ptCount val="4"/>
+                <c:pt idx="0">
+                  <c:v>Jan</c:v>
+                </c:pt>
+                <c:pt idx="1">
+                  <c:v>Feb</c:v>
+                </c:pt>
+                <c:pt idx="2">
+                  <c:v>Mar</c:v>
+                </c:pt>
+                <c:pt idx="3">
+                  <c:v>Apr</c:v>
+                </c:pt>
+              </c:strCache>
+            </c:strRef>
+          </c:cat>
+          <c:val>
+            <c:numRef>
+              <c:f>Sheet1!$C$2:$C$5</c:f>
+              <c:numCache>
+                <c:formatCode>General</c:formatCode>
+                <c:ptCount val="4"/>
+                <c:pt idx="0">
+                  <c:v>2</c:v>
+                </c:pt>
+                <c:pt idx="1">
+                  <c:v>4</c:v>
+                </c:pt>
+                <c:pt idx="2">
+                  <c:v>3</c:v>
+                </c:pt>
+                <c:pt idx="3">
+                  <c:v>1</c:v>
+                </c:pt>
+              </c:numCache>
+            </c:numRef>
+          </c:val>
+          <c:smooth val="0"/>
+        </c:ser>
+        <c:marker val="1"/>
+        <c:smooth val="0"/>
+        <c:axId val="2118791784"/>
+        <c:axId val="2140495176"/>
+      </c:lineChart>
+      <c:catAx>
+        <c:axId val="2118791784"/>
+        <c:scaling>
+          <c:orientation val="minMax"/>
+        </c:scaling>
+        <c:delete val="0"/>
+        <c:axPos val="b"/>
+        <c:title>
+          <c:tx>
+            <c:rich>
+              <a:bodyPr/>
+              <a:lstStyle/>
+              <a:p>
+                <a:pPr>
+                  <a:defRPr sz="1400" b="1" i="0" u="none"/>
+                </a:pPr>
+                <a:r>
+                  <a:t>Revenue</a:t>
+                </a:r>
+              </a:p>
+            </c:rich>
+          </c:tx>
+          <c:layout/>
+          <c:overlay val="0"/>
+        </c:title>
+        <c:majorTickMark val="out"/>
+        <c:minorTickMark val="none"/>
+        <c:tickLblPos val="low"/>
+        <c:txPr>
+          <a:bodyPr/>
+          <a:lstStyle/>
+          <a:p>
+            <a:pPr>
+              <a:defRPr sz="1400"/>
+            </a:pPr>
+          </a:p>
+        </c:txPr>
+        <c:crossAx val="2140495176"/>
+        <c:crosses val="autoZero"/>
+        <c:auto val="1"/>
+        <c:lblAlgn val="ctr"/>
+        <c:lblOffset val="100"/>
+        <c:noMultiLvlLbl val="0"/>
+      </c:catAx>
+      <c:valAx>
+        <c:axId val="2140495176"/>
+        <c:scaling>
+          <c:max val="20.0"/>
+          <c:min val="0.0"/>
+        </c:scaling>
+        <c:delete val="0"/>
+        <c:axPos val="l"/>
+        <c:title>
+          <c:tx>
+            <c:rich>
+              <a:bodyPr/>
+              <a:lstStyle/>
+              <a:p>
+                <a:pPr>
+                  <a:defRPr sz="1400" b="1" i="0" u="none"/>
+                </a:pPr>
+                <a:r>
+                  <a:t>Month</a:t>
+                </a:r>
+              </a:p>
+            </c:rich>
+          </c:tx>
+          <c:layout/>
+          <c:overlay val="0"/>
+        </c:title>
+        <c:numFmt formatCode="$0.0" sourceLinked="0"/>
+        <c:majorTickMark val="out"/>
+        <c:minorTickMark val="none"/>
+        <c:tickLblPos val="nextTo"/>
+        <c:txPr>
+          <a:bodyPr/>
+          <a:lstStyle/>
+          <a:p>
+            <a:pPr>
+              <a:defRPr sz="1400"/>
+            </a:pPr>
+          </a:p>
+        </c:txPr>
+        <c:crossAx val="2118791784"/>
+        <c:crosses val="autoZero"/>
+      </c:valAx>
+    </c:plotArea>
+    <c:legend>
+      <c:legendPos val="b"/>
+      <c:layout/>
+      <c:overlay val="0"/>
+      <c:txPr>
+        <a:bodyPr/>
+        <a:lstStyle/>
+        <a:p>
+          <a:pPr>
+            <a:defRPr sz="1400"/>
+          </a:pPr>
+        </a:p>
+      </c:txPr>
+    </c:legend>
+    <c:plotVisOnly val="1"/>
+    <c:dispBlanksAs val="gap"/>
+    <c:showDLblsOverMax val="0"/>
+  </c:chart>
+  <c:txPr>
+    <a:bodyPr/>
+    <a:lstStyle/>
+    <a:p>
+      <a:pPr>
+        <a:defRPr sz="1800"/>
+      </a:pPr>
+      <a:endParaRPr lang="en-US"/>
+    </a:p>
+  </c:txPr>
+  <c:externalData r:id="rId1">
+    <c:autoUpdate val="0"/>
+  </c:externalData>
+</c:chartSpace>
+</file>
+
+<file path=ppt/charts/chart11.xml><?xml version="1.0" encoding="utf-8"?>
+<c:chartSpace xmlns:c="http://schemas.openxmlformats.org/drawingml/2006/chart" xmlns:a="http://schemas.openxmlformats.org/drawingml/2006/main" xmlns:r="http://schemas.openxmlformats.org/officeDocument/2006/relationships">
+  <c:date1904 val="0"/>
+  <c:chart>
+    <c:autoTitleDeleted val="1"/>
+    <c:plotArea>
+      <c:lineChart>
+        <c:grouping val="standard"/>
+        <c:varyColors val="0"/>
+        <c:ser>
+          <c:idx val="0"/>
+          <c:order val="0"/>
+          <c:tx>
+            <c:strRef>
+              <c:f>Sheet1!$B$1</c:f>
+              <c:strCache>
+                <c:ptCount val="1"/>
+                <c:pt idx="0">
+                  <c:v>revenue</c:v>
+                </c:pt>
+              </c:strCache>
+            </c:strRef>
+          </c:tx>
+          <c:spPr>
+            <a:solidFill>
+              <a:srgbClr val="4E79A7"/>
+            </a:solidFill>
+            <a:ln w="25400">
+              <a:solidFill>
+                <a:srgbClr val="4E79A7"/>
+              </a:solidFill>
+              <a:prstDash val="dash"/>
+            </a:ln>
+          </c:spPr>
+          <c:marker>
+            <c:symbol val="none"/>
+          </c:marker>
+          <c:cat>
+            <c:strRef>
+              <c:f>Sheet1!$A$2:$A$5</c:f>
+              <c:strCache>
+                <c:ptCount val="4"/>
+                <c:pt idx="0">
+                  <c:v>Jan</c:v>
+                </c:pt>
+                <c:pt idx="1">
+                  <c:v>Feb</c:v>
+                </c:pt>
+                <c:pt idx="2">
+                  <c:v>Mar</c:v>
+                </c:pt>
+                <c:pt idx="3">
+                  <c:v>Apr</c:v>
+                </c:pt>
+              </c:strCache>
+            </c:strRef>
+          </c:cat>
+          <c:val>
+            <c:numRef>
+              <c:f>Sheet1!$B$2:$B$5</c:f>
+              <c:numCache>
+                <c:formatCode>General</c:formatCode>
+                <c:ptCount val="4"/>
+                <c:pt idx="0">
+                  <c:v>10</c:v>
+                </c:pt>
+                <c:pt idx="1">
+                  <c:v>14</c:v>
+                </c:pt>
+                <c:pt idx="2">
+                  <c:v>9</c:v>
+                </c:pt>
+                <c:pt idx="3">
+                  <c:v>18</c:v>
+                </c:pt>
+              </c:numCache>
+            </c:numRef>
+          </c:val>
+          <c:smooth val="0"/>
+        </c:ser>
+        <c:ser>
+          <c:idx val="1"/>
+          <c:order val="1"/>
+          <c:tx>
+            <c:strRef>
+              <c:f>Sheet1!$C$1</c:f>
+              <c:strCache>
+                <c:ptCount val="1"/>
+                <c:pt idx="0">
+                  <c:v>cost</c:v>
+                </c:pt>
+              </c:strCache>
+            </c:strRef>
+          </c:tx>
+          <c:spPr>
+            <a:solidFill>
+              <a:srgbClr val="F28E2B"/>
+            </a:solidFill>
+            <a:ln w="25400">
+              <a:solidFill>
+                <a:srgbClr val="F28E2B"/>
+              </a:solidFill>
+              <a:prstDash val="dash"/>
+            </a:ln>
+          </c:spPr>
+          <c:marker>
+            <c:symbol val="none"/>
+          </c:marker>
+          <c:cat>
+            <c:strRef>
+              <c:f>Sheet1!$A$2:$A$5</c:f>
+              <c:strCache>
+                <c:ptCount val="4"/>
+                <c:pt idx="0">
+                  <c:v>Jan</c:v>
+                </c:pt>
+                <c:pt idx="1">
+                  <c:v>Feb</c:v>
+                </c:pt>
+                <c:pt idx="2">
+                  <c:v>Mar</c:v>
+                </c:pt>
+                <c:pt idx="3">
+                  <c:v>Apr</c:v>
+                </c:pt>
+              </c:strCache>
+            </c:strRef>
+          </c:cat>
+          <c:val>
+            <c:numRef>
+              <c:f>Sheet1!$C$2:$C$5</c:f>
+              <c:numCache>
+                <c:formatCode>General</c:formatCode>
+                <c:ptCount val="4"/>
+                <c:pt idx="0">
+                  <c:v>2</c:v>
+                </c:pt>
+                <c:pt idx="1">
+                  <c:v>4</c:v>
+                </c:pt>
+                <c:pt idx="2">
+                  <c:v>3</c:v>
+                </c:pt>
+                <c:pt idx="3">
+                  <c:v>1</c:v>
+                </c:pt>
+              </c:numCache>
+            </c:numRef>
+          </c:val>
+          <c:smooth val="0"/>
+        </c:ser>
+        <c:marker val="1"/>
+        <c:smooth val="0"/>
+        <c:axId val="2118791784"/>
+        <c:axId val="2140495176"/>
+      </c:lineChart>
+      <c:catAx>
+        <c:axId val="2118791784"/>
+        <c:scaling>
+          <c:orientation val="minMax"/>
+        </c:scaling>
+        <c:delete val="0"/>
+        <c:axPos val="b"/>
+        <c:title>
+          <c:tx>
+            <c:rich>
+              <a:bodyPr/>
+              <a:lstStyle/>
+              <a:p>
+                <a:pPr>
+                  <a:defRPr sz="1400" b="1" i="0" u="none"/>
+                </a:pPr>
+                <a:r>
+                  <a:t>Revenue</a:t>
+                </a:r>
+              </a:p>
+            </c:rich>
+          </c:tx>
+          <c:layout/>
+          <c:overlay val="0"/>
+        </c:title>
+        <c:majorTickMark val="out"/>
+        <c:minorTickMark val="none"/>
+        <c:tickLblPos val="low"/>
+        <c:txPr>
+          <a:bodyPr/>
+          <a:lstStyle/>
+          <a:p>
+            <a:pPr>
+              <a:defRPr sz="1400"/>
+            </a:pPr>
+          </a:p>
+        </c:txPr>
+        <c:crossAx val="2140495176"/>
+        <c:crosses val="autoZero"/>
+        <c:auto val="1"/>
+        <c:lblAlgn val="ctr"/>
+        <c:lblOffset val="100"/>
+        <c:noMultiLvlLbl val="0"/>
+      </c:catAx>
+      <c:valAx>
+        <c:axId val="2140495176"/>
+        <c:scaling>
+          <c:max val="20.0"/>
+          <c:min val="0.0"/>
+        </c:scaling>
+        <c:delete val="0"/>
+        <c:axPos val="l"/>
+        <c:title>
+          <c:tx>
+            <c:rich>
+              <a:bodyPr/>
+              <a:lstStyle/>
+              <a:p>
+                <a:pPr>
+                  <a:defRPr sz="1400" b="1" i="0" u="none"/>
+                </a:pPr>
+                <a:r>
+                  <a:t>Month</a:t>
+                </a:r>
+              </a:p>
+            </c:rich>
+          </c:tx>
+          <c:layout/>
+          <c:overlay val="0"/>
+        </c:title>
+        <c:numFmt formatCode="$0.0" sourceLinked="0"/>
+        <c:majorTickMark val="out"/>
+        <c:minorTickMark val="none"/>
+        <c:tickLblPos val="nextTo"/>
+        <c:txPr>
+          <a:bodyPr/>
+          <a:lstStyle/>
+          <a:p>
+            <a:pPr>
+              <a:defRPr sz="1400"/>
+            </a:pPr>
+          </a:p>
+        </c:txPr>
+        <c:crossAx val="2118791784"/>
+        <c:crosses val="autoZero"/>
+      </c:valAx>
+    </c:plotArea>
+    <c:legend>
+      <c:legendPos val="b"/>
+      <c:layout/>
+      <c:overlay val="0"/>
+      <c:txPr>
+        <a:bodyPr/>
+        <a:lstStyle/>
+        <a:p>
+          <a:pPr>
+            <a:defRPr sz="1400"/>
+          </a:pPr>
+        </a:p>
+      </c:txPr>
+    </c:legend>
+    <c:plotVisOnly val="1"/>
+    <c:dispBlanksAs val="gap"/>
+    <c:showDLblsOverMax val="0"/>
+  </c:chart>
+  <c:txPr>
+    <a:bodyPr/>
+    <a:lstStyle/>
+    <a:p>
+      <a:pPr>
+        <a:defRPr sz="1800"/>
+      </a:pPr>
+      <a:endParaRPr lang="en-US"/>
+    </a:p>
+  </c:txPr>
+  <c:externalData r:id="rId1">
+    <c:autoUpdate val="0"/>
+  </c:externalData>
+</c:chartSpace>
+</file>
+
+<file path=ppt/charts/chart12.xml><?xml version="1.0" encoding="utf-8"?>
+<c:chartSpace xmlns:c="http://schemas.openxmlformats.org/drawingml/2006/chart" xmlns:a="http://schemas.openxmlformats.org/drawingml/2006/main" xmlns:r="http://schemas.openxmlformats.org/officeDocument/2006/relationships">
+  <c:date1904 val="0"/>
+  <c:chart>
+    <c:autoTitleDeleted val="1"/>
+    <c:plotArea>
+      <c:lineChart>
+        <c:grouping val="standard"/>
+        <c:varyColors val="0"/>
+        <c:ser>
+          <c:idx val="0"/>
+          <c:order val="0"/>
+          <c:tx>
+            <c:strRef>
+              <c:f>Sheet1!$B$1</c:f>
+              <c:strCache>
+                <c:ptCount val="1"/>
+                <c:pt idx="0">
+                  <c:v>Revenue!</c:v>
+                </c:pt>
+              </c:strCache>
+            </c:strRef>
+          </c:tx>
+          <c:spPr>
+            <a:solidFill>
+              <a:srgbClr val="4E79A7"/>
+            </a:solidFill>
+            <a:ln w="25400">
+              <a:solidFill>
+                <a:srgbClr val="4E79A7"/>
+              </a:solidFill>
+              <a:prstDash val="dash"/>
+            </a:ln>
+          </c:spPr>
+          <c:marker>
+            <c:symbol val="none"/>
+          </c:marker>
+          <c:cat>
+            <c:strRef>
+              <c:f>Sheet1!$A$2:$A$5</c:f>
+              <c:strCache>
+                <c:ptCount val="4"/>
+                <c:pt idx="0">
+                  <c:v>Jan</c:v>
+                </c:pt>
+                <c:pt idx="1">
+                  <c:v>Feb</c:v>
+                </c:pt>
+                <c:pt idx="2">
+                  <c:v>Mar</c:v>
+                </c:pt>
+                <c:pt idx="3">
+                  <c:v>Apr</c:v>
+                </c:pt>
+              </c:strCache>
+            </c:strRef>
+          </c:cat>
+          <c:val>
+            <c:numRef>
+              <c:f>Sheet1!$B$2:$B$5</c:f>
+              <c:numCache>
+                <c:formatCode>General</c:formatCode>
+                <c:ptCount val="4"/>
+                <c:pt idx="0">
+                  <c:v>10</c:v>
+                </c:pt>
+                <c:pt idx="1">
+                  <c:v>14</c:v>
+                </c:pt>
+                <c:pt idx="2">
+                  <c:v>9</c:v>
+                </c:pt>
+                <c:pt idx="3">
+                  <c:v>18</c:v>
+                </c:pt>
+              </c:numCache>
+            </c:numRef>
+          </c:val>
+          <c:smooth val="0"/>
+        </c:ser>
+        <c:ser>
+          <c:idx val="1"/>
+          <c:order val="1"/>
+          <c:tx>
+            <c:strRef>
+              <c:f>Sheet1!$C$1</c:f>
+              <c:strCache>
+                <c:ptCount val="1"/>
+                <c:pt idx="0">
+                  <c:v>Cost!</c:v>
+                </c:pt>
+              </c:strCache>
+            </c:strRef>
+          </c:tx>
+          <c:spPr>
+            <a:solidFill>
+              <a:srgbClr val="F28E2B"/>
+            </a:solidFill>
+            <a:ln w="25400">
+              <a:solidFill>
+                <a:srgbClr val="F28E2B"/>
+              </a:solidFill>
+              <a:prstDash val="dash"/>
+            </a:ln>
+          </c:spPr>
+          <c:marker>
+            <c:symbol val="none"/>
+          </c:marker>
+          <c:cat>
+            <c:strRef>
+              <c:f>Sheet1!$A$2:$A$5</c:f>
+              <c:strCache>
+                <c:ptCount val="4"/>
+                <c:pt idx="0">
+                  <c:v>Jan</c:v>
+                </c:pt>
+                <c:pt idx="1">
+                  <c:v>Feb</c:v>
+                </c:pt>
+                <c:pt idx="2">
+                  <c:v>Mar</c:v>
+                </c:pt>
+                <c:pt idx="3">
+                  <c:v>Apr</c:v>
+                </c:pt>
+              </c:strCache>
+            </c:strRef>
+          </c:cat>
+          <c:val>
+            <c:numRef>
+              <c:f>Sheet1!$C$2:$C$5</c:f>
+              <c:numCache>
+                <c:formatCode>General</c:formatCode>
+                <c:ptCount val="4"/>
+                <c:pt idx="0">
+                  <c:v>2</c:v>
+                </c:pt>
+                <c:pt idx="1">
+                  <c:v>4</c:v>
+                </c:pt>
+                <c:pt idx="2">
+                  <c:v>3</c:v>
+                </c:pt>
+                <c:pt idx="3">
+                  <c:v>1</c:v>
+                </c:pt>
+              </c:numCache>
+            </c:numRef>
+          </c:val>
+          <c:smooth val="0"/>
+        </c:ser>
+        <c:marker val="1"/>
+        <c:smooth val="0"/>
+        <c:axId val="2118791784"/>
+        <c:axId val="2140495176"/>
+      </c:lineChart>
+      <c:catAx>
+        <c:axId val="2118791784"/>
+        <c:scaling>
+          <c:orientation val="minMax"/>
+        </c:scaling>
+        <c:delete val="0"/>
+        <c:axPos val="b"/>
+        <c:title>
+          <c:tx>
+            <c:rich>
+              <a:bodyPr/>
+              <a:lstStyle/>
+              <a:p>
+                <a:pPr>
+                  <a:defRPr sz="1400" b="1" i="0" u="none"/>
+                </a:pPr>
+                <a:r>
+                  <a:t>Revenue</a:t>
+                </a:r>
+              </a:p>
+            </c:rich>
+          </c:tx>
+          <c:layout/>
+          <c:overlay val="0"/>
+        </c:title>
+        <c:majorTickMark val="out"/>
+        <c:minorTickMark val="none"/>
+        <c:tickLblPos val="low"/>
+        <c:txPr>
+          <a:bodyPr/>
+          <a:lstStyle/>
+          <a:p>
+            <a:pPr>
+              <a:defRPr sz="1400"/>
+            </a:pPr>
+          </a:p>
+        </c:txPr>
+        <c:crossAx val="2140495176"/>
+        <c:crosses val="autoZero"/>
+        <c:auto val="1"/>
+        <c:lblAlgn val="ctr"/>
+        <c:lblOffset val="100"/>
+        <c:noMultiLvlLbl val="0"/>
+      </c:catAx>
+      <c:valAx>
+        <c:axId val="2140495176"/>
+        <c:scaling>
+          <c:max val="20.0"/>
           <c:min val="0.0"/>
         </c:scaling>
         <c:delete val="0"/>
@@ -7156,6 +7988,275 @@
 </p:sld>
 </file>
 
+<file path=ppt/slides/slide6.xml><?xml version="1.0" encoding="utf-8"?>
+<p:sld xmlns:a="http://schemas.openxmlformats.org/drawingml/2006/main" xmlns:p="http://schemas.openxmlformats.org/presentationml/2006/main" xmlns:r="http://schemas.openxmlformats.org/officeDocument/2006/relationships">
+  <p:cSld>
+    <p:spTree>
+      <p:nvGrpSpPr>
+        <p:cNvPr id="1" name=""/>
+        <p:cNvGrpSpPr/>
+        <p:nvPr/>
+      </p:nvGrpSpPr>
+      <p:grpSpPr/>
+      <p:sp>
+        <p:nvSpPr>
+          <p:cNvPr id="2" name="TextBox 1"/>
+          <p:cNvSpPr txBox="1"/>
+          <p:nvPr/>
+        </p:nvSpPr>
+        <p:spPr>
+          <a:xfrm>
+            <a:off x="457200" y="91440"/>
+            <a:ext cx="11430000" cy="731520"/>
+          </a:xfrm>
+          <a:prstGeom prst="rect">
+            <a:avLst/>
+          </a:prstGeom>
+          <a:noFill/>
+        </p:spPr>
+        <p:txBody>
+          <a:bodyPr wrap="none" anchor="t">
+            <a:spAutoFit/>
+          </a:bodyPr>
+          <a:lstStyle/>
+          <a:p>
+            <a:pPr algn="l"/>
+            <a:r>
+              <a:rPr sz="2000" b="1" i="0" u="none">
+                <a:solidFill>
+                  <a:srgbClr val="7F7F7F"/>
+                </a:solidFill>
+              </a:rPr>
+              <a:t>These should all be the same (except for legend names)</a:t>
+            </a:r>
+          </a:p>
+        </p:txBody>
+      </p:sp>
+      <p:graphicFrame>
+        <p:nvGraphicFramePr>
+          <p:cNvPr id="3" name="chart_1"/>
+          <p:cNvGraphicFramePr>
+            <a:graphicFrameLocks noGrp="1"/>
+          </p:cNvGraphicFramePr>
+          <p:nvPr/>
+        </p:nvGraphicFramePr>
+        <p:xfrm>
+          <a:off x="457200" y="1463040"/>
+          <a:ext cx="3813048" cy="4800600"/>
+        </p:xfrm>
+        <a:graphic>
+          <a:graphicData uri="http://schemas.openxmlformats.org/drawingml/2006/chart">
+            <c:chart xmlns:c="http://schemas.openxmlformats.org/drawingml/2006/chart" r:id="rId2"/>
+          </a:graphicData>
+        </a:graphic>
+      </p:graphicFrame>
+      <p:sp>
+        <p:nvSpPr>
+          <p:cNvPr id="4" name="TextBox 3"/>
+          <p:cNvSpPr txBox="1"/>
+          <p:nvPr/>
+        </p:nvSpPr>
+        <p:spPr>
+          <a:xfrm>
+            <a:off x="457200" y="1005840"/>
+            <a:ext cx="3813048" cy="457200"/>
+          </a:xfrm>
+          <a:prstGeom prst="rect">
+            <a:avLst/>
+          </a:prstGeom>
+          <a:noFill/>
+        </p:spPr>
+        <p:txBody>
+          <a:bodyPr wrap="none" anchor="t">
+            <a:spAutoFit/>
+          </a:bodyPr>
+          <a:lstStyle/>
+          <a:p>
+            <a:pPr algn="ctr"/>
+            <a:r>
+              <a:rPr sz="1600" b="1" i="0" u="sng">
+                <a:solidFill>
+                  <a:srgbClr val="000000"/>
+                </a:solidFill>
+              </a:rPr>
+              <a:t>Revenue Trend (Line) - Chart Title
+</a:t>
+            </a:r>
+            <a:r>
+              <a:rPr sz="1400" b="0" i="1" u="none">
+                <a:solidFill>
+                  <a:srgbClr val="000000"/>
+                </a:solidFill>
+              </a:rPr>
+              <a:t>2024 Actuals</a:t>
+            </a:r>
+          </a:p>
+        </p:txBody>
+      </p:sp>
+      <p:graphicFrame>
+        <p:nvGraphicFramePr>
+          <p:cNvPr id="5" name="chart_2"/>
+          <p:cNvGraphicFramePr>
+            <a:graphicFrameLocks noGrp="1"/>
+          </p:cNvGraphicFramePr>
+          <p:nvPr/>
+        </p:nvGraphicFramePr>
+        <p:xfrm>
+          <a:off x="4270248" y="1463040"/>
+          <a:ext cx="3813048" cy="4800600"/>
+        </p:xfrm>
+        <a:graphic>
+          <a:graphicData uri="http://schemas.openxmlformats.org/drawingml/2006/chart">
+            <c:chart xmlns:c="http://schemas.openxmlformats.org/drawingml/2006/chart" r:id="rId3"/>
+          </a:graphicData>
+        </a:graphic>
+      </p:graphicFrame>
+      <p:sp>
+        <p:nvSpPr>
+          <p:cNvPr id="6" name="TextBox 5"/>
+          <p:cNvSpPr txBox="1"/>
+          <p:nvPr/>
+        </p:nvSpPr>
+        <p:spPr>
+          <a:xfrm>
+            <a:off x="4270248" y="1005840"/>
+            <a:ext cx="3813048" cy="457200"/>
+          </a:xfrm>
+          <a:prstGeom prst="rect">
+            <a:avLst/>
+          </a:prstGeom>
+          <a:noFill/>
+        </p:spPr>
+        <p:txBody>
+          <a:bodyPr wrap="none" anchor="t">
+            <a:spAutoFit/>
+          </a:bodyPr>
+          <a:lstStyle/>
+          <a:p>
+            <a:pPr algn="ctr"/>
+            <a:r>
+              <a:rPr sz="1600" b="1" i="0" u="sng">
+                <a:solidFill>
+                  <a:srgbClr val="000000"/>
+                </a:solidFill>
+              </a:rPr>
+              <a:t>Revenue Trend (Line) - Chart Title
+</a:t>
+            </a:r>
+            <a:r>
+              <a:rPr sz="1400" b="0" i="1" u="none">
+                <a:solidFill>
+                  <a:srgbClr val="000000"/>
+                </a:solidFill>
+              </a:rPr>
+              <a:t>2024 Actuals</a:t>
+            </a:r>
+          </a:p>
+        </p:txBody>
+      </p:sp>
+      <p:graphicFrame>
+        <p:nvGraphicFramePr>
+          <p:cNvPr id="7" name="chart_3"/>
+          <p:cNvGraphicFramePr>
+            <a:graphicFrameLocks noGrp="1"/>
+          </p:cNvGraphicFramePr>
+          <p:nvPr/>
+        </p:nvGraphicFramePr>
+        <p:xfrm>
+          <a:off x="8083296" y="1463040"/>
+          <a:ext cx="3813048" cy="4800600"/>
+        </p:xfrm>
+        <a:graphic>
+          <a:graphicData uri="http://schemas.openxmlformats.org/drawingml/2006/chart">
+            <c:chart xmlns:c="http://schemas.openxmlformats.org/drawingml/2006/chart" r:id="rId4"/>
+          </a:graphicData>
+        </a:graphic>
+      </p:graphicFrame>
+      <p:sp>
+        <p:nvSpPr>
+          <p:cNvPr id="8" name="TextBox 7"/>
+          <p:cNvSpPr txBox="1"/>
+          <p:nvPr/>
+        </p:nvSpPr>
+        <p:spPr>
+          <a:xfrm>
+            <a:off x="8083296" y="1005840"/>
+            <a:ext cx="3813048" cy="457200"/>
+          </a:xfrm>
+          <a:prstGeom prst="rect">
+            <a:avLst/>
+          </a:prstGeom>
+          <a:noFill/>
+        </p:spPr>
+        <p:txBody>
+          <a:bodyPr wrap="none" anchor="t">
+            <a:spAutoFit/>
+          </a:bodyPr>
+          <a:lstStyle/>
+          <a:p>
+            <a:pPr algn="ctr"/>
+            <a:r>
+              <a:rPr sz="1600" b="1" i="0" u="sng">
+                <a:solidFill>
+                  <a:srgbClr val="000000"/>
+                </a:solidFill>
+              </a:rPr>
+              <a:t>Revenue Trend (Line) - Chart Title
+</a:t>
+            </a:r>
+            <a:r>
+              <a:rPr sz="1400" b="0" i="1" u="none">
+                <a:solidFill>
+                  <a:srgbClr val="000000"/>
+                </a:solidFill>
+              </a:rPr>
+              <a:t>2024 Actuals</a:t>
+            </a:r>
+          </a:p>
+        </p:txBody>
+      </p:sp>
+      <p:sp>
+        <p:nvSpPr>
+          <p:cNvPr id="9" name="TextBox 8"/>
+          <p:cNvSpPr txBox="1"/>
+          <p:nvPr/>
+        </p:nvSpPr>
+        <p:spPr>
+          <a:xfrm>
+            <a:off x="457200" y="6263640"/>
+            <a:ext cx="11430000" cy="365760"/>
+          </a:xfrm>
+          <a:prstGeom prst="rect">
+            <a:avLst/>
+          </a:prstGeom>
+          <a:noFill/>
+        </p:spPr>
+        <p:txBody>
+          <a:bodyPr wrap="none" anchor="t">
+            <a:spAutoFit/>
+          </a:bodyPr>
+          <a:lstStyle/>
+          <a:p>
+            <a:pPr algn="l"/>
+            <a:r>
+              <a:rPr sz="1000" b="0" i="0" u="none">
+                <a:solidFill>
+                  <a:srgbClr val="000000"/>
+                </a:solidFill>
+              </a:rPr>
+              <a:t>Notes: Adjusted for recent acquisitions.</a:t>
+            </a:r>
+          </a:p>
+        </p:txBody>
+      </p:sp>
+    </p:spTree>
+  </p:cSld>
+  <p:clrMapOvr>
+    <a:masterClrMapping/>
+  </p:clrMapOvr>
+</p:sld>
+</file>
+
 <file path=ppt/theme/theme1.xml><?xml version="1.0" encoding="utf-8"?>
 <a:theme xmlns:a="http://schemas.openxmlformats.org/drawingml/2006/main" name="Simple Light">
   <a:themeElements>

--- a/notebooks/demo.pptx
+++ b/notebooks/demo.pptx
@@ -14,6 +14,7 @@
     <p:sldId id="259" r:id="rId21"/>
     <p:sldId id="260" r:id="rId22"/>
     <p:sldId id="261" r:id="rId23"/>
+    <p:sldId id="262" r:id="rId24"/>
   </p:sldIdLst>
   <p:sldSz cx="12188825" cy="6858000"/>
   <p:notesSz cx="6858000" cy="9144000"/>
@@ -1322,6 +1323,837 @@
         <c:axId val="2140495176"/>
         <c:scaling>
           <c:max val="20.0"/>
+          <c:min val="0.0"/>
+        </c:scaling>
+        <c:delete val="0"/>
+        <c:axPos val="l"/>
+        <c:title>
+          <c:tx>
+            <c:rich>
+              <a:bodyPr/>
+              <a:lstStyle/>
+              <a:p>
+                <a:pPr>
+                  <a:defRPr sz="1400" b="1" i="0" u="none"/>
+                </a:pPr>
+                <a:r>
+                  <a:t>Month</a:t>
+                </a:r>
+              </a:p>
+            </c:rich>
+          </c:tx>
+          <c:layout/>
+          <c:overlay val="0"/>
+        </c:title>
+        <c:numFmt formatCode="$0.0" sourceLinked="0"/>
+        <c:majorTickMark val="out"/>
+        <c:minorTickMark val="none"/>
+        <c:tickLblPos val="nextTo"/>
+        <c:txPr>
+          <a:bodyPr/>
+          <a:lstStyle/>
+          <a:p>
+            <a:pPr>
+              <a:defRPr sz="1400"/>
+            </a:pPr>
+          </a:p>
+        </c:txPr>
+        <c:crossAx val="2118791784"/>
+        <c:crosses val="autoZero"/>
+      </c:valAx>
+    </c:plotArea>
+    <c:legend>
+      <c:legendPos val="b"/>
+      <c:layout/>
+      <c:overlay val="0"/>
+      <c:txPr>
+        <a:bodyPr/>
+        <a:lstStyle/>
+        <a:p>
+          <a:pPr>
+            <a:defRPr sz="1400"/>
+          </a:pPr>
+        </a:p>
+      </c:txPr>
+    </c:legend>
+    <c:plotVisOnly val="1"/>
+    <c:dispBlanksAs val="gap"/>
+    <c:showDLblsOverMax val="0"/>
+  </c:chart>
+  <c:txPr>
+    <a:bodyPr/>
+    <a:lstStyle/>
+    <a:p>
+      <a:pPr>
+        <a:defRPr sz="1800"/>
+      </a:pPr>
+      <a:endParaRPr lang="en-US"/>
+    </a:p>
+  </c:txPr>
+  <c:externalData r:id="rId1">
+    <c:autoUpdate val="0"/>
+  </c:externalData>
+</c:chartSpace>
+</file>
+
+<file path=ppt/charts/chart13.xml><?xml version="1.0" encoding="utf-8"?>
+<c:chartSpace xmlns:c="http://schemas.openxmlformats.org/drawingml/2006/chart" xmlns:a="http://schemas.openxmlformats.org/drawingml/2006/main" xmlns:r="http://schemas.openxmlformats.org/officeDocument/2006/relationships">
+  <c:date1904 val="0"/>
+  <c:chart>
+    <c:autoTitleDeleted val="1"/>
+    <c:plotArea>
+      <c:lineChart>
+        <c:grouping val="standard"/>
+        <c:varyColors val="0"/>
+        <c:ser>
+          <c:idx val="0"/>
+          <c:order val="0"/>
+          <c:tx>
+            <c:strRef>
+              <c:f>Sheet1!$B$1</c:f>
+              <c:strCache>
+                <c:ptCount val="1"/>
+                <c:pt idx="0">
+                  <c:v>Revenue!</c:v>
+                </c:pt>
+              </c:strCache>
+            </c:strRef>
+          </c:tx>
+          <c:spPr>
+            <a:solidFill>
+              <a:srgbClr val="4E79A7"/>
+            </a:solidFill>
+            <a:ln w="25400">
+              <a:solidFill>
+                <a:srgbClr val="4E79A7"/>
+              </a:solidFill>
+              <a:prstDash val="dash"/>
+            </a:ln>
+          </c:spPr>
+          <c:marker>
+            <c:symbol val="none"/>
+          </c:marker>
+          <c:cat>
+            <c:strRef>
+              <c:f>Sheet1!$A$2:$A$5</c:f>
+              <c:strCache>
+                <c:ptCount val="4"/>
+                <c:pt idx="0">
+                  <c:v>Jan</c:v>
+                </c:pt>
+                <c:pt idx="1">
+                  <c:v>Feb</c:v>
+                </c:pt>
+                <c:pt idx="2">
+                  <c:v>Mar</c:v>
+                </c:pt>
+                <c:pt idx="3">
+                  <c:v>Apr</c:v>
+                </c:pt>
+              </c:strCache>
+            </c:strRef>
+          </c:cat>
+          <c:val>
+            <c:numRef>
+              <c:f>Sheet1!$B$2:$B$5</c:f>
+              <c:numCache>
+                <c:formatCode>General</c:formatCode>
+                <c:ptCount val="4"/>
+                <c:pt idx="0">
+                  <c:v>10</c:v>
+                </c:pt>
+                <c:pt idx="1">
+                  <c:v>14</c:v>
+                </c:pt>
+                <c:pt idx="2">
+                  <c:v>9</c:v>
+                </c:pt>
+                <c:pt idx="3">
+                  <c:v>18</c:v>
+                </c:pt>
+              </c:numCache>
+            </c:numRef>
+          </c:val>
+          <c:smooth val="0"/>
+        </c:ser>
+        <c:ser>
+          <c:idx val="1"/>
+          <c:order val="1"/>
+          <c:tx>
+            <c:strRef>
+              <c:f>Sheet1!$C$1</c:f>
+              <c:strCache>
+                <c:ptCount val="1"/>
+                <c:pt idx="0">
+                  <c:v>Cost!</c:v>
+                </c:pt>
+              </c:strCache>
+            </c:strRef>
+          </c:tx>
+          <c:spPr>
+            <a:solidFill>
+              <a:srgbClr val="F28E2B"/>
+            </a:solidFill>
+            <a:ln w="25400">
+              <a:solidFill>
+                <a:srgbClr val="F28E2B"/>
+              </a:solidFill>
+              <a:prstDash val="dash"/>
+            </a:ln>
+          </c:spPr>
+          <c:marker>
+            <c:symbol val="none"/>
+          </c:marker>
+          <c:cat>
+            <c:strRef>
+              <c:f>Sheet1!$A$2:$A$5</c:f>
+              <c:strCache>
+                <c:ptCount val="4"/>
+                <c:pt idx="0">
+                  <c:v>Jan</c:v>
+                </c:pt>
+                <c:pt idx="1">
+                  <c:v>Feb</c:v>
+                </c:pt>
+                <c:pt idx="2">
+                  <c:v>Mar</c:v>
+                </c:pt>
+                <c:pt idx="3">
+                  <c:v>Apr</c:v>
+                </c:pt>
+              </c:strCache>
+            </c:strRef>
+          </c:cat>
+          <c:val>
+            <c:numRef>
+              <c:f>Sheet1!$C$2:$C$5</c:f>
+              <c:numCache>
+                <c:formatCode>General</c:formatCode>
+                <c:ptCount val="4"/>
+                <c:pt idx="0">
+                  <c:v>2</c:v>
+                </c:pt>
+                <c:pt idx="1">
+                  <c:v>4</c:v>
+                </c:pt>
+                <c:pt idx="2">
+                  <c:v>3</c:v>
+                </c:pt>
+                <c:pt idx="3">
+                  <c:v>1</c:v>
+                </c:pt>
+              </c:numCache>
+            </c:numRef>
+          </c:val>
+          <c:smooth val="0"/>
+        </c:ser>
+        <c:marker val="1"/>
+        <c:smooth val="0"/>
+        <c:axId val="2118791784"/>
+        <c:axId val="2140495176"/>
+      </c:lineChart>
+      <c:catAx>
+        <c:axId val="2118791784"/>
+        <c:scaling>
+          <c:orientation val="minMax"/>
+        </c:scaling>
+        <c:delete val="0"/>
+        <c:axPos val="b"/>
+        <c:title>
+          <c:tx>
+            <c:rich>
+              <a:bodyPr/>
+              <a:lstStyle/>
+              <a:p>
+                <a:pPr>
+                  <a:defRPr sz="1400" b="1" i="0" u="none"/>
+                </a:pPr>
+                <a:r>
+                  <a:t>Revenue</a:t>
+                </a:r>
+              </a:p>
+            </c:rich>
+          </c:tx>
+          <c:layout/>
+          <c:overlay val="0"/>
+        </c:title>
+        <c:majorTickMark val="out"/>
+        <c:minorTickMark val="none"/>
+        <c:tickLblPos val="low"/>
+        <c:txPr>
+          <a:bodyPr/>
+          <a:lstStyle/>
+          <a:p>
+            <a:pPr>
+              <a:defRPr sz="1400"/>
+            </a:pPr>
+          </a:p>
+        </c:txPr>
+        <c:crossAx val="2140495176"/>
+        <c:crosses val="autoZero"/>
+        <c:auto val="1"/>
+        <c:lblAlgn val="ctr"/>
+        <c:lblOffset val="100"/>
+        <c:noMultiLvlLbl val="0"/>
+      </c:catAx>
+      <c:valAx>
+        <c:axId val="2140495176"/>
+        <c:scaling>
+          <c:max val="30.0"/>
+          <c:min val="0.0"/>
+        </c:scaling>
+        <c:delete val="0"/>
+        <c:axPos val="l"/>
+        <c:title>
+          <c:tx>
+            <c:rich>
+              <a:bodyPr/>
+              <a:lstStyle/>
+              <a:p>
+                <a:pPr>
+                  <a:defRPr sz="1400" b="1" i="0" u="none"/>
+                </a:pPr>
+                <a:r>
+                  <a:t>Month</a:t>
+                </a:r>
+              </a:p>
+            </c:rich>
+          </c:tx>
+          <c:layout/>
+          <c:overlay val="0"/>
+        </c:title>
+        <c:numFmt formatCode="$0.0" sourceLinked="0"/>
+        <c:majorTickMark val="out"/>
+        <c:minorTickMark val="none"/>
+        <c:tickLblPos val="nextTo"/>
+        <c:txPr>
+          <a:bodyPr/>
+          <a:lstStyle/>
+          <a:p>
+            <a:pPr>
+              <a:defRPr sz="1400"/>
+            </a:pPr>
+          </a:p>
+        </c:txPr>
+        <c:crossAx val="2118791784"/>
+        <c:crosses val="autoZero"/>
+      </c:valAx>
+    </c:plotArea>
+    <c:legend>
+      <c:legendPos val="b"/>
+      <c:layout/>
+      <c:overlay val="0"/>
+      <c:txPr>
+        <a:bodyPr/>
+        <a:lstStyle/>
+        <a:p>
+          <a:pPr>
+            <a:defRPr sz="1400"/>
+          </a:pPr>
+        </a:p>
+      </c:txPr>
+    </c:legend>
+    <c:plotVisOnly val="1"/>
+    <c:dispBlanksAs val="gap"/>
+    <c:showDLblsOverMax val="0"/>
+  </c:chart>
+  <c:txPr>
+    <a:bodyPr/>
+    <a:lstStyle/>
+    <a:p>
+      <a:pPr>
+        <a:defRPr sz="1800"/>
+      </a:pPr>
+      <a:endParaRPr lang="en-US"/>
+    </a:p>
+  </c:txPr>
+  <c:externalData r:id="rId1">
+    <c:autoUpdate val="0"/>
+  </c:externalData>
+</c:chartSpace>
+</file>
+
+<file path=ppt/charts/chart14.xml><?xml version="1.0" encoding="utf-8"?>
+<c:chartSpace xmlns:c="http://schemas.openxmlformats.org/drawingml/2006/chart" xmlns:a="http://schemas.openxmlformats.org/drawingml/2006/main" xmlns:r="http://schemas.openxmlformats.org/officeDocument/2006/relationships">
+  <c:date1904 val="0"/>
+  <c:chart>
+    <c:autoTitleDeleted val="1"/>
+    <c:plotArea>
+      <c:lineChart>
+        <c:grouping val="standard"/>
+        <c:varyColors val="0"/>
+        <c:ser>
+          <c:idx val="0"/>
+          <c:order val="0"/>
+          <c:tx>
+            <c:strRef>
+              <c:f>Sheet1!$B$1</c:f>
+              <c:strCache>
+                <c:ptCount val="1"/>
+                <c:pt idx="0">
+                  <c:v>revenue</c:v>
+                </c:pt>
+              </c:strCache>
+            </c:strRef>
+          </c:tx>
+          <c:spPr>
+            <a:solidFill>
+              <a:srgbClr val="4E79A7"/>
+            </a:solidFill>
+            <a:ln w="25400">
+              <a:solidFill>
+                <a:srgbClr val="4E79A7"/>
+              </a:solidFill>
+              <a:prstDash val="dash"/>
+            </a:ln>
+          </c:spPr>
+          <c:marker>
+            <c:symbol val="none"/>
+          </c:marker>
+          <c:cat>
+            <c:strRef>
+              <c:f>Sheet1!$A$2:$A$5</c:f>
+              <c:strCache>
+                <c:ptCount val="4"/>
+                <c:pt idx="0">
+                  <c:v>Jan</c:v>
+                </c:pt>
+                <c:pt idx="1">
+                  <c:v>Feb</c:v>
+                </c:pt>
+                <c:pt idx="2">
+                  <c:v>Mar</c:v>
+                </c:pt>
+                <c:pt idx="3">
+                  <c:v>Apr</c:v>
+                </c:pt>
+              </c:strCache>
+            </c:strRef>
+          </c:cat>
+          <c:val>
+            <c:numRef>
+              <c:f>Sheet1!$B$2:$B$5</c:f>
+              <c:numCache>
+                <c:formatCode>General</c:formatCode>
+                <c:ptCount val="4"/>
+                <c:pt idx="0">
+                  <c:v>10</c:v>
+                </c:pt>
+                <c:pt idx="1">
+                  <c:v>14</c:v>
+                </c:pt>
+                <c:pt idx="2">
+                  <c:v>9</c:v>
+                </c:pt>
+                <c:pt idx="3">
+                  <c:v>18</c:v>
+                </c:pt>
+              </c:numCache>
+            </c:numRef>
+          </c:val>
+          <c:smooth val="0"/>
+        </c:ser>
+        <c:ser>
+          <c:idx val="1"/>
+          <c:order val="1"/>
+          <c:tx>
+            <c:strRef>
+              <c:f>Sheet1!$C$1</c:f>
+              <c:strCache>
+                <c:ptCount val="1"/>
+                <c:pt idx="0">
+                  <c:v>cost</c:v>
+                </c:pt>
+              </c:strCache>
+            </c:strRef>
+          </c:tx>
+          <c:spPr>
+            <a:solidFill>
+              <a:srgbClr val="F28E2B"/>
+            </a:solidFill>
+            <a:ln w="25400">
+              <a:solidFill>
+                <a:srgbClr val="F28E2B"/>
+              </a:solidFill>
+              <a:prstDash val="dash"/>
+            </a:ln>
+          </c:spPr>
+          <c:marker>
+            <c:symbol val="none"/>
+          </c:marker>
+          <c:cat>
+            <c:strRef>
+              <c:f>Sheet1!$A$2:$A$5</c:f>
+              <c:strCache>
+                <c:ptCount val="4"/>
+                <c:pt idx="0">
+                  <c:v>Jan</c:v>
+                </c:pt>
+                <c:pt idx="1">
+                  <c:v>Feb</c:v>
+                </c:pt>
+                <c:pt idx="2">
+                  <c:v>Mar</c:v>
+                </c:pt>
+                <c:pt idx="3">
+                  <c:v>Apr</c:v>
+                </c:pt>
+              </c:strCache>
+            </c:strRef>
+          </c:cat>
+          <c:val>
+            <c:numRef>
+              <c:f>Sheet1!$C$2:$C$5</c:f>
+              <c:numCache>
+                <c:formatCode>General</c:formatCode>
+                <c:ptCount val="4"/>
+                <c:pt idx="0">
+                  <c:v>2</c:v>
+                </c:pt>
+                <c:pt idx="1">
+                  <c:v>4</c:v>
+                </c:pt>
+                <c:pt idx="2">
+                  <c:v>3</c:v>
+                </c:pt>
+                <c:pt idx="3">
+                  <c:v>1</c:v>
+                </c:pt>
+              </c:numCache>
+            </c:numRef>
+          </c:val>
+          <c:smooth val="0"/>
+        </c:ser>
+        <c:marker val="1"/>
+        <c:smooth val="0"/>
+        <c:axId val="2118791784"/>
+        <c:axId val="2140495176"/>
+      </c:lineChart>
+      <c:catAx>
+        <c:axId val="2118791784"/>
+        <c:scaling>
+          <c:orientation val="minMax"/>
+        </c:scaling>
+        <c:delete val="0"/>
+        <c:axPos val="b"/>
+        <c:title>
+          <c:tx>
+            <c:rich>
+              <a:bodyPr/>
+              <a:lstStyle/>
+              <a:p>
+                <a:pPr>
+                  <a:defRPr sz="1400" b="1" i="0" u="none"/>
+                </a:pPr>
+                <a:r>
+                  <a:t>Revenue</a:t>
+                </a:r>
+              </a:p>
+            </c:rich>
+          </c:tx>
+          <c:layout/>
+          <c:overlay val="0"/>
+        </c:title>
+        <c:majorTickMark val="out"/>
+        <c:minorTickMark val="none"/>
+        <c:tickLblPos val="low"/>
+        <c:txPr>
+          <a:bodyPr/>
+          <a:lstStyle/>
+          <a:p>
+            <a:pPr>
+              <a:defRPr sz="1400"/>
+            </a:pPr>
+          </a:p>
+        </c:txPr>
+        <c:crossAx val="2140495176"/>
+        <c:crosses val="autoZero"/>
+        <c:auto val="1"/>
+        <c:lblAlgn val="ctr"/>
+        <c:lblOffset val="100"/>
+        <c:noMultiLvlLbl val="0"/>
+      </c:catAx>
+      <c:valAx>
+        <c:axId val="2140495176"/>
+        <c:scaling>
+          <c:max val="30.0"/>
+          <c:min val="0.0"/>
+        </c:scaling>
+        <c:delete val="0"/>
+        <c:axPos val="l"/>
+        <c:title>
+          <c:tx>
+            <c:rich>
+              <a:bodyPr/>
+              <a:lstStyle/>
+              <a:p>
+                <a:pPr>
+                  <a:defRPr sz="1400" b="1" i="0" u="none"/>
+                </a:pPr>
+                <a:r>
+                  <a:t>Month</a:t>
+                </a:r>
+              </a:p>
+            </c:rich>
+          </c:tx>
+          <c:layout/>
+          <c:overlay val="0"/>
+        </c:title>
+        <c:numFmt formatCode="$0.0" sourceLinked="0"/>
+        <c:majorTickMark val="out"/>
+        <c:minorTickMark val="none"/>
+        <c:tickLblPos val="nextTo"/>
+        <c:txPr>
+          <a:bodyPr/>
+          <a:lstStyle/>
+          <a:p>
+            <a:pPr>
+              <a:defRPr sz="1400"/>
+            </a:pPr>
+          </a:p>
+        </c:txPr>
+        <c:crossAx val="2118791784"/>
+        <c:crosses val="autoZero"/>
+      </c:valAx>
+    </c:plotArea>
+    <c:legend>
+      <c:legendPos val="b"/>
+      <c:layout/>
+      <c:overlay val="0"/>
+      <c:txPr>
+        <a:bodyPr/>
+        <a:lstStyle/>
+        <a:p>
+          <a:pPr>
+            <a:defRPr sz="1400"/>
+          </a:pPr>
+        </a:p>
+      </c:txPr>
+    </c:legend>
+    <c:plotVisOnly val="1"/>
+    <c:dispBlanksAs val="gap"/>
+    <c:showDLblsOverMax val="0"/>
+  </c:chart>
+  <c:txPr>
+    <a:bodyPr/>
+    <a:lstStyle/>
+    <a:p>
+      <a:pPr>
+        <a:defRPr sz="1800"/>
+      </a:pPr>
+      <a:endParaRPr lang="en-US"/>
+    </a:p>
+  </c:txPr>
+  <c:externalData r:id="rId1">
+    <c:autoUpdate val="0"/>
+  </c:externalData>
+</c:chartSpace>
+</file>
+
+<file path=ppt/charts/chart15.xml><?xml version="1.0" encoding="utf-8"?>
+<c:chartSpace xmlns:c="http://schemas.openxmlformats.org/drawingml/2006/chart" xmlns:a="http://schemas.openxmlformats.org/drawingml/2006/main" xmlns:r="http://schemas.openxmlformats.org/officeDocument/2006/relationships">
+  <c:date1904 val="0"/>
+  <c:chart>
+    <c:autoTitleDeleted val="1"/>
+    <c:plotArea>
+      <c:lineChart>
+        <c:grouping val="standard"/>
+        <c:varyColors val="0"/>
+        <c:ser>
+          <c:idx val="0"/>
+          <c:order val="0"/>
+          <c:tx>
+            <c:strRef>
+              <c:f>Sheet1!$B$1</c:f>
+              <c:strCache>
+                <c:ptCount val="1"/>
+                <c:pt idx="0">
+                  <c:v>Revenue!</c:v>
+                </c:pt>
+              </c:strCache>
+            </c:strRef>
+          </c:tx>
+          <c:spPr>
+            <a:solidFill>
+              <a:srgbClr val="4E79A7"/>
+            </a:solidFill>
+            <a:ln w="25400">
+              <a:solidFill>
+                <a:srgbClr val="4E79A7"/>
+              </a:solidFill>
+              <a:prstDash val="dash"/>
+            </a:ln>
+          </c:spPr>
+          <c:marker>
+            <c:symbol val="none"/>
+          </c:marker>
+          <c:cat>
+            <c:strRef>
+              <c:f>Sheet1!$A$2:$A$5</c:f>
+              <c:strCache>
+                <c:ptCount val="4"/>
+                <c:pt idx="0">
+                  <c:v>Jan</c:v>
+                </c:pt>
+                <c:pt idx="1">
+                  <c:v>Feb</c:v>
+                </c:pt>
+                <c:pt idx="2">
+                  <c:v>Mar</c:v>
+                </c:pt>
+                <c:pt idx="3">
+                  <c:v>Apr</c:v>
+                </c:pt>
+              </c:strCache>
+            </c:strRef>
+          </c:cat>
+          <c:val>
+            <c:numRef>
+              <c:f>Sheet1!$B$2:$B$5</c:f>
+              <c:numCache>
+                <c:formatCode>General</c:formatCode>
+                <c:ptCount val="4"/>
+                <c:pt idx="0">
+                  <c:v>10</c:v>
+                </c:pt>
+                <c:pt idx="1">
+                  <c:v>14</c:v>
+                </c:pt>
+                <c:pt idx="2">
+                  <c:v>9</c:v>
+                </c:pt>
+                <c:pt idx="3">
+                  <c:v>18</c:v>
+                </c:pt>
+              </c:numCache>
+            </c:numRef>
+          </c:val>
+          <c:smooth val="0"/>
+        </c:ser>
+        <c:ser>
+          <c:idx val="1"/>
+          <c:order val="1"/>
+          <c:tx>
+            <c:strRef>
+              <c:f>Sheet1!$C$1</c:f>
+              <c:strCache>
+                <c:ptCount val="1"/>
+                <c:pt idx="0">
+                  <c:v>Cost!</c:v>
+                </c:pt>
+              </c:strCache>
+            </c:strRef>
+          </c:tx>
+          <c:spPr>
+            <a:solidFill>
+              <a:srgbClr val="F28E2B"/>
+            </a:solidFill>
+            <a:ln w="25400">
+              <a:solidFill>
+                <a:srgbClr val="F28E2B"/>
+              </a:solidFill>
+              <a:prstDash val="dash"/>
+            </a:ln>
+          </c:spPr>
+          <c:marker>
+            <c:symbol val="none"/>
+          </c:marker>
+          <c:cat>
+            <c:strRef>
+              <c:f>Sheet1!$A$2:$A$5</c:f>
+              <c:strCache>
+                <c:ptCount val="4"/>
+                <c:pt idx="0">
+                  <c:v>Jan</c:v>
+                </c:pt>
+                <c:pt idx="1">
+                  <c:v>Feb</c:v>
+                </c:pt>
+                <c:pt idx="2">
+                  <c:v>Mar</c:v>
+                </c:pt>
+                <c:pt idx="3">
+                  <c:v>Apr</c:v>
+                </c:pt>
+              </c:strCache>
+            </c:strRef>
+          </c:cat>
+          <c:val>
+            <c:numRef>
+              <c:f>Sheet1!$C$2:$C$5</c:f>
+              <c:numCache>
+                <c:formatCode>General</c:formatCode>
+                <c:ptCount val="4"/>
+                <c:pt idx="0">
+                  <c:v>2</c:v>
+                </c:pt>
+                <c:pt idx="1">
+                  <c:v>4</c:v>
+                </c:pt>
+                <c:pt idx="2">
+                  <c:v>3</c:v>
+                </c:pt>
+                <c:pt idx="3">
+                  <c:v>1</c:v>
+                </c:pt>
+              </c:numCache>
+            </c:numRef>
+          </c:val>
+          <c:smooth val="0"/>
+        </c:ser>
+        <c:marker val="1"/>
+        <c:smooth val="0"/>
+        <c:axId val="2118791784"/>
+        <c:axId val="2140495176"/>
+      </c:lineChart>
+      <c:catAx>
+        <c:axId val="2118791784"/>
+        <c:scaling>
+          <c:orientation val="minMax"/>
+        </c:scaling>
+        <c:delete val="0"/>
+        <c:axPos val="b"/>
+        <c:title>
+          <c:tx>
+            <c:rich>
+              <a:bodyPr/>
+              <a:lstStyle/>
+              <a:p>
+                <a:pPr>
+                  <a:defRPr sz="1400" b="1" i="0" u="none"/>
+                </a:pPr>
+                <a:r>
+                  <a:t>Revenue</a:t>
+                </a:r>
+              </a:p>
+            </c:rich>
+          </c:tx>
+          <c:layout/>
+          <c:overlay val="0"/>
+        </c:title>
+        <c:majorTickMark val="out"/>
+        <c:minorTickMark val="none"/>
+        <c:tickLblPos val="low"/>
+        <c:txPr>
+          <a:bodyPr/>
+          <a:lstStyle/>
+          <a:p>
+            <a:pPr>
+              <a:defRPr sz="1400"/>
+            </a:pPr>
+          </a:p>
+        </c:txPr>
+        <c:crossAx val="2140495176"/>
+        <c:crosses val="autoZero"/>
+        <c:auto val="1"/>
+        <c:lblAlgn val="ctr"/>
+        <c:lblOffset val="100"/>
+        <c:noMultiLvlLbl val="0"/>
+      </c:catAx>
+      <c:valAx>
+        <c:axId val="2140495176"/>
+        <c:scaling>
+          <c:max val="30.0"/>
           <c:min val="0.0"/>
         </c:scaling>
         <c:delete val="0"/>
@@ -8257,6 +9089,275 @@
 </p:sld>
 </file>
 
+<file path=ppt/slides/slide7.xml><?xml version="1.0" encoding="utf-8"?>
+<p:sld xmlns:a="http://schemas.openxmlformats.org/drawingml/2006/main" xmlns:p="http://schemas.openxmlformats.org/presentationml/2006/main" xmlns:r="http://schemas.openxmlformats.org/officeDocument/2006/relationships">
+  <p:cSld>
+    <p:spTree>
+      <p:nvGrpSpPr>
+        <p:cNvPr id="1" name=""/>
+        <p:cNvGrpSpPr/>
+        <p:nvPr/>
+      </p:nvGrpSpPr>
+      <p:grpSpPr/>
+      <p:sp>
+        <p:nvSpPr>
+          <p:cNvPr id="2" name="TextBox 1"/>
+          <p:cNvSpPr txBox="1"/>
+          <p:nvPr/>
+        </p:nvSpPr>
+        <p:spPr>
+          <a:xfrm>
+            <a:off x="457200" y="91440"/>
+            <a:ext cx="11430000" cy="731520"/>
+          </a:xfrm>
+          <a:prstGeom prst="rect">
+            <a:avLst/>
+          </a:prstGeom>
+          <a:noFill/>
+        </p:spPr>
+        <p:txBody>
+          <a:bodyPr wrap="none" anchor="t">
+            <a:spAutoFit/>
+          </a:bodyPr>
+          <a:lstStyle/>
+          <a:p>
+            <a:pPr algn="l"/>
+            <a:r>
+              <a:rPr sz="2000" b="1" i="0" u="none">
+                <a:solidFill>
+                  <a:srgbClr val="7F7F7F"/>
+                </a:solidFill>
+              </a:rPr>
+              <a:t>These should all be the same (except for legend names)</a:t>
+            </a:r>
+          </a:p>
+        </p:txBody>
+      </p:sp>
+      <p:graphicFrame>
+        <p:nvGraphicFramePr>
+          <p:cNvPr id="3" name="chart_1"/>
+          <p:cNvGraphicFramePr>
+            <a:graphicFrameLocks noGrp="1"/>
+          </p:cNvGraphicFramePr>
+          <p:nvPr/>
+        </p:nvGraphicFramePr>
+        <p:xfrm>
+          <a:off x="457200" y="1463040"/>
+          <a:ext cx="3813048" cy="4800600"/>
+        </p:xfrm>
+        <a:graphic>
+          <a:graphicData uri="http://schemas.openxmlformats.org/drawingml/2006/chart">
+            <c:chart xmlns:c="http://schemas.openxmlformats.org/drawingml/2006/chart" r:id="rId2"/>
+          </a:graphicData>
+        </a:graphic>
+      </p:graphicFrame>
+      <p:sp>
+        <p:nvSpPr>
+          <p:cNvPr id="4" name="TextBox 3"/>
+          <p:cNvSpPr txBox="1"/>
+          <p:nvPr/>
+        </p:nvSpPr>
+        <p:spPr>
+          <a:xfrm>
+            <a:off x="457200" y="1005840"/>
+            <a:ext cx="3813048" cy="457200"/>
+          </a:xfrm>
+          <a:prstGeom prst="rect">
+            <a:avLst/>
+          </a:prstGeom>
+          <a:noFill/>
+        </p:spPr>
+        <p:txBody>
+          <a:bodyPr wrap="none" anchor="t">
+            <a:spAutoFit/>
+          </a:bodyPr>
+          <a:lstStyle/>
+          <a:p>
+            <a:pPr algn="ctr"/>
+            <a:r>
+              <a:rPr sz="1600" b="1" i="0" u="sng">
+                <a:solidFill>
+                  <a:srgbClr val="000000"/>
+                </a:solidFill>
+              </a:rPr>
+              <a:t>Revenue Trend (Line) - Chart Title
+</a:t>
+            </a:r>
+            <a:r>
+              <a:rPr sz="1400" b="0" i="1" u="none">
+                <a:solidFill>
+                  <a:srgbClr val="000000"/>
+                </a:solidFill>
+              </a:rPr>
+              <a:t>2024 Actuals</a:t>
+            </a:r>
+          </a:p>
+        </p:txBody>
+      </p:sp>
+      <p:graphicFrame>
+        <p:nvGraphicFramePr>
+          <p:cNvPr id="5" name="chart_2"/>
+          <p:cNvGraphicFramePr>
+            <a:graphicFrameLocks noGrp="1"/>
+          </p:cNvGraphicFramePr>
+          <p:nvPr/>
+        </p:nvGraphicFramePr>
+        <p:xfrm>
+          <a:off x="4270248" y="1463040"/>
+          <a:ext cx="3813048" cy="4800600"/>
+        </p:xfrm>
+        <a:graphic>
+          <a:graphicData uri="http://schemas.openxmlformats.org/drawingml/2006/chart">
+            <c:chart xmlns:c="http://schemas.openxmlformats.org/drawingml/2006/chart" r:id="rId3"/>
+          </a:graphicData>
+        </a:graphic>
+      </p:graphicFrame>
+      <p:sp>
+        <p:nvSpPr>
+          <p:cNvPr id="6" name="TextBox 5"/>
+          <p:cNvSpPr txBox="1"/>
+          <p:nvPr/>
+        </p:nvSpPr>
+        <p:spPr>
+          <a:xfrm>
+            <a:off x="4270248" y="1005840"/>
+            <a:ext cx="3813048" cy="457200"/>
+          </a:xfrm>
+          <a:prstGeom prst="rect">
+            <a:avLst/>
+          </a:prstGeom>
+          <a:noFill/>
+        </p:spPr>
+        <p:txBody>
+          <a:bodyPr wrap="none" anchor="t">
+            <a:spAutoFit/>
+          </a:bodyPr>
+          <a:lstStyle/>
+          <a:p>
+            <a:pPr algn="ctr"/>
+            <a:r>
+              <a:rPr sz="1600" b="1" i="0" u="sng">
+                <a:solidFill>
+                  <a:srgbClr val="000000"/>
+                </a:solidFill>
+              </a:rPr>
+              <a:t>Revenue Trend (Line) - Chart Title
+</a:t>
+            </a:r>
+            <a:r>
+              <a:rPr sz="1400" b="0" i="1" u="none">
+                <a:solidFill>
+                  <a:srgbClr val="000000"/>
+                </a:solidFill>
+              </a:rPr>
+              <a:t>2024 Actuals</a:t>
+            </a:r>
+          </a:p>
+        </p:txBody>
+      </p:sp>
+      <p:graphicFrame>
+        <p:nvGraphicFramePr>
+          <p:cNvPr id="7" name="chart_3"/>
+          <p:cNvGraphicFramePr>
+            <a:graphicFrameLocks noGrp="1"/>
+          </p:cNvGraphicFramePr>
+          <p:nvPr/>
+        </p:nvGraphicFramePr>
+        <p:xfrm>
+          <a:off x="8083296" y="1463040"/>
+          <a:ext cx="3813048" cy="4800600"/>
+        </p:xfrm>
+        <a:graphic>
+          <a:graphicData uri="http://schemas.openxmlformats.org/drawingml/2006/chart">
+            <c:chart xmlns:c="http://schemas.openxmlformats.org/drawingml/2006/chart" r:id="rId4"/>
+          </a:graphicData>
+        </a:graphic>
+      </p:graphicFrame>
+      <p:sp>
+        <p:nvSpPr>
+          <p:cNvPr id="8" name="TextBox 7"/>
+          <p:cNvSpPr txBox="1"/>
+          <p:nvPr/>
+        </p:nvSpPr>
+        <p:spPr>
+          <a:xfrm>
+            <a:off x="8083296" y="1005840"/>
+            <a:ext cx="3813048" cy="457200"/>
+          </a:xfrm>
+          <a:prstGeom prst="rect">
+            <a:avLst/>
+          </a:prstGeom>
+          <a:noFill/>
+        </p:spPr>
+        <p:txBody>
+          <a:bodyPr wrap="none" anchor="t">
+            <a:spAutoFit/>
+          </a:bodyPr>
+          <a:lstStyle/>
+          <a:p>
+            <a:pPr algn="ctr"/>
+            <a:r>
+              <a:rPr sz="1600" b="1" i="0" u="sng">
+                <a:solidFill>
+                  <a:srgbClr val="000000"/>
+                </a:solidFill>
+              </a:rPr>
+              <a:t>Revenue Trend (Line) - Chart Title
+</a:t>
+            </a:r>
+            <a:r>
+              <a:rPr sz="1400" b="0" i="1" u="none">
+                <a:solidFill>
+                  <a:srgbClr val="000000"/>
+                </a:solidFill>
+              </a:rPr>
+              <a:t>2024 Actuals</a:t>
+            </a:r>
+          </a:p>
+        </p:txBody>
+      </p:sp>
+      <p:sp>
+        <p:nvSpPr>
+          <p:cNvPr id="9" name="TextBox 8"/>
+          <p:cNvSpPr txBox="1"/>
+          <p:nvPr/>
+        </p:nvSpPr>
+        <p:spPr>
+          <a:xfrm>
+            <a:off x="457200" y="6263640"/>
+            <a:ext cx="11430000" cy="365760"/>
+          </a:xfrm>
+          <a:prstGeom prst="rect">
+            <a:avLst/>
+          </a:prstGeom>
+          <a:noFill/>
+        </p:spPr>
+        <p:txBody>
+          <a:bodyPr wrap="none" anchor="t">
+            <a:spAutoFit/>
+          </a:bodyPr>
+          <a:lstStyle/>
+          <a:p>
+            <a:pPr algn="l"/>
+            <a:r>
+              <a:rPr sz="1000" b="0" i="0" u="none">
+                <a:solidFill>
+                  <a:srgbClr val="000000"/>
+                </a:solidFill>
+              </a:rPr>
+              <a:t>Notes: Adjusted for recent acquisitions.</a:t>
+            </a:r>
+          </a:p>
+        </p:txBody>
+      </p:sp>
+    </p:spTree>
+  </p:cSld>
+  <p:clrMapOvr>
+    <a:masterClrMapping/>
+  </p:clrMapOvr>
+</p:sld>
+</file>
+
 <file path=ppt/theme/theme1.xml><?xml version="1.0" encoding="utf-8"?>
 <a:theme xmlns:a="http://schemas.openxmlformats.org/drawingml/2006/main" name="Simple Light">
   <a:themeElements>

--- a/notebooks/demo.pptx
+++ b/notebooks/demo.pptx
@@ -15,6 +15,7 @@
     <p:sldId id="260" r:id="rId22"/>
     <p:sldId id="261" r:id="rId23"/>
     <p:sldId id="262" r:id="rId24"/>
+    <p:sldId id="263" r:id="rId25"/>
   </p:sldIdLst>
   <p:sldSz cx="12188825" cy="6858000"/>
   <p:notesSz cx="6858000" cy="9144000"/>
@@ -1951,6 +1952,1114 @@
 </file>
 
 <file path=ppt/charts/chart15.xml><?xml version="1.0" encoding="utf-8"?>
+<c:chartSpace xmlns:c="http://schemas.openxmlformats.org/drawingml/2006/chart" xmlns:a="http://schemas.openxmlformats.org/drawingml/2006/main" xmlns:r="http://schemas.openxmlformats.org/officeDocument/2006/relationships">
+  <c:date1904 val="0"/>
+  <c:chart>
+    <c:autoTitleDeleted val="1"/>
+    <c:plotArea>
+      <c:lineChart>
+        <c:grouping val="standard"/>
+        <c:varyColors val="0"/>
+        <c:ser>
+          <c:idx val="0"/>
+          <c:order val="0"/>
+          <c:tx>
+            <c:strRef>
+              <c:f>Sheet1!$B$1</c:f>
+              <c:strCache>
+                <c:ptCount val="1"/>
+                <c:pt idx="0">
+                  <c:v>Revenue!</c:v>
+                </c:pt>
+              </c:strCache>
+            </c:strRef>
+          </c:tx>
+          <c:spPr>
+            <a:solidFill>
+              <a:srgbClr val="4E79A7"/>
+            </a:solidFill>
+            <a:ln w="25400">
+              <a:solidFill>
+                <a:srgbClr val="4E79A7"/>
+              </a:solidFill>
+              <a:prstDash val="dash"/>
+            </a:ln>
+          </c:spPr>
+          <c:marker>
+            <c:symbol val="none"/>
+          </c:marker>
+          <c:cat>
+            <c:strRef>
+              <c:f>Sheet1!$A$2:$A$5</c:f>
+              <c:strCache>
+                <c:ptCount val="4"/>
+                <c:pt idx="0">
+                  <c:v>Jan</c:v>
+                </c:pt>
+                <c:pt idx="1">
+                  <c:v>Feb</c:v>
+                </c:pt>
+                <c:pt idx="2">
+                  <c:v>Mar</c:v>
+                </c:pt>
+                <c:pt idx="3">
+                  <c:v>Apr</c:v>
+                </c:pt>
+              </c:strCache>
+            </c:strRef>
+          </c:cat>
+          <c:val>
+            <c:numRef>
+              <c:f>Sheet1!$B$2:$B$5</c:f>
+              <c:numCache>
+                <c:formatCode>General</c:formatCode>
+                <c:ptCount val="4"/>
+                <c:pt idx="0">
+                  <c:v>10</c:v>
+                </c:pt>
+                <c:pt idx="1">
+                  <c:v>14</c:v>
+                </c:pt>
+                <c:pt idx="2">
+                  <c:v>9</c:v>
+                </c:pt>
+                <c:pt idx="3">
+                  <c:v>18</c:v>
+                </c:pt>
+              </c:numCache>
+            </c:numRef>
+          </c:val>
+          <c:smooth val="0"/>
+        </c:ser>
+        <c:ser>
+          <c:idx val="1"/>
+          <c:order val="1"/>
+          <c:tx>
+            <c:strRef>
+              <c:f>Sheet1!$C$1</c:f>
+              <c:strCache>
+                <c:ptCount val="1"/>
+                <c:pt idx="0">
+                  <c:v>Cost!</c:v>
+                </c:pt>
+              </c:strCache>
+            </c:strRef>
+          </c:tx>
+          <c:spPr>
+            <a:solidFill>
+              <a:srgbClr val="F28E2B"/>
+            </a:solidFill>
+            <a:ln w="25400">
+              <a:solidFill>
+                <a:srgbClr val="F28E2B"/>
+              </a:solidFill>
+              <a:prstDash val="dash"/>
+            </a:ln>
+          </c:spPr>
+          <c:marker>
+            <c:symbol val="none"/>
+          </c:marker>
+          <c:cat>
+            <c:strRef>
+              <c:f>Sheet1!$A$2:$A$5</c:f>
+              <c:strCache>
+                <c:ptCount val="4"/>
+                <c:pt idx="0">
+                  <c:v>Jan</c:v>
+                </c:pt>
+                <c:pt idx="1">
+                  <c:v>Feb</c:v>
+                </c:pt>
+                <c:pt idx="2">
+                  <c:v>Mar</c:v>
+                </c:pt>
+                <c:pt idx="3">
+                  <c:v>Apr</c:v>
+                </c:pt>
+              </c:strCache>
+            </c:strRef>
+          </c:cat>
+          <c:val>
+            <c:numRef>
+              <c:f>Sheet1!$C$2:$C$5</c:f>
+              <c:numCache>
+                <c:formatCode>General</c:formatCode>
+                <c:ptCount val="4"/>
+                <c:pt idx="0">
+                  <c:v>2</c:v>
+                </c:pt>
+                <c:pt idx="1">
+                  <c:v>4</c:v>
+                </c:pt>
+                <c:pt idx="2">
+                  <c:v>3</c:v>
+                </c:pt>
+                <c:pt idx="3">
+                  <c:v>1</c:v>
+                </c:pt>
+              </c:numCache>
+            </c:numRef>
+          </c:val>
+          <c:smooth val="0"/>
+        </c:ser>
+        <c:marker val="1"/>
+        <c:smooth val="0"/>
+        <c:axId val="2118791784"/>
+        <c:axId val="2140495176"/>
+      </c:lineChart>
+      <c:catAx>
+        <c:axId val="2118791784"/>
+        <c:scaling>
+          <c:orientation val="minMax"/>
+        </c:scaling>
+        <c:delete val="0"/>
+        <c:axPos val="b"/>
+        <c:title>
+          <c:tx>
+            <c:rich>
+              <a:bodyPr/>
+              <a:lstStyle/>
+              <a:p>
+                <a:pPr>
+                  <a:defRPr sz="1400" b="1" i="0" u="none"/>
+                </a:pPr>
+                <a:r>
+                  <a:t>Revenue</a:t>
+                </a:r>
+              </a:p>
+            </c:rich>
+          </c:tx>
+          <c:layout/>
+          <c:overlay val="0"/>
+        </c:title>
+        <c:majorTickMark val="out"/>
+        <c:minorTickMark val="none"/>
+        <c:tickLblPos val="low"/>
+        <c:txPr>
+          <a:bodyPr/>
+          <a:lstStyle/>
+          <a:p>
+            <a:pPr>
+              <a:defRPr sz="1400"/>
+            </a:pPr>
+          </a:p>
+        </c:txPr>
+        <c:crossAx val="2140495176"/>
+        <c:crosses val="autoZero"/>
+        <c:auto val="1"/>
+        <c:lblAlgn val="ctr"/>
+        <c:lblOffset val="100"/>
+        <c:noMultiLvlLbl val="0"/>
+      </c:catAx>
+      <c:valAx>
+        <c:axId val="2140495176"/>
+        <c:scaling>
+          <c:max val="30.0"/>
+          <c:min val="0.0"/>
+        </c:scaling>
+        <c:delete val="0"/>
+        <c:axPos val="l"/>
+        <c:title>
+          <c:tx>
+            <c:rich>
+              <a:bodyPr/>
+              <a:lstStyle/>
+              <a:p>
+                <a:pPr>
+                  <a:defRPr sz="1400" b="1" i="0" u="none"/>
+                </a:pPr>
+                <a:r>
+                  <a:t>Month</a:t>
+                </a:r>
+              </a:p>
+            </c:rich>
+          </c:tx>
+          <c:layout/>
+          <c:overlay val="0"/>
+        </c:title>
+        <c:numFmt formatCode="$0.0" sourceLinked="0"/>
+        <c:majorTickMark val="out"/>
+        <c:minorTickMark val="none"/>
+        <c:tickLblPos val="nextTo"/>
+        <c:txPr>
+          <a:bodyPr/>
+          <a:lstStyle/>
+          <a:p>
+            <a:pPr>
+              <a:defRPr sz="1400"/>
+            </a:pPr>
+          </a:p>
+        </c:txPr>
+        <c:crossAx val="2118791784"/>
+        <c:crosses val="autoZero"/>
+      </c:valAx>
+    </c:plotArea>
+    <c:legend>
+      <c:legendPos val="b"/>
+      <c:layout/>
+      <c:overlay val="0"/>
+      <c:txPr>
+        <a:bodyPr/>
+        <a:lstStyle/>
+        <a:p>
+          <a:pPr>
+            <a:defRPr sz="1400"/>
+          </a:pPr>
+        </a:p>
+      </c:txPr>
+    </c:legend>
+    <c:plotVisOnly val="1"/>
+    <c:dispBlanksAs val="gap"/>
+    <c:showDLblsOverMax val="0"/>
+  </c:chart>
+  <c:txPr>
+    <a:bodyPr/>
+    <a:lstStyle/>
+    <a:p>
+      <a:pPr>
+        <a:defRPr sz="1800"/>
+      </a:pPr>
+      <a:endParaRPr lang="en-US"/>
+    </a:p>
+  </c:txPr>
+  <c:externalData r:id="rId1">
+    <c:autoUpdate val="0"/>
+  </c:externalData>
+</c:chartSpace>
+</file>
+
+<file path=ppt/charts/chart16.xml><?xml version="1.0" encoding="utf-8"?>
+<c:chartSpace xmlns:c="http://schemas.openxmlformats.org/drawingml/2006/chart" xmlns:a="http://schemas.openxmlformats.org/drawingml/2006/main" xmlns:r="http://schemas.openxmlformats.org/officeDocument/2006/relationships">
+  <c:date1904 val="0"/>
+  <c:chart>
+    <c:autoTitleDeleted val="1"/>
+    <c:plotArea>
+      <c:lineChart>
+        <c:grouping val="standard"/>
+        <c:varyColors val="0"/>
+        <c:ser>
+          <c:idx val="0"/>
+          <c:order val="0"/>
+          <c:tx>
+            <c:strRef>
+              <c:f>Sheet1!$B$1</c:f>
+              <c:strCache>
+                <c:ptCount val="1"/>
+                <c:pt idx="0">
+                  <c:v>Revenue!</c:v>
+                </c:pt>
+              </c:strCache>
+            </c:strRef>
+          </c:tx>
+          <c:spPr>
+            <a:solidFill>
+              <a:srgbClr val="4E79A7"/>
+            </a:solidFill>
+            <a:ln w="25400">
+              <a:solidFill>
+                <a:srgbClr val="4E79A7"/>
+              </a:solidFill>
+              <a:prstDash val="dash"/>
+            </a:ln>
+          </c:spPr>
+          <c:marker>
+            <c:symbol val="none"/>
+          </c:marker>
+          <c:cat>
+            <c:strRef>
+              <c:f>Sheet1!$A$2:$A$5</c:f>
+              <c:strCache>
+                <c:ptCount val="4"/>
+                <c:pt idx="0">
+                  <c:v>Jan</c:v>
+                </c:pt>
+                <c:pt idx="1">
+                  <c:v>Feb</c:v>
+                </c:pt>
+                <c:pt idx="2">
+                  <c:v>Mar</c:v>
+                </c:pt>
+                <c:pt idx="3">
+                  <c:v>Apr</c:v>
+                </c:pt>
+              </c:strCache>
+            </c:strRef>
+          </c:cat>
+          <c:val>
+            <c:numRef>
+              <c:f>Sheet1!$B$2:$B$5</c:f>
+              <c:numCache>
+                <c:formatCode>General</c:formatCode>
+                <c:ptCount val="4"/>
+                <c:pt idx="0">
+                  <c:v>10</c:v>
+                </c:pt>
+                <c:pt idx="1">
+                  <c:v>14</c:v>
+                </c:pt>
+                <c:pt idx="2">
+                  <c:v>9</c:v>
+                </c:pt>
+                <c:pt idx="3">
+                  <c:v>18</c:v>
+                </c:pt>
+              </c:numCache>
+            </c:numRef>
+          </c:val>
+          <c:smooth val="0"/>
+        </c:ser>
+        <c:ser>
+          <c:idx val="1"/>
+          <c:order val="1"/>
+          <c:tx>
+            <c:strRef>
+              <c:f>Sheet1!$C$1</c:f>
+              <c:strCache>
+                <c:ptCount val="1"/>
+                <c:pt idx="0">
+                  <c:v>Cost!</c:v>
+                </c:pt>
+              </c:strCache>
+            </c:strRef>
+          </c:tx>
+          <c:spPr>
+            <a:solidFill>
+              <a:srgbClr val="F28E2B"/>
+            </a:solidFill>
+            <a:ln w="25400">
+              <a:solidFill>
+                <a:srgbClr val="F28E2B"/>
+              </a:solidFill>
+              <a:prstDash val="dash"/>
+            </a:ln>
+          </c:spPr>
+          <c:marker>
+            <c:symbol val="none"/>
+          </c:marker>
+          <c:cat>
+            <c:strRef>
+              <c:f>Sheet1!$A$2:$A$5</c:f>
+              <c:strCache>
+                <c:ptCount val="4"/>
+                <c:pt idx="0">
+                  <c:v>Jan</c:v>
+                </c:pt>
+                <c:pt idx="1">
+                  <c:v>Feb</c:v>
+                </c:pt>
+                <c:pt idx="2">
+                  <c:v>Mar</c:v>
+                </c:pt>
+                <c:pt idx="3">
+                  <c:v>Apr</c:v>
+                </c:pt>
+              </c:strCache>
+            </c:strRef>
+          </c:cat>
+          <c:val>
+            <c:numRef>
+              <c:f>Sheet1!$C$2:$C$5</c:f>
+              <c:numCache>
+                <c:formatCode>General</c:formatCode>
+                <c:ptCount val="4"/>
+                <c:pt idx="0">
+                  <c:v>2</c:v>
+                </c:pt>
+                <c:pt idx="1">
+                  <c:v>4</c:v>
+                </c:pt>
+                <c:pt idx="2">
+                  <c:v>3</c:v>
+                </c:pt>
+                <c:pt idx="3">
+                  <c:v>1</c:v>
+                </c:pt>
+              </c:numCache>
+            </c:numRef>
+          </c:val>
+          <c:smooth val="0"/>
+        </c:ser>
+        <c:marker val="1"/>
+        <c:smooth val="0"/>
+        <c:axId val="2118791784"/>
+        <c:axId val="2140495176"/>
+      </c:lineChart>
+      <c:catAx>
+        <c:axId val="2118791784"/>
+        <c:scaling>
+          <c:orientation val="minMax"/>
+        </c:scaling>
+        <c:delete val="0"/>
+        <c:axPos val="b"/>
+        <c:title>
+          <c:tx>
+            <c:rich>
+              <a:bodyPr/>
+              <a:lstStyle/>
+              <a:p>
+                <a:pPr>
+                  <a:defRPr sz="1400" b="1" i="0" u="none"/>
+                </a:pPr>
+                <a:r>
+                  <a:t>Revenue</a:t>
+                </a:r>
+              </a:p>
+            </c:rich>
+          </c:tx>
+          <c:layout/>
+          <c:overlay val="0"/>
+        </c:title>
+        <c:majorTickMark val="out"/>
+        <c:minorTickMark val="none"/>
+        <c:tickLblPos val="low"/>
+        <c:txPr>
+          <a:bodyPr/>
+          <a:lstStyle/>
+          <a:p>
+            <a:pPr>
+              <a:defRPr sz="1400"/>
+            </a:pPr>
+          </a:p>
+        </c:txPr>
+        <c:crossAx val="2140495176"/>
+        <c:crosses val="autoZero"/>
+        <c:auto val="1"/>
+        <c:lblAlgn val="ctr"/>
+        <c:lblOffset val="100"/>
+        <c:noMultiLvlLbl val="0"/>
+      </c:catAx>
+      <c:valAx>
+        <c:axId val="2140495176"/>
+        <c:scaling>
+          <c:max val="30.0"/>
+          <c:min val="0.0"/>
+        </c:scaling>
+        <c:delete val="0"/>
+        <c:axPos val="l"/>
+        <c:title>
+          <c:tx>
+            <c:rich>
+              <a:bodyPr/>
+              <a:lstStyle/>
+              <a:p>
+                <a:pPr>
+                  <a:defRPr sz="1400" b="1" i="0" u="none"/>
+                </a:pPr>
+                <a:r>
+                  <a:t>Month</a:t>
+                </a:r>
+              </a:p>
+            </c:rich>
+          </c:tx>
+          <c:layout/>
+          <c:overlay val="0"/>
+        </c:title>
+        <c:numFmt formatCode="$0.0" sourceLinked="0"/>
+        <c:majorTickMark val="out"/>
+        <c:minorTickMark val="none"/>
+        <c:tickLblPos val="nextTo"/>
+        <c:txPr>
+          <a:bodyPr/>
+          <a:lstStyle/>
+          <a:p>
+            <a:pPr>
+              <a:defRPr sz="1400"/>
+            </a:pPr>
+          </a:p>
+        </c:txPr>
+        <c:crossAx val="2118791784"/>
+        <c:crosses val="autoZero"/>
+      </c:valAx>
+    </c:plotArea>
+    <c:legend>
+      <c:legendPos val="b"/>
+      <c:layout/>
+      <c:overlay val="0"/>
+      <c:txPr>
+        <a:bodyPr/>
+        <a:lstStyle/>
+        <a:p>
+          <a:pPr>
+            <a:defRPr sz="1400"/>
+          </a:pPr>
+        </a:p>
+      </c:txPr>
+    </c:legend>
+    <c:plotVisOnly val="1"/>
+    <c:dispBlanksAs val="gap"/>
+    <c:showDLblsOverMax val="0"/>
+  </c:chart>
+  <c:txPr>
+    <a:bodyPr/>
+    <a:lstStyle/>
+    <a:p>
+      <a:pPr>
+        <a:defRPr sz="1800"/>
+      </a:pPr>
+      <a:endParaRPr lang="en-US"/>
+    </a:p>
+  </c:txPr>
+  <c:externalData r:id="rId1">
+    <c:autoUpdate val="0"/>
+  </c:externalData>
+</c:chartSpace>
+</file>
+
+<file path=ppt/charts/chart17.xml><?xml version="1.0" encoding="utf-8"?>
+<c:chartSpace xmlns:c="http://schemas.openxmlformats.org/drawingml/2006/chart" xmlns:a="http://schemas.openxmlformats.org/drawingml/2006/main" xmlns:r="http://schemas.openxmlformats.org/officeDocument/2006/relationships">
+  <c:date1904 val="0"/>
+  <c:chart>
+    <c:autoTitleDeleted val="1"/>
+    <c:plotArea>
+      <c:lineChart>
+        <c:grouping val="standard"/>
+        <c:varyColors val="0"/>
+        <c:ser>
+          <c:idx val="0"/>
+          <c:order val="0"/>
+          <c:tx>
+            <c:strRef>
+              <c:f>Sheet1!$B$1</c:f>
+              <c:strCache>
+                <c:ptCount val="1"/>
+                <c:pt idx="0">
+                  <c:v>revenue</c:v>
+                </c:pt>
+              </c:strCache>
+            </c:strRef>
+          </c:tx>
+          <c:spPr>
+            <a:solidFill>
+              <a:srgbClr val="4E79A7"/>
+            </a:solidFill>
+            <a:ln w="25400">
+              <a:solidFill>
+                <a:srgbClr val="4E79A7"/>
+              </a:solidFill>
+              <a:prstDash val="dash"/>
+            </a:ln>
+          </c:spPr>
+          <c:marker>
+            <c:symbol val="none"/>
+          </c:marker>
+          <c:cat>
+            <c:strRef>
+              <c:f>Sheet1!$A$2:$A$5</c:f>
+              <c:strCache>
+                <c:ptCount val="4"/>
+                <c:pt idx="0">
+                  <c:v>Jan</c:v>
+                </c:pt>
+                <c:pt idx="1">
+                  <c:v>Feb</c:v>
+                </c:pt>
+                <c:pt idx="2">
+                  <c:v>Mar</c:v>
+                </c:pt>
+                <c:pt idx="3">
+                  <c:v>Apr</c:v>
+                </c:pt>
+              </c:strCache>
+            </c:strRef>
+          </c:cat>
+          <c:val>
+            <c:numRef>
+              <c:f>Sheet1!$B$2:$B$5</c:f>
+              <c:numCache>
+                <c:formatCode>General</c:formatCode>
+                <c:ptCount val="4"/>
+                <c:pt idx="0">
+                  <c:v>10</c:v>
+                </c:pt>
+                <c:pt idx="1">
+                  <c:v>14</c:v>
+                </c:pt>
+                <c:pt idx="2">
+                  <c:v>9</c:v>
+                </c:pt>
+                <c:pt idx="3">
+                  <c:v>18</c:v>
+                </c:pt>
+              </c:numCache>
+            </c:numRef>
+          </c:val>
+          <c:smooth val="0"/>
+        </c:ser>
+        <c:ser>
+          <c:idx val="1"/>
+          <c:order val="1"/>
+          <c:tx>
+            <c:strRef>
+              <c:f>Sheet1!$C$1</c:f>
+              <c:strCache>
+                <c:ptCount val="1"/>
+                <c:pt idx="0">
+                  <c:v>cost</c:v>
+                </c:pt>
+              </c:strCache>
+            </c:strRef>
+          </c:tx>
+          <c:spPr>
+            <a:solidFill>
+              <a:srgbClr val="F28E2B"/>
+            </a:solidFill>
+            <a:ln w="25400">
+              <a:solidFill>
+                <a:srgbClr val="F28E2B"/>
+              </a:solidFill>
+              <a:prstDash val="dash"/>
+            </a:ln>
+          </c:spPr>
+          <c:marker>
+            <c:symbol val="none"/>
+          </c:marker>
+          <c:cat>
+            <c:strRef>
+              <c:f>Sheet1!$A$2:$A$5</c:f>
+              <c:strCache>
+                <c:ptCount val="4"/>
+                <c:pt idx="0">
+                  <c:v>Jan</c:v>
+                </c:pt>
+                <c:pt idx="1">
+                  <c:v>Feb</c:v>
+                </c:pt>
+                <c:pt idx="2">
+                  <c:v>Mar</c:v>
+                </c:pt>
+                <c:pt idx="3">
+                  <c:v>Apr</c:v>
+                </c:pt>
+              </c:strCache>
+            </c:strRef>
+          </c:cat>
+          <c:val>
+            <c:numRef>
+              <c:f>Sheet1!$C$2:$C$5</c:f>
+              <c:numCache>
+                <c:formatCode>General</c:formatCode>
+                <c:ptCount val="4"/>
+                <c:pt idx="0">
+                  <c:v>2</c:v>
+                </c:pt>
+                <c:pt idx="1">
+                  <c:v>4</c:v>
+                </c:pt>
+                <c:pt idx="2">
+                  <c:v>3</c:v>
+                </c:pt>
+                <c:pt idx="3">
+                  <c:v>1</c:v>
+                </c:pt>
+              </c:numCache>
+            </c:numRef>
+          </c:val>
+          <c:smooth val="0"/>
+        </c:ser>
+        <c:marker val="1"/>
+        <c:smooth val="0"/>
+        <c:axId val="2118791784"/>
+        <c:axId val="2140495176"/>
+      </c:lineChart>
+      <c:catAx>
+        <c:axId val="2118791784"/>
+        <c:scaling>
+          <c:orientation val="minMax"/>
+        </c:scaling>
+        <c:delete val="0"/>
+        <c:axPos val="b"/>
+        <c:title>
+          <c:tx>
+            <c:rich>
+              <a:bodyPr/>
+              <a:lstStyle/>
+              <a:p>
+                <a:pPr>
+                  <a:defRPr sz="1400" b="1" i="0" u="none"/>
+                </a:pPr>
+                <a:r>
+                  <a:t>Revenue</a:t>
+                </a:r>
+              </a:p>
+            </c:rich>
+          </c:tx>
+          <c:layout/>
+          <c:overlay val="0"/>
+        </c:title>
+        <c:majorTickMark val="out"/>
+        <c:minorTickMark val="none"/>
+        <c:tickLblPos val="low"/>
+        <c:txPr>
+          <a:bodyPr/>
+          <a:lstStyle/>
+          <a:p>
+            <a:pPr>
+              <a:defRPr sz="1400"/>
+            </a:pPr>
+          </a:p>
+        </c:txPr>
+        <c:crossAx val="2140495176"/>
+        <c:crosses val="autoZero"/>
+        <c:auto val="1"/>
+        <c:lblAlgn val="ctr"/>
+        <c:lblOffset val="100"/>
+        <c:noMultiLvlLbl val="0"/>
+      </c:catAx>
+      <c:valAx>
+        <c:axId val="2140495176"/>
+        <c:scaling>
+          <c:max val="30.0"/>
+          <c:min val="0.0"/>
+        </c:scaling>
+        <c:delete val="0"/>
+        <c:axPos val="l"/>
+        <c:title>
+          <c:tx>
+            <c:rich>
+              <a:bodyPr/>
+              <a:lstStyle/>
+              <a:p>
+                <a:pPr>
+                  <a:defRPr sz="1400" b="1" i="0" u="none"/>
+                </a:pPr>
+                <a:r>
+                  <a:t>Month</a:t>
+                </a:r>
+              </a:p>
+            </c:rich>
+          </c:tx>
+          <c:layout/>
+          <c:overlay val="0"/>
+        </c:title>
+        <c:numFmt formatCode="$0.0" sourceLinked="0"/>
+        <c:majorTickMark val="out"/>
+        <c:minorTickMark val="none"/>
+        <c:tickLblPos val="nextTo"/>
+        <c:txPr>
+          <a:bodyPr/>
+          <a:lstStyle/>
+          <a:p>
+            <a:pPr>
+              <a:defRPr sz="1400"/>
+            </a:pPr>
+          </a:p>
+        </c:txPr>
+        <c:crossAx val="2118791784"/>
+        <c:crosses val="autoZero"/>
+      </c:valAx>
+    </c:plotArea>
+    <c:legend>
+      <c:legendPos val="b"/>
+      <c:layout/>
+      <c:overlay val="0"/>
+      <c:txPr>
+        <a:bodyPr/>
+        <a:lstStyle/>
+        <a:p>
+          <a:pPr>
+            <a:defRPr sz="1400"/>
+          </a:pPr>
+        </a:p>
+      </c:txPr>
+    </c:legend>
+    <c:plotVisOnly val="1"/>
+    <c:dispBlanksAs val="gap"/>
+    <c:showDLblsOverMax val="0"/>
+  </c:chart>
+  <c:txPr>
+    <a:bodyPr/>
+    <a:lstStyle/>
+    <a:p>
+      <a:pPr>
+        <a:defRPr sz="1800"/>
+      </a:pPr>
+      <a:endParaRPr lang="en-US"/>
+    </a:p>
+  </c:txPr>
+  <c:externalData r:id="rId1">
+    <c:autoUpdate val="0"/>
+  </c:externalData>
+</c:chartSpace>
+</file>
+
+<file path=ppt/charts/chart18.xml><?xml version="1.0" encoding="utf-8"?>
+<c:chartSpace xmlns:c="http://schemas.openxmlformats.org/drawingml/2006/chart" xmlns:a="http://schemas.openxmlformats.org/drawingml/2006/main" xmlns:r="http://schemas.openxmlformats.org/officeDocument/2006/relationships">
+  <c:date1904 val="0"/>
+  <c:chart>
+    <c:autoTitleDeleted val="1"/>
+    <c:plotArea>
+      <c:lineChart>
+        <c:grouping val="standard"/>
+        <c:varyColors val="0"/>
+        <c:ser>
+          <c:idx val="0"/>
+          <c:order val="0"/>
+          <c:tx>
+            <c:strRef>
+              <c:f>Sheet1!$B$1</c:f>
+              <c:strCache>
+                <c:ptCount val="1"/>
+                <c:pt idx="0">
+                  <c:v>Revenue!</c:v>
+                </c:pt>
+              </c:strCache>
+            </c:strRef>
+          </c:tx>
+          <c:spPr>
+            <a:solidFill>
+              <a:srgbClr val="4E79A7"/>
+            </a:solidFill>
+            <a:ln w="25400">
+              <a:solidFill>
+                <a:srgbClr val="4E79A7"/>
+              </a:solidFill>
+              <a:prstDash val="dash"/>
+            </a:ln>
+          </c:spPr>
+          <c:marker>
+            <c:symbol val="none"/>
+          </c:marker>
+          <c:cat>
+            <c:strRef>
+              <c:f>Sheet1!$A$2:$A$5</c:f>
+              <c:strCache>
+                <c:ptCount val="4"/>
+                <c:pt idx="0">
+                  <c:v>Jan</c:v>
+                </c:pt>
+                <c:pt idx="1">
+                  <c:v>Feb</c:v>
+                </c:pt>
+                <c:pt idx="2">
+                  <c:v>Mar</c:v>
+                </c:pt>
+                <c:pt idx="3">
+                  <c:v>Apr</c:v>
+                </c:pt>
+              </c:strCache>
+            </c:strRef>
+          </c:cat>
+          <c:val>
+            <c:numRef>
+              <c:f>Sheet1!$B$2:$B$5</c:f>
+              <c:numCache>
+                <c:formatCode>General</c:formatCode>
+                <c:ptCount val="4"/>
+                <c:pt idx="0">
+                  <c:v>10</c:v>
+                </c:pt>
+                <c:pt idx="1">
+                  <c:v>14</c:v>
+                </c:pt>
+                <c:pt idx="2">
+                  <c:v>9</c:v>
+                </c:pt>
+                <c:pt idx="3">
+                  <c:v>18</c:v>
+                </c:pt>
+              </c:numCache>
+            </c:numRef>
+          </c:val>
+          <c:smooth val="0"/>
+        </c:ser>
+        <c:ser>
+          <c:idx val="1"/>
+          <c:order val="1"/>
+          <c:tx>
+            <c:strRef>
+              <c:f>Sheet1!$C$1</c:f>
+              <c:strCache>
+                <c:ptCount val="1"/>
+                <c:pt idx="0">
+                  <c:v>Cost!</c:v>
+                </c:pt>
+              </c:strCache>
+            </c:strRef>
+          </c:tx>
+          <c:spPr>
+            <a:solidFill>
+              <a:srgbClr val="F28E2B"/>
+            </a:solidFill>
+            <a:ln w="25400">
+              <a:solidFill>
+                <a:srgbClr val="F28E2B"/>
+              </a:solidFill>
+              <a:prstDash val="dash"/>
+            </a:ln>
+          </c:spPr>
+          <c:marker>
+            <c:symbol val="none"/>
+          </c:marker>
+          <c:cat>
+            <c:strRef>
+              <c:f>Sheet1!$A$2:$A$5</c:f>
+              <c:strCache>
+                <c:ptCount val="4"/>
+                <c:pt idx="0">
+                  <c:v>Jan</c:v>
+                </c:pt>
+                <c:pt idx="1">
+                  <c:v>Feb</c:v>
+                </c:pt>
+                <c:pt idx="2">
+                  <c:v>Mar</c:v>
+                </c:pt>
+                <c:pt idx="3">
+                  <c:v>Apr</c:v>
+                </c:pt>
+              </c:strCache>
+            </c:strRef>
+          </c:cat>
+          <c:val>
+            <c:numRef>
+              <c:f>Sheet1!$C$2:$C$5</c:f>
+              <c:numCache>
+                <c:formatCode>General</c:formatCode>
+                <c:ptCount val="4"/>
+                <c:pt idx="0">
+                  <c:v>2</c:v>
+                </c:pt>
+                <c:pt idx="1">
+                  <c:v>4</c:v>
+                </c:pt>
+                <c:pt idx="2">
+                  <c:v>3</c:v>
+                </c:pt>
+                <c:pt idx="3">
+                  <c:v>1</c:v>
+                </c:pt>
+              </c:numCache>
+            </c:numRef>
+          </c:val>
+          <c:smooth val="0"/>
+        </c:ser>
+        <c:marker val="1"/>
+        <c:smooth val="0"/>
+        <c:axId val="2118791784"/>
+        <c:axId val="2140495176"/>
+      </c:lineChart>
+      <c:catAx>
+        <c:axId val="2118791784"/>
+        <c:scaling>
+          <c:orientation val="minMax"/>
+        </c:scaling>
+        <c:delete val="0"/>
+        <c:axPos val="b"/>
+        <c:title>
+          <c:tx>
+            <c:rich>
+              <a:bodyPr/>
+              <a:lstStyle/>
+              <a:p>
+                <a:pPr>
+                  <a:defRPr sz="1400" b="1" i="0" u="none"/>
+                </a:pPr>
+                <a:r>
+                  <a:t>Revenue</a:t>
+                </a:r>
+              </a:p>
+            </c:rich>
+          </c:tx>
+          <c:layout/>
+          <c:overlay val="0"/>
+        </c:title>
+        <c:majorTickMark val="out"/>
+        <c:minorTickMark val="none"/>
+        <c:tickLblPos val="low"/>
+        <c:txPr>
+          <a:bodyPr/>
+          <a:lstStyle/>
+          <a:p>
+            <a:pPr>
+              <a:defRPr sz="1400"/>
+            </a:pPr>
+          </a:p>
+        </c:txPr>
+        <c:crossAx val="2140495176"/>
+        <c:crosses val="autoZero"/>
+        <c:auto val="1"/>
+        <c:lblAlgn val="ctr"/>
+        <c:lblOffset val="100"/>
+        <c:noMultiLvlLbl val="0"/>
+      </c:catAx>
+      <c:valAx>
+        <c:axId val="2140495176"/>
+        <c:scaling>
+          <c:max val="30.0"/>
+          <c:min val="0.0"/>
+        </c:scaling>
+        <c:delete val="0"/>
+        <c:axPos val="l"/>
+        <c:title>
+          <c:tx>
+            <c:rich>
+              <a:bodyPr/>
+              <a:lstStyle/>
+              <a:p>
+                <a:pPr>
+                  <a:defRPr sz="1400" b="1" i="0" u="none"/>
+                </a:pPr>
+                <a:r>
+                  <a:t>Month</a:t>
+                </a:r>
+              </a:p>
+            </c:rich>
+          </c:tx>
+          <c:layout/>
+          <c:overlay val="0"/>
+        </c:title>
+        <c:numFmt formatCode="$0.0" sourceLinked="0"/>
+        <c:majorTickMark val="out"/>
+        <c:minorTickMark val="none"/>
+        <c:tickLblPos val="nextTo"/>
+        <c:txPr>
+          <a:bodyPr/>
+          <a:lstStyle/>
+          <a:p>
+            <a:pPr>
+              <a:defRPr sz="1400"/>
+            </a:pPr>
+          </a:p>
+        </c:txPr>
+        <c:crossAx val="2118791784"/>
+        <c:crosses val="autoZero"/>
+      </c:valAx>
+    </c:plotArea>
+    <c:legend>
+      <c:legendPos val="b"/>
+      <c:layout/>
+      <c:overlay val="0"/>
+      <c:txPr>
+        <a:bodyPr/>
+        <a:lstStyle/>
+        <a:p>
+          <a:pPr>
+            <a:defRPr sz="1400"/>
+          </a:pPr>
+        </a:p>
+      </c:txPr>
+    </c:legend>
+    <c:plotVisOnly val="1"/>
+    <c:dispBlanksAs val="gap"/>
+    <c:showDLblsOverMax val="0"/>
+  </c:chart>
+  <c:txPr>
+    <a:bodyPr/>
+    <a:lstStyle/>
+    <a:p>
+      <a:pPr>
+        <a:defRPr sz="1800"/>
+      </a:pPr>
+      <a:endParaRPr lang="en-US"/>
+    </a:p>
+  </c:txPr>
+  <c:externalData r:id="rId1">
+    <c:autoUpdate val="0"/>
+  </c:externalData>
+</c:chartSpace>
+</file>
+
+<file path=ppt/charts/chart19.xml><?xml version="1.0" encoding="utf-8"?>
 <c:chartSpace xmlns:c="http://schemas.openxmlformats.org/drawingml/2006/chart" xmlns:a="http://schemas.openxmlformats.org/drawingml/2006/main" xmlns:r="http://schemas.openxmlformats.org/officeDocument/2006/relationships">
   <c:date1904 val="0"/>
   <c:chart>
@@ -7535,7 +8644,7 @@
           <a:p>
             <a:pPr algn="l"/>
             <a:r>
-              <a:rPr sz="3200" b="1" i="0" u="none">
+              <a:rPr sz="4400" b="1" i="0" u="none">
                 <a:solidFill>
                   <a:srgbClr val="7F7F7F"/>
                 </a:solidFill>
@@ -7673,7 +8782,7 @@
           <a:p>
             <a:pPr algn="ctr"/>
             <a:r>
-              <a:rPr sz="1600" b="1" i="0" u="sng">
+              <a:rPr sz="1400" b="1" i="0" u="sng">
                 <a:solidFill>
                   <a:srgbClr val="000000"/>
                 </a:solidFill>
@@ -7682,7 +8791,7 @@
 </a:t>
             </a:r>
             <a:r>
-              <a:rPr sz="1400" b="0" i="1" u="none">
+              <a:rPr sz="1200" b="0" i="1" u="none">
                 <a:solidFill>
                   <a:srgbClr val="000000"/>
                 </a:solidFill>
@@ -8273,7 +9382,7 @@
           <a:p>
             <a:pPr algn="ctr"/>
             <a:r>
-              <a:rPr sz="1600" b="1" i="0" u="sng">
+              <a:rPr sz="1400" b="1" i="0" u="sng">
                 <a:solidFill>
                   <a:srgbClr val="000000"/>
                 </a:solidFill>
@@ -8325,7 +9434,7 @@
           <a:p>
             <a:pPr algn="ctr"/>
             <a:r>
-              <a:rPr sz="1600" b="1" i="0" u="sng">
+              <a:rPr sz="1400" b="1" i="0" u="sng">
                 <a:solidFill>
                   <a:srgbClr val="000000"/>
                 </a:solidFill>
@@ -8429,7 +9538,7 @@
           <a:p>
             <a:pPr algn="ctr"/>
             <a:r>
-              <a:rPr sz="1600" b="1" i="0" u="sng">
+              <a:rPr sz="1400" b="1" i="0" u="sng">
                 <a:solidFill>
                   <a:srgbClr val="000000"/>
                 </a:solidFill>
@@ -8481,7 +9590,7 @@
           <a:p>
             <a:pPr algn="ctr"/>
             <a:r>
-              <a:rPr sz="1600" b="1" i="0" u="sng">
+              <a:rPr sz="1400" b="1" i="0" u="sng">
                 <a:solidFill>
                   <a:srgbClr val="000000"/>
                 </a:solidFill>
@@ -8533,7 +9642,7 @@
           <a:p>
             <a:pPr algn="ctr"/>
             <a:r>
-              <a:rPr sz="1600" b="1" i="0" u="sng">
+              <a:rPr sz="1400" b="1" i="0" u="sng">
                 <a:solidFill>
                   <a:srgbClr val="000000"/>
                 </a:solidFill>
@@ -8637,7 +9746,7 @@
           <a:p>
             <a:pPr algn="ctr"/>
             <a:r>
-              <a:rPr sz="1600" b="1" i="0" u="sng">
+              <a:rPr sz="1400" b="1" i="0" u="sng">
                 <a:solidFill>
                   <a:srgbClr val="000000"/>
                 </a:solidFill>
@@ -8646,7 +9755,7 @@
 </a:t>
             </a:r>
             <a:r>
-              <a:rPr sz="1400" b="0" i="1" u="none">
+              <a:rPr sz="1200" b="0" i="1" u="none">
                 <a:solidFill>
                   <a:srgbClr val="000000"/>
                 </a:solidFill>
@@ -8698,7 +9807,7 @@
           <a:p>
             <a:pPr algn="ctr"/>
             <a:r>
-              <a:rPr sz="1600" b="1" i="0" u="sng">
+              <a:rPr sz="1400" b="1" i="0" u="sng">
                 <a:solidFill>
                   <a:srgbClr val="000000"/>
                 </a:solidFill>
@@ -8707,7 +9816,7 @@
 </a:t>
             </a:r>
             <a:r>
-              <a:rPr sz="1400" b="0" i="1" u="none">
+              <a:rPr sz="1200" b="0" i="1" u="none">
                 <a:solidFill>
                   <a:srgbClr val="000000"/>
                 </a:solidFill>
@@ -8759,7 +9868,7 @@
           <a:p>
             <a:pPr algn="ctr"/>
             <a:r>
-              <a:rPr sz="1600" b="1" i="0" u="sng">
+              <a:rPr sz="1400" b="1" i="0" u="sng">
                 <a:solidFill>
                   <a:srgbClr val="000000"/>
                 </a:solidFill>
@@ -8768,7 +9877,7 @@
 </a:t>
             </a:r>
             <a:r>
-              <a:rPr sz="1400" b="0" i="1" u="none">
+              <a:rPr sz="1200" b="0" i="1" u="none">
                 <a:solidFill>
                   <a:srgbClr val="000000"/>
                 </a:solidFill>
@@ -8906,7 +10015,7 @@
           <a:p>
             <a:pPr algn="ctr"/>
             <a:r>
-              <a:rPr sz="1600" b="1" i="0" u="sng">
+              <a:rPr sz="1400" b="1" i="0" u="sng">
                 <a:solidFill>
                   <a:srgbClr val="000000"/>
                 </a:solidFill>
@@ -8915,7 +10024,7 @@
 </a:t>
             </a:r>
             <a:r>
-              <a:rPr sz="1400" b="0" i="1" u="none">
+              <a:rPr sz="1200" b="0" i="1" u="none">
                 <a:solidFill>
                   <a:srgbClr val="000000"/>
                 </a:solidFill>
@@ -8967,7 +10076,7 @@
           <a:p>
             <a:pPr algn="ctr"/>
             <a:r>
-              <a:rPr sz="1600" b="1" i="0" u="sng">
+              <a:rPr sz="1400" b="1" i="0" u="sng">
                 <a:solidFill>
                   <a:srgbClr val="000000"/>
                 </a:solidFill>
@@ -8976,7 +10085,7 @@
 </a:t>
             </a:r>
             <a:r>
-              <a:rPr sz="1400" b="0" i="1" u="none">
+              <a:rPr sz="1200" b="0" i="1" u="none">
                 <a:solidFill>
                   <a:srgbClr val="000000"/>
                 </a:solidFill>
@@ -9028,7 +10137,7 @@
           <a:p>
             <a:pPr algn="ctr"/>
             <a:r>
-              <a:rPr sz="1600" b="1" i="0" u="sng">
+              <a:rPr sz="1400" b="1" i="0" u="sng">
                 <a:solidFill>
                   <a:srgbClr val="000000"/>
                 </a:solidFill>
@@ -9037,7 +10146,7 @@
 </a:t>
             </a:r>
             <a:r>
-              <a:rPr sz="1400" b="0" i="1" u="none">
+              <a:rPr sz="1200" b="0" i="1" u="none">
                 <a:solidFill>
                   <a:srgbClr val="000000"/>
                 </a:solidFill>
@@ -9175,7 +10284,7 @@
           <a:p>
             <a:pPr algn="ctr"/>
             <a:r>
-              <a:rPr sz="1600" b="1" i="0" u="sng">
+              <a:rPr sz="1400" b="1" i="0" u="sng">
                 <a:solidFill>
                   <a:srgbClr val="000000"/>
                 </a:solidFill>
@@ -9184,7 +10293,7 @@
 </a:t>
             </a:r>
             <a:r>
-              <a:rPr sz="1400" b="0" i="1" u="none">
+              <a:rPr sz="1200" b="0" i="1" u="none">
                 <a:solidFill>
                   <a:srgbClr val="000000"/>
                 </a:solidFill>
@@ -9236,7 +10345,7 @@
           <a:p>
             <a:pPr algn="ctr"/>
             <a:r>
-              <a:rPr sz="1600" b="1" i="0" u="sng">
+              <a:rPr sz="1400" b="1" i="0" u="sng">
                 <a:solidFill>
                   <a:srgbClr val="000000"/>
                 </a:solidFill>
@@ -9245,7 +10354,7 @@
 </a:t>
             </a:r>
             <a:r>
-              <a:rPr sz="1400" b="0" i="1" u="none">
+              <a:rPr sz="1200" b="0" i="1" u="none">
                 <a:solidFill>
                   <a:srgbClr val="000000"/>
                 </a:solidFill>
@@ -9297,7 +10406,7 @@
           <a:p>
             <a:pPr algn="ctr"/>
             <a:r>
-              <a:rPr sz="1600" b="1" i="0" u="sng">
+              <a:rPr sz="1400" b="1" i="0" u="sng">
                 <a:solidFill>
                   <a:srgbClr val="000000"/>
                 </a:solidFill>
@@ -9306,7 +10415,7 @@
 </a:t>
             </a:r>
             <a:r>
-              <a:rPr sz="1400" b="0" i="1" u="none">
+              <a:rPr sz="1200" b="0" i="1" u="none">
                 <a:solidFill>
                   <a:srgbClr val="000000"/>
                 </a:solidFill>
@@ -9319,6 +10428,336 @@
       <p:sp>
         <p:nvSpPr>
           <p:cNvPr id="9" name="TextBox 8"/>
+          <p:cNvSpPr txBox="1"/>
+          <p:nvPr/>
+        </p:nvSpPr>
+        <p:spPr>
+          <a:xfrm>
+            <a:off x="457200" y="6263640"/>
+            <a:ext cx="11430000" cy="365760"/>
+          </a:xfrm>
+          <a:prstGeom prst="rect">
+            <a:avLst/>
+          </a:prstGeom>
+          <a:noFill/>
+        </p:spPr>
+        <p:txBody>
+          <a:bodyPr wrap="none" anchor="t">
+            <a:spAutoFit/>
+          </a:bodyPr>
+          <a:lstStyle/>
+          <a:p>
+            <a:pPr algn="l"/>
+            <a:r>
+              <a:rPr sz="1000" b="0" i="0" u="none">
+                <a:solidFill>
+                  <a:srgbClr val="000000"/>
+                </a:solidFill>
+              </a:rPr>
+              <a:t>Notes: Adjusted for recent acquisitions.</a:t>
+            </a:r>
+          </a:p>
+        </p:txBody>
+      </p:sp>
+    </p:spTree>
+  </p:cSld>
+  <p:clrMapOvr>
+    <a:masterClrMapping/>
+  </p:clrMapOvr>
+</p:sld>
+</file>
+
+<file path=ppt/slides/slide8.xml><?xml version="1.0" encoding="utf-8"?>
+<p:sld xmlns:a="http://schemas.openxmlformats.org/drawingml/2006/main" xmlns:p="http://schemas.openxmlformats.org/presentationml/2006/main" xmlns:r="http://schemas.openxmlformats.org/officeDocument/2006/relationships">
+  <p:cSld>
+    <p:spTree>
+      <p:nvGrpSpPr>
+        <p:cNvPr id="1" name=""/>
+        <p:cNvGrpSpPr/>
+        <p:nvPr/>
+      </p:nvGrpSpPr>
+      <p:grpSpPr/>
+      <p:sp>
+        <p:nvSpPr>
+          <p:cNvPr id="2" name="TextBox 1"/>
+          <p:cNvSpPr txBox="1"/>
+          <p:nvPr/>
+        </p:nvSpPr>
+        <p:spPr>
+          <a:xfrm>
+            <a:off x="457200" y="91440"/>
+            <a:ext cx="11430000" cy="731520"/>
+          </a:xfrm>
+          <a:prstGeom prst="rect">
+            <a:avLst/>
+          </a:prstGeom>
+          <a:noFill/>
+        </p:spPr>
+        <p:txBody>
+          <a:bodyPr wrap="none" anchor="t">
+            <a:spAutoFit/>
+          </a:bodyPr>
+          <a:lstStyle/>
+          <a:p>
+            <a:pPr algn="l"/>
+            <a:r>
+              <a:rPr sz="2000" b="1" i="0" u="none">
+                <a:solidFill>
+                  <a:srgbClr val="7F7F7F"/>
+                </a:solidFill>
+              </a:rPr>
+              <a:t>These should all be the same (except for legend names)</a:t>
+            </a:r>
+          </a:p>
+        </p:txBody>
+      </p:sp>
+      <p:graphicFrame>
+        <p:nvGraphicFramePr>
+          <p:cNvPr id="3" name="chart_1"/>
+          <p:cNvGraphicFramePr>
+            <a:graphicFrameLocks noGrp="1"/>
+          </p:cNvGraphicFramePr>
+          <p:nvPr/>
+        </p:nvGraphicFramePr>
+        <p:xfrm>
+          <a:off x="457200" y="1463040"/>
+          <a:ext cx="2862072" cy="4800600"/>
+        </p:xfrm>
+        <a:graphic>
+          <a:graphicData uri="http://schemas.openxmlformats.org/drawingml/2006/chart">
+            <c:chart xmlns:c="http://schemas.openxmlformats.org/drawingml/2006/chart" r:id="rId2"/>
+          </a:graphicData>
+        </a:graphic>
+      </p:graphicFrame>
+      <p:sp>
+        <p:nvSpPr>
+          <p:cNvPr id="4" name="TextBox 3"/>
+          <p:cNvSpPr txBox="1"/>
+          <p:nvPr/>
+        </p:nvSpPr>
+        <p:spPr>
+          <a:xfrm>
+            <a:off x="457200" y="1005840"/>
+            <a:ext cx="2862072" cy="457200"/>
+          </a:xfrm>
+          <a:prstGeom prst="rect">
+            <a:avLst/>
+          </a:prstGeom>
+          <a:noFill/>
+        </p:spPr>
+        <p:txBody>
+          <a:bodyPr wrap="none" anchor="t">
+            <a:spAutoFit/>
+          </a:bodyPr>
+          <a:lstStyle/>
+          <a:p>
+            <a:pPr algn="ctr"/>
+            <a:r>
+              <a:rPr sz="1200" b="1" i="0" u="sng">
+                <a:solidFill>
+                  <a:srgbClr val="000000"/>
+                </a:solidFill>
+              </a:rPr>
+              <a:t>Revenue Trend (Line) - Chart Title
+</a:t>
+            </a:r>
+            <a:r>
+              <a:rPr sz="1000" b="0" i="1" u="none">
+                <a:solidFill>
+                  <a:srgbClr val="000000"/>
+                </a:solidFill>
+              </a:rPr>
+              <a:t>2024 Actuals</a:t>
+            </a:r>
+          </a:p>
+        </p:txBody>
+      </p:sp>
+      <p:graphicFrame>
+        <p:nvGraphicFramePr>
+          <p:cNvPr id="5" name="chart_2"/>
+          <p:cNvGraphicFramePr>
+            <a:graphicFrameLocks noGrp="1"/>
+          </p:cNvGraphicFramePr>
+          <p:nvPr/>
+        </p:nvGraphicFramePr>
+        <p:xfrm>
+          <a:off x="3319272" y="1463040"/>
+          <a:ext cx="2862072" cy="4800600"/>
+        </p:xfrm>
+        <a:graphic>
+          <a:graphicData uri="http://schemas.openxmlformats.org/drawingml/2006/chart">
+            <c:chart xmlns:c="http://schemas.openxmlformats.org/drawingml/2006/chart" r:id="rId3"/>
+          </a:graphicData>
+        </a:graphic>
+      </p:graphicFrame>
+      <p:sp>
+        <p:nvSpPr>
+          <p:cNvPr id="6" name="TextBox 5"/>
+          <p:cNvSpPr txBox="1"/>
+          <p:nvPr/>
+        </p:nvSpPr>
+        <p:spPr>
+          <a:xfrm>
+            <a:off x="3319272" y="1005840"/>
+            <a:ext cx="2862072" cy="457200"/>
+          </a:xfrm>
+          <a:prstGeom prst="rect">
+            <a:avLst/>
+          </a:prstGeom>
+          <a:noFill/>
+        </p:spPr>
+        <p:txBody>
+          <a:bodyPr wrap="none" anchor="t">
+            <a:spAutoFit/>
+          </a:bodyPr>
+          <a:lstStyle/>
+          <a:p>
+            <a:pPr algn="ctr"/>
+            <a:r>
+              <a:rPr sz="1200" b="1" i="0" u="sng">
+                <a:solidFill>
+                  <a:srgbClr val="000000"/>
+                </a:solidFill>
+              </a:rPr>
+              <a:t>Revenue Trend (Line) - Chart Title
+</a:t>
+            </a:r>
+            <a:r>
+              <a:rPr sz="1000" b="0" i="1" u="none">
+                <a:solidFill>
+                  <a:srgbClr val="000000"/>
+                </a:solidFill>
+              </a:rPr>
+              <a:t>2024 Actuals</a:t>
+            </a:r>
+          </a:p>
+        </p:txBody>
+      </p:sp>
+      <p:graphicFrame>
+        <p:nvGraphicFramePr>
+          <p:cNvPr id="7" name="chart_3"/>
+          <p:cNvGraphicFramePr>
+            <a:graphicFrameLocks noGrp="1"/>
+          </p:cNvGraphicFramePr>
+          <p:nvPr/>
+        </p:nvGraphicFramePr>
+        <p:xfrm>
+          <a:off x="6181344" y="1463040"/>
+          <a:ext cx="2862072" cy="4800600"/>
+        </p:xfrm>
+        <a:graphic>
+          <a:graphicData uri="http://schemas.openxmlformats.org/drawingml/2006/chart">
+            <c:chart xmlns:c="http://schemas.openxmlformats.org/drawingml/2006/chart" r:id="rId4"/>
+          </a:graphicData>
+        </a:graphic>
+      </p:graphicFrame>
+      <p:sp>
+        <p:nvSpPr>
+          <p:cNvPr id="8" name="TextBox 7"/>
+          <p:cNvSpPr txBox="1"/>
+          <p:nvPr/>
+        </p:nvSpPr>
+        <p:spPr>
+          <a:xfrm>
+            <a:off x="6181344" y="1005840"/>
+            <a:ext cx="2862072" cy="457200"/>
+          </a:xfrm>
+          <a:prstGeom prst="rect">
+            <a:avLst/>
+          </a:prstGeom>
+          <a:noFill/>
+        </p:spPr>
+        <p:txBody>
+          <a:bodyPr wrap="none" anchor="t">
+            <a:spAutoFit/>
+          </a:bodyPr>
+          <a:lstStyle/>
+          <a:p>
+            <a:pPr algn="ctr"/>
+            <a:r>
+              <a:rPr sz="1200" b="1" i="0" u="sng">
+                <a:solidFill>
+                  <a:srgbClr val="000000"/>
+                </a:solidFill>
+              </a:rPr>
+              <a:t>Revenue Trend (Line) - Chart Title
+</a:t>
+            </a:r>
+            <a:r>
+              <a:rPr sz="1000" b="0" i="1" u="none">
+                <a:solidFill>
+                  <a:srgbClr val="000000"/>
+                </a:solidFill>
+              </a:rPr>
+              <a:t>2024 Actuals</a:t>
+            </a:r>
+          </a:p>
+        </p:txBody>
+      </p:sp>
+      <p:graphicFrame>
+        <p:nvGraphicFramePr>
+          <p:cNvPr id="9" name="chart_4"/>
+          <p:cNvGraphicFramePr>
+            <a:graphicFrameLocks noGrp="1"/>
+          </p:cNvGraphicFramePr>
+          <p:nvPr/>
+        </p:nvGraphicFramePr>
+        <p:xfrm>
+          <a:off x="9043416" y="1463040"/>
+          <a:ext cx="2862072" cy="4800600"/>
+        </p:xfrm>
+        <a:graphic>
+          <a:graphicData uri="http://schemas.openxmlformats.org/drawingml/2006/chart">
+            <c:chart xmlns:c="http://schemas.openxmlformats.org/drawingml/2006/chart" r:id="rId5"/>
+          </a:graphicData>
+        </a:graphic>
+      </p:graphicFrame>
+      <p:sp>
+        <p:nvSpPr>
+          <p:cNvPr id="10" name="TextBox 9"/>
+          <p:cNvSpPr txBox="1"/>
+          <p:nvPr/>
+        </p:nvSpPr>
+        <p:spPr>
+          <a:xfrm>
+            <a:off x="9043416" y="1005840"/>
+            <a:ext cx="2862072" cy="457200"/>
+          </a:xfrm>
+          <a:prstGeom prst="rect">
+            <a:avLst/>
+          </a:prstGeom>
+          <a:noFill/>
+        </p:spPr>
+        <p:txBody>
+          <a:bodyPr wrap="none" anchor="t">
+            <a:spAutoFit/>
+          </a:bodyPr>
+          <a:lstStyle/>
+          <a:p>
+            <a:pPr algn="ctr"/>
+            <a:r>
+              <a:rPr sz="1200" b="1" i="0" u="sng">
+                <a:solidFill>
+                  <a:srgbClr val="000000"/>
+                </a:solidFill>
+              </a:rPr>
+              <a:t>Revenue Trend (Line) - Chart Title
+</a:t>
+            </a:r>
+            <a:r>
+              <a:rPr sz="1000" b="0" i="1" u="none">
+                <a:solidFill>
+                  <a:srgbClr val="000000"/>
+                </a:solidFill>
+              </a:rPr>
+              <a:t>2024 Actuals</a:t>
+            </a:r>
+          </a:p>
+        </p:txBody>
+      </p:sp>
+      <p:sp>
+        <p:nvSpPr>
+          <p:cNvPr id="11" name="TextBox 10"/>
           <p:cNvSpPr txBox="1"/>
           <p:nvPr/>
         </p:nvSpPr>

--- a/notebooks/demo.pptx
+++ b/notebooks/demo.pptx
@@ -16,6 +16,8 @@
     <p:sldId id="261" r:id="rId23"/>
     <p:sldId id="262" r:id="rId24"/>
     <p:sldId id="263" r:id="rId25"/>
+    <p:sldId id="264" r:id="rId26"/>
+    <p:sldId id="265" r:id="rId27"/>
   </p:sldIdLst>
   <p:sldSz cx="12188825" cy="6858000"/>
   <p:notesSz cx="6858000" cy="9144000"/>
@@ -3577,6 +3579,1202 @@
         </c:txPr>
         <c:crossAx val="2118791784"/>
         <c:crosses val="autoZero"/>
+      </c:valAx>
+    </c:plotArea>
+    <c:legend>
+      <c:legendPos val="b"/>
+      <c:layout/>
+      <c:overlay val="0"/>
+      <c:txPr>
+        <a:bodyPr/>
+        <a:lstStyle/>
+        <a:p>
+          <a:pPr>
+            <a:defRPr sz="1400"/>
+          </a:pPr>
+        </a:p>
+      </c:txPr>
+    </c:legend>
+    <c:plotVisOnly val="1"/>
+    <c:dispBlanksAs val="gap"/>
+    <c:showDLblsOverMax val="0"/>
+  </c:chart>
+  <c:txPr>
+    <a:bodyPr/>
+    <a:lstStyle/>
+    <a:p>
+      <a:pPr>
+        <a:defRPr sz="1800"/>
+      </a:pPr>
+      <a:endParaRPr lang="en-US"/>
+    </a:p>
+  </c:txPr>
+  <c:externalData r:id="rId1">
+    <c:autoUpdate val="0"/>
+  </c:externalData>
+</c:chartSpace>
+</file>
+
+<file path=ppt/charts/chart20.xml><?xml version="1.0" encoding="utf-8"?>
+<c:chartSpace xmlns:c="http://schemas.openxmlformats.org/drawingml/2006/chart" xmlns:a="http://schemas.openxmlformats.org/drawingml/2006/main" xmlns:r="http://schemas.openxmlformats.org/officeDocument/2006/relationships">
+  <c:date1904 val="0"/>
+  <c:roundedCorners val="0"/>
+  <c:chart>
+    <c:autoTitleDeleted val="1"/>
+    <c:plotArea>
+      <c:layout/>
+      <c:areaChart>
+        <c:grouping val="stacked"/>
+        <c:varyColors val="0"/>
+        <c:ser>
+          <c:idx val="0"/>
+          <c:order val="0"/>
+          <c:tx>
+            <c:strRef>
+              <c:f>Sheet1!$B$1</c:f>
+              <c:strCache>
+                <c:ptCount val="1"/>
+                <c:pt idx="0">
+                  <c:v>Revenue!</c:v>
+                </c:pt>
+              </c:strCache>
+            </c:strRef>
+          </c:tx>
+          <c:spPr>
+            <a:solidFill>
+              <a:srgbClr val="C00000"/>
+            </a:solidFill>
+            <a:ln>
+              <a:solidFill>
+                <a:srgbClr val="C00000"/>
+              </a:solidFill>
+            </a:ln>
+          </c:spPr>
+          <c:cat>
+            <c:strRef>
+              <c:f>Sheet1!$A$2:$A$5</c:f>
+              <c:strCache>
+                <c:ptCount val="4"/>
+                <c:pt idx="0">
+                  <c:v>Jan</c:v>
+                </c:pt>
+                <c:pt idx="1">
+                  <c:v>Feb</c:v>
+                </c:pt>
+                <c:pt idx="2">
+                  <c:v>Mar</c:v>
+                </c:pt>
+                <c:pt idx="3">
+                  <c:v>Apr</c:v>
+                </c:pt>
+              </c:strCache>
+            </c:strRef>
+          </c:cat>
+          <c:val>
+            <c:numRef>
+              <c:f>Sheet1!$B$2:$B$5</c:f>
+              <c:numCache>
+                <c:formatCode>General</c:formatCode>
+                <c:ptCount val="4"/>
+                <c:pt idx="0">
+                  <c:v>10</c:v>
+                </c:pt>
+                <c:pt idx="1">
+                  <c:v>14</c:v>
+                </c:pt>
+                <c:pt idx="2">
+                  <c:v>9</c:v>
+                </c:pt>
+                <c:pt idx="3">
+                  <c:v>18</c:v>
+                </c:pt>
+              </c:numCache>
+            </c:numRef>
+          </c:val>
+        </c:ser>
+        <c:ser>
+          <c:idx val="1"/>
+          <c:order val="1"/>
+          <c:tx>
+            <c:strRef>
+              <c:f>Sheet1!$C$1</c:f>
+              <c:strCache>
+                <c:ptCount val="1"/>
+                <c:pt idx="0">
+                  <c:v>Cost!</c:v>
+                </c:pt>
+              </c:strCache>
+            </c:strRef>
+          </c:tx>
+          <c:spPr>
+            <a:solidFill>
+              <a:srgbClr val="7030A0"/>
+            </a:solidFill>
+            <a:ln>
+              <a:solidFill>
+                <a:srgbClr val="7030A0"/>
+              </a:solidFill>
+            </a:ln>
+          </c:spPr>
+          <c:cat>
+            <c:strRef>
+              <c:f>Sheet1!$A$2:$A$5</c:f>
+              <c:strCache>
+                <c:ptCount val="4"/>
+                <c:pt idx="0">
+                  <c:v>Jan</c:v>
+                </c:pt>
+                <c:pt idx="1">
+                  <c:v>Feb</c:v>
+                </c:pt>
+                <c:pt idx="2">
+                  <c:v>Mar</c:v>
+                </c:pt>
+                <c:pt idx="3">
+                  <c:v>Apr</c:v>
+                </c:pt>
+              </c:strCache>
+            </c:strRef>
+          </c:cat>
+          <c:val>
+            <c:numRef>
+              <c:f>Sheet1!$C$2:$C$5</c:f>
+              <c:numCache>
+                <c:formatCode>General</c:formatCode>
+                <c:ptCount val="4"/>
+                <c:pt idx="0">
+                  <c:v>2</c:v>
+                </c:pt>
+                <c:pt idx="1">
+                  <c:v>4</c:v>
+                </c:pt>
+                <c:pt idx="2">
+                  <c:v>3</c:v>
+                </c:pt>
+                <c:pt idx="3">
+                  <c:v>1</c:v>
+                </c:pt>
+              </c:numCache>
+            </c:numRef>
+          </c:val>
+        </c:ser>
+        <c:dLbls>
+          <c:showLegendKey val="0"/>
+          <c:showVal val="0"/>
+          <c:showCatName val="0"/>
+          <c:showSerName val="0"/>
+          <c:showPercent val="0"/>
+          <c:showBubbleSize val="0"/>
+        </c:dLbls>
+        <c:axId val="-2101159928"/>
+        <c:axId val="-2100718248"/>
+      </c:areaChart>
+      <c:catAx>
+        <c:axId val="-2101159928"/>
+        <c:scaling>
+          <c:orientation val="minMax"/>
+        </c:scaling>
+        <c:delete val="0"/>
+        <c:axPos val="b"/>
+        <c:numFmt formatCode="General" sourceLinked="1"/>
+        <c:majorTickMark val="out"/>
+        <c:minorTickMark val="none"/>
+        <c:tickLblPos val="low"/>
+        <c:txPr>
+          <a:bodyPr/>
+          <a:lstStyle/>
+          <a:p>
+            <a:pPr>
+              <a:defRPr sz="1400"/>
+            </a:pPr>
+          </a:p>
+        </c:txPr>
+        <c:crossAx val="-2100718248"/>
+        <c:crosses val="autoZero"/>
+        <c:auto val="1"/>
+        <c:lblAlgn val="ctr"/>
+        <c:lblOffset val="100"/>
+        <c:noMultiLvlLbl val="0"/>
+      </c:catAx>
+      <c:valAx>
+        <c:axId val="-2100718248"/>
+        <c:scaling>
+          <c:orientation val="minMax"/>
+          <c:max val="100.0"/>
+          <c:min val="0.0"/>
+        </c:scaling>
+        <c:delete val="0"/>
+        <c:axPos val="l"/>
+        <c:numFmt formatCode="$0.0" sourceLinked="0"/>
+        <c:majorTickMark val="out"/>
+        <c:minorTickMark val="none"/>
+        <c:tickLblPos val="nextTo"/>
+        <c:txPr>
+          <a:bodyPr/>
+          <a:lstStyle/>
+          <a:p>
+            <a:pPr>
+              <a:defRPr sz="1400"/>
+            </a:pPr>
+          </a:p>
+        </c:txPr>
+        <c:crossAx val="-2101159928"/>
+        <c:crosses val="autoZero"/>
+        <c:crossBetween val="midCat"/>
+      </c:valAx>
+    </c:plotArea>
+    <c:legend>
+      <c:legendPos val="b"/>
+      <c:layout/>
+      <c:overlay val="0"/>
+      <c:txPr>
+        <a:bodyPr/>
+        <a:lstStyle/>
+        <a:p>
+          <a:pPr>
+            <a:defRPr sz="1400"/>
+          </a:pPr>
+        </a:p>
+      </c:txPr>
+    </c:legend>
+    <c:plotVisOnly val="1"/>
+    <c:dispBlanksAs val="zero"/>
+    <c:showDLblsOverMax val="0"/>
+  </c:chart>
+  <c:txPr>
+    <a:bodyPr/>
+    <a:lstStyle/>
+    <a:p>
+      <a:pPr>
+        <a:defRPr sz="1800"/>
+      </a:pPr>
+      <a:endParaRPr/>
+    </a:p>
+  </c:txPr>
+  <c:externalData r:id="rId1">
+    <c:autoUpdate val="0"/>
+  </c:externalData>
+</c:chartSpace>
+</file>
+
+<file path=ppt/charts/chart21.xml><?xml version="1.0" encoding="utf-8"?>
+<c:chartSpace xmlns:c="http://schemas.openxmlformats.org/drawingml/2006/chart" xmlns:a="http://schemas.openxmlformats.org/drawingml/2006/main" xmlns:r="http://schemas.openxmlformats.org/officeDocument/2006/relationships">
+  <c:date1904 val="0"/>
+  <c:roundedCorners val="0"/>
+  <c:chart>
+    <c:autoTitleDeleted val="1"/>
+    <c:plotArea>
+      <c:layout/>
+      <c:areaChart>
+        <c:grouping val="percentStacked"/>
+        <c:varyColors val="0"/>
+        <c:ser>
+          <c:idx val="0"/>
+          <c:order val="0"/>
+          <c:tx>
+            <c:strRef>
+              <c:f>Sheet1!$B$1</c:f>
+              <c:strCache>
+                <c:ptCount val="1"/>
+                <c:pt idx="0">
+                  <c:v>Revenue!</c:v>
+                </c:pt>
+              </c:strCache>
+            </c:strRef>
+          </c:tx>
+          <c:spPr>
+            <a:solidFill>
+              <a:srgbClr val="C00000"/>
+            </a:solidFill>
+            <a:ln>
+              <a:solidFill>
+                <a:srgbClr val="C00000"/>
+              </a:solidFill>
+            </a:ln>
+          </c:spPr>
+          <c:cat>
+            <c:strRef>
+              <c:f>Sheet1!$A$2:$A$5</c:f>
+              <c:strCache>
+                <c:ptCount val="4"/>
+                <c:pt idx="0">
+                  <c:v>Jan</c:v>
+                </c:pt>
+                <c:pt idx="1">
+                  <c:v>Feb</c:v>
+                </c:pt>
+                <c:pt idx="2">
+                  <c:v>Mar</c:v>
+                </c:pt>
+                <c:pt idx="3">
+                  <c:v>Apr</c:v>
+                </c:pt>
+              </c:strCache>
+            </c:strRef>
+          </c:cat>
+          <c:val>
+            <c:numRef>
+              <c:f>Sheet1!$B$2:$B$5</c:f>
+              <c:numCache>
+                <c:formatCode>General</c:formatCode>
+                <c:ptCount val="4"/>
+                <c:pt idx="0">
+                  <c:v>10</c:v>
+                </c:pt>
+                <c:pt idx="1">
+                  <c:v>14</c:v>
+                </c:pt>
+                <c:pt idx="2">
+                  <c:v>9</c:v>
+                </c:pt>
+                <c:pt idx="3">
+                  <c:v>18</c:v>
+                </c:pt>
+              </c:numCache>
+            </c:numRef>
+          </c:val>
+        </c:ser>
+        <c:ser>
+          <c:idx val="1"/>
+          <c:order val="1"/>
+          <c:tx>
+            <c:strRef>
+              <c:f>Sheet1!$C$1</c:f>
+              <c:strCache>
+                <c:ptCount val="1"/>
+                <c:pt idx="0">
+                  <c:v>Cost!</c:v>
+                </c:pt>
+              </c:strCache>
+            </c:strRef>
+          </c:tx>
+          <c:spPr>
+            <a:solidFill>
+              <a:srgbClr val="7030A0"/>
+            </a:solidFill>
+            <a:ln>
+              <a:solidFill>
+                <a:srgbClr val="7030A0"/>
+              </a:solidFill>
+            </a:ln>
+          </c:spPr>
+          <c:cat>
+            <c:strRef>
+              <c:f>Sheet1!$A$2:$A$5</c:f>
+              <c:strCache>
+                <c:ptCount val="4"/>
+                <c:pt idx="0">
+                  <c:v>Jan</c:v>
+                </c:pt>
+                <c:pt idx="1">
+                  <c:v>Feb</c:v>
+                </c:pt>
+                <c:pt idx="2">
+                  <c:v>Mar</c:v>
+                </c:pt>
+                <c:pt idx="3">
+                  <c:v>Apr</c:v>
+                </c:pt>
+              </c:strCache>
+            </c:strRef>
+          </c:cat>
+          <c:val>
+            <c:numRef>
+              <c:f>Sheet1!$C$2:$C$5</c:f>
+              <c:numCache>
+                <c:formatCode>General</c:formatCode>
+                <c:ptCount val="4"/>
+                <c:pt idx="0">
+                  <c:v>2</c:v>
+                </c:pt>
+                <c:pt idx="1">
+                  <c:v>4</c:v>
+                </c:pt>
+                <c:pt idx="2">
+                  <c:v>3</c:v>
+                </c:pt>
+                <c:pt idx="3">
+                  <c:v>1</c:v>
+                </c:pt>
+              </c:numCache>
+            </c:numRef>
+          </c:val>
+        </c:ser>
+        <c:dLbls>
+          <c:showLegendKey val="0"/>
+          <c:showVal val="0"/>
+          <c:showCatName val="0"/>
+          <c:showSerName val="0"/>
+          <c:showPercent val="0"/>
+          <c:showBubbleSize val="0"/>
+        </c:dLbls>
+        <c:axId val="-2101159928"/>
+        <c:axId val="-2100718248"/>
+      </c:areaChart>
+      <c:catAx>
+        <c:axId val="-2101159928"/>
+        <c:scaling>
+          <c:orientation val="minMax"/>
+        </c:scaling>
+        <c:delete val="0"/>
+        <c:axPos val="b"/>
+        <c:numFmt formatCode="General" sourceLinked="1"/>
+        <c:majorTickMark val="out"/>
+        <c:minorTickMark val="none"/>
+        <c:tickLblPos val="low"/>
+        <c:txPr>
+          <a:bodyPr/>
+          <a:lstStyle/>
+          <a:p>
+            <a:pPr>
+              <a:defRPr sz="1400"/>
+            </a:pPr>
+          </a:p>
+        </c:txPr>
+        <c:crossAx val="-2100718248"/>
+        <c:crosses val="autoZero"/>
+        <c:auto val="1"/>
+        <c:lblAlgn val="ctr"/>
+        <c:lblOffset val="100"/>
+        <c:noMultiLvlLbl val="0"/>
+      </c:catAx>
+      <c:valAx>
+        <c:axId val="-2100718248"/>
+        <c:scaling>
+          <c:orientation val="minMax"/>
+          <c:max val="1.0"/>
+          <c:min val="0.0"/>
+        </c:scaling>
+        <c:delete val="0"/>
+        <c:axPos val="l"/>
+        <c:numFmt formatCode="0%" sourceLinked="0"/>
+        <c:majorTickMark val="out"/>
+        <c:minorTickMark val="none"/>
+        <c:tickLblPos val="nextTo"/>
+        <c:txPr>
+          <a:bodyPr/>
+          <a:lstStyle/>
+          <a:p>
+            <a:pPr>
+              <a:defRPr sz="1400"/>
+            </a:pPr>
+          </a:p>
+        </c:txPr>
+        <c:crossAx val="-2101159928"/>
+        <c:crosses val="autoZero"/>
+        <c:crossBetween val="midCat"/>
+      </c:valAx>
+    </c:plotArea>
+    <c:legend>
+      <c:legendPos val="b"/>
+      <c:layout/>
+      <c:overlay val="0"/>
+      <c:txPr>
+        <a:bodyPr/>
+        <a:lstStyle/>
+        <a:p>
+          <a:pPr>
+            <a:defRPr sz="1400"/>
+          </a:pPr>
+        </a:p>
+      </c:txPr>
+    </c:legend>
+    <c:plotVisOnly val="1"/>
+    <c:dispBlanksAs val="zero"/>
+    <c:showDLblsOverMax val="0"/>
+  </c:chart>
+  <c:txPr>
+    <a:bodyPr/>
+    <a:lstStyle/>
+    <a:p>
+      <a:pPr>
+        <a:defRPr sz="1800"/>
+      </a:pPr>
+      <a:endParaRPr/>
+    </a:p>
+  </c:txPr>
+  <c:externalData r:id="rId1">
+    <c:autoUpdate val="0"/>
+  </c:externalData>
+</c:chartSpace>
+</file>
+
+<file path=ppt/charts/chart22.xml><?xml version="1.0" encoding="utf-8"?>
+<c:chartSpace xmlns:c="http://schemas.openxmlformats.org/drawingml/2006/chart" xmlns:a="http://schemas.openxmlformats.org/drawingml/2006/main" xmlns:r="http://schemas.openxmlformats.org/officeDocument/2006/relationships">
+  <c:date1904 val="0"/>
+  <c:chart>
+    <c:autoTitleDeleted val="1"/>
+    <c:plotArea>
+      <c:barChart>
+        <c:barDir val="bar"/>
+        <c:grouping val="stacked"/>
+        <c:ser>
+          <c:idx val="0"/>
+          <c:order val="0"/>
+          <c:tx>
+            <c:strRef>
+              <c:f>Sheet1!$B$1</c:f>
+              <c:strCache>
+                <c:ptCount val="1"/>
+                <c:pt idx="0">
+                  <c:v>Revenue!</c:v>
+                </c:pt>
+              </c:strCache>
+            </c:strRef>
+          </c:tx>
+          <c:spPr>
+            <a:solidFill>
+              <a:srgbClr val="C00000"/>
+            </a:solidFill>
+            <a:ln>
+              <a:solidFill>
+                <a:srgbClr val="C00000"/>
+              </a:solidFill>
+            </a:ln>
+          </c:spPr>
+          <c:invertIfNegative val="0"/>
+          <c:cat>
+            <c:strRef>
+              <c:f>Sheet1!$A$2:$A$5</c:f>
+              <c:strCache>
+                <c:ptCount val="4"/>
+                <c:pt idx="0">
+                  <c:v>Jan</c:v>
+                </c:pt>
+                <c:pt idx="1">
+                  <c:v>Feb</c:v>
+                </c:pt>
+                <c:pt idx="2">
+                  <c:v>Mar</c:v>
+                </c:pt>
+                <c:pt idx="3">
+                  <c:v>Apr</c:v>
+                </c:pt>
+              </c:strCache>
+            </c:strRef>
+          </c:cat>
+          <c:val>
+            <c:numRef>
+              <c:f>Sheet1!$B$2:$B$5</c:f>
+              <c:numCache>
+                <c:formatCode>General</c:formatCode>
+                <c:ptCount val="4"/>
+                <c:pt idx="0">
+                  <c:v>10</c:v>
+                </c:pt>
+                <c:pt idx="1">
+                  <c:v>14</c:v>
+                </c:pt>
+                <c:pt idx="2">
+                  <c:v>9</c:v>
+                </c:pt>
+                <c:pt idx="3">
+                  <c:v>18</c:v>
+                </c:pt>
+              </c:numCache>
+            </c:numRef>
+          </c:val>
+        </c:ser>
+        <c:ser>
+          <c:idx val="1"/>
+          <c:order val="1"/>
+          <c:tx>
+            <c:strRef>
+              <c:f>Sheet1!$C$1</c:f>
+              <c:strCache>
+                <c:ptCount val="1"/>
+                <c:pt idx="0">
+                  <c:v>Cost!</c:v>
+                </c:pt>
+              </c:strCache>
+            </c:strRef>
+          </c:tx>
+          <c:spPr>
+            <a:solidFill>
+              <a:srgbClr val="7030A0"/>
+            </a:solidFill>
+            <a:ln>
+              <a:solidFill>
+                <a:srgbClr val="7030A0"/>
+              </a:solidFill>
+            </a:ln>
+          </c:spPr>
+          <c:invertIfNegative val="0"/>
+          <c:cat>
+            <c:strRef>
+              <c:f>Sheet1!$A$2:$A$5</c:f>
+              <c:strCache>
+                <c:ptCount val="4"/>
+                <c:pt idx="0">
+                  <c:v>Jan</c:v>
+                </c:pt>
+                <c:pt idx="1">
+                  <c:v>Feb</c:v>
+                </c:pt>
+                <c:pt idx="2">
+                  <c:v>Mar</c:v>
+                </c:pt>
+                <c:pt idx="3">
+                  <c:v>Apr</c:v>
+                </c:pt>
+              </c:strCache>
+            </c:strRef>
+          </c:cat>
+          <c:val>
+            <c:numRef>
+              <c:f>Sheet1!$C$2:$C$5</c:f>
+              <c:numCache>
+                <c:formatCode>General</c:formatCode>
+                <c:ptCount val="4"/>
+                <c:pt idx="0">
+                  <c:v>2</c:v>
+                </c:pt>
+                <c:pt idx="1">
+                  <c:v>4</c:v>
+                </c:pt>
+                <c:pt idx="2">
+                  <c:v>3</c:v>
+                </c:pt>
+                <c:pt idx="3">
+                  <c:v>1</c:v>
+                </c:pt>
+              </c:numCache>
+            </c:numRef>
+          </c:val>
+        </c:ser>
+        <c:overlap val="100"/>
+        <c:axId val="-2068027336"/>
+        <c:axId val="-2113994440"/>
+      </c:barChart>
+      <c:catAx>
+        <c:axId val="-2068027336"/>
+        <c:scaling>
+          <c:orientation val="minMax"/>
+        </c:scaling>
+        <c:delete val="0"/>
+        <c:axPos val="l"/>
+        <c:majorTickMark val="out"/>
+        <c:minorTickMark val="none"/>
+        <c:tickLblPos val="low"/>
+        <c:txPr>
+          <a:bodyPr/>
+          <a:lstStyle/>
+          <a:p>
+            <a:pPr>
+              <a:defRPr sz="1400"/>
+            </a:pPr>
+          </a:p>
+        </c:txPr>
+        <c:crossAx val="-2113994440"/>
+        <c:crosses val="autoZero"/>
+        <c:auto val="1"/>
+        <c:lblAlgn val="ctr"/>
+        <c:lblOffset val="100"/>
+        <c:noMultiLvlLbl val="0"/>
+      </c:catAx>
+      <c:valAx>
+        <c:axId val="-2113994440"/>
+        <c:scaling>
+          <c:max val="100.0"/>
+          <c:min val="0.0"/>
+        </c:scaling>
+        <c:delete val="0"/>
+        <c:axPos val="b"/>
+        <c:numFmt formatCode="$0.0" sourceLinked="0"/>
+        <c:majorTickMark val="out"/>
+        <c:minorTickMark val="none"/>
+        <c:tickLblPos val="nextTo"/>
+        <c:txPr>
+          <a:bodyPr/>
+          <a:lstStyle/>
+          <a:p>
+            <a:pPr>
+              <a:defRPr sz="1400"/>
+            </a:pPr>
+          </a:p>
+        </c:txPr>
+        <c:crossAx val="-2068027336"/>
+        <c:crosses val="autoZero"/>
+      </c:valAx>
+    </c:plotArea>
+    <c:legend>
+      <c:legendPos val="b"/>
+      <c:overlay val="0"/>
+      <c:txPr>
+        <a:bodyPr/>
+        <a:lstStyle/>
+        <a:p>
+          <a:pPr>
+            <a:defRPr sz="1400"/>
+          </a:pPr>
+        </a:p>
+      </c:txPr>
+    </c:legend>
+    <c:dispBlanksAs val="gap"/>
+  </c:chart>
+  <c:txPr>
+    <a:bodyPr/>
+    <a:lstStyle/>
+    <a:p>
+      <a:pPr>
+        <a:defRPr sz="1800"/>
+      </a:pPr>
+      <a:endParaRPr lang="en-US"/>
+    </a:p>
+  </c:txPr>
+  <c:externalData r:id="rId1">
+    <c:autoUpdate val="0"/>
+  </c:externalData>
+</c:chartSpace>
+</file>
+
+<file path=ppt/charts/chart23.xml><?xml version="1.0" encoding="utf-8"?>
+<c:chartSpace xmlns:c="http://schemas.openxmlformats.org/drawingml/2006/chart" xmlns:a="http://schemas.openxmlformats.org/drawingml/2006/main" xmlns:r="http://schemas.openxmlformats.org/officeDocument/2006/relationships">
+  <c:date1904 val="0"/>
+  <c:chart>
+    <c:autoTitleDeleted val="1"/>
+    <c:plotArea>
+      <c:barChart>
+        <c:barDir val="col"/>
+        <c:grouping val="stacked"/>
+        <c:ser>
+          <c:idx val="0"/>
+          <c:order val="0"/>
+          <c:tx>
+            <c:strRef>
+              <c:f>Sheet1!$B$1</c:f>
+              <c:strCache>
+                <c:ptCount val="1"/>
+                <c:pt idx="0">
+                  <c:v>Revenue!</c:v>
+                </c:pt>
+              </c:strCache>
+            </c:strRef>
+          </c:tx>
+          <c:spPr>
+            <a:solidFill>
+              <a:srgbClr val="C00000"/>
+            </a:solidFill>
+            <a:ln>
+              <a:solidFill>
+                <a:srgbClr val="C00000"/>
+              </a:solidFill>
+            </a:ln>
+          </c:spPr>
+          <c:invertIfNegative val="0"/>
+          <c:cat>
+            <c:strRef>
+              <c:f>Sheet1!$A$2:$A$5</c:f>
+              <c:strCache>
+                <c:ptCount val="4"/>
+                <c:pt idx="0">
+                  <c:v>Jan</c:v>
+                </c:pt>
+                <c:pt idx="1">
+                  <c:v>Feb</c:v>
+                </c:pt>
+                <c:pt idx="2">
+                  <c:v>Mar</c:v>
+                </c:pt>
+                <c:pt idx="3">
+                  <c:v>Apr</c:v>
+                </c:pt>
+              </c:strCache>
+            </c:strRef>
+          </c:cat>
+          <c:val>
+            <c:numRef>
+              <c:f>Sheet1!$B$2:$B$5</c:f>
+              <c:numCache>
+                <c:formatCode>General</c:formatCode>
+                <c:ptCount val="4"/>
+                <c:pt idx="0">
+                  <c:v>10</c:v>
+                </c:pt>
+                <c:pt idx="1">
+                  <c:v>14</c:v>
+                </c:pt>
+                <c:pt idx="2">
+                  <c:v>9</c:v>
+                </c:pt>
+                <c:pt idx="3">
+                  <c:v>18</c:v>
+                </c:pt>
+              </c:numCache>
+            </c:numRef>
+          </c:val>
+        </c:ser>
+        <c:ser>
+          <c:idx val="1"/>
+          <c:order val="1"/>
+          <c:tx>
+            <c:strRef>
+              <c:f>Sheet1!$C$1</c:f>
+              <c:strCache>
+                <c:ptCount val="1"/>
+                <c:pt idx="0">
+                  <c:v>Cost!</c:v>
+                </c:pt>
+              </c:strCache>
+            </c:strRef>
+          </c:tx>
+          <c:spPr>
+            <a:solidFill>
+              <a:srgbClr val="7030A0"/>
+            </a:solidFill>
+            <a:ln>
+              <a:solidFill>
+                <a:srgbClr val="7030A0"/>
+              </a:solidFill>
+            </a:ln>
+          </c:spPr>
+          <c:invertIfNegative val="0"/>
+          <c:cat>
+            <c:strRef>
+              <c:f>Sheet1!$A$2:$A$5</c:f>
+              <c:strCache>
+                <c:ptCount val="4"/>
+                <c:pt idx="0">
+                  <c:v>Jan</c:v>
+                </c:pt>
+                <c:pt idx="1">
+                  <c:v>Feb</c:v>
+                </c:pt>
+                <c:pt idx="2">
+                  <c:v>Mar</c:v>
+                </c:pt>
+                <c:pt idx="3">
+                  <c:v>Apr</c:v>
+                </c:pt>
+              </c:strCache>
+            </c:strRef>
+          </c:cat>
+          <c:val>
+            <c:numRef>
+              <c:f>Sheet1!$C$2:$C$5</c:f>
+              <c:numCache>
+                <c:formatCode>General</c:formatCode>
+                <c:ptCount val="4"/>
+                <c:pt idx="0">
+                  <c:v>2</c:v>
+                </c:pt>
+                <c:pt idx="1">
+                  <c:v>4</c:v>
+                </c:pt>
+                <c:pt idx="2">
+                  <c:v>3</c:v>
+                </c:pt>
+                <c:pt idx="3">
+                  <c:v>1</c:v>
+                </c:pt>
+              </c:numCache>
+            </c:numRef>
+          </c:val>
+        </c:ser>
+        <c:overlap val="100"/>
+        <c:axId val="-2068027336"/>
+        <c:axId val="-2113994440"/>
+      </c:barChart>
+      <c:catAx>
+        <c:axId val="-2068027336"/>
+        <c:scaling>
+          <c:orientation val="minMax"/>
+        </c:scaling>
+        <c:delete val="0"/>
+        <c:axPos val="b"/>
+        <c:majorTickMark val="out"/>
+        <c:minorTickMark val="none"/>
+        <c:tickLblPos val="low"/>
+        <c:txPr>
+          <a:bodyPr/>
+          <a:lstStyle/>
+          <a:p>
+            <a:pPr>
+              <a:defRPr sz="1400"/>
+            </a:pPr>
+          </a:p>
+        </c:txPr>
+        <c:crossAx val="-2113994440"/>
+        <c:crosses val="autoZero"/>
+        <c:auto val="1"/>
+        <c:lblAlgn val="ctr"/>
+        <c:lblOffset val="100"/>
+        <c:noMultiLvlLbl val="0"/>
+      </c:catAx>
+      <c:valAx>
+        <c:axId val="-2113994440"/>
+        <c:scaling>
+          <c:max val="100.0"/>
+          <c:min val="0.0"/>
+        </c:scaling>
+        <c:delete val="0"/>
+        <c:axPos val="l"/>
+        <c:numFmt formatCode="$0.0" sourceLinked="0"/>
+        <c:majorTickMark val="out"/>
+        <c:minorTickMark val="none"/>
+        <c:tickLblPos val="nextTo"/>
+        <c:txPr>
+          <a:bodyPr/>
+          <a:lstStyle/>
+          <a:p>
+            <a:pPr>
+              <a:defRPr sz="1400"/>
+            </a:pPr>
+          </a:p>
+        </c:txPr>
+        <c:crossAx val="-2068027336"/>
+        <c:crosses val="autoZero"/>
+      </c:valAx>
+    </c:plotArea>
+    <c:legend>
+      <c:legendPos val="b"/>
+      <c:overlay val="0"/>
+      <c:txPr>
+        <a:bodyPr/>
+        <a:lstStyle/>
+        <a:p>
+          <a:pPr>
+            <a:defRPr sz="1400"/>
+          </a:pPr>
+        </a:p>
+      </c:txPr>
+    </c:legend>
+    <c:dispBlanksAs val="gap"/>
+  </c:chart>
+  <c:txPr>
+    <a:bodyPr/>
+    <a:lstStyle/>
+    <a:p>
+      <a:pPr>
+        <a:defRPr sz="1800"/>
+      </a:pPr>
+      <a:endParaRPr lang="en-US"/>
+    </a:p>
+  </c:txPr>
+  <c:externalData r:id="rId1">
+    <c:autoUpdate val="0"/>
+  </c:externalData>
+</c:chartSpace>
+</file>
+
+<file path=ppt/charts/chart24.xml><?xml version="1.0" encoding="utf-8"?>
+<c:chartSpace xmlns:c="http://schemas.openxmlformats.org/drawingml/2006/chart" xmlns:a="http://schemas.openxmlformats.org/drawingml/2006/main" xmlns:r="http://schemas.openxmlformats.org/officeDocument/2006/relationships">
+  <c:chart>
+    <c:autoTitleDeleted val="1"/>
+    <c:plotArea>
+      <c:scatterChart>
+        <c:scatterStyle val="smoothMarker"/>
+        <c:varyColors val="0"/>
+        <c:ser>
+          <c:idx val="0"/>
+          <c:order val="0"/>
+          <c:tx>
+            <c:strRef>
+              <c:f>Sheet1!$B$1</c:f>
+              <c:strCache>
+                <c:ptCount val="1"/>
+                <c:pt idx="0">
+                  <c:v>Revenue!</c:v>
+                </c:pt>
+              </c:strCache>
+            </c:strRef>
+          </c:tx>
+          <c:spPr>
+            <a:solidFill>
+              <a:srgbClr val="C00000"/>
+            </a:solidFill>
+            <a:ln>
+              <a:noFill/>
+            </a:ln>
+          </c:spPr>
+          <c:marker>
+            <c:symbol val="circle"/>
+            <c:spPr>
+              <a:solidFill>
+                <a:srgbClr val="C00000"/>
+              </a:solidFill>
+              <a:ln>
+                <a:solidFill>
+                  <a:srgbClr val="C00000"/>
+                </a:solidFill>
+              </a:ln>
+            </c:spPr>
+          </c:marker>
+          <c:xVal>
+            <c:numRef>
+              <c:f>Sheet1!$A$2:$A$5</c:f>
+              <c:numCache>
+                <c:formatCode>General</c:formatCode>
+                <c:ptCount val="4"/>
+                <c:pt idx="0">
+                  <c:v>0</c:v>
+                </c:pt>
+                <c:pt idx="1">
+                  <c:v>1</c:v>
+                </c:pt>
+                <c:pt idx="2">
+                  <c:v>2</c:v>
+                </c:pt>
+                <c:pt idx="3">
+                  <c:v>3</c:v>
+                </c:pt>
+              </c:numCache>
+            </c:numRef>
+          </c:xVal>
+          <c:yVal>
+            <c:numRef>
+              <c:f>Sheet1!$B$2:$B$5</c:f>
+              <c:numCache>
+                <c:formatCode>General</c:formatCode>
+                <c:ptCount val="4"/>
+                <c:pt idx="0">
+                  <c:v>10</c:v>
+                </c:pt>
+                <c:pt idx="1">
+                  <c:v>14</c:v>
+                </c:pt>
+                <c:pt idx="2">
+                  <c:v>9</c:v>
+                </c:pt>
+                <c:pt idx="3">
+                  <c:v>18</c:v>
+                </c:pt>
+              </c:numCache>
+            </c:numRef>
+          </c:yVal>
+          <c:smooth val="0"/>
+        </c:ser>
+        <c:ser>
+          <c:idx val="1"/>
+          <c:order val="1"/>
+          <c:tx>
+            <c:strRef>
+              <c:f>Sheet1!$B$7</c:f>
+              <c:strCache>
+                <c:ptCount val="1"/>
+                <c:pt idx="0">
+                  <c:v>Cost!</c:v>
+                </c:pt>
+              </c:strCache>
+            </c:strRef>
+          </c:tx>
+          <c:spPr>
+            <a:solidFill>
+              <a:srgbClr val="7030A0"/>
+            </a:solidFill>
+            <a:ln>
+              <a:noFill/>
+            </a:ln>
+          </c:spPr>
+          <c:marker>
+            <c:symbol val="circle"/>
+            <c:spPr>
+              <a:solidFill>
+                <a:srgbClr val="7030A0"/>
+              </a:solidFill>
+              <a:ln>
+                <a:solidFill>
+                  <a:srgbClr val="7030A0"/>
+                </a:solidFill>
+              </a:ln>
+            </c:spPr>
+          </c:marker>
+          <c:xVal>
+            <c:numRef>
+              <c:f>Sheet1!$A$8:$A$11</c:f>
+              <c:numCache>
+                <c:formatCode>General</c:formatCode>
+                <c:ptCount val="4"/>
+                <c:pt idx="0">
+                  <c:v>0</c:v>
+                </c:pt>
+                <c:pt idx="1">
+                  <c:v>1</c:v>
+                </c:pt>
+                <c:pt idx="2">
+                  <c:v>2</c:v>
+                </c:pt>
+                <c:pt idx="3">
+                  <c:v>3</c:v>
+                </c:pt>
+              </c:numCache>
+            </c:numRef>
+          </c:xVal>
+          <c:yVal>
+            <c:numRef>
+              <c:f>Sheet1!$B$8:$B$11</c:f>
+              <c:numCache>
+                <c:formatCode>General</c:formatCode>
+                <c:ptCount val="4"/>
+                <c:pt idx="0">
+                  <c:v>2</c:v>
+                </c:pt>
+                <c:pt idx="1">
+                  <c:v>4</c:v>
+                </c:pt>
+                <c:pt idx="2">
+                  <c:v>3</c:v>
+                </c:pt>
+                <c:pt idx="3">
+                  <c:v>1</c:v>
+                </c:pt>
+              </c:numCache>
+            </c:numRef>
+          </c:yVal>
+          <c:smooth val="0"/>
+        </c:ser>
+        <c:axId val="-2128940872"/>
+        <c:axId val="-2129643912"/>
+      </c:scatterChart>
+      <c:valAx>
+        <c:axId val="-2128940872"/>
+        <c:scaling>
+          <c:orientation val="minMax"/>
+        </c:scaling>
+        <c:delete val="0"/>
+        <c:axPos val="b"/>
+        <c:numFmt formatCode="General" sourceLinked="1"/>
+        <c:majorTickMark val="out"/>
+        <c:minorTickMark val="none"/>
+        <c:tickLblPos val="low"/>
+        <c:txPr>
+          <a:bodyPr/>
+          <a:lstStyle/>
+          <a:p>
+            <a:pPr>
+              <a:defRPr sz="1400"/>
+            </a:pPr>
+          </a:p>
+        </c:txPr>
+        <c:crossAx val="-2129643912"/>
+        <c:crosses val="autoZero"/>
+        <c:crossBetween val="midCat"/>
+      </c:valAx>
+      <c:valAx>
+        <c:axId val="-2129643912"/>
+        <c:scaling>
+          <c:orientation val="minMax"/>
+          <c:max val="100.0"/>
+          <c:min val="0.0"/>
+        </c:scaling>
+        <c:delete val="0"/>
+        <c:axPos val="l"/>
+        <c:numFmt formatCode="$0.0" sourceLinked="0"/>
+        <c:majorTickMark val="out"/>
+        <c:minorTickMark val="none"/>
+        <c:tickLblPos val="nextTo"/>
+        <c:txPr>
+          <a:bodyPr/>
+          <a:lstStyle/>
+          <a:p>
+            <a:pPr>
+              <a:defRPr sz="1400"/>
+            </a:pPr>
+          </a:p>
+        </c:txPr>
+        <c:crossAx val="-2128940872"/>
+        <c:crosses val="autoZero"/>
+        <c:crossBetween val="midCat"/>
       </c:valAx>
     </c:plotArea>
     <c:legend>
@@ -8696,6 +9894,76 @@
 </p:sld>
 </file>
 
+<file path=ppt/slides/slide10.xml><?xml version="1.0" encoding="utf-8"?>
+<p:sld xmlns:a="http://schemas.openxmlformats.org/drawingml/2006/main" xmlns:p="http://schemas.openxmlformats.org/presentationml/2006/main" xmlns:r="http://schemas.openxmlformats.org/officeDocument/2006/relationships">
+  <p:cSld>
+    <p:spTree>
+      <p:nvGrpSpPr>
+        <p:cNvPr id="1" name=""/>
+        <p:cNvGrpSpPr/>
+        <p:nvPr/>
+      </p:nvGrpSpPr>
+      <p:grpSpPr/>
+      <p:sp>
+        <p:nvSpPr>
+          <p:cNvPr id="2" name="TextBox 1"/>
+          <p:cNvSpPr txBox="1"/>
+          <p:nvPr/>
+        </p:nvSpPr>
+        <p:spPr>
+          <a:xfrm>
+            <a:off x="457200" y="91440"/>
+            <a:ext cx="11430000" cy="731520"/>
+          </a:xfrm>
+          <a:prstGeom prst="rect">
+            <a:avLst/>
+          </a:prstGeom>
+          <a:noFill/>
+        </p:spPr>
+        <p:txBody>
+          <a:bodyPr wrap="none" anchor="t">
+            <a:spAutoFit/>
+          </a:bodyPr>
+          <a:lstStyle/>
+          <a:p>
+            <a:pPr algn="l"/>
+            <a:r>
+              <a:rPr sz="2000" b="1" i="0" u="none">
+                <a:solidFill>
+                  <a:srgbClr val="7F7F7F"/>
+                </a:solidFill>
+              </a:rPr>
+              <a:t>Revenue Trend - Slide Title</a:t>
+            </a:r>
+          </a:p>
+        </p:txBody>
+      </p:sp>
+      <p:graphicFrame>
+        <p:nvGraphicFramePr>
+          <p:cNvPr id="3" name="chart_1"/>
+          <p:cNvGraphicFramePr>
+            <a:graphicFrameLocks noGrp="1"/>
+          </p:cNvGraphicFramePr>
+          <p:nvPr/>
+        </p:nvGraphicFramePr>
+        <p:xfrm>
+          <a:off x="457200" y="1463040"/>
+          <a:ext cx="11430000" cy="4800600"/>
+        </p:xfrm>
+        <a:graphic>
+          <a:graphicData uri="http://schemas.openxmlformats.org/drawingml/2006/chart">
+            <c:chart xmlns:c="http://schemas.openxmlformats.org/drawingml/2006/chart" r:id="rId2"/>
+          </a:graphicData>
+        </a:graphic>
+      </p:graphicFrame>
+    </p:spTree>
+  </p:cSld>
+  <p:clrMapOvr>
+    <a:masterClrMapping/>
+  </p:clrMapOvr>
+</p:sld>
+</file>
+
 <file path=ppt/slides/slide2.xml><?xml version="1.0" encoding="utf-8"?>
 <p:sld xmlns:a="http://schemas.openxmlformats.org/drawingml/2006/main" xmlns:p="http://schemas.openxmlformats.org/presentationml/2006/main" xmlns:r="http://schemas.openxmlformats.org/officeDocument/2006/relationships">
   <p:cSld>
@@ -10797,6 +12065,130 @@
 </p:sld>
 </file>
 
+<file path=ppt/slides/slide9.xml><?xml version="1.0" encoding="utf-8"?>
+<p:sld xmlns:a="http://schemas.openxmlformats.org/drawingml/2006/main" xmlns:p="http://schemas.openxmlformats.org/presentationml/2006/main" xmlns:r="http://schemas.openxmlformats.org/officeDocument/2006/relationships">
+  <p:cSld>
+    <p:spTree>
+      <p:nvGrpSpPr>
+        <p:cNvPr id="1" name=""/>
+        <p:cNvGrpSpPr/>
+        <p:nvPr/>
+      </p:nvGrpSpPr>
+      <p:grpSpPr/>
+      <p:sp>
+        <p:nvSpPr>
+          <p:cNvPr id="2" name="TextBox 1"/>
+          <p:cNvSpPr txBox="1"/>
+          <p:nvPr/>
+        </p:nvSpPr>
+        <p:spPr>
+          <a:xfrm>
+            <a:off x="457200" y="91440"/>
+            <a:ext cx="11430000" cy="731520"/>
+          </a:xfrm>
+          <a:prstGeom prst="rect">
+            <a:avLst/>
+          </a:prstGeom>
+          <a:noFill/>
+        </p:spPr>
+        <p:txBody>
+          <a:bodyPr wrap="none" anchor="t">
+            <a:spAutoFit/>
+          </a:bodyPr>
+          <a:lstStyle/>
+          <a:p>
+            <a:pPr algn="l"/>
+            <a:r>
+              <a:rPr sz="2000" b="1" i="0" u="none">
+                <a:solidFill>
+                  <a:srgbClr val="7F7F7F"/>
+                </a:solidFill>
+              </a:rPr>
+              <a:t>Revenue Trend - Slide Title</a:t>
+            </a:r>
+          </a:p>
+        </p:txBody>
+      </p:sp>
+      <p:graphicFrame>
+        <p:nvGraphicFramePr>
+          <p:cNvPr id="3" name="chart_1"/>
+          <p:cNvGraphicFramePr>
+            <a:graphicFrameLocks noGrp="1"/>
+          </p:cNvGraphicFramePr>
+          <p:nvPr/>
+        </p:nvGraphicFramePr>
+        <p:xfrm>
+          <a:off x="457200" y="1463040"/>
+          <a:ext cx="2862072" cy="4800600"/>
+        </p:xfrm>
+        <a:graphic>
+          <a:graphicData uri="http://schemas.openxmlformats.org/drawingml/2006/chart">
+            <c:chart xmlns:c="http://schemas.openxmlformats.org/drawingml/2006/chart" r:id="rId2"/>
+          </a:graphicData>
+        </a:graphic>
+      </p:graphicFrame>
+      <p:graphicFrame>
+        <p:nvGraphicFramePr>
+          <p:cNvPr id="4" name="chart_2"/>
+          <p:cNvGraphicFramePr>
+            <a:graphicFrameLocks noGrp="1"/>
+          </p:cNvGraphicFramePr>
+          <p:nvPr/>
+        </p:nvGraphicFramePr>
+        <p:xfrm>
+          <a:off x="3319272" y="1463040"/>
+          <a:ext cx="2862072" cy="4800600"/>
+        </p:xfrm>
+        <a:graphic>
+          <a:graphicData uri="http://schemas.openxmlformats.org/drawingml/2006/chart">
+            <c:chart xmlns:c="http://schemas.openxmlformats.org/drawingml/2006/chart" r:id="rId3"/>
+          </a:graphicData>
+        </a:graphic>
+      </p:graphicFrame>
+      <p:graphicFrame>
+        <p:nvGraphicFramePr>
+          <p:cNvPr id="5" name="chart_3"/>
+          <p:cNvGraphicFramePr>
+            <a:graphicFrameLocks noGrp="1"/>
+          </p:cNvGraphicFramePr>
+          <p:nvPr/>
+        </p:nvGraphicFramePr>
+        <p:xfrm>
+          <a:off x="6181344" y="1463040"/>
+          <a:ext cx="2862072" cy="4800600"/>
+        </p:xfrm>
+        <a:graphic>
+          <a:graphicData uri="http://schemas.openxmlformats.org/drawingml/2006/chart">
+            <c:chart xmlns:c="http://schemas.openxmlformats.org/drawingml/2006/chart" r:id="rId4"/>
+          </a:graphicData>
+        </a:graphic>
+      </p:graphicFrame>
+      <p:graphicFrame>
+        <p:nvGraphicFramePr>
+          <p:cNvPr id="6" name="chart_4"/>
+          <p:cNvGraphicFramePr>
+            <a:graphicFrameLocks noGrp="1"/>
+          </p:cNvGraphicFramePr>
+          <p:nvPr/>
+        </p:nvGraphicFramePr>
+        <p:xfrm>
+          <a:off x="9043416" y="1463040"/>
+          <a:ext cx="2862072" cy="4800600"/>
+        </p:xfrm>
+        <a:graphic>
+          <a:graphicData uri="http://schemas.openxmlformats.org/drawingml/2006/chart">
+            <c:chart xmlns:c="http://schemas.openxmlformats.org/drawingml/2006/chart" r:id="rId5"/>
+          </a:graphicData>
+        </a:graphic>
+      </p:graphicFrame>
+    </p:spTree>
+  </p:cSld>
+  <p:clrMapOvr>
+    <a:masterClrMapping/>
+  </p:clrMapOvr>
+</p:sld>
+</file>
+
 <file path=ppt/theme/theme1.xml><?xml version="1.0" encoding="utf-8"?>
 <a:theme xmlns:a="http://schemas.openxmlformats.org/drawingml/2006/main" name="Simple Light">
   <a:themeElements>

--- a/notebooks/demo.pptx
+++ b/notebooks/demo.pptx
@@ -5081,19 +5081,6 @@
         <c:crosses val="autoZero"/>
       </c:valAx>
     </c:plotArea>
-    <c:legend>
-      <c:legendPos val="b"/>
-      <c:overlay val="0"/>
-      <c:txPr>
-        <a:bodyPr/>
-        <a:lstStyle/>
-        <a:p>
-          <a:pPr>
-            <a:defRPr sz="1400"/>
-          </a:pPr>
-        </a:p>
-      </c:txPr>
-    </c:legend>
     <c:dispBlanksAs val="gap"/>
   </c:chart>
   <c:txPr>
@@ -10702,7 +10689,7 @@
           <a:p>
             <a:pPr algn="ctr"/>
             <a:r>
-              <a:rPr sz="1400" b="1" i="0" u="sng">
+              <a:rPr sz="1600" b="1" i="0" u="sng">
                 <a:solidFill>
                   <a:srgbClr val="000000"/>
                 </a:solidFill>
